--- a/docs/competition/2026-guochuang/output/final/Agent-eBPF-Filter-项目答辩路演PPT-浅色优化版.pptx
+++ b/docs/competition/2026-guochuang/output/final/Agent-eBPF-Filter-项目答辩路演PPT-浅色优化版.pptx
@@ -4756,7 +4756,7 @@
                 <a:ea typeface="Microsoft YaHei" pitchFamily="34" charset="-122"/>
                 <a:cs typeface="Microsoft YaHei" pitchFamily="34" charset="-120"/>
               </a:rPr>
-              <a:t>代码证据：backend/semantic_alerts.go；backend/event_envelope.go；backend/execution_graph.go；wrapper/main.go</a:t>
+              <a:t>工程证据：语义风险检测模块；事件信封模型；执行图谱；命令策略代理。未来可扩展为组织级 Agent 安全策略中心。</a:t>
             </a:r>
             <a:endParaRPr lang="en-US" sz="660" dirty="0"/>
           </a:p>
@@ -7210,7 +7210,7 @@
                 <a:ea typeface="Microsoft YaHei" pitchFamily="34" charset="-122"/>
                 <a:cs typeface="Microsoft YaHei" pitchFamily="34" charset="-120"/>
               </a:rPr>
-              <a:t>应用前景总览：同一条技术闭环对应三类可付费场景</a:t>
+              <a:t>未来前景总览：从单机工具走向 Agent 安全基础设施</a:t>
             </a:r>
             <a:endParaRPr lang="en-US" sz="2050" dirty="0"/>
           </a:p>
@@ -7254,7 +7254,7 @@
                 <a:ea typeface="Microsoft YaHei" pitchFamily="34" charset="-122"/>
                 <a:cs typeface="Microsoft YaHei" pitchFamily="34" charset="-120"/>
               </a:rPr>
-              <a:t>应用前景不再泛泛讲市场，而是把技术深度映射到具体用户的刚需。</a:t>
+              <a:t>应用前景不再泛泛讲市场，而是把内核级证据链扩展成教育、团队、企业三类长期基础能力。</a:t>
             </a:r>
             <a:endParaRPr lang="en-US" sz="900" dirty="0"/>
           </a:p>
@@ -7442,7 +7442,7 @@
                 <a:ea typeface="Microsoft YaHei" pitchFamily="34" charset="-122"/>
                 <a:cs typeface="Microsoft YaHei" pitchFamily="34" charset="-120"/>
               </a:rPr>
-              <a:t>把 eBPF、AI 安全、攻防演练做成可复现实验；形成课程、论文、软著和竞赛成果。</a:t>
+              <a:t>沉淀为 AI 安全与系统安全实验平台，支撑课程、论文、软著、竞赛和校企联合实践。</a:t>
             </a:r>
             <a:endParaRPr lang="en-US" sz="780" dirty="0"/>
           </a:p>
@@ -7770,7 +7770,7 @@
                 <a:ea typeface="Microsoft YaHei" pitchFamily="34" charset="-122"/>
                 <a:cs typeface="Microsoft YaHei" pitchFamily="34" charset="-120"/>
               </a:rPr>
-              <a:t>治理本地/云端 Agent 对敏感文件、依赖脚本和外联的访问；给团队安全负责人可审计证据。</a:t>
+              <a:t>发展为团队级 Agent 安全工作台，持续管理敏感文件、依赖脚本、MCP 工具和异常外联。</a:t>
             </a:r>
             <a:endParaRPr lang="en-US" sz="780" dirty="0"/>
           </a:p>
@@ -8098,7 +8098,7 @@
                 <a:ea typeface="Microsoft YaHei" pitchFamily="34" charset="-122"/>
                 <a:cs typeface="Microsoft YaHei" pitchFamily="34" charset="-120"/>
               </a:rPr>
-              <a:t>在内网 Agent、MCP、代码助手落地时提供策略、审计报表、SIEM/OTLP 对接和留存能力。</a:t>
+              <a:t>演进为企业 Agent runtime security 基础设施，接入审计、SIEM/OTLP、策略审批和合规留存。</a:t>
             </a:r>
             <a:endParaRPr lang="en-US" sz="780" dirty="0"/>
           </a:p>
@@ -10791,7 +10791,7 @@
                 <a:ea typeface="Microsoft YaHei" pitchFamily="34" charset="-122"/>
                 <a:cs typeface="Microsoft YaHei" pitchFamily="34" charset="-120"/>
               </a:rPr>
-              <a:t>应用前景三：企业私有化，把 Agent 安全接入现有安全体系</a:t>
+              <a:t>未来前景三：企业私有化，成为 Agent 安全基础设施</a:t>
             </a:r>
             <a:endParaRPr lang="en-US" sz="2050" dirty="0"/>
           </a:p>
@@ -10835,7 +10835,7 @@
                 <a:ea typeface="Microsoft YaHei" pitchFamily="34" charset="-122"/>
                 <a:cs typeface="Microsoft YaHei" pitchFamily="34" charset="-120"/>
               </a:rPr>
-              <a:t>企业价值不只是 UI，而是把 Agent 执行证据送进合规、审计和安全运营流程。</a:t>
+              <a:t>企业价值不只是 UI，而是把 Agent 执行证据送进合规、审计、安全运营和策略治理流程。</a:t>
             </a:r>
             <a:endParaRPr lang="en-US" sz="900" dirty="0"/>
           </a:p>
@@ -11706,7 +11706,7 @@
                 <a:ea typeface="Microsoft YaHei" pitchFamily="34" charset="-122"/>
                 <a:cs typeface="Microsoft YaHei" pitchFamily="34" charset="-120"/>
               </a:rPr>
-              <a:t>企业侧最容易成交的不是“炫酷监控”，而是私有化部署、审计留存、异常外联管控和事故可复盘。</a:t>
+              <a:t>长期前景：当 Agent 成为企业标准生产力工具，runtime guardrail 会像日志、EDR、CI 安全一样成为基础设施。</a:t>
             </a:r>
             <a:endParaRPr lang="en-US" sz="780" dirty="0"/>
           </a:p>
@@ -22615,7 +22615,7 @@
                 <a:ea typeface="Microsoft YaHei" pitchFamily="34" charset="-122"/>
                 <a:cs typeface="Microsoft YaHei" pitchFamily="34" charset="-120"/>
               </a:rPr>
-              <a:t>BPF map 维护 agent_pids、tracked_comms、tracked_paths；ringbuf 将事件送到 Go runtime。</a:t>
+              <a:t>BPF map 维护 Agent 进程、关注命令与关注路径；ringbuf 将事件送到用户态 runtime。</a:t>
             </a:r>
             <a:endParaRPr lang="en-US" sz="780" dirty="0"/>
           </a:p>
@@ -22826,7 +22826,7 @@
                 <a:ea typeface="Arial" pitchFamily="34" charset="-122"/>
                 <a:cs typeface="Arial" pitchFamily="34" charset="-120"/>
               </a:rPr>
-              <a:t>backend/ebpf/agent_tracker.c</a:t>
+              <a:t>内核事件采集模块</a:t>
             </a:r>
             <a:endParaRPr lang="en-US" sz="670" dirty="0"/>
           </a:p>
@@ -22846,7 +22846,7 @@
                 <a:ea typeface="Arial" pitchFamily="34" charset="-122"/>
                 <a:cs typeface="Arial" pitchFamily="34" charset="-120"/>
               </a:rPr>
-              <a:t>backend/network_events.go</a:t>
+              <a:t>事件归一化与分发模块</a:t>
             </a:r>
             <a:endParaRPr lang="en-US" sz="670" dirty="0"/>
           </a:p>
@@ -22866,7 +22866,7 @@
                 <a:ea typeface="Arial" pitchFamily="34" charset="-122"/>
                 <a:cs typeface="Arial" pitchFamily="34" charset="-120"/>
               </a:rPr>
-              <a:t>backend/runtime_state.go</a:t>
+              <a:t>运行时状态管理模块</a:t>
             </a:r>
             <a:endParaRPr lang="en-US" sz="670" dirty="0"/>
           </a:p>
@@ -22886,7 +22886,7 @@
                 <a:ea typeface="Arial" pitchFamily="34" charset="-122"/>
                 <a:cs typeface="Arial" pitchFamily="34" charset="-120"/>
               </a:rPr>
-              <a:t>backend/event_envelope.go</a:t>
+              <a:t>证据信封模型模块</a:t>
             </a:r>
             <a:endParaRPr lang="en-US" sz="670" dirty="0"/>
           </a:p>
@@ -23026,7 +23026,7 @@
                 <a:ea typeface="Microsoft YaHei" pitchFamily="34" charset="-122"/>
                 <a:cs typeface="Microsoft YaHei" pitchFamily="34" charset="-120"/>
               </a:rPr>
-              <a:t>既要拿到足够细的事实字段，又不能把每个 syscall 都变成高开销日志；因此只采关键路径，并用 map/filter 降低噪声。</a:t>
+              <a:t>既要拿到足够细的事实字段，又不能把每个 syscall 都变成高开销日志；未来可扩展为可配置采集策略和行业模板。</a:t>
             </a:r>
             <a:endParaRPr lang="en-US" sz="760" dirty="0"/>
           </a:p>
@@ -23986,7 +23986,7 @@
                 <a:ea typeface="Microsoft YaHei" pitchFamily="34" charset="-122"/>
                 <a:cs typeface="Microsoft YaHei" pitchFamily="34" charset="-120"/>
               </a:rPr>
-              <a:t>代码证据：backend/ebpf/lsm_enforcer.c；backend/ebpf/cgroup_sandbox.c；scripts/os-enforcement-smoke.sh</a:t>
+              <a:t>工程证据：内核文件/执行策略模块；cgroup 网络策略模块；OS 阻断冒烟验证流程。未来可沉淀为多场景策略模板。</a:t>
             </a:r>
             <a:endParaRPr lang="en-US" sz="660" dirty="0"/>
           </a:p>
@@ -25420,7 +25420,7 @@
                 <a:ea typeface="Microsoft YaHei" pitchFamily="34" charset="-122"/>
                 <a:cs typeface="Microsoft YaHei" pitchFamily="34" charset="-120"/>
               </a:rPr>
-              <a:t>代码证据：backend/event_context.go；backend/execution_graph.go；backend/shell_sessions.go</a:t>
+              <a:t>工程证据：Agent 上下文继承模块；执行图谱模块；交互式会话管理模块。未来可扩展为跨 IDE、跨云端 Agent 的统一追踪层。</a:t>
             </a:r>
             <a:endParaRPr lang="en-US" sz="660" dirty="0"/>
           </a:p>

--- a/docs/competition/2026-guochuang/output/final/Agent-eBPF-Filter-项目答辩路演PPT-浅色优化版.pptx
+++ b/docs/competition/2026-guochuang/output/final/Agent-eBPF-Filter-项目答辩路演PPT-浅色优化版.pptx
@@ -25,9 +25,10 @@
     <p:sldId id="273" r:id="rId19"/>
     <p:sldId id="274" r:id="rId20"/>
     <p:sldId id="275" r:id="rId21"/>
+    <p:sldId id="276" r:id="rId22"/>
   </p:sldIdLst>
   <p:notesMasterIdLst>
-    <p:notesMasterId r:id="rId22"/>
+    <p:notesMasterId r:id="rId23"/>
   </p:notesMasterIdLst>
   <p:sldSz cx="9144000" cy="5143500"/>
   <p:notesSz cx="5143500" cy="9144000"/>
@@ -1619,6 +1620,94 @@
 </p:notes>
 </file>
 
+<file path=ppt/notesSlides/notesSlide21.xml><?xml version="1.0" encoding="utf-8"?>
+<p:notes xmlns:a="http://schemas.openxmlformats.org/drawingml/2006/main" xmlns:r="http://schemas.openxmlformats.org/officeDocument/2006/relationships" xmlns:p="http://schemas.openxmlformats.org/presentationml/2006/main">
+  <p:cSld>
+    <p:spTree>
+      <p:nvGrpSpPr>
+        <p:cNvPr id="1" name=""/>
+        <p:cNvGrpSpPr/>
+        <p:nvPr/>
+      </p:nvGrpSpPr>
+      <p:grpSpPr>
+        <a:xfrm>
+          <a:off x="0" y="0"/>
+          <a:ext cx="0" cy="0"/>
+          <a:chOff x="0" y="0"/>
+          <a:chExt cx="0" cy="0"/>
+        </a:xfrm>
+      </p:grpSpPr>
+      <p:sp>
+        <p:nvSpPr>
+          <p:cNvPr id="2" name="Slide Image Placeholder 1"/>
+          <p:cNvSpPr>
+            <a:spLocks noGrp="1" noRot="1" noChangeAspect="1"/>
+          </p:cNvSpPr>
+          <p:nvPr>
+            <p:ph type="sldImg"/>
+          </p:nvPr>
+        </p:nvSpPr>
+        <p:spPr/>
+      </p:sp>
+      <p:sp>
+        <p:nvSpPr>
+          <p:cNvPr id="3" name="Notes Placeholder 2"/>
+          <p:cNvSpPr>
+            <a:spLocks noGrp="1"/>
+          </p:cNvSpPr>
+          <p:nvPr>
+            <p:ph type="body" idx="1"/>
+          </p:nvPr>
+        </p:nvSpPr>
+        <p:spPr/>
+        <p:txBody>
+          <a:bodyPr/>
+          <a:lstStyle/>
+          <a:p>
+            <a:r>
+              <a:rPr lang="en-US" dirty="0"/>
+              <a:t/>
+            </a:r>
+            <a:endParaRPr lang="en-US" dirty="0"/>
+          </a:p>
+        </p:txBody>
+      </p:sp>
+      <p:sp>
+        <p:nvSpPr>
+          <p:cNvPr id="4" name="Slide Number Placeholder 3"/>
+          <p:cNvSpPr>
+            <a:spLocks noGrp="1"/>
+          </p:cNvSpPr>
+          <p:nvPr>
+            <p:ph type="sldNum" sz="quarter" idx="10"/>
+          </p:nvPr>
+        </p:nvSpPr>
+        <p:spPr/>
+        <p:txBody>
+          <a:bodyPr/>
+          <a:lstStyle/>
+          <a:p>
+            <a:fld id="{F7021451-1387-4CA6-816F-3879F97B5CBC}" type="slidenum">
+              <a:rPr lang="en-US"/>
+              <a:t>21</a:t>
+            </a:fld>
+            <a:endParaRPr lang="en-US"/>
+          </a:p>
+        </p:txBody>
+      </p:sp>
+    </p:spTree>
+    <p:extLst>
+      <p:ext uri="{BB962C8B-B14F-4D97-AF65-F5344CB8AC3E}">
+        <p14:creationId xmlns:p14="http://schemas.microsoft.com/office/powerpoint/2010/main" val="1024086991"/>
+      </p:ext>
+    </p:extLst>
+  </p:cSld>
+  <p:clrMapOvr>
+    <a:masterClrMapping/>
+  </p:clrMapOvr>
+</p:notes>
+</file>
+
 <file path=ppt/notesSlides/notesSlide3.xml><?xml version="1.0" encoding="utf-8"?>
 <p:notes xmlns:a="http://schemas.openxmlformats.org/drawingml/2006/main" xmlns:r="http://schemas.openxmlformats.org/officeDocument/2006/relationships" xmlns:p="http://schemas.openxmlformats.org/presentationml/2006/main">
   <p:cSld>
@@ -8305,7 +8394,7 @@
                 <a:ea typeface="Microsoft YaHei" pitchFamily="34" charset="-122"/>
                 <a:cs typeface="Microsoft YaHei" pitchFamily="34" charset="-120"/>
               </a:rPr>
-              <a:t>市场证据：Stack Overflow AI adoption；GitGuardian secrets sprawl；IBM AI oversight gap。</a:t>
+              <a:t>引用：[1] Stack Overflow 2025 AI adoption；[2] GitGuardian 2026 secrets sprawl；[3] IBM 2025 AI oversight gap。完整链接见引用页。</a:t>
             </a:r>
             <a:endParaRPr lang="en-US" sz="660" dirty="0"/>
           </a:p>
@@ -10502,7 +10591,7 @@
                 <a:ea typeface="Microsoft YaHei" pitchFamily="34" charset="-122"/>
                 <a:cs typeface="Microsoft YaHei" pitchFamily="34" charset="-120"/>
               </a:rPr>
-              <a:t>市场证据：GitGuardian State of Secrets Sprawl 2026；Stack Overflow Developer Survey 2025。</a:t>
+              <a:t>引用：[2] GitGuardian State of Secrets Sprawl 2026；[1] Stack Overflow Developer Survey 2025。完整链接见引用页。</a:t>
             </a:r>
             <a:endParaRPr lang="en-US" sz="660" dirty="0"/>
           </a:p>
@@ -17729,8 +17818,8 @@
         </p:nvSpPr>
         <p:spPr>
           <a:xfrm>
-            <a:off x="987552" y="3584448"/>
-            <a:ext cx="7168896" cy="274320"/>
+            <a:off x="987552" y="3639312"/>
+            <a:ext cx="7168896" cy="146304"/>
           </a:xfrm>
           <a:prstGeom prst="rect">
             <a:avLst/>
@@ -17751,7 +17840,7 @@
               <a:buNone/>
             </a:pPr>
             <a:r>
-              <a:rPr lang="en-US" sz="680" dirty="0">
+              <a:rPr lang="en-US" sz="860" dirty="0">
                 <a:solidFill>
                   <a:srgbClr val="243B53"/>
                 </a:solidFill>
@@ -17759,9 +17848,9 @@
                 <a:ea typeface="Microsoft YaHei" pitchFamily="34" charset="-122"/>
                 <a:cs typeface="Microsoft YaHei" pitchFamily="34" charset="-120"/>
               </a:rPr>
-              <a:t>主要来源：Stack Overflow Developer Survey 2025；GitGuardian State of Secrets Sprawl 2026；IBM Cost of a Data Breach Report 2025；OWASP Top 10 for LLM Applications / Agentic AI Threats；CSA M365 Copilot research note；NVD CVE-2025-32711。</a:t>
-            </a:r>
-            <a:endParaRPr lang="en-US" sz="680" dirty="0"/>
+              <a:t>本 PPT 中统计数据、案例与外部框架已用 [1]–[6] 标注来源；完整引用信息见下一页。</a:t>
+            </a:r>
+            <a:endParaRPr lang="en-US" sz="860" dirty="0"/>
           </a:p>
         </p:txBody>
       </p:sp>
@@ -17806,6 +17895,1364 @@
               <a:t>谢谢各位老师，请批评指正</a:t>
             </a:r>
             <a:endParaRPr lang="en-US" sz="1420" dirty="0"/>
+          </a:p>
+        </p:txBody>
+      </p:sp>
+    </p:spTree>
+  </p:cSld>
+  <p:clrMapOvr>
+    <a:masterClrMapping/>
+  </p:clrMapOvr>
+</p:sld>
+</file>
+
+<file path=ppt/slides/slide21.xml><?xml version="1.0" encoding="utf-8"?>
+<p:sld xmlns:a="http://schemas.openxmlformats.org/drawingml/2006/main" xmlns:r="http://schemas.openxmlformats.org/officeDocument/2006/relationships" xmlns:p="http://schemas.openxmlformats.org/presentationml/2006/main">
+  <p:cSld name="Slide 21">
+    <p:bg>
+      <p:bgPr>
+        <a:solidFill>
+          <a:srgbClr val="FBFDFF"/>
+        </a:solidFill>
+      </p:bgPr>
+    </p:bg>
+    <p:spTree>
+      <p:nvGrpSpPr>
+        <p:cNvPr id="1" name=""/>
+        <p:cNvGrpSpPr/>
+        <p:nvPr/>
+      </p:nvGrpSpPr>
+      <p:grpSpPr>
+        <a:xfrm>
+          <a:off x="0" y="0"/>
+          <a:ext cx="0" cy="0"/>
+          <a:chOff x="0" y="0"/>
+          <a:chExt cx="0" cy="0"/>
+        </a:xfrm>
+      </p:grpSpPr>
+      <p:sp>
+        <p:nvSpPr>
+          <p:cNvPr id="2" name="Shape 0"/>
+          <p:cNvSpPr/>
+          <p:nvPr/>
+        </p:nvSpPr>
+        <p:spPr>
+          <a:xfrm>
+            <a:off x="0" y="0"/>
+            <a:ext cx="9144000" cy="5143500"/>
+          </a:xfrm>
+          <a:prstGeom prst="rect">
+            <a:avLst/>
+          </a:prstGeom>
+          <a:solidFill>
+            <a:srgbClr val="FBFDFF"/>
+          </a:solidFill>
+          <a:ln w="12700">
+            <a:solidFill>
+              <a:srgbClr val="FBFDFF"/>
+            </a:solidFill>
+            <a:prstDash val="solid"/>
+          </a:ln>
+        </p:spPr>
+      </p:sp>
+      <p:sp>
+        <p:nvSpPr>
+          <p:cNvPr id="3" name="Shape 1"/>
+          <p:cNvSpPr/>
+          <p:nvPr/>
+        </p:nvSpPr>
+        <p:spPr>
+          <a:xfrm>
+            <a:off x="0" y="0"/>
+            <a:ext cx="9144000" cy="73152"/>
+          </a:xfrm>
+          <a:prstGeom prst="rect">
+            <a:avLst/>
+          </a:prstGeom>
+          <a:solidFill>
+            <a:srgbClr val="1677B8"/>
+          </a:solidFill>
+          <a:ln w="12700">
+            <a:solidFill>
+              <a:srgbClr val="1677B8"/>
+            </a:solidFill>
+            <a:prstDash val="solid"/>
+          </a:ln>
+        </p:spPr>
+      </p:sp>
+      <p:sp>
+        <p:nvSpPr>
+          <p:cNvPr id="4" name="Shape 2"/>
+          <p:cNvSpPr/>
+          <p:nvPr/>
+        </p:nvSpPr>
+        <p:spPr>
+          <a:xfrm>
+            <a:off x="7635240" y="0"/>
+            <a:ext cx="1508760" cy="73152"/>
+          </a:xfrm>
+          <a:prstGeom prst="rect">
+            <a:avLst/>
+          </a:prstGeom>
+          <a:solidFill>
+            <a:srgbClr val="23865F"/>
+          </a:solidFill>
+          <a:ln w="12700">
+            <a:solidFill>
+              <a:srgbClr val="23865F"/>
+            </a:solidFill>
+            <a:prstDash val="solid"/>
+          </a:ln>
+        </p:spPr>
+      </p:sp>
+      <p:sp>
+        <p:nvSpPr>
+          <p:cNvPr id="5" name="Shape 3"/>
+          <p:cNvSpPr/>
+          <p:nvPr/>
+        </p:nvSpPr>
+        <p:spPr>
+          <a:xfrm>
+            <a:off x="8458200" y="4700016"/>
+            <a:ext cx="438912" cy="246888"/>
+          </a:xfrm>
+          <a:prstGeom prst="roundRect">
+            <a:avLst>
+              <a:gd name="adj" fmla="val 14815"/>
+            </a:avLst>
+          </a:prstGeom>
+          <a:solidFill>
+            <a:srgbClr val="FFFFFF"/>
+          </a:solidFill>
+          <a:ln w="10160">
+            <a:solidFill>
+              <a:srgbClr val="E7EEF4"/>
+            </a:solidFill>
+            <a:prstDash val="solid"/>
+          </a:ln>
+        </p:spPr>
+      </p:sp>
+      <p:sp>
+        <p:nvSpPr>
+          <p:cNvPr id="6" name="Text 4"/>
+          <p:cNvSpPr/>
+          <p:nvPr/>
+        </p:nvSpPr>
+        <p:spPr>
+          <a:xfrm>
+            <a:off x="8458200" y="4759452"/>
+            <a:ext cx="438912" cy="91440"/>
+          </a:xfrm>
+          <a:prstGeom prst="rect">
+            <a:avLst/>
+          </a:prstGeom>
+          <a:noFill/>
+          <a:ln/>
+        </p:spPr>
+        <p:txBody>
+          <a:bodyPr wrap="square" lIns="127" tIns="127" rIns="127" bIns="127" rtlCol="0" anchor="t">
+            <a:normAutofit/>
+          </a:bodyPr>
+          <a:lstStyle/>
+          <a:p>
+            <a:pPr algn="ctr" indent="0" marL="0">
+              <a:lnSpc>
+                <a:spcPct val="92000"/>
+              </a:lnSpc>
+              <a:buNone/>
+            </a:pPr>
+            <a:r>
+              <a:rPr lang="en-US" sz="750" b="1" dirty="0">
+                <a:solidFill>
+                  <a:srgbClr val="1677B8"/>
+                </a:solidFill>
+                <a:latin typeface="Arial" pitchFamily="34" charset="0"/>
+                <a:ea typeface="Arial" pitchFamily="34" charset="-122"/>
+                <a:cs typeface="Arial" pitchFamily="34" charset="-120"/>
+              </a:rPr>
+              <a:t>21</a:t>
+            </a:r>
+            <a:endParaRPr lang="en-US" sz="750" dirty="0"/>
+          </a:p>
+        </p:txBody>
+      </p:sp>
+      <p:sp>
+        <p:nvSpPr>
+          <p:cNvPr id="7" name="Text 5"/>
+          <p:cNvSpPr/>
+          <p:nvPr/>
+        </p:nvSpPr>
+        <p:spPr>
+          <a:xfrm>
+            <a:off x="530352" y="329184"/>
+            <a:ext cx="1143000" cy="164592"/>
+          </a:xfrm>
+          <a:prstGeom prst="rect">
+            <a:avLst/>
+          </a:prstGeom>
+          <a:noFill/>
+          <a:ln/>
+        </p:spPr>
+        <p:txBody>
+          <a:bodyPr wrap="square" lIns="127" tIns="127" rIns="127" bIns="127" rtlCol="0" anchor="t">
+            <a:normAutofit/>
+          </a:bodyPr>
+          <a:lstStyle/>
+          <a:p>
+            <a:pPr algn="l" indent="0" marL="0">
+              <a:lnSpc>
+                <a:spcPct val="92000"/>
+              </a:lnSpc>
+              <a:buNone/>
+            </a:pPr>
+            <a:r>
+              <a:rPr lang="en-US" sz="720" b="1" dirty="0">
+                <a:solidFill>
+                  <a:srgbClr val="1677B8"/>
+                </a:solidFill>
+                <a:latin typeface="Arial" pitchFamily="34" charset="0"/>
+                <a:ea typeface="Arial" pitchFamily="34" charset="-122"/>
+                <a:cs typeface="Arial" pitchFamily="34" charset="-120"/>
+              </a:rPr>
+              <a:t>SECTION REF</a:t>
+            </a:r>
+            <a:endParaRPr lang="en-US" sz="720" dirty="0"/>
+          </a:p>
+        </p:txBody>
+      </p:sp>
+      <p:sp>
+        <p:nvSpPr>
+          <p:cNvPr id="8" name="Shape 6"/>
+          <p:cNvSpPr/>
+          <p:nvPr/>
+        </p:nvSpPr>
+        <p:spPr>
+          <a:xfrm>
+            <a:off x="530352" y="594360"/>
+            <a:ext cx="0" cy="347472"/>
+          </a:xfrm>
+          <a:prstGeom prst="line">
+            <a:avLst/>
+          </a:prstGeom>
+          <a:noFill/>
+          <a:ln w="27940">
+            <a:solidFill>
+              <a:srgbClr val="1677B8"/>
+            </a:solidFill>
+            <a:prstDash val="solid"/>
+          </a:ln>
+        </p:spPr>
+      </p:sp>
+      <p:sp>
+        <p:nvSpPr>
+          <p:cNvPr id="9" name="Text 7"/>
+          <p:cNvSpPr/>
+          <p:nvPr/>
+        </p:nvSpPr>
+        <p:spPr>
+          <a:xfrm>
+            <a:off x="676656" y="530352"/>
+            <a:ext cx="7772400" cy="384048"/>
+          </a:xfrm>
+          <a:prstGeom prst="rect">
+            <a:avLst/>
+          </a:prstGeom>
+          <a:noFill/>
+          <a:ln/>
+        </p:spPr>
+        <p:txBody>
+          <a:bodyPr wrap="square" lIns="127" tIns="127" rIns="127" bIns="127" rtlCol="0" anchor="t">
+            <a:normAutofit/>
+          </a:bodyPr>
+          <a:lstStyle/>
+          <a:p>
+            <a:pPr algn="l" indent="0" marL="0">
+              <a:lnSpc>
+                <a:spcPct val="92000"/>
+              </a:lnSpc>
+              <a:buNone/>
+            </a:pPr>
+            <a:r>
+              <a:rPr lang="en-US" sz="2050" b="1" dirty="0">
+                <a:solidFill>
+                  <a:srgbClr val="102A43"/>
+                </a:solidFill>
+                <a:latin typeface="Microsoft YaHei" pitchFamily="34" charset="0"/>
+                <a:ea typeface="Microsoft YaHei" pitchFamily="34" charset="-122"/>
+                <a:cs typeface="Microsoft YaHei" pitchFamily="34" charset="-120"/>
+              </a:rPr>
+              <a:t>引用信息：统计数据、案例与风险框架来源</a:t>
+            </a:r>
+            <a:endParaRPr lang="en-US" sz="2050" dirty="0"/>
+          </a:p>
+        </p:txBody>
+      </p:sp>
+      <p:sp>
+        <p:nvSpPr>
+          <p:cNvPr id="10" name="Text 8"/>
+          <p:cNvSpPr/>
+          <p:nvPr/>
+        </p:nvSpPr>
+        <p:spPr>
+          <a:xfrm>
+            <a:off x="685800" y="960120"/>
+            <a:ext cx="7589520" cy="201168"/>
+          </a:xfrm>
+          <a:prstGeom prst="rect">
+            <a:avLst/>
+          </a:prstGeom>
+          <a:noFill/>
+          <a:ln/>
+        </p:spPr>
+        <p:txBody>
+          <a:bodyPr wrap="square" lIns="127" tIns="127" rIns="127" bIns="127" rtlCol="0" anchor="t">
+            <a:normAutofit/>
+          </a:bodyPr>
+          <a:lstStyle/>
+          <a:p>
+            <a:pPr algn="l" indent="0" marL="0">
+              <a:lnSpc>
+                <a:spcPct val="92000"/>
+              </a:lnSpc>
+              <a:buNone/>
+            </a:pPr>
+            <a:r>
+              <a:rPr lang="en-US" sz="900" dirty="0">
+                <a:solidFill>
+                  <a:srgbClr val="6B7C8E"/>
+                </a:solidFill>
+                <a:latin typeface="Microsoft YaHei" pitchFamily="34" charset="0"/>
+                <a:ea typeface="Microsoft YaHei" pitchFamily="34" charset="-122"/>
+                <a:cs typeface="Microsoft YaHei" pitchFamily="34" charset="-120"/>
+              </a:rPr>
+              <a:t>答辩时可按编号追溯数据、报告截图和外部安全框架。</a:t>
+            </a:r>
+            <a:endParaRPr lang="en-US" sz="900" dirty="0"/>
+          </a:p>
+        </p:txBody>
+      </p:sp>
+      <p:sp>
+        <p:nvSpPr>
+          <p:cNvPr id="11" name="Shape 9"/>
+          <p:cNvSpPr/>
+          <p:nvPr/>
+        </p:nvSpPr>
+        <p:spPr>
+          <a:xfrm>
+            <a:off x="658368" y="1170432"/>
+            <a:ext cx="7936992" cy="384048"/>
+          </a:xfrm>
+          <a:prstGeom prst="roundRect">
+            <a:avLst>
+              <a:gd name="adj" fmla="val 4762"/>
+            </a:avLst>
+          </a:prstGeom>
+          <a:solidFill>
+            <a:srgbClr val="FFFFFF"/>
+          </a:solidFill>
+          <a:ln w="10160">
+            <a:solidFill>
+              <a:srgbClr val="D9E6EF"/>
+            </a:solidFill>
+            <a:prstDash val="solid"/>
+          </a:ln>
+        </p:spPr>
+      </p:sp>
+      <p:sp>
+        <p:nvSpPr>
+          <p:cNvPr id="12" name="Text 10"/>
+          <p:cNvSpPr/>
+          <p:nvPr/>
+        </p:nvSpPr>
+        <p:spPr>
+          <a:xfrm>
+            <a:off x="841248" y="1293876"/>
+            <a:ext cx="384048" cy="73152"/>
+          </a:xfrm>
+          <a:prstGeom prst="rect">
+            <a:avLst/>
+          </a:prstGeom>
+          <a:noFill/>
+          <a:ln/>
+        </p:spPr>
+        <p:txBody>
+          <a:bodyPr wrap="square" lIns="127" tIns="127" rIns="127" bIns="127" rtlCol="0" anchor="t">
+            <a:normAutofit/>
+          </a:bodyPr>
+          <a:lstStyle/>
+          <a:p>
+            <a:pPr algn="ctr" indent="0" marL="0">
+              <a:lnSpc>
+                <a:spcPct val="92000"/>
+              </a:lnSpc>
+              <a:buNone/>
+            </a:pPr>
+            <a:r>
+              <a:rPr lang="en-US" sz="780" b="1" dirty="0">
+                <a:solidFill>
+                  <a:srgbClr val="1677B8"/>
+                </a:solidFill>
+                <a:latin typeface="Arial" pitchFamily="34" charset="0"/>
+                <a:ea typeface="Arial" pitchFamily="34" charset="-122"/>
+                <a:cs typeface="Arial" pitchFamily="34" charset="-120"/>
+              </a:rPr>
+              <a:t>[1]</a:t>
+            </a:r>
+            <a:endParaRPr lang="en-US" sz="780" dirty="0"/>
+          </a:p>
+        </p:txBody>
+      </p:sp>
+      <p:sp>
+        <p:nvSpPr>
+          <p:cNvPr id="13" name="Text 11"/>
+          <p:cNvSpPr/>
+          <p:nvPr/>
+        </p:nvSpPr>
+        <p:spPr>
+          <a:xfrm>
+            <a:off x="1353312" y="1243584"/>
+            <a:ext cx="4526280" cy="109728"/>
+          </a:xfrm>
+          <a:prstGeom prst="rect">
+            <a:avLst/>
+          </a:prstGeom>
+          <a:noFill/>
+          <a:ln/>
+        </p:spPr>
+        <p:txBody>
+          <a:bodyPr wrap="square" lIns="127" tIns="127" rIns="127" bIns="127" rtlCol="0" anchor="t">
+            <a:normAutofit/>
+          </a:bodyPr>
+          <a:lstStyle/>
+          <a:p>
+            <a:pPr algn="l" indent="0" marL="0">
+              <a:lnSpc>
+                <a:spcPct val="92000"/>
+              </a:lnSpc>
+              <a:buNone/>
+            </a:pPr>
+            <a:r>
+              <a:rPr lang="en-US" sz="720" b="1" dirty="0">
+                <a:solidFill>
+                  <a:srgbClr val="102A43"/>
+                </a:solidFill>
+                <a:latin typeface="Microsoft YaHei" pitchFamily="34" charset="0"/>
+                <a:ea typeface="Microsoft YaHei" pitchFamily="34" charset="-122"/>
+                <a:cs typeface="Microsoft YaHei" pitchFamily="34" charset="-120"/>
+              </a:rPr>
+              <a:t>Stack Overflow Developer Survey 2025 — AI tools adoption / usage</a:t>
+            </a:r>
+            <a:endParaRPr lang="en-US" sz="720" dirty="0"/>
+          </a:p>
+        </p:txBody>
+      </p:sp>
+      <p:sp>
+        <p:nvSpPr>
+          <p:cNvPr id="14" name="Text 12"/>
+          <p:cNvSpPr/>
+          <p:nvPr/>
+        </p:nvSpPr>
+        <p:spPr>
+          <a:xfrm>
+            <a:off x="1353312" y="1389888"/>
+            <a:ext cx="6355080" cy="73152"/>
+          </a:xfrm>
+          <a:prstGeom prst="rect">
+            <a:avLst/>
+          </a:prstGeom>
+          <a:noFill/>
+          <a:ln/>
+        </p:spPr>
+        <p:txBody>
+          <a:bodyPr wrap="square" lIns="127" tIns="127" rIns="127" bIns="127" rtlCol="0" anchor="t">
+            <a:normAutofit/>
+          </a:bodyPr>
+          <a:lstStyle/>
+          <a:p>
+            <a:pPr algn="l" indent="0" marL="0">
+              <a:lnSpc>
+                <a:spcPct val="92000"/>
+              </a:lnSpc>
+              <a:buNone/>
+            </a:pPr>
+            <a:r>
+              <a:rPr lang="en-US" sz="580" dirty="0">
+                <a:solidFill>
+                  <a:srgbClr val="6B7C8E"/>
+                </a:solidFill>
+                <a:latin typeface="Arial" pitchFamily="34" charset="0"/>
+                <a:ea typeface="Arial" pitchFamily="34" charset="-122"/>
+                <a:cs typeface="Arial" pitchFamily="34" charset="-120"/>
+              </a:rPr>
+              <a:t>https://survey.stackoverflow.co/2025/ai</a:t>
+            </a:r>
+            <a:endParaRPr lang="en-US" sz="580" dirty="0"/>
+          </a:p>
+        </p:txBody>
+      </p:sp>
+      <p:sp>
+        <p:nvSpPr>
+          <p:cNvPr id="15" name="Shape 13"/>
+          <p:cNvSpPr/>
+          <p:nvPr/>
+        </p:nvSpPr>
+        <p:spPr>
+          <a:xfrm>
+            <a:off x="658368" y="1700784"/>
+            <a:ext cx="7936992" cy="384048"/>
+          </a:xfrm>
+          <a:prstGeom prst="roundRect">
+            <a:avLst>
+              <a:gd name="adj" fmla="val 4762"/>
+            </a:avLst>
+          </a:prstGeom>
+          <a:solidFill>
+            <a:srgbClr val="F3F8FC"/>
+          </a:solidFill>
+          <a:ln w="10160">
+            <a:solidFill>
+              <a:srgbClr val="D9E6EF"/>
+            </a:solidFill>
+            <a:prstDash val="solid"/>
+          </a:ln>
+        </p:spPr>
+      </p:sp>
+      <p:sp>
+        <p:nvSpPr>
+          <p:cNvPr id="16" name="Text 14"/>
+          <p:cNvSpPr/>
+          <p:nvPr/>
+        </p:nvSpPr>
+        <p:spPr>
+          <a:xfrm>
+            <a:off x="841248" y="1824228"/>
+            <a:ext cx="384048" cy="73152"/>
+          </a:xfrm>
+          <a:prstGeom prst="rect">
+            <a:avLst/>
+          </a:prstGeom>
+          <a:noFill/>
+          <a:ln/>
+        </p:spPr>
+        <p:txBody>
+          <a:bodyPr wrap="square" lIns="127" tIns="127" rIns="127" bIns="127" rtlCol="0" anchor="t">
+            <a:normAutofit/>
+          </a:bodyPr>
+          <a:lstStyle/>
+          <a:p>
+            <a:pPr algn="ctr" indent="0" marL="0">
+              <a:lnSpc>
+                <a:spcPct val="92000"/>
+              </a:lnSpc>
+              <a:buNone/>
+            </a:pPr>
+            <a:r>
+              <a:rPr lang="en-US" sz="780" b="1" dirty="0">
+                <a:solidFill>
+                  <a:srgbClr val="C74343"/>
+                </a:solidFill>
+                <a:latin typeface="Arial" pitchFamily="34" charset="0"/>
+                <a:ea typeface="Arial" pitchFamily="34" charset="-122"/>
+                <a:cs typeface="Arial" pitchFamily="34" charset="-120"/>
+              </a:rPr>
+              <a:t>[2]</a:t>
+            </a:r>
+            <a:endParaRPr lang="en-US" sz="780" dirty="0"/>
+          </a:p>
+        </p:txBody>
+      </p:sp>
+      <p:sp>
+        <p:nvSpPr>
+          <p:cNvPr id="17" name="Text 15"/>
+          <p:cNvSpPr/>
+          <p:nvPr/>
+        </p:nvSpPr>
+        <p:spPr>
+          <a:xfrm>
+            <a:off x="1353312" y="1773936"/>
+            <a:ext cx="4526280" cy="109728"/>
+          </a:xfrm>
+          <a:prstGeom prst="rect">
+            <a:avLst/>
+          </a:prstGeom>
+          <a:noFill/>
+          <a:ln/>
+        </p:spPr>
+        <p:txBody>
+          <a:bodyPr wrap="square" lIns="127" tIns="127" rIns="127" bIns="127" rtlCol="0" anchor="t">
+            <a:normAutofit/>
+          </a:bodyPr>
+          <a:lstStyle/>
+          <a:p>
+            <a:pPr algn="l" indent="0" marL="0">
+              <a:lnSpc>
+                <a:spcPct val="92000"/>
+              </a:lnSpc>
+              <a:buNone/>
+            </a:pPr>
+            <a:r>
+              <a:rPr lang="en-US" sz="720" b="1" dirty="0">
+                <a:solidFill>
+                  <a:srgbClr val="102A43"/>
+                </a:solidFill>
+                <a:latin typeface="Microsoft YaHei" pitchFamily="34" charset="0"/>
+                <a:ea typeface="Microsoft YaHei" pitchFamily="34" charset="-122"/>
+                <a:cs typeface="Microsoft YaHei" pitchFamily="34" charset="-120"/>
+              </a:rPr>
+              <a:t>GitGuardian State of Secrets Sprawl 2026 — secrets scale, MCP secrets, AI-assisted commit risk</a:t>
+            </a:r>
+            <a:endParaRPr lang="en-US" sz="720" dirty="0"/>
+          </a:p>
+        </p:txBody>
+      </p:sp>
+      <p:sp>
+        <p:nvSpPr>
+          <p:cNvPr id="18" name="Text 16"/>
+          <p:cNvSpPr/>
+          <p:nvPr/>
+        </p:nvSpPr>
+        <p:spPr>
+          <a:xfrm>
+            <a:off x="1353312" y="1920240"/>
+            <a:ext cx="6355080" cy="73152"/>
+          </a:xfrm>
+          <a:prstGeom prst="rect">
+            <a:avLst/>
+          </a:prstGeom>
+          <a:noFill/>
+          <a:ln/>
+        </p:spPr>
+        <p:txBody>
+          <a:bodyPr wrap="square" lIns="127" tIns="127" rIns="127" bIns="127" rtlCol="0" anchor="t">
+            <a:normAutofit/>
+          </a:bodyPr>
+          <a:lstStyle/>
+          <a:p>
+            <a:pPr algn="l" indent="0" marL="0">
+              <a:lnSpc>
+                <a:spcPct val="92000"/>
+              </a:lnSpc>
+              <a:buNone/>
+            </a:pPr>
+            <a:r>
+              <a:rPr lang="en-US" sz="580" dirty="0">
+                <a:solidFill>
+                  <a:srgbClr val="6B7C8E"/>
+                </a:solidFill>
+                <a:latin typeface="Arial" pitchFamily="34" charset="0"/>
+                <a:ea typeface="Arial" pitchFamily="34" charset="-122"/>
+                <a:cs typeface="Arial" pitchFamily="34" charset="-120"/>
+              </a:rPr>
+              <a:t>https://blog.gitguardian.com/the-state-of-secrets-sprawl-2026/</a:t>
+            </a:r>
+            <a:endParaRPr lang="en-US" sz="580" dirty="0"/>
+          </a:p>
+        </p:txBody>
+      </p:sp>
+      <p:sp>
+        <p:nvSpPr>
+          <p:cNvPr id="19" name="Shape 17"/>
+          <p:cNvSpPr/>
+          <p:nvPr/>
+        </p:nvSpPr>
+        <p:spPr>
+          <a:xfrm>
+            <a:off x="658368" y="2231136"/>
+            <a:ext cx="7936992" cy="384048"/>
+          </a:xfrm>
+          <a:prstGeom prst="roundRect">
+            <a:avLst>
+              <a:gd name="adj" fmla="val 4762"/>
+            </a:avLst>
+          </a:prstGeom>
+          <a:solidFill>
+            <a:srgbClr val="FFFFFF"/>
+          </a:solidFill>
+          <a:ln w="10160">
+            <a:solidFill>
+              <a:srgbClr val="D9E6EF"/>
+            </a:solidFill>
+            <a:prstDash val="solid"/>
+          </a:ln>
+        </p:spPr>
+      </p:sp>
+      <p:sp>
+        <p:nvSpPr>
+          <p:cNvPr id="20" name="Text 18"/>
+          <p:cNvSpPr/>
+          <p:nvPr/>
+        </p:nvSpPr>
+        <p:spPr>
+          <a:xfrm>
+            <a:off x="841248" y="2354580"/>
+            <a:ext cx="384048" cy="73152"/>
+          </a:xfrm>
+          <a:prstGeom prst="rect">
+            <a:avLst/>
+          </a:prstGeom>
+          <a:noFill/>
+          <a:ln/>
+        </p:spPr>
+        <p:txBody>
+          <a:bodyPr wrap="square" lIns="127" tIns="127" rIns="127" bIns="127" rtlCol="0" anchor="t">
+            <a:normAutofit/>
+          </a:bodyPr>
+          <a:lstStyle/>
+          <a:p>
+            <a:pPr algn="ctr" indent="0" marL="0">
+              <a:lnSpc>
+                <a:spcPct val="92000"/>
+              </a:lnSpc>
+              <a:buNone/>
+            </a:pPr>
+            <a:r>
+              <a:rPr lang="en-US" sz="780" b="1" dirty="0">
+                <a:solidFill>
+                  <a:srgbClr val="5B55A3"/>
+                </a:solidFill>
+                <a:latin typeface="Arial" pitchFamily="34" charset="0"/>
+                <a:ea typeface="Arial" pitchFamily="34" charset="-122"/>
+                <a:cs typeface="Arial" pitchFamily="34" charset="-120"/>
+              </a:rPr>
+              <a:t>[3]</a:t>
+            </a:r>
+            <a:endParaRPr lang="en-US" sz="780" dirty="0"/>
+          </a:p>
+        </p:txBody>
+      </p:sp>
+      <p:sp>
+        <p:nvSpPr>
+          <p:cNvPr id="21" name="Text 19"/>
+          <p:cNvSpPr/>
+          <p:nvPr/>
+        </p:nvSpPr>
+        <p:spPr>
+          <a:xfrm>
+            <a:off x="1353312" y="2304288"/>
+            <a:ext cx="4526280" cy="109728"/>
+          </a:xfrm>
+          <a:prstGeom prst="rect">
+            <a:avLst/>
+          </a:prstGeom>
+          <a:noFill/>
+          <a:ln/>
+        </p:spPr>
+        <p:txBody>
+          <a:bodyPr wrap="square" lIns="127" tIns="127" rIns="127" bIns="127" rtlCol="0" anchor="t">
+            <a:normAutofit/>
+          </a:bodyPr>
+          <a:lstStyle/>
+          <a:p>
+            <a:pPr algn="l" indent="0" marL="0">
+              <a:lnSpc>
+                <a:spcPct val="92000"/>
+              </a:lnSpc>
+              <a:buNone/>
+            </a:pPr>
+            <a:r>
+              <a:rPr lang="en-US" sz="720" b="1" dirty="0">
+                <a:solidFill>
+                  <a:srgbClr val="102A43"/>
+                </a:solidFill>
+                <a:latin typeface="Microsoft YaHei" pitchFamily="34" charset="0"/>
+                <a:ea typeface="Microsoft YaHei" pitchFamily="34" charset="-122"/>
+                <a:cs typeface="Microsoft YaHei" pitchFamily="34" charset="-120"/>
+              </a:rPr>
+              <a:t>IBM Cost of a Data Breach Report 2025 / IBM newsroom — breach cost and AI access-control gap</a:t>
+            </a:r>
+            <a:endParaRPr lang="en-US" sz="720" dirty="0"/>
+          </a:p>
+        </p:txBody>
+      </p:sp>
+      <p:sp>
+        <p:nvSpPr>
+          <p:cNvPr id="22" name="Text 20"/>
+          <p:cNvSpPr/>
+          <p:nvPr/>
+        </p:nvSpPr>
+        <p:spPr>
+          <a:xfrm>
+            <a:off x="1353312" y="2450592"/>
+            <a:ext cx="6355080" cy="73152"/>
+          </a:xfrm>
+          <a:prstGeom prst="rect">
+            <a:avLst/>
+          </a:prstGeom>
+          <a:noFill/>
+          <a:ln/>
+        </p:spPr>
+        <p:txBody>
+          <a:bodyPr wrap="square" lIns="127" tIns="127" rIns="127" bIns="127" rtlCol="0" anchor="t">
+            <a:normAutofit/>
+          </a:bodyPr>
+          <a:lstStyle/>
+          <a:p>
+            <a:pPr algn="l" indent="0" marL="0">
+              <a:lnSpc>
+                <a:spcPct val="92000"/>
+              </a:lnSpc>
+              <a:buNone/>
+            </a:pPr>
+            <a:r>
+              <a:rPr lang="en-US" sz="580" dirty="0">
+                <a:solidFill>
+                  <a:srgbClr val="6B7C8E"/>
+                </a:solidFill>
+                <a:latin typeface="Arial" pitchFamily="34" charset="0"/>
+                <a:ea typeface="Arial" pitchFamily="34" charset="-122"/>
+                <a:cs typeface="Arial" pitchFamily="34" charset="-120"/>
+              </a:rPr>
+              <a:t>https://www.ibm.com/reports/data-breach</a:t>
+            </a:r>
+            <a:endParaRPr lang="en-US" sz="580" dirty="0"/>
+          </a:p>
+        </p:txBody>
+      </p:sp>
+      <p:sp>
+        <p:nvSpPr>
+          <p:cNvPr id="23" name="Shape 21"/>
+          <p:cNvSpPr/>
+          <p:nvPr/>
+        </p:nvSpPr>
+        <p:spPr>
+          <a:xfrm>
+            <a:off x="658368" y="2761488"/>
+            <a:ext cx="7936992" cy="384048"/>
+          </a:xfrm>
+          <a:prstGeom prst="roundRect">
+            <a:avLst>
+              <a:gd name="adj" fmla="val 4762"/>
+            </a:avLst>
+          </a:prstGeom>
+          <a:solidFill>
+            <a:srgbClr val="F3F8FC"/>
+          </a:solidFill>
+          <a:ln w="10160">
+            <a:solidFill>
+              <a:srgbClr val="D9E6EF"/>
+            </a:solidFill>
+            <a:prstDash val="solid"/>
+          </a:ln>
+        </p:spPr>
+      </p:sp>
+      <p:sp>
+        <p:nvSpPr>
+          <p:cNvPr id="24" name="Text 22"/>
+          <p:cNvSpPr/>
+          <p:nvPr/>
+        </p:nvSpPr>
+        <p:spPr>
+          <a:xfrm>
+            <a:off x="841248" y="2884932"/>
+            <a:ext cx="384048" cy="73152"/>
+          </a:xfrm>
+          <a:prstGeom prst="rect">
+            <a:avLst/>
+          </a:prstGeom>
+          <a:noFill/>
+          <a:ln/>
+        </p:spPr>
+        <p:txBody>
+          <a:bodyPr wrap="square" lIns="127" tIns="127" rIns="127" bIns="127" rtlCol="0" anchor="t">
+            <a:normAutofit/>
+          </a:bodyPr>
+          <a:lstStyle/>
+          <a:p>
+            <a:pPr algn="ctr" indent="0" marL="0">
+              <a:lnSpc>
+                <a:spcPct val="92000"/>
+              </a:lnSpc>
+              <a:buNone/>
+            </a:pPr>
+            <a:r>
+              <a:rPr lang="en-US" sz="780" b="1" dirty="0">
+                <a:solidFill>
+                  <a:srgbClr val="23865F"/>
+                </a:solidFill>
+                <a:latin typeface="Arial" pitchFamily="34" charset="0"/>
+                <a:ea typeface="Arial" pitchFamily="34" charset="-122"/>
+                <a:cs typeface="Arial" pitchFamily="34" charset="-120"/>
+              </a:rPr>
+              <a:t>[4]</a:t>
+            </a:r>
+            <a:endParaRPr lang="en-US" sz="780" dirty="0"/>
+          </a:p>
+        </p:txBody>
+      </p:sp>
+      <p:sp>
+        <p:nvSpPr>
+          <p:cNvPr id="25" name="Text 23"/>
+          <p:cNvSpPr/>
+          <p:nvPr/>
+        </p:nvSpPr>
+        <p:spPr>
+          <a:xfrm>
+            <a:off x="1353312" y="2834640"/>
+            <a:ext cx="4526280" cy="109728"/>
+          </a:xfrm>
+          <a:prstGeom prst="rect">
+            <a:avLst/>
+          </a:prstGeom>
+          <a:noFill/>
+          <a:ln/>
+        </p:spPr>
+        <p:txBody>
+          <a:bodyPr wrap="square" lIns="127" tIns="127" rIns="127" bIns="127" rtlCol="0" anchor="t">
+            <a:normAutofit/>
+          </a:bodyPr>
+          <a:lstStyle/>
+          <a:p>
+            <a:pPr algn="l" indent="0" marL="0">
+              <a:lnSpc>
+                <a:spcPct val="92000"/>
+              </a:lnSpc>
+              <a:buNone/>
+            </a:pPr>
+            <a:r>
+              <a:rPr lang="en-US" sz="720" b="1" dirty="0">
+                <a:solidFill>
+                  <a:srgbClr val="102A43"/>
+                </a:solidFill>
+                <a:latin typeface="Microsoft YaHei" pitchFamily="34" charset="0"/>
+                <a:ea typeface="Microsoft YaHei" pitchFamily="34" charset="-122"/>
+                <a:cs typeface="Microsoft YaHei" pitchFamily="34" charset="-120"/>
+              </a:rPr>
+              <a:t>OWASP Top 10 for LLM Applications / Agentic AI Threats / MCP Tool Poisoning</a:t>
+            </a:r>
+            <a:endParaRPr lang="en-US" sz="720" dirty="0"/>
+          </a:p>
+        </p:txBody>
+      </p:sp>
+      <p:sp>
+        <p:nvSpPr>
+          <p:cNvPr id="26" name="Text 24"/>
+          <p:cNvSpPr/>
+          <p:nvPr/>
+        </p:nvSpPr>
+        <p:spPr>
+          <a:xfrm>
+            <a:off x="1353312" y="2980944"/>
+            <a:ext cx="6355080" cy="73152"/>
+          </a:xfrm>
+          <a:prstGeom prst="rect">
+            <a:avLst/>
+          </a:prstGeom>
+          <a:noFill/>
+          <a:ln/>
+        </p:spPr>
+        <p:txBody>
+          <a:bodyPr wrap="square" lIns="127" tIns="127" rIns="127" bIns="127" rtlCol="0" anchor="t">
+            <a:normAutofit/>
+          </a:bodyPr>
+          <a:lstStyle/>
+          <a:p>
+            <a:pPr algn="l" indent="0" marL="0">
+              <a:lnSpc>
+                <a:spcPct val="92000"/>
+              </a:lnSpc>
+              <a:buNone/>
+            </a:pPr>
+            <a:r>
+              <a:rPr lang="en-US" sz="580" dirty="0">
+                <a:solidFill>
+                  <a:srgbClr val="6B7C8E"/>
+                </a:solidFill>
+                <a:latin typeface="Arial" pitchFamily="34" charset="0"/>
+                <a:ea typeface="Arial" pitchFamily="34" charset="-122"/>
+                <a:cs typeface="Arial" pitchFamily="34" charset="-120"/>
+              </a:rPr>
+              <a:t>https://owasp.org/www-project-top-10-for-large-language-model-applications/</a:t>
+            </a:r>
+            <a:endParaRPr lang="en-US" sz="580" dirty="0"/>
+          </a:p>
+        </p:txBody>
+      </p:sp>
+      <p:sp>
+        <p:nvSpPr>
+          <p:cNvPr id="27" name="Shape 25"/>
+          <p:cNvSpPr/>
+          <p:nvPr/>
+        </p:nvSpPr>
+        <p:spPr>
+          <a:xfrm>
+            <a:off x="658368" y="3291840"/>
+            <a:ext cx="7936992" cy="384048"/>
+          </a:xfrm>
+          <a:prstGeom prst="roundRect">
+            <a:avLst>
+              <a:gd name="adj" fmla="val 4762"/>
+            </a:avLst>
+          </a:prstGeom>
+          <a:solidFill>
+            <a:srgbClr val="FFFFFF"/>
+          </a:solidFill>
+          <a:ln w="10160">
+            <a:solidFill>
+              <a:srgbClr val="D9E6EF"/>
+            </a:solidFill>
+            <a:prstDash val="solid"/>
+          </a:ln>
+        </p:spPr>
+      </p:sp>
+      <p:sp>
+        <p:nvSpPr>
+          <p:cNvPr id="28" name="Text 26"/>
+          <p:cNvSpPr/>
+          <p:nvPr/>
+        </p:nvSpPr>
+        <p:spPr>
+          <a:xfrm>
+            <a:off x="841248" y="3415284"/>
+            <a:ext cx="384048" cy="73152"/>
+          </a:xfrm>
+          <a:prstGeom prst="rect">
+            <a:avLst/>
+          </a:prstGeom>
+          <a:noFill/>
+          <a:ln/>
+        </p:spPr>
+        <p:txBody>
+          <a:bodyPr wrap="square" lIns="127" tIns="127" rIns="127" bIns="127" rtlCol="0" anchor="t">
+            <a:normAutofit/>
+          </a:bodyPr>
+          <a:lstStyle/>
+          <a:p>
+            <a:pPr algn="ctr" indent="0" marL="0">
+              <a:lnSpc>
+                <a:spcPct val="92000"/>
+              </a:lnSpc>
+              <a:buNone/>
+            </a:pPr>
+            <a:r>
+              <a:rPr lang="en-US" sz="780" b="1" dirty="0">
+                <a:solidFill>
+                  <a:srgbClr val="C66A1D"/>
+                </a:solidFill>
+                <a:latin typeface="Arial" pitchFamily="34" charset="0"/>
+                <a:ea typeface="Arial" pitchFamily="34" charset="-122"/>
+                <a:cs typeface="Arial" pitchFamily="34" charset="-120"/>
+              </a:rPr>
+              <a:t>[5]</a:t>
+            </a:r>
+            <a:endParaRPr lang="en-US" sz="780" dirty="0"/>
+          </a:p>
+        </p:txBody>
+      </p:sp>
+      <p:sp>
+        <p:nvSpPr>
+          <p:cNvPr id="29" name="Text 27"/>
+          <p:cNvSpPr/>
+          <p:nvPr/>
+        </p:nvSpPr>
+        <p:spPr>
+          <a:xfrm>
+            <a:off x="1353312" y="3364992"/>
+            <a:ext cx="4526280" cy="109728"/>
+          </a:xfrm>
+          <a:prstGeom prst="rect">
+            <a:avLst/>
+          </a:prstGeom>
+          <a:noFill/>
+          <a:ln/>
+        </p:spPr>
+        <p:txBody>
+          <a:bodyPr wrap="square" lIns="127" tIns="127" rIns="127" bIns="127" rtlCol="0" anchor="t">
+            <a:normAutofit/>
+          </a:bodyPr>
+          <a:lstStyle/>
+          <a:p>
+            <a:pPr algn="l" indent="0" marL="0">
+              <a:lnSpc>
+                <a:spcPct val="92000"/>
+              </a:lnSpc>
+              <a:buNone/>
+            </a:pPr>
+            <a:r>
+              <a:rPr lang="en-US" sz="720" b="1" dirty="0">
+                <a:solidFill>
+                  <a:srgbClr val="102A43"/>
+                </a:solidFill>
+                <a:latin typeface="Microsoft YaHei" pitchFamily="34" charset="0"/>
+                <a:ea typeface="Microsoft YaHei" pitchFamily="34" charset="-122"/>
+                <a:cs typeface="Microsoft YaHei" pitchFamily="34" charset="-120"/>
+              </a:rPr>
+              <a:t>Cloud Security Alliance research note — M365 Copilot / CVE-2026-24299 security guidance</a:t>
+            </a:r>
+            <a:endParaRPr lang="en-US" sz="720" dirty="0"/>
+          </a:p>
+        </p:txBody>
+      </p:sp>
+      <p:sp>
+        <p:nvSpPr>
+          <p:cNvPr id="30" name="Text 28"/>
+          <p:cNvSpPr/>
+          <p:nvPr/>
+        </p:nvSpPr>
+        <p:spPr>
+          <a:xfrm>
+            <a:off x="1353312" y="3511296"/>
+            <a:ext cx="6355080" cy="73152"/>
+          </a:xfrm>
+          <a:prstGeom prst="rect">
+            <a:avLst/>
+          </a:prstGeom>
+          <a:noFill/>
+          <a:ln/>
+        </p:spPr>
+        <p:txBody>
+          <a:bodyPr wrap="square" lIns="127" tIns="127" rIns="127" bIns="127" rtlCol="0" anchor="t">
+            <a:normAutofit/>
+          </a:bodyPr>
+          <a:lstStyle/>
+          <a:p>
+            <a:pPr algn="l" indent="0" marL="0">
+              <a:lnSpc>
+                <a:spcPct val="92000"/>
+              </a:lnSpc>
+              <a:buNone/>
+            </a:pPr>
+            <a:r>
+              <a:rPr lang="en-US" sz="580" dirty="0">
+                <a:solidFill>
+                  <a:srgbClr val="6B7C8E"/>
+                </a:solidFill>
+                <a:latin typeface="Arial" pitchFamily="34" charset="0"/>
+                <a:ea typeface="Arial" pitchFamily="34" charset="-122"/>
+                <a:cs typeface="Arial" pitchFamily="34" charset="-120"/>
+              </a:rPr>
+              <a:t>https://labs.cloudsecurityalliance.org/</a:t>
+            </a:r>
+            <a:endParaRPr lang="en-US" sz="580" dirty="0"/>
+          </a:p>
+        </p:txBody>
+      </p:sp>
+      <p:sp>
+        <p:nvSpPr>
+          <p:cNvPr id="31" name="Shape 29"/>
+          <p:cNvSpPr/>
+          <p:nvPr/>
+        </p:nvSpPr>
+        <p:spPr>
+          <a:xfrm>
+            <a:off x="658368" y="3822192"/>
+            <a:ext cx="7936992" cy="384048"/>
+          </a:xfrm>
+          <a:prstGeom prst="roundRect">
+            <a:avLst>
+              <a:gd name="adj" fmla="val 4762"/>
+            </a:avLst>
+          </a:prstGeom>
+          <a:solidFill>
+            <a:srgbClr val="F3F8FC"/>
+          </a:solidFill>
+          <a:ln w="10160">
+            <a:solidFill>
+              <a:srgbClr val="D9E6EF"/>
+            </a:solidFill>
+            <a:prstDash val="solid"/>
+          </a:ln>
+        </p:spPr>
+      </p:sp>
+      <p:sp>
+        <p:nvSpPr>
+          <p:cNvPr id="32" name="Text 30"/>
+          <p:cNvSpPr/>
+          <p:nvPr/>
+        </p:nvSpPr>
+        <p:spPr>
+          <a:xfrm>
+            <a:off x="841248" y="3945636"/>
+            <a:ext cx="384048" cy="73152"/>
+          </a:xfrm>
+          <a:prstGeom prst="rect">
+            <a:avLst/>
+          </a:prstGeom>
+          <a:noFill/>
+          <a:ln/>
+        </p:spPr>
+        <p:txBody>
+          <a:bodyPr wrap="square" lIns="127" tIns="127" rIns="127" bIns="127" rtlCol="0" anchor="t">
+            <a:normAutofit/>
+          </a:bodyPr>
+          <a:lstStyle/>
+          <a:p>
+            <a:pPr algn="ctr" indent="0" marL="0">
+              <a:lnSpc>
+                <a:spcPct val="92000"/>
+              </a:lnSpc>
+              <a:buNone/>
+            </a:pPr>
+            <a:r>
+              <a:rPr lang="en-US" sz="780" b="1" dirty="0">
+                <a:solidFill>
+                  <a:srgbClr val="0A9FB5"/>
+                </a:solidFill>
+                <a:latin typeface="Arial" pitchFamily="34" charset="0"/>
+                <a:ea typeface="Arial" pitchFamily="34" charset="-122"/>
+                <a:cs typeface="Arial" pitchFamily="34" charset="-120"/>
+              </a:rPr>
+              <a:t>[6]</a:t>
+            </a:r>
+            <a:endParaRPr lang="en-US" sz="780" dirty="0"/>
+          </a:p>
+        </p:txBody>
+      </p:sp>
+      <p:sp>
+        <p:nvSpPr>
+          <p:cNvPr id="33" name="Text 31"/>
+          <p:cNvSpPr/>
+          <p:nvPr/>
+        </p:nvSpPr>
+        <p:spPr>
+          <a:xfrm>
+            <a:off x="1353312" y="3895344"/>
+            <a:ext cx="4526280" cy="109728"/>
+          </a:xfrm>
+          <a:prstGeom prst="rect">
+            <a:avLst/>
+          </a:prstGeom>
+          <a:noFill/>
+          <a:ln/>
+        </p:spPr>
+        <p:txBody>
+          <a:bodyPr wrap="square" lIns="127" tIns="127" rIns="127" bIns="127" rtlCol="0" anchor="t">
+            <a:normAutofit/>
+          </a:bodyPr>
+          <a:lstStyle/>
+          <a:p>
+            <a:pPr algn="l" indent="0" marL="0">
+              <a:lnSpc>
+                <a:spcPct val="92000"/>
+              </a:lnSpc>
+              <a:buNone/>
+            </a:pPr>
+            <a:r>
+              <a:rPr lang="en-US" sz="720" b="1" dirty="0">
+                <a:solidFill>
+                  <a:srgbClr val="102A43"/>
+                </a:solidFill>
+                <a:latin typeface="Microsoft YaHei" pitchFamily="34" charset="0"/>
+                <a:ea typeface="Microsoft YaHei" pitchFamily="34" charset="-122"/>
+                <a:cs typeface="Microsoft YaHei" pitchFamily="34" charset="-120"/>
+              </a:rPr>
+              <a:t>NVD CVE-2025-32711 — EchoLeak vulnerability record</a:t>
+            </a:r>
+            <a:endParaRPr lang="en-US" sz="720" dirty="0"/>
+          </a:p>
+        </p:txBody>
+      </p:sp>
+      <p:sp>
+        <p:nvSpPr>
+          <p:cNvPr id="34" name="Text 32"/>
+          <p:cNvSpPr/>
+          <p:nvPr/>
+        </p:nvSpPr>
+        <p:spPr>
+          <a:xfrm>
+            <a:off x="1353312" y="4041648"/>
+            <a:ext cx="6355080" cy="73152"/>
+          </a:xfrm>
+          <a:prstGeom prst="rect">
+            <a:avLst/>
+          </a:prstGeom>
+          <a:noFill/>
+          <a:ln/>
+        </p:spPr>
+        <p:txBody>
+          <a:bodyPr wrap="square" lIns="127" tIns="127" rIns="127" bIns="127" rtlCol="0" anchor="t">
+            <a:normAutofit/>
+          </a:bodyPr>
+          <a:lstStyle/>
+          <a:p>
+            <a:pPr algn="l" indent="0" marL="0">
+              <a:lnSpc>
+                <a:spcPct val="92000"/>
+              </a:lnSpc>
+              <a:buNone/>
+            </a:pPr>
+            <a:r>
+              <a:rPr lang="en-US" sz="580" dirty="0">
+                <a:solidFill>
+                  <a:srgbClr val="6B7C8E"/>
+                </a:solidFill>
+                <a:latin typeface="Arial" pitchFamily="34" charset="0"/>
+                <a:ea typeface="Arial" pitchFamily="34" charset="-122"/>
+                <a:cs typeface="Arial" pitchFamily="34" charset="-120"/>
+              </a:rPr>
+              <a:t>https://nvd.nist.gov/vuln/detail/CVE-2025-32711</a:t>
+            </a:r>
+            <a:endParaRPr lang="en-US" sz="580" dirty="0"/>
+          </a:p>
+        </p:txBody>
+      </p:sp>
+      <p:sp>
+        <p:nvSpPr>
+          <p:cNvPr id="35" name="Shape 33"/>
+          <p:cNvSpPr/>
+          <p:nvPr/>
+        </p:nvSpPr>
+        <p:spPr>
+          <a:xfrm>
+            <a:off x="841248" y="4462272"/>
+            <a:ext cx="7424928" cy="256032"/>
+          </a:xfrm>
+          <a:prstGeom prst="roundRect">
+            <a:avLst>
+              <a:gd name="adj" fmla="val 7143"/>
+            </a:avLst>
+          </a:prstGeom>
+          <a:solidFill>
+            <a:srgbClr val="EDF5FB"/>
+          </a:solidFill>
+          <a:ln w="10160">
+            <a:solidFill>
+              <a:srgbClr val="E7EEF4"/>
+            </a:solidFill>
+            <a:prstDash val="solid"/>
+          </a:ln>
+        </p:spPr>
+      </p:sp>
+      <p:sp>
+        <p:nvSpPr>
+          <p:cNvPr id="36" name="Text 34"/>
+          <p:cNvSpPr/>
+          <p:nvPr/>
+        </p:nvSpPr>
+        <p:spPr>
+          <a:xfrm>
+            <a:off x="1005840" y="4539996"/>
+            <a:ext cx="7114032" cy="73152"/>
+          </a:xfrm>
+          <a:prstGeom prst="rect">
+            <a:avLst/>
+          </a:prstGeom>
+          <a:noFill/>
+          <a:ln/>
+        </p:spPr>
+        <p:txBody>
+          <a:bodyPr wrap="square" lIns="127" tIns="127" rIns="127" bIns="127" rtlCol="0" anchor="t">
+            <a:normAutofit/>
+          </a:bodyPr>
+          <a:lstStyle/>
+          <a:p>
+            <a:pPr algn="ctr" indent="0" marL="0">
+              <a:lnSpc>
+                <a:spcPct val="92000"/>
+              </a:lnSpc>
+              <a:buNone/>
+            </a:pPr>
+            <a:r>
+              <a:rPr lang="en-US" sz="690" dirty="0">
+                <a:solidFill>
+                  <a:srgbClr val="243B53"/>
+                </a:solidFill>
+                <a:latin typeface="Microsoft YaHei" pitchFamily="34" charset="0"/>
+                <a:ea typeface="Microsoft YaHei" pitchFamily="34" charset="-122"/>
+                <a:cs typeface="Microsoft YaHei" pitchFamily="34" charset="-120"/>
+              </a:rPr>
+              <a:t>说明：PPT 内使用短编号标注来源，详细数值以引用页链接和原报告为准；2026 正式竞赛材料提交前建议再次复核访问状态。</a:t>
+            </a:r>
+            <a:endParaRPr lang="en-US" sz="690" dirty="0"/>
           </a:p>
         </p:txBody>
       </p:sp>
@@ -18251,7 +19698,7 @@
                 <a:ea typeface="Microsoft YaHei" pitchFamily="34" charset="-122"/>
                 <a:cs typeface="Microsoft YaHei" pitchFamily="34" charset="-120"/>
               </a:rPr>
-              <a:t>Stack Overflow：正在使用或计划使用 AI 开发工具</a:t>
+              <a:t>Stack Overflow 2025：正在使用或计划使用 AI 开发工具 [1]</a:t>
             </a:r>
             <a:endParaRPr lang="en-US" sz="690" dirty="0"/>
           </a:p>
@@ -18366,7 +19813,7 @@
                 <a:ea typeface="Microsoft YaHei" pitchFamily="34" charset="-122"/>
                 <a:cs typeface="Microsoft YaHei" pitchFamily="34" charset="-120"/>
               </a:rPr>
-              <a:t>GitGuardian：2025 年 public GitHub 新增硬编码密钥</a:t>
+              <a:t>GitGuardian 2026：2025 年 public GitHub 新增硬编码密钥 [2]</a:t>
             </a:r>
             <a:endParaRPr lang="en-US" sz="690" dirty="0"/>
           </a:p>
@@ -18481,7 +19928,7 @@
                 <a:ea typeface="Microsoft YaHei" pitchFamily="34" charset="-122"/>
                 <a:cs typeface="Microsoft YaHei" pitchFamily="34" charset="-120"/>
               </a:rPr>
-              <a:t>IBM：全球平均数据泄露成本</a:t>
+              <a:t>IBM 2025：全球平均数据泄露成本 [3]</a:t>
             </a:r>
             <a:endParaRPr lang="en-US" sz="690" dirty="0"/>
           </a:p>
@@ -18596,7 +20043,7 @@
                 <a:ea typeface="Microsoft YaHei" pitchFamily="34" charset="-122"/>
                 <a:cs typeface="Microsoft YaHei" pitchFamily="34" charset="-120"/>
               </a:rPr>
-              <a:t>IBM：AI 相关事件组织缺少适当 AI 访问控制</a:t>
+              <a:t>IBM 2025：AI 相关事件组织缺少适当访问控制 [3]</a:t>
             </a:r>
             <a:endParaRPr lang="en-US" sz="690" dirty="0"/>
           </a:p>
@@ -18711,7 +20158,7 @@
                 <a:ea typeface="Microsoft YaHei" pitchFamily="34" charset="-122"/>
                 <a:cs typeface="Microsoft YaHei" pitchFamily="34" charset="-120"/>
               </a:rPr>
-              <a:t>GitGuardian：公开 MCP 配置中暴露的唯一密钥</a:t>
+              <a:t>GitGuardian 2026：公开 MCP 配置中暴露的唯一密钥 [2]</a:t>
             </a:r>
             <a:endParaRPr lang="en-US" sz="690" dirty="0"/>
           </a:p>
@@ -18833,7 +20280,7 @@
                 <a:ea typeface="Microsoft YaHei" pitchFamily="34" charset="-122"/>
                 <a:cs typeface="Microsoft YaHei" pitchFamily="34" charset="-120"/>
               </a:rPr>
-              <a:t>采用率提升不是重点，重点是 Agent 已经开始触发终端、文件和网络行为。安全边界必须落到运行时。</a:t>
+              <a:t>采用率提升不是重点，重点是 Agent 已经开始触发终端、文件和网络行为。安全边界必须落到运行时 [1]。</a:t>
             </a:r>
             <a:endParaRPr lang="en-US" sz="700" dirty="0"/>
           </a:p>
@@ -18955,7 +20402,7 @@
                 <a:ea typeface="Microsoft YaHei" pitchFamily="34" charset="-122"/>
                 <a:cs typeface="Microsoft YaHei" pitchFamily="34" charset="-120"/>
               </a:rPr>
-              <a:t>软件生产提速后，密钥、依赖脚本、MCP 配置的扩散速度也变快；只看 prompt 已经不够。</a:t>
+              <a:t>软件生产提速后，密钥、依赖脚本、MCP 配置的扩散速度也变快；只看 prompt 已经不够 [2]。</a:t>
             </a:r>
             <a:endParaRPr lang="en-US" sz="700" dirty="0"/>
           </a:p>
@@ -19022,7 +20469,7 @@
                 <a:ea typeface="Microsoft YaHei" pitchFamily="34" charset="-122"/>
                 <a:cs typeface="Microsoft YaHei" pitchFamily="34" charset="-120"/>
               </a:rPr>
-              <a:t>数据/图片：Stack Overflow Developer Survey 2025；GitGuardian State of Secrets Sprawl 2026；IBM Cost of a Data Breach Report 2025</a:t>
+              <a:t>引用：[1] Stack Overflow Developer Survey 2025；[2] GitGuardian State of Secrets Sprawl 2026；[3] IBM Cost of a Data Breach Report 2025。完整链接见引用页。</a:t>
             </a:r>
             <a:endParaRPr lang="en-US" sz="660" dirty="0"/>
           </a:p>
@@ -19477,7 +20924,7 @@
                 <a:ea typeface="Microsoft YaHei" pitchFamily="34" charset="-122"/>
                 <a:cs typeface="Microsoft YaHei" pitchFamily="34" charset="-120"/>
               </a:rPr>
-              <a:t>上下文越权</a:t>
+              <a:t>上下文越权 [5][6]</a:t>
             </a:r>
             <a:endParaRPr lang="en-US" sz="1130" dirty="0"/>
           </a:p>
@@ -19716,7 +21163,7 @@
                 <a:ea typeface="Microsoft YaHei" pitchFamily="34" charset="-122"/>
                 <a:cs typeface="Microsoft YaHei" pitchFamily="34" charset="-120"/>
               </a:rPr>
-              <a:t>配置即攻击面</a:t>
+              <a:t>配置即攻击面 [2]</a:t>
             </a:r>
             <a:endParaRPr lang="en-US" sz="1130" dirty="0"/>
           </a:p>
@@ -19955,7 +21402,7 @@
                 <a:ea typeface="Microsoft YaHei" pitchFamily="34" charset="-122"/>
                 <a:cs typeface="Microsoft YaHei" pitchFamily="34" charset="-120"/>
               </a:rPr>
-              <a:t>工具误用</a:t>
+              <a:t>工具误用 [4]</a:t>
             </a:r>
             <a:endParaRPr lang="en-US" sz="1130" dirty="0"/>
           </a:p>
@@ -20139,7 +21586,7 @@
                 <a:ea typeface="Microsoft YaHei" pitchFamily="34" charset="-122"/>
                 <a:cs typeface="Microsoft YaHei" pitchFamily="34" charset="-120"/>
               </a:rPr>
-              <a:t>案例图片：Cloud Security Alliance 2026 Copilot research note；GitGuardian 2026 report；OWASP Top 10 for LLM Applications 2025 / Agentic AI Threats</a:t>
+              <a:t>引用：[2] GitGuardian 2026；[4] OWASP LLM/Agentic AI Threats；[5] CSA Copilot research note；[6] NVD CVE-2025-32711。完整链接见引用页。</a:t>
             </a:r>
             <a:endParaRPr lang="en-US" sz="660" dirty="0"/>
           </a:p>

--- a/docs/competition/2026-guochuang/output/final/Agent-eBPF-Filter-项目答辩路演PPT-浅色优化版.pptx
+++ b/docs/competition/2026-guochuang/output/final/Agent-eBPF-Filter-项目答辩路演PPT-浅色优化版.pptx
@@ -8394,7 +8394,7 @@
                 <a:ea typeface="Microsoft YaHei" pitchFamily="34" charset="-122"/>
                 <a:cs typeface="Microsoft YaHei" pitchFamily="34" charset="-120"/>
               </a:rPr>
-              <a:t>引用：[1] Stack Overflow 2025 AI adoption；[2] GitGuardian 2026 secrets sprawl；[3] IBM 2025 AI oversight gap。完整链接见引用页。</a:t>
+              <a:t>资料来源：[1] Stack Overflow 2025 AI adoption；[2] GitGuardian 2026 secrets sprawl；[3] IBM 2025 AI oversight gap。详见参考文献页。</a:t>
             </a:r>
             <a:endParaRPr lang="en-US" sz="660" dirty="0"/>
           </a:p>
@@ -10591,7 +10591,7 @@
                 <a:ea typeface="Microsoft YaHei" pitchFamily="34" charset="-122"/>
                 <a:cs typeface="Microsoft YaHei" pitchFamily="34" charset="-120"/>
               </a:rPr>
-              <a:t>引用：[2] GitGuardian State of Secrets Sprawl 2026；[1] Stack Overflow Developer Survey 2025。完整链接见引用页。</a:t>
+              <a:t>资料来源：[2] GitGuardian State of Secrets Sprawl 2026；[1] Stack Overflow Developer Survey 2025。详见参考文献页。</a:t>
             </a:r>
             <a:endParaRPr lang="en-US" sz="660" dirty="0"/>
           </a:p>
@@ -17848,7 +17848,7 @@
                 <a:ea typeface="Microsoft YaHei" pitchFamily="34" charset="-122"/>
                 <a:cs typeface="Microsoft YaHei" pitchFamily="34" charset="-120"/>
               </a:rPr>
-              <a:t>本 PPT 中统计数据、案例与外部框架已用 [1]–[6] 标注来源；完整引用信息见下一页。</a:t>
+              <a:t>本 PPT 中统计数据、案例与外部框架已用 [1]–[6] 标注来源；参考文献按 GB/T 7714 常用格式列于下一页。</a:t>
             </a:r>
             <a:endParaRPr lang="en-US" sz="860" dirty="0"/>
           </a:p>
@@ -18181,7 +18181,7 @@
                 <a:ea typeface="Microsoft YaHei" pitchFamily="34" charset="-122"/>
                 <a:cs typeface="Microsoft YaHei" pitchFamily="34" charset="-120"/>
               </a:rPr>
-              <a:t>引用信息：统计数据、案例与风险框架来源</a:t>
+              <a:t>参考文献</a:t>
             </a:r>
             <a:endParaRPr lang="en-US" sz="2050" dirty="0"/>
           </a:p>
@@ -18225,7 +18225,7 @@
                 <a:ea typeface="Microsoft YaHei" pitchFamily="34" charset="-122"/>
                 <a:cs typeface="Microsoft YaHei" pitchFamily="34" charset="-120"/>
               </a:rPr>
-              <a:t>答辩时可按编号追溯数据、报告截图和外部安全框架。</a:t>
+              <a:t>按中国大陆论文常用著录习惯整理；网络资源类型标注为 [EB/OL]。</a:t>
             </a:r>
             <a:endParaRPr lang="en-US" sz="900" dirty="0"/>
           </a:p>
@@ -18239,12 +18239,12 @@
         </p:nvSpPr>
         <p:spPr>
           <a:xfrm>
-            <a:off x="658368" y="1170432"/>
-            <a:ext cx="7936992" cy="384048"/>
+            <a:off x="658368" y="1143000"/>
+            <a:ext cx="7936992" cy="393192"/>
           </a:xfrm>
           <a:prstGeom prst="roundRect">
             <a:avLst>
-              <a:gd name="adj" fmla="val 4762"/>
+              <a:gd name="adj" fmla="val 4651"/>
             </a:avLst>
           </a:prstGeom>
           <a:solidFill>
@@ -18266,7 +18266,7 @@
         </p:nvSpPr>
         <p:spPr>
           <a:xfrm>
-            <a:off x="841248" y="1293876"/>
+            <a:off x="804672" y="1271016"/>
             <a:ext cx="384048" cy="73152"/>
           </a:xfrm>
           <a:prstGeom prst="rect">
@@ -18310,29 +18310,29 @@
         </p:nvSpPr>
         <p:spPr>
           <a:xfrm>
-            <a:off x="1353312" y="1243584"/>
-            <a:ext cx="4526280" cy="109728"/>
-          </a:xfrm>
-          <a:prstGeom prst="rect">
-            <a:avLst/>
-          </a:prstGeom>
-          <a:noFill/>
-          <a:ln/>
-        </p:spPr>
-        <p:txBody>
-          <a:bodyPr wrap="square" lIns="127" tIns="127" rIns="127" bIns="127" rtlCol="0" anchor="t">
-            <a:normAutofit/>
-          </a:bodyPr>
-          <a:lstStyle/>
-          <a:p>
-            <a:pPr algn="l" indent="0" marL="0">
-              <a:lnSpc>
-                <a:spcPct val="92000"/>
-              </a:lnSpc>
-              <a:buNone/>
-            </a:pPr>
-            <a:r>
-              <a:rPr lang="en-US" sz="720" b="1" dirty="0">
+            <a:off x="1243584" y="1211580"/>
+            <a:ext cx="6967728" cy="109728"/>
+          </a:xfrm>
+          <a:prstGeom prst="rect">
+            <a:avLst/>
+          </a:prstGeom>
+          <a:noFill/>
+          <a:ln/>
+        </p:spPr>
+        <p:txBody>
+          <a:bodyPr wrap="square" lIns="127" tIns="127" rIns="127" bIns="127" rtlCol="0" anchor="t">
+            <a:normAutofit/>
+          </a:bodyPr>
+          <a:lstStyle/>
+          <a:p>
+            <a:pPr algn="l" indent="0" marL="0">
+              <a:lnSpc>
+                <a:spcPct val="92000"/>
+              </a:lnSpc>
+              <a:buNone/>
+            </a:pPr>
+            <a:r>
+              <a:rPr lang="en-US" sz="680" b="1" dirty="0">
                 <a:solidFill>
                   <a:srgbClr val="102A43"/>
                 </a:solidFill>
@@ -18340,9 +18340,9 @@
                 <a:ea typeface="Microsoft YaHei" pitchFamily="34" charset="-122"/>
                 <a:cs typeface="Microsoft YaHei" pitchFamily="34" charset="-120"/>
               </a:rPr>
-              <a:t>Stack Overflow Developer Survey 2025 — AI tools adoption / usage</a:t>
-            </a:r>
-            <a:endParaRPr lang="en-US" sz="720" dirty="0"/>
+              <a:t>Stack Overflow. Stack Overflow Developer Survey 2025: AI tools adoption and usage[EB/OL].</a:t>
+            </a:r>
+            <a:endParaRPr lang="en-US" sz="680" dirty="0"/>
           </a:p>
         </p:txBody>
       </p:sp>
@@ -18354,29 +18354,29 @@
         </p:nvSpPr>
         <p:spPr>
           <a:xfrm>
-            <a:off x="1353312" y="1389888"/>
-            <a:ext cx="6355080" cy="73152"/>
-          </a:xfrm>
-          <a:prstGeom prst="rect">
-            <a:avLst/>
-          </a:prstGeom>
-          <a:noFill/>
-          <a:ln/>
-        </p:spPr>
-        <p:txBody>
-          <a:bodyPr wrap="square" lIns="127" tIns="127" rIns="127" bIns="127" rtlCol="0" anchor="t">
-            <a:normAutofit/>
-          </a:bodyPr>
-          <a:lstStyle/>
-          <a:p>
-            <a:pPr algn="l" indent="0" marL="0">
-              <a:lnSpc>
-                <a:spcPct val="92000"/>
-              </a:lnSpc>
-              <a:buNone/>
-            </a:pPr>
-            <a:r>
-              <a:rPr lang="en-US" sz="580" dirty="0">
+            <a:off x="1243584" y="1367028"/>
+            <a:ext cx="7040880" cy="73152"/>
+          </a:xfrm>
+          <a:prstGeom prst="rect">
+            <a:avLst/>
+          </a:prstGeom>
+          <a:noFill/>
+          <a:ln/>
+        </p:spPr>
+        <p:txBody>
+          <a:bodyPr wrap="square" lIns="127" tIns="127" rIns="127" bIns="127" rtlCol="0" anchor="t">
+            <a:normAutofit/>
+          </a:bodyPr>
+          <a:lstStyle/>
+          <a:p>
+            <a:pPr algn="l" indent="0" marL="0">
+              <a:lnSpc>
+                <a:spcPct val="92000"/>
+              </a:lnSpc>
+              <a:buNone/>
+            </a:pPr>
+            <a:r>
+              <a:rPr lang="en-US" sz="570" dirty="0">
                 <a:solidFill>
                   <a:srgbClr val="6B7C8E"/>
                 </a:solidFill>
@@ -18384,9 +18384,9 @@
                 <a:ea typeface="Arial" pitchFamily="34" charset="-122"/>
                 <a:cs typeface="Arial" pitchFamily="34" charset="-120"/>
               </a:rPr>
-              <a:t>https://survey.stackoverflow.co/2025/ai</a:t>
-            </a:r>
-            <a:endParaRPr lang="en-US" sz="580" dirty="0"/>
+              <a:t>[2026-05-26]. https://survey.stackoverflow.co/2025/ai</a:t>
+            </a:r>
+            <a:endParaRPr lang="en-US" sz="570" dirty="0"/>
           </a:p>
         </p:txBody>
       </p:sp>
@@ -18398,12 +18398,12 @@
         </p:nvSpPr>
         <p:spPr>
           <a:xfrm>
-            <a:off x="658368" y="1700784"/>
-            <a:ext cx="7936992" cy="384048"/>
+            <a:off x="658368" y="1673352"/>
+            <a:ext cx="7936992" cy="393192"/>
           </a:xfrm>
           <a:prstGeom prst="roundRect">
             <a:avLst>
-              <a:gd name="adj" fmla="val 4762"/>
+              <a:gd name="adj" fmla="val 4651"/>
             </a:avLst>
           </a:prstGeom>
           <a:solidFill>
@@ -18425,7 +18425,7 @@
         </p:nvSpPr>
         <p:spPr>
           <a:xfrm>
-            <a:off x="841248" y="1824228"/>
+            <a:off x="804672" y="1801368"/>
             <a:ext cx="384048" cy="73152"/>
           </a:xfrm>
           <a:prstGeom prst="rect">
@@ -18469,29 +18469,29 @@
         </p:nvSpPr>
         <p:spPr>
           <a:xfrm>
-            <a:off x="1353312" y="1773936"/>
-            <a:ext cx="4526280" cy="109728"/>
-          </a:xfrm>
-          <a:prstGeom prst="rect">
-            <a:avLst/>
-          </a:prstGeom>
-          <a:noFill/>
-          <a:ln/>
-        </p:spPr>
-        <p:txBody>
-          <a:bodyPr wrap="square" lIns="127" tIns="127" rIns="127" bIns="127" rtlCol="0" anchor="t">
-            <a:normAutofit/>
-          </a:bodyPr>
-          <a:lstStyle/>
-          <a:p>
-            <a:pPr algn="l" indent="0" marL="0">
-              <a:lnSpc>
-                <a:spcPct val="92000"/>
-              </a:lnSpc>
-              <a:buNone/>
-            </a:pPr>
-            <a:r>
-              <a:rPr lang="en-US" sz="720" b="1" dirty="0">
+            <a:off x="1243584" y="1741932"/>
+            <a:ext cx="6967728" cy="109728"/>
+          </a:xfrm>
+          <a:prstGeom prst="rect">
+            <a:avLst/>
+          </a:prstGeom>
+          <a:noFill/>
+          <a:ln/>
+        </p:spPr>
+        <p:txBody>
+          <a:bodyPr wrap="square" lIns="127" tIns="127" rIns="127" bIns="127" rtlCol="0" anchor="t">
+            <a:normAutofit/>
+          </a:bodyPr>
+          <a:lstStyle/>
+          <a:p>
+            <a:pPr algn="l" indent="0" marL="0">
+              <a:lnSpc>
+                <a:spcPct val="92000"/>
+              </a:lnSpc>
+              <a:buNone/>
+            </a:pPr>
+            <a:r>
+              <a:rPr lang="en-US" sz="680" b="1" dirty="0">
                 <a:solidFill>
                   <a:srgbClr val="102A43"/>
                 </a:solidFill>
@@ -18499,9 +18499,9 @@
                 <a:ea typeface="Microsoft YaHei" pitchFamily="34" charset="-122"/>
                 <a:cs typeface="Microsoft YaHei" pitchFamily="34" charset="-120"/>
               </a:rPr>
-              <a:t>GitGuardian State of Secrets Sprawl 2026 — secrets scale, MCP secrets, AI-assisted commit risk</a:t>
-            </a:r>
-            <a:endParaRPr lang="en-US" sz="720" dirty="0"/>
+              <a:t>GitGuardian. The State of Secrets Sprawl 2026[EB/OL].</a:t>
+            </a:r>
+            <a:endParaRPr lang="en-US" sz="680" dirty="0"/>
           </a:p>
         </p:txBody>
       </p:sp>
@@ -18513,29 +18513,29 @@
         </p:nvSpPr>
         <p:spPr>
           <a:xfrm>
-            <a:off x="1353312" y="1920240"/>
-            <a:ext cx="6355080" cy="73152"/>
-          </a:xfrm>
-          <a:prstGeom prst="rect">
-            <a:avLst/>
-          </a:prstGeom>
-          <a:noFill/>
-          <a:ln/>
-        </p:spPr>
-        <p:txBody>
-          <a:bodyPr wrap="square" lIns="127" tIns="127" rIns="127" bIns="127" rtlCol="0" anchor="t">
-            <a:normAutofit/>
-          </a:bodyPr>
-          <a:lstStyle/>
-          <a:p>
-            <a:pPr algn="l" indent="0" marL="0">
-              <a:lnSpc>
-                <a:spcPct val="92000"/>
-              </a:lnSpc>
-              <a:buNone/>
-            </a:pPr>
-            <a:r>
-              <a:rPr lang="en-US" sz="580" dirty="0">
+            <a:off x="1243584" y="1897380"/>
+            <a:ext cx="7040880" cy="73152"/>
+          </a:xfrm>
+          <a:prstGeom prst="rect">
+            <a:avLst/>
+          </a:prstGeom>
+          <a:noFill/>
+          <a:ln/>
+        </p:spPr>
+        <p:txBody>
+          <a:bodyPr wrap="square" lIns="127" tIns="127" rIns="127" bIns="127" rtlCol="0" anchor="t">
+            <a:normAutofit/>
+          </a:bodyPr>
+          <a:lstStyle/>
+          <a:p>
+            <a:pPr algn="l" indent="0" marL="0">
+              <a:lnSpc>
+                <a:spcPct val="92000"/>
+              </a:lnSpc>
+              <a:buNone/>
+            </a:pPr>
+            <a:r>
+              <a:rPr lang="en-US" sz="570" dirty="0">
                 <a:solidFill>
                   <a:srgbClr val="6B7C8E"/>
                 </a:solidFill>
@@ -18543,9 +18543,9 @@
                 <a:ea typeface="Arial" pitchFamily="34" charset="-122"/>
                 <a:cs typeface="Arial" pitchFamily="34" charset="-120"/>
               </a:rPr>
-              <a:t>https://blog.gitguardian.com/the-state-of-secrets-sprawl-2026/</a:t>
-            </a:r>
-            <a:endParaRPr lang="en-US" sz="580" dirty="0"/>
+              <a:t>2026 [2026-05-26]. https://blog.gitguardian.com/the-state-of-secrets-sprawl-2026/</a:t>
+            </a:r>
+            <a:endParaRPr lang="en-US" sz="570" dirty="0"/>
           </a:p>
         </p:txBody>
       </p:sp>
@@ -18557,12 +18557,12 @@
         </p:nvSpPr>
         <p:spPr>
           <a:xfrm>
-            <a:off x="658368" y="2231136"/>
-            <a:ext cx="7936992" cy="384048"/>
+            <a:off x="658368" y="2203704"/>
+            <a:ext cx="7936992" cy="393192"/>
           </a:xfrm>
           <a:prstGeom prst="roundRect">
             <a:avLst>
-              <a:gd name="adj" fmla="val 4762"/>
+              <a:gd name="adj" fmla="val 4651"/>
             </a:avLst>
           </a:prstGeom>
           <a:solidFill>
@@ -18584,7 +18584,7 @@
         </p:nvSpPr>
         <p:spPr>
           <a:xfrm>
-            <a:off x="841248" y="2354580"/>
+            <a:off x="804672" y="2331720"/>
             <a:ext cx="384048" cy="73152"/>
           </a:xfrm>
           <a:prstGeom prst="rect">
@@ -18628,29 +18628,29 @@
         </p:nvSpPr>
         <p:spPr>
           <a:xfrm>
-            <a:off x="1353312" y="2304288"/>
-            <a:ext cx="4526280" cy="109728"/>
-          </a:xfrm>
-          <a:prstGeom prst="rect">
-            <a:avLst/>
-          </a:prstGeom>
-          <a:noFill/>
-          <a:ln/>
-        </p:spPr>
-        <p:txBody>
-          <a:bodyPr wrap="square" lIns="127" tIns="127" rIns="127" bIns="127" rtlCol="0" anchor="t">
-            <a:normAutofit/>
-          </a:bodyPr>
-          <a:lstStyle/>
-          <a:p>
-            <a:pPr algn="l" indent="0" marL="0">
-              <a:lnSpc>
-                <a:spcPct val="92000"/>
-              </a:lnSpc>
-              <a:buNone/>
-            </a:pPr>
-            <a:r>
-              <a:rPr lang="en-US" sz="720" b="1" dirty="0">
+            <a:off x="1243584" y="2272284"/>
+            <a:ext cx="6967728" cy="109728"/>
+          </a:xfrm>
+          <a:prstGeom prst="rect">
+            <a:avLst/>
+          </a:prstGeom>
+          <a:noFill/>
+          <a:ln/>
+        </p:spPr>
+        <p:txBody>
+          <a:bodyPr wrap="square" lIns="127" tIns="127" rIns="127" bIns="127" rtlCol="0" anchor="t">
+            <a:normAutofit/>
+          </a:bodyPr>
+          <a:lstStyle/>
+          <a:p>
+            <a:pPr algn="l" indent="0" marL="0">
+              <a:lnSpc>
+                <a:spcPct val="92000"/>
+              </a:lnSpc>
+              <a:buNone/>
+            </a:pPr>
+            <a:r>
+              <a:rPr lang="en-US" sz="680" b="1" dirty="0">
                 <a:solidFill>
                   <a:srgbClr val="102A43"/>
                 </a:solidFill>
@@ -18658,9 +18658,9 @@
                 <a:ea typeface="Microsoft YaHei" pitchFamily="34" charset="-122"/>
                 <a:cs typeface="Microsoft YaHei" pitchFamily="34" charset="-120"/>
               </a:rPr>
-              <a:t>IBM Cost of a Data Breach Report 2025 / IBM newsroom — breach cost and AI access-control gap</a:t>
-            </a:r>
-            <a:endParaRPr lang="en-US" sz="720" dirty="0"/>
+              <a:t>IBM. Cost of a Data Breach Report 2025[EB/OL].</a:t>
+            </a:r>
+            <a:endParaRPr lang="en-US" sz="680" dirty="0"/>
           </a:p>
         </p:txBody>
       </p:sp>
@@ -18672,29 +18672,29 @@
         </p:nvSpPr>
         <p:spPr>
           <a:xfrm>
-            <a:off x="1353312" y="2450592"/>
-            <a:ext cx="6355080" cy="73152"/>
-          </a:xfrm>
-          <a:prstGeom prst="rect">
-            <a:avLst/>
-          </a:prstGeom>
-          <a:noFill/>
-          <a:ln/>
-        </p:spPr>
-        <p:txBody>
-          <a:bodyPr wrap="square" lIns="127" tIns="127" rIns="127" bIns="127" rtlCol="0" anchor="t">
-            <a:normAutofit/>
-          </a:bodyPr>
-          <a:lstStyle/>
-          <a:p>
-            <a:pPr algn="l" indent="0" marL="0">
-              <a:lnSpc>
-                <a:spcPct val="92000"/>
-              </a:lnSpc>
-              <a:buNone/>
-            </a:pPr>
-            <a:r>
-              <a:rPr lang="en-US" sz="580" dirty="0">
+            <a:off x="1243584" y="2427732"/>
+            <a:ext cx="7040880" cy="73152"/>
+          </a:xfrm>
+          <a:prstGeom prst="rect">
+            <a:avLst/>
+          </a:prstGeom>
+          <a:noFill/>
+          <a:ln/>
+        </p:spPr>
+        <p:txBody>
+          <a:bodyPr wrap="square" lIns="127" tIns="127" rIns="127" bIns="127" rtlCol="0" anchor="t">
+            <a:normAutofit/>
+          </a:bodyPr>
+          <a:lstStyle/>
+          <a:p>
+            <a:pPr algn="l" indent="0" marL="0">
+              <a:lnSpc>
+                <a:spcPct val="92000"/>
+              </a:lnSpc>
+              <a:buNone/>
+            </a:pPr>
+            <a:r>
+              <a:rPr lang="en-US" sz="570" dirty="0">
                 <a:solidFill>
                   <a:srgbClr val="6B7C8E"/>
                 </a:solidFill>
@@ -18702,9 +18702,9 @@
                 <a:ea typeface="Arial" pitchFamily="34" charset="-122"/>
                 <a:cs typeface="Arial" pitchFamily="34" charset="-120"/>
               </a:rPr>
-              <a:t>https://www.ibm.com/reports/data-breach</a:t>
-            </a:r>
-            <a:endParaRPr lang="en-US" sz="580" dirty="0"/>
+              <a:t>2025 [2026-05-26]. https://www.ibm.com/reports/data-breach</a:t>
+            </a:r>
+            <a:endParaRPr lang="en-US" sz="570" dirty="0"/>
           </a:p>
         </p:txBody>
       </p:sp>
@@ -18716,12 +18716,12 @@
         </p:nvSpPr>
         <p:spPr>
           <a:xfrm>
-            <a:off x="658368" y="2761488"/>
-            <a:ext cx="7936992" cy="384048"/>
+            <a:off x="658368" y="2734056"/>
+            <a:ext cx="7936992" cy="393192"/>
           </a:xfrm>
           <a:prstGeom prst="roundRect">
             <a:avLst>
-              <a:gd name="adj" fmla="val 4762"/>
+              <a:gd name="adj" fmla="val 4651"/>
             </a:avLst>
           </a:prstGeom>
           <a:solidFill>
@@ -18743,7 +18743,7 @@
         </p:nvSpPr>
         <p:spPr>
           <a:xfrm>
-            <a:off x="841248" y="2884932"/>
+            <a:off x="804672" y="2862072"/>
             <a:ext cx="384048" cy="73152"/>
           </a:xfrm>
           <a:prstGeom prst="rect">
@@ -18787,29 +18787,29 @@
         </p:nvSpPr>
         <p:spPr>
           <a:xfrm>
-            <a:off x="1353312" y="2834640"/>
-            <a:ext cx="4526280" cy="109728"/>
-          </a:xfrm>
-          <a:prstGeom prst="rect">
-            <a:avLst/>
-          </a:prstGeom>
-          <a:noFill/>
-          <a:ln/>
-        </p:spPr>
-        <p:txBody>
-          <a:bodyPr wrap="square" lIns="127" tIns="127" rIns="127" bIns="127" rtlCol="0" anchor="t">
-            <a:normAutofit/>
-          </a:bodyPr>
-          <a:lstStyle/>
-          <a:p>
-            <a:pPr algn="l" indent="0" marL="0">
-              <a:lnSpc>
-                <a:spcPct val="92000"/>
-              </a:lnSpc>
-              <a:buNone/>
-            </a:pPr>
-            <a:r>
-              <a:rPr lang="en-US" sz="720" b="1" dirty="0">
+            <a:off x="1243584" y="2802636"/>
+            <a:ext cx="6967728" cy="109728"/>
+          </a:xfrm>
+          <a:prstGeom prst="rect">
+            <a:avLst/>
+          </a:prstGeom>
+          <a:noFill/>
+          <a:ln/>
+        </p:spPr>
+        <p:txBody>
+          <a:bodyPr wrap="square" lIns="127" tIns="127" rIns="127" bIns="127" rtlCol="0" anchor="t">
+            <a:normAutofit/>
+          </a:bodyPr>
+          <a:lstStyle/>
+          <a:p>
+            <a:pPr algn="l" indent="0" marL="0">
+              <a:lnSpc>
+                <a:spcPct val="92000"/>
+              </a:lnSpc>
+              <a:buNone/>
+            </a:pPr>
+            <a:r>
+              <a:rPr lang="en-US" sz="680" b="1" dirty="0">
                 <a:solidFill>
                   <a:srgbClr val="102A43"/>
                 </a:solidFill>
@@ -18817,9 +18817,9 @@
                 <a:ea typeface="Microsoft YaHei" pitchFamily="34" charset="-122"/>
                 <a:cs typeface="Microsoft YaHei" pitchFamily="34" charset="-120"/>
               </a:rPr>
-              <a:t>OWASP Top 10 for LLM Applications / Agentic AI Threats / MCP Tool Poisoning</a:t>
-            </a:r>
-            <a:endParaRPr lang="en-US" sz="720" dirty="0"/>
+              <a:t>OWASP Foundation. OWASP Top 10 for LLM Applications and Agentic AI Threats[EB/OL].</a:t>
+            </a:r>
+            <a:endParaRPr lang="en-US" sz="680" dirty="0"/>
           </a:p>
         </p:txBody>
       </p:sp>
@@ -18831,29 +18831,29 @@
         </p:nvSpPr>
         <p:spPr>
           <a:xfrm>
-            <a:off x="1353312" y="2980944"/>
-            <a:ext cx="6355080" cy="73152"/>
-          </a:xfrm>
-          <a:prstGeom prst="rect">
-            <a:avLst/>
-          </a:prstGeom>
-          <a:noFill/>
-          <a:ln/>
-        </p:spPr>
-        <p:txBody>
-          <a:bodyPr wrap="square" lIns="127" tIns="127" rIns="127" bIns="127" rtlCol="0" anchor="t">
-            <a:normAutofit/>
-          </a:bodyPr>
-          <a:lstStyle/>
-          <a:p>
-            <a:pPr algn="l" indent="0" marL="0">
-              <a:lnSpc>
-                <a:spcPct val="92000"/>
-              </a:lnSpc>
-              <a:buNone/>
-            </a:pPr>
-            <a:r>
-              <a:rPr lang="en-US" sz="580" dirty="0">
+            <a:off x="1243584" y="2958084"/>
+            <a:ext cx="7040880" cy="73152"/>
+          </a:xfrm>
+          <a:prstGeom prst="rect">
+            <a:avLst/>
+          </a:prstGeom>
+          <a:noFill/>
+          <a:ln/>
+        </p:spPr>
+        <p:txBody>
+          <a:bodyPr wrap="square" lIns="127" tIns="127" rIns="127" bIns="127" rtlCol="0" anchor="t">
+            <a:normAutofit/>
+          </a:bodyPr>
+          <a:lstStyle/>
+          <a:p>
+            <a:pPr algn="l" indent="0" marL="0">
+              <a:lnSpc>
+                <a:spcPct val="92000"/>
+              </a:lnSpc>
+              <a:buNone/>
+            </a:pPr>
+            <a:r>
+              <a:rPr lang="en-US" sz="570" dirty="0">
                 <a:solidFill>
                   <a:srgbClr val="6B7C8E"/>
                 </a:solidFill>
@@ -18861,9 +18861,9 @@
                 <a:ea typeface="Arial" pitchFamily="34" charset="-122"/>
                 <a:cs typeface="Arial" pitchFamily="34" charset="-120"/>
               </a:rPr>
-              <a:t>https://owasp.org/www-project-top-10-for-large-language-model-applications/</a:t>
-            </a:r>
-            <a:endParaRPr lang="en-US" sz="580" dirty="0"/>
+              <a:t>2025 [2026-05-26]. https://owasp.org/www-project-top-10-for-large-language-model-applications/</a:t>
+            </a:r>
+            <a:endParaRPr lang="en-US" sz="570" dirty="0"/>
           </a:p>
         </p:txBody>
       </p:sp>
@@ -18875,12 +18875,12 @@
         </p:nvSpPr>
         <p:spPr>
           <a:xfrm>
-            <a:off x="658368" y="3291840"/>
-            <a:ext cx="7936992" cy="384048"/>
+            <a:off x="658368" y="3264408"/>
+            <a:ext cx="7936992" cy="393192"/>
           </a:xfrm>
           <a:prstGeom prst="roundRect">
             <a:avLst>
-              <a:gd name="adj" fmla="val 4762"/>
+              <a:gd name="adj" fmla="val 4651"/>
             </a:avLst>
           </a:prstGeom>
           <a:solidFill>
@@ -18902,7 +18902,7 @@
         </p:nvSpPr>
         <p:spPr>
           <a:xfrm>
-            <a:off x="841248" y="3415284"/>
+            <a:off x="804672" y="3392424"/>
             <a:ext cx="384048" cy="73152"/>
           </a:xfrm>
           <a:prstGeom prst="rect">
@@ -18946,29 +18946,29 @@
         </p:nvSpPr>
         <p:spPr>
           <a:xfrm>
-            <a:off x="1353312" y="3364992"/>
-            <a:ext cx="4526280" cy="109728"/>
-          </a:xfrm>
-          <a:prstGeom prst="rect">
-            <a:avLst/>
-          </a:prstGeom>
-          <a:noFill/>
-          <a:ln/>
-        </p:spPr>
-        <p:txBody>
-          <a:bodyPr wrap="square" lIns="127" tIns="127" rIns="127" bIns="127" rtlCol="0" anchor="t">
-            <a:normAutofit/>
-          </a:bodyPr>
-          <a:lstStyle/>
-          <a:p>
-            <a:pPr algn="l" indent="0" marL="0">
-              <a:lnSpc>
-                <a:spcPct val="92000"/>
-              </a:lnSpc>
-              <a:buNone/>
-            </a:pPr>
-            <a:r>
-              <a:rPr lang="en-US" sz="720" b="1" dirty="0">
+            <a:off x="1243584" y="3332988"/>
+            <a:ext cx="6967728" cy="109728"/>
+          </a:xfrm>
+          <a:prstGeom prst="rect">
+            <a:avLst/>
+          </a:prstGeom>
+          <a:noFill/>
+          <a:ln/>
+        </p:spPr>
+        <p:txBody>
+          <a:bodyPr wrap="square" lIns="127" tIns="127" rIns="127" bIns="127" rtlCol="0" anchor="t">
+            <a:normAutofit/>
+          </a:bodyPr>
+          <a:lstStyle/>
+          <a:p>
+            <a:pPr algn="l" indent="0" marL="0">
+              <a:lnSpc>
+                <a:spcPct val="92000"/>
+              </a:lnSpc>
+              <a:buNone/>
+            </a:pPr>
+            <a:r>
+              <a:rPr lang="en-US" sz="680" b="1" dirty="0">
                 <a:solidFill>
                   <a:srgbClr val="102A43"/>
                 </a:solidFill>
@@ -18976,9 +18976,9 @@
                 <a:ea typeface="Microsoft YaHei" pitchFamily="34" charset="-122"/>
                 <a:cs typeface="Microsoft YaHei" pitchFamily="34" charset="-120"/>
               </a:rPr>
-              <a:t>Cloud Security Alliance research note — M365 Copilot / CVE-2026-24299 security guidance</a:t>
-            </a:r>
-            <a:endParaRPr lang="en-US" sz="720" dirty="0"/>
+              <a:t>Cloud Security Alliance. M365 Copilot command injection at scale: security guidance for CVE-2026-24299[EB/OL].</a:t>
+            </a:r>
+            <a:endParaRPr lang="en-US" sz="680" dirty="0"/>
           </a:p>
         </p:txBody>
       </p:sp>
@@ -18990,29 +18990,29 @@
         </p:nvSpPr>
         <p:spPr>
           <a:xfrm>
-            <a:off x="1353312" y="3511296"/>
-            <a:ext cx="6355080" cy="73152"/>
-          </a:xfrm>
-          <a:prstGeom prst="rect">
-            <a:avLst/>
-          </a:prstGeom>
-          <a:noFill/>
-          <a:ln/>
-        </p:spPr>
-        <p:txBody>
-          <a:bodyPr wrap="square" lIns="127" tIns="127" rIns="127" bIns="127" rtlCol="0" anchor="t">
-            <a:normAutofit/>
-          </a:bodyPr>
-          <a:lstStyle/>
-          <a:p>
-            <a:pPr algn="l" indent="0" marL="0">
-              <a:lnSpc>
-                <a:spcPct val="92000"/>
-              </a:lnSpc>
-              <a:buNone/>
-            </a:pPr>
-            <a:r>
-              <a:rPr lang="en-US" sz="580" dirty="0">
+            <a:off x="1243584" y="3488436"/>
+            <a:ext cx="7040880" cy="73152"/>
+          </a:xfrm>
+          <a:prstGeom prst="rect">
+            <a:avLst/>
+          </a:prstGeom>
+          <a:noFill/>
+          <a:ln/>
+        </p:spPr>
+        <p:txBody>
+          <a:bodyPr wrap="square" lIns="127" tIns="127" rIns="127" bIns="127" rtlCol="0" anchor="t">
+            <a:normAutofit/>
+          </a:bodyPr>
+          <a:lstStyle/>
+          <a:p>
+            <a:pPr algn="l" indent="0" marL="0">
+              <a:lnSpc>
+                <a:spcPct val="92000"/>
+              </a:lnSpc>
+              <a:buNone/>
+            </a:pPr>
+            <a:r>
+              <a:rPr lang="en-US" sz="570" dirty="0">
                 <a:solidFill>
                   <a:srgbClr val="6B7C8E"/>
                 </a:solidFill>
@@ -19020,9 +19020,9 @@
                 <a:ea typeface="Arial" pitchFamily="34" charset="-122"/>
                 <a:cs typeface="Arial" pitchFamily="34" charset="-120"/>
               </a:rPr>
-              <a:t>https://labs.cloudsecurityalliance.org/</a:t>
-            </a:r>
-            <a:endParaRPr lang="en-US" sz="580" dirty="0"/>
+              <a:t>2026 [2026-05-26]. https://labs.cloudsecurityalliance.org/</a:t>
+            </a:r>
+            <a:endParaRPr lang="en-US" sz="570" dirty="0"/>
           </a:p>
         </p:txBody>
       </p:sp>
@@ -19034,12 +19034,12 @@
         </p:nvSpPr>
         <p:spPr>
           <a:xfrm>
-            <a:off x="658368" y="3822192"/>
-            <a:ext cx="7936992" cy="384048"/>
+            <a:off x="658368" y="3794760"/>
+            <a:ext cx="7936992" cy="393192"/>
           </a:xfrm>
           <a:prstGeom prst="roundRect">
             <a:avLst>
-              <a:gd name="adj" fmla="val 4762"/>
+              <a:gd name="adj" fmla="val 4651"/>
             </a:avLst>
           </a:prstGeom>
           <a:solidFill>
@@ -19061,7 +19061,7 @@
         </p:nvSpPr>
         <p:spPr>
           <a:xfrm>
-            <a:off x="841248" y="3945636"/>
+            <a:off x="804672" y="3922776"/>
             <a:ext cx="384048" cy="73152"/>
           </a:xfrm>
           <a:prstGeom prst="rect">
@@ -19105,29 +19105,29 @@
         </p:nvSpPr>
         <p:spPr>
           <a:xfrm>
-            <a:off x="1353312" y="3895344"/>
-            <a:ext cx="4526280" cy="109728"/>
-          </a:xfrm>
-          <a:prstGeom prst="rect">
-            <a:avLst/>
-          </a:prstGeom>
-          <a:noFill/>
-          <a:ln/>
-        </p:spPr>
-        <p:txBody>
-          <a:bodyPr wrap="square" lIns="127" tIns="127" rIns="127" bIns="127" rtlCol="0" anchor="t">
-            <a:normAutofit/>
-          </a:bodyPr>
-          <a:lstStyle/>
-          <a:p>
-            <a:pPr algn="l" indent="0" marL="0">
-              <a:lnSpc>
-                <a:spcPct val="92000"/>
-              </a:lnSpc>
-              <a:buNone/>
-            </a:pPr>
-            <a:r>
-              <a:rPr lang="en-US" sz="720" b="1" dirty="0">
+            <a:off x="1243584" y="3863340"/>
+            <a:ext cx="6967728" cy="109728"/>
+          </a:xfrm>
+          <a:prstGeom prst="rect">
+            <a:avLst/>
+          </a:prstGeom>
+          <a:noFill/>
+          <a:ln/>
+        </p:spPr>
+        <p:txBody>
+          <a:bodyPr wrap="square" lIns="127" tIns="127" rIns="127" bIns="127" rtlCol="0" anchor="t">
+            <a:normAutofit/>
+          </a:bodyPr>
+          <a:lstStyle/>
+          <a:p>
+            <a:pPr algn="l" indent="0" marL="0">
+              <a:lnSpc>
+                <a:spcPct val="92000"/>
+              </a:lnSpc>
+              <a:buNone/>
+            </a:pPr>
+            <a:r>
+              <a:rPr lang="en-US" sz="680" b="1" dirty="0">
                 <a:solidFill>
                   <a:srgbClr val="102A43"/>
                 </a:solidFill>
@@ -19135,9 +19135,9 @@
                 <a:ea typeface="Microsoft YaHei" pitchFamily="34" charset="-122"/>
                 <a:cs typeface="Microsoft YaHei" pitchFamily="34" charset="-120"/>
               </a:rPr>
-              <a:t>NVD CVE-2025-32711 — EchoLeak vulnerability record</a:t>
-            </a:r>
-            <a:endParaRPr lang="en-US" sz="720" dirty="0"/>
+              <a:t>National Vulnerability Database. CVE-2025-32711 Detail[EB/OL].</a:t>
+            </a:r>
+            <a:endParaRPr lang="en-US" sz="680" dirty="0"/>
           </a:p>
         </p:txBody>
       </p:sp>
@@ -19149,29 +19149,29 @@
         </p:nvSpPr>
         <p:spPr>
           <a:xfrm>
-            <a:off x="1353312" y="4041648"/>
-            <a:ext cx="6355080" cy="73152"/>
-          </a:xfrm>
-          <a:prstGeom prst="rect">
-            <a:avLst/>
-          </a:prstGeom>
-          <a:noFill/>
-          <a:ln/>
-        </p:spPr>
-        <p:txBody>
-          <a:bodyPr wrap="square" lIns="127" tIns="127" rIns="127" bIns="127" rtlCol="0" anchor="t">
-            <a:normAutofit/>
-          </a:bodyPr>
-          <a:lstStyle/>
-          <a:p>
-            <a:pPr algn="l" indent="0" marL="0">
-              <a:lnSpc>
-                <a:spcPct val="92000"/>
-              </a:lnSpc>
-              <a:buNone/>
-            </a:pPr>
-            <a:r>
-              <a:rPr lang="en-US" sz="580" dirty="0">
+            <a:off x="1243584" y="4018788"/>
+            <a:ext cx="7040880" cy="73152"/>
+          </a:xfrm>
+          <a:prstGeom prst="rect">
+            <a:avLst/>
+          </a:prstGeom>
+          <a:noFill/>
+          <a:ln/>
+        </p:spPr>
+        <p:txBody>
+          <a:bodyPr wrap="square" lIns="127" tIns="127" rIns="127" bIns="127" rtlCol="0" anchor="t">
+            <a:normAutofit/>
+          </a:bodyPr>
+          <a:lstStyle/>
+          <a:p>
+            <a:pPr algn="l" indent="0" marL="0">
+              <a:lnSpc>
+                <a:spcPct val="92000"/>
+              </a:lnSpc>
+              <a:buNone/>
+            </a:pPr>
+            <a:r>
+              <a:rPr lang="en-US" sz="570" dirty="0">
                 <a:solidFill>
                   <a:srgbClr val="6B7C8E"/>
                 </a:solidFill>
@@ -19179,9 +19179,9 @@
                 <a:ea typeface="Arial" pitchFamily="34" charset="-122"/>
                 <a:cs typeface="Arial" pitchFamily="34" charset="-120"/>
               </a:rPr>
-              <a:t>https://nvd.nist.gov/vuln/detail/CVE-2025-32711</a:t>
-            </a:r>
-            <a:endParaRPr lang="en-US" sz="580" dirty="0"/>
+              <a:t>2025 [2026-05-26]. https://nvd.nist.gov/vuln/detail/CVE-2025-32711</a:t>
+            </a:r>
+            <a:endParaRPr lang="en-US" sz="570" dirty="0"/>
           </a:p>
         </p:txBody>
       </p:sp>
@@ -19250,7 +19250,7 @@
                 <a:ea typeface="Microsoft YaHei" pitchFamily="34" charset="-122"/>
                 <a:cs typeface="Microsoft YaHei" pitchFamily="34" charset="-120"/>
               </a:rPr>
-              <a:t>说明：PPT 内使用短编号标注来源，详细数值以引用页链接和原报告为准；2026 正式竞赛材料提交前建议再次复核访问状态。</a:t>
+              <a:t>说明：PPT 正文采用顺序编码制标注资料来源；网络文献访问日期统一按本材料生成日期记录。</a:t>
             </a:r>
             <a:endParaRPr lang="en-US" sz="690" dirty="0"/>
           </a:p>
@@ -20469,7 +20469,7 @@
                 <a:ea typeface="Microsoft YaHei" pitchFamily="34" charset="-122"/>
                 <a:cs typeface="Microsoft YaHei" pitchFamily="34" charset="-120"/>
               </a:rPr>
-              <a:t>引用：[1] Stack Overflow Developer Survey 2025；[2] GitGuardian State of Secrets Sprawl 2026；[3] IBM Cost of a Data Breach Report 2025。完整链接见引用页。</a:t>
+              <a:t>资料来源：[1] Stack Overflow Developer Survey 2025；[2] GitGuardian State of Secrets Sprawl 2026；[3] IBM Cost of a Data Breach Report 2025。详见参考文献页。</a:t>
             </a:r>
             <a:endParaRPr lang="en-US" sz="660" dirty="0"/>
           </a:p>
@@ -21586,7 +21586,7 @@
                 <a:ea typeface="Microsoft YaHei" pitchFamily="34" charset="-122"/>
                 <a:cs typeface="Microsoft YaHei" pitchFamily="34" charset="-120"/>
               </a:rPr>
-              <a:t>引用：[2] GitGuardian 2026；[4] OWASP LLM/Agentic AI Threats；[5] CSA Copilot research note；[6] NVD CVE-2025-32711。完整链接见引用页。</a:t>
+              <a:t>资料来源：[2] GitGuardian 2026；[4] OWASP LLM/Agentic AI Threats；[5] CSA Copilot research note；[6] NVD CVE-2025-32711。详见参考文献页。</a:t>
             </a:r>
             <a:endParaRPr lang="en-US" sz="660" dirty="0"/>
           </a:p>

--- a/docs/competition/2026-guochuang/output/final/Agent-eBPF-Filter-项目答辩路演PPT-浅色优化版.pptx
+++ b/docs/competition/2026-guochuang/output/final/Agent-eBPF-Filter-项目答辩路演PPT-浅色优化版.pptx
@@ -2757,7 +2757,7 @@
       </p:sp>
       <p:sp>
         <p:nvSpPr>
-          <p:cNvPr id="6" name="Text 4"/>
+          <p:cNvPr id="6" name="tw_text_0001"/>
           <p:cNvSpPr/>
           <p:nvPr/>
         </p:nvSpPr>
@@ -2824,7 +2824,7 @@
       </p:sp>
       <p:sp>
         <p:nvSpPr>
-          <p:cNvPr id="8" name="Text 6"/>
+          <p:cNvPr id="8" name="tw_text_0002"/>
           <p:cNvSpPr/>
           <p:nvPr/>
         </p:nvSpPr>
@@ -2868,7 +2868,7 @@
       </p:sp>
       <p:sp>
         <p:nvSpPr>
-          <p:cNvPr id="9" name="Text 7"/>
+          <p:cNvPr id="9" name="tw_text_0003"/>
           <p:cNvSpPr/>
           <p:nvPr/>
         </p:nvSpPr>
@@ -2932,7 +2932,7 @@
       </p:sp>
       <p:sp>
         <p:nvSpPr>
-          <p:cNvPr id="10" name="Text 8"/>
+          <p:cNvPr id="10" name="tw_text_0004"/>
           <p:cNvSpPr/>
           <p:nvPr/>
         </p:nvSpPr>
@@ -3025,7 +3025,7 @@
       </p:sp>
       <p:sp>
         <p:nvSpPr>
-          <p:cNvPr id="12" name="Text 10"/>
+          <p:cNvPr id="12" name="static_text_0005"/>
           <p:cNvSpPr/>
           <p:nvPr/>
         </p:nvSpPr>
@@ -3098,7 +3098,7 @@
       </p:sp>
       <p:sp>
         <p:nvSpPr>
-          <p:cNvPr id="14" name="Text 12"/>
+          <p:cNvPr id="14" name="tw_text_0006"/>
           <p:cNvSpPr/>
           <p:nvPr/>
         </p:nvSpPr>
@@ -3171,7 +3171,7 @@
       </p:sp>
       <p:sp>
         <p:nvSpPr>
-          <p:cNvPr id="16" name="Text 14"/>
+          <p:cNvPr id="16" name="static_text_0007"/>
           <p:cNvSpPr/>
           <p:nvPr/>
         </p:nvSpPr>
@@ -3215,7 +3215,7 @@
       </p:sp>
       <p:sp>
         <p:nvSpPr>
-          <p:cNvPr id="17" name="Text 15"/>
+          <p:cNvPr id="17" name="tw_text_0008"/>
           <p:cNvSpPr/>
           <p:nvPr/>
         </p:nvSpPr>
@@ -3339,7 +3339,7 @@
       </p:sp>
       <p:sp>
         <p:nvSpPr>
-          <p:cNvPr id="18" name="Text 16"/>
+          <p:cNvPr id="18" name="tw_text_0009"/>
           <p:cNvSpPr/>
           <p:nvPr/>
         </p:nvSpPr>
@@ -3410,7 +3410,7 @@
       </p:sp>
       <p:sp>
         <p:nvSpPr>
-          <p:cNvPr id="20" name="Text 18"/>
+          <p:cNvPr id="20" name="static_text_0010"/>
           <p:cNvSpPr/>
           <p:nvPr/>
         </p:nvSpPr>
@@ -3454,7 +3454,7 @@
       </p:sp>
       <p:sp>
         <p:nvSpPr>
-          <p:cNvPr id="21" name="Text 19"/>
+          <p:cNvPr id="21" name="tw_text_0011"/>
           <p:cNvSpPr/>
           <p:nvPr/>
         </p:nvSpPr>
@@ -3525,7 +3525,7 @@
       </p:sp>
       <p:sp>
         <p:nvSpPr>
-          <p:cNvPr id="23" name="Text 21"/>
+          <p:cNvPr id="23" name="static_text_0012"/>
           <p:cNvSpPr/>
           <p:nvPr/>
         </p:nvSpPr>
@@ -3569,7 +3569,7 @@
       </p:sp>
       <p:sp>
         <p:nvSpPr>
-          <p:cNvPr id="24" name="Text 22"/>
+          <p:cNvPr id="24" name="tw_text_0013"/>
           <p:cNvSpPr/>
           <p:nvPr/>
         </p:nvSpPr>
@@ -3640,7 +3640,7 @@
       </p:sp>
       <p:sp>
         <p:nvSpPr>
-          <p:cNvPr id="26" name="Text 24"/>
+          <p:cNvPr id="26" name="static_text_0014"/>
           <p:cNvSpPr/>
           <p:nvPr/>
         </p:nvSpPr>
@@ -3684,7 +3684,7 @@
       </p:sp>
       <p:sp>
         <p:nvSpPr>
-          <p:cNvPr id="27" name="Text 25"/>
+          <p:cNvPr id="27" name="tw_text_0015"/>
           <p:cNvSpPr/>
           <p:nvPr/>
         </p:nvSpPr>
@@ -3755,7 +3755,7 @@
       </p:sp>
       <p:sp>
         <p:nvSpPr>
-          <p:cNvPr id="29" name="Text 27"/>
+          <p:cNvPr id="29" name="static_text_0016"/>
           <p:cNvSpPr/>
           <p:nvPr/>
         </p:nvSpPr>
@@ -3799,7 +3799,7 @@
       </p:sp>
       <p:sp>
         <p:nvSpPr>
-          <p:cNvPr id="30" name="Text 28"/>
+          <p:cNvPr id="30" name="tw_text_0017"/>
           <p:cNvSpPr/>
           <p:nvPr/>
         </p:nvSpPr>
@@ -3846,6 +3846,368 @@
   <p:clrMapOvr>
     <a:masterClrMapping/>
   </p:clrMapOvr>
+  <p:timing>
+    <p:tnLst>
+      <p:par>
+        <p:cTn id="1" dur="indefinite" restart="never" nodeType="tmRoot">
+          <p:childTnLst>
+            <p:seq concurrent="1" nextAc="seek">
+              <p:cTn id="2" dur="indefinite" nodeType="mainSeq">
+                <p:childTnLst>
+                  <p:par>
+                    <p:cTn id="2" fill="hold">
+                      <p:stCondLst>
+                        <p:cond delay="0"/>
+                      </p:stCondLst>
+                      <p:childTnLst>
+                        <p:par>
+                          <p:cTn id="3" presetID="1" presetClass="entr" presetSubtype="0" fill="hold" nodeType="clickEffect">
+                            <p:stCondLst>
+                              <p:cond delay="0"/>
+                            </p:stCondLst>
+                            <p:childTnLst>
+                              <p:animEffect transition="in" filter="typewriter">
+                                <p:cBhvr>
+                                  <p:cTn id="4" dur="520" fill="hold"/>
+                                  <p:tgtEl>
+                                    <p:spTgt spid="6"/>
+                                  </p:tgtEl>
+                                </p:cBhvr>
+                              </p:animEffect>
+                            </p:childTnLst>
+                            <p:iterate type="lt">
+                              <p:tmAbs val="35"/>
+                            </p:iterate>
+                          </p:cTn>
+                        </p:par>
+                      </p:childTnLst>
+                    </p:cTn>
+                  </p:par>
+                  <p:par>
+                    <p:cTn id="5" fill="hold">
+                      <p:stCondLst>
+                        <p:cond delay="90"/>
+                      </p:stCondLst>
+                      <p:childTnLst>
+                        <p:par>
+                          <p:cTn id="6" presetID="1" presetClass="entr" presetSubtype="0" fill="hold" nodeType="clickEffect">
+                            <p:stCondLst>
+                              <p:cond delay="0"/>
+                            </p:stCondLst>
+                            <p:childTnLst>
+                              <p:animEffect transition="in" filter="typewriter">
+                                <p:cBhvr>
+                                  <p:cTn id="7" dur="565" fill="hold"/>
+                                  <p:tgtEl>
+                                    <p:spTgt spid="8"/>
+                                  </p:tgtEl>
+                                </p:cBhvr>
+                              </p:animEffect>
+                            </p:childTnLst>
+                            <p:iterate type="lt">
+                              <p:tmAbs val="35"/>
+                            </p:iterate>
+                          </p:cTn>
+                        </p:par>
+                      </p:childTnLst>
+                    </p:cTn>
+                  </p:par>
+                  <p:par>
+                    <p:cTn id="8" fill="hold">
+                      <p:stCondLst>
+                        <p:cond delay="90"/>
+                      </p:stCondLst>
+                      <p:childTnLst>
+                        <p:par>
+                          <p:cTn id="9" presetID="1" presetClass="entr" presetSubtype="0" fill="hold" nodeType="clickEffect">
+                            <p:stCondLst>
+                              <p:cond delay="0"/>
+                            </p:stCondLst>
+                            <p:childTnLst>
+                              <p:animEffect transition="in" filter="typewriter">
+                                <p:cBhvr>
+                                  <p:cTn id="10" dur="610" fill="hold"/>
+                                  <p:tgtEl>
+                                    <p:spTgt spid="9"/>
+                                  </p:tgtEl>
+                                </p:cBhvr>
+                              </p:animEffect>
+                            </p:childTnLst>
+                            <p:iterate type="lt">
+                              <p:tmAbs val="35"/>
+                            </p:iterate>
+                          </p:cTn>
+                        </p:par>
+                      </p:childTnLst>
+                    </p:cTn>
+                  </p:par>
+                  <p:par>
+                    <p:cTn id="11" fill="hold">
+                      <p:stCondLst>
+                        <p:cond delay="90"/>
+                      </p:stCondLst>
+                      <p:childTnLst>
+                        <p:par>
+                          <p:cTn id="12" presetID="1" presetClass="entr" presetSubtype="0" fill="hold" nodeType="clickEffect">
+                            <p:stCondLst>
+                              <p:cond delay="0"/>
+                            </p:stCondLst>
+                            <p:childTnLst>
+                              <p:animEffect transition="in" filter="typewriter">
+                                <p:cBhvr>
+                                  <p:cTn id="13" dur="655" fill="hold"/>
+                                  <p:tgtEl>
+                                    <p:spTgt spid="10"/>
+                                  </p:tgtEl>
+                                </p:cBhvr>
+                              </p:animEffect>
+                            </p:childTnLst>
+                            <p:iterate type="lt">
+                              <p:tmAbs val="35"/>
+                            </p:iterate>
+                          </p:cTn>
+                        </p:par>
+                      </p:childTnLst>
+                    </p:cTn>
+                  </p:par>
+                  <p:par>
+                    <p:cTn id="14" fill="hold">
+                      <p:stCondLst>
+                        <p:cond delay="90"/>
+                      </p:stCondLst>
+                      <p:childTnLst>
+                        <p:par>
+                          <p:cTn id="15" presetID="1" presetClass="entr" presetSubtype="0" fill="hold" nodeType="clickEffect">
+                            <p:stCondLst>
+                              <p:cond delay="0"/>
+                            </p:stCondLst>
+                            <p:childTnLst>
+                              <p:animEffect transition="in" filter="typewriter">
+                                <p:cBhvr>
+                                  <p:cTn id="16" dur="700" fill="hold"/>
+                                  <p:tgtEl>
+                                    <p:spTgt spid="14"/>
+                                  </p:tgtEl>
+                                </p:cBhvr>
+                              </p:animEffect>
+                            </p:childTnLst>
+                            <p:iterate type="lt">
+                              <p:tmAbs val="35"/>
+                            </p:iterate>
+                          </p:cTn>
+                        </p:par>
+                      </p:childTnLst>
+                    </p:cTn>
+                  </p:par>
+                  <p:par>
+                    <p:cTn id="17" fill="hold">
+                      <p:stCondLst>
+                        <p:cond delay="90"/>
+                      </p:stCondLst>
+                      <p:childTnLst>
+                        <p:par>
+                          <p:cTn id="18" presetID="1" presetClass="entr" presetSubtype="0" fill="hold" nodeType="clickEffect">
+                            <p:stCondLst>
+                              <p:cond delay="0"/>
+                            </p:stCondLst>
+                            <p:childTnLst>
+                              <p:animEffect transition="in" filter="typewriter">
+                                <p:cBhvr>
+                                  <p:cTn id="19" dur="745" fill="hold"/>
+                                  <p:tgtEl>
+                                    <p:spTgt spid="17"/>
+                                  </p:tgtEl>
+                                </p:cBhvr>
+                              </p:animEffect>
+                            </p:childTnLst>
+                            <p:iterate type="lt">
+                              <p:tmAbs val="35"/>
+                            </p:iterate>
+                          </p:cTn>
+                        </p:par>
+                      </p:childTnLst>
+                    </p:cTn>
+                  </p:par>
+                  <p:par>
+                    <p:cTn id="20" fill="hold">
+                      <p:stCondLst>
+                        <p:cond delay="90"/>
+                      </p:stCondLst>
+                      <p:childTnLst>
+                        <p:par>
+                          <p:cTn id="21" presetID="1" presetClass="entr" presetSubtype="0" fill="hold" nodeType="clickEffect">
+                            <p:stCondLst>
+                              <p:cond delay="0"/>
+                            </p:stCondLst>
+                            <p:childTnLst>
+                              <p:animEffect transition="in" filter="typewriter">
+                                <p:cBhvr>
+                                  <p:cTn id="22" dur="790" fill="hold"/>
+                                  <p:tgtEl>
+                                    <p:spTgt spid="18"/>
+                                  </p:tgtEl>
+                                </p:cBhvr>
+                              </p:animEffect>
+                            </p:childTnLst>
+                            <p:iterate type="lt">
+                              <p:tmAbs val="35"/>
+                            </p:iterate>
+                          </p:cTn>
+                        </p:par>
+                      </p:childTnLst>
+                    </p:cTn>
+                  </p:par>
+                  <p:par>
+                    <p:cTn id="23" fill="hold">
+                      <p:stCondLst>
+                        <p:cond delay="90"/>
+                      </p:stCondLst>
+                      <p:childTnLst>
+                        <p:par>
+                          <p:cTn id="24" presetID="1" presetClass="entr" presetSubtype="0" fill="hold" nodeType="clickEffect">
+                            <p:stCondLst>
+                              <p:cond delay="0"/>
+                            </p:stCondLst>
+                            <p:childTnLst>
+                              <p:animEffect transition="in" filter="typewriter">
+                                <p:cBhvr>
+                                  <p:cTn id="25" dur="835" fill="hold"/>
+                                  <p:tgtEl>
+                                    <p:spTgt spid="21"/>
+                                  </p:tgtEl>
+                                </p:cBhvr>
+                              </p:animEffect>
+                            </p:childTnLst>
+                            <p:iterate type="lt">
+                              <p:tmAbs val="35"/>
+                            </p:iterate>
+                          </p:cTn>
+                        </p:par>
+                      </p:childTnLst>
+                    </p:cTn>
+                  </p:par>
+                  <p:par>
+                    <p:cTn id="26" fill="hold">
+                      <p:stCondLst>
+                        <p:cond delay="90"/>
+                      </p:stCondLst>
+                      <p:childTnLst>
+                        <p:par>
+                          <p:cTn id="27" presetID="1" presetClass="entr" presetSubtype="0" fill="hold" nodeType="clickEffect">
+                            <p:stCondLst>
+                              <p:cond delay="0"/>
+                            </p:stCondLst>
+                            <p:childTnLst>
+                              <p:animEffect transition="in" filter="typewriter">
+                                <p:cBhvr>
+                                  <p:cTn id="28" dur="880" fill="hold"/>
+                                  <p:tgtEl>
+                                    <p:spTgt spid="24"/>
+                                  </p:tgtEl>
+                                </p:cBhvr>
+                              </p:animEffect>
+                            </p:childTnLst>
+                            <p:iterate type="lt">
+                              <p:tmAbs val="35"/>
+                            </p:iterate>
+                          </p:cTn>
+                        </p:par>
+                      </p:childTnLst>
+                    </p:cTn>
+                  </p:par>
+                  <p:par>
+                    <p:cTn id="29" fill="hold">
+                      <p:stCondLst>
+                        <p:cond delay="90"/>
+                      </p:stCondLst>
+                      <p:childTnLst>
+                        <p:par>
+                          <p:cTn id="30" presetID="1" presetClass="entr" presetSubtype="0" fill="hold" nodeType="clickEffect">
+                            <p:stCondLst>
+                              <p:cond delay="0"/>
+                            </p:stCondLst>
+                            <p:childTnLst>
+                              <p:animEffect transition="in" filter="typewriter">
+                                <p:cBhvr>
+                                  <p:cTn id="31" dur="925" fill="hold"/>
+                                  <p:tgtEl>
+                                    <p:spTgt spid="27"/>
+                                  </p:tgtEl>
+                                </p:cBhvr>
+                              </p:animEffect>
+                            </p:childTnLst>
+                            <p:iterate type="lt">
+                              <p:tmAbs val="35"/>
+                            </p:iterate>
+                          </p:cTn>
+                        </p:par>
+                      </p:childTnLst>
+                    </p:cTn>
+                  </p:par>
+                  <p:par>
+                    <p:cTn id="32" fill="hold">
+                      <p:stCondLst>
+                        <p:cond delay="90"/>
+                      </p:stCondLst>
+                      <p:childTnLst>
+                        <p:par>
+                          <p:cTn id="33" presetID="1" presetClass="entr" presetSubtype="0" fill="hold" nodeType="clickEffect">
+                            <p:stCondLst>
+                              <p:cond delay="0"/>
+                            </p:stCondLst>
+                            <p:childTnLst>
+                              <p:animEffect transition="in" filter="typewriter">
+                                <p:cBhvr>
+                                  <p:cTn id="34" dur="970" fill="hold"/>
+                                  <p:tgtEl>
+                                    <p:spTgt spid="30"/>
+                                  </p:tgtEl>
+                                </p:cBhvr>
+                              </p:animEffect>
+                            </p:childTnLst>
+                            <p:iterate type="lt">
+                              <p:tmAbs val="35"/>
+                            </p:iterate>
+                          </p:cTn>
+                        </p:par>
+                      </p:childTnLst>
+                    </p:cTn>
+                  </p:par>
+                </p:childTnLst>
+              </p:cTn>
+              <p:prevCondLst>
+                <p:cond evt="onPrev" delay="0">
+                  <p:tgtEl>
+                    <p:sldTgt/>
+                  </p:tgtEl>
+                </p:cond>
+              </p:prevCondLst>
+              <p:nextCondLst>
+                <p:cond evt="onNext" delay="0">
+                  <p:tgtEl>
+                    <p:sldTgt/>
+                  </p:tgtEl>
+                </p:cond>
+              </p:nextCondLst>
+            </p:seq>
+          </p:childTnLst>
+        </p:cTn>
+      </p:par>
+    </p:tnLst>
+    <p:bldLst>
+      <p:bldP spid="6" grpId="0" build="p"/>
+      <p:bldP spid="8" grpId="0" build="p"/>
+      <p:bldP spid="9" grpId="0" build="p"/>
+      <p:bldP spid="10" grpId="0" build="p"/>
+      <p:bldP spid="14" grpId="0" build="p"/>
+      <p:bldP spid="17" grpId="0" build="p"/>
+      <p:bldP spid="18" grpId="0" build="p"/>
+      <p:bldP spid="21" grpId="0" build="p"/>
+      <p:bldP spid="24" grpId="0" build="p"/>
+      <p:bldP spid="27" grpId="0" build="p"/>
+      <p:bldP spid="30" grpId="0" build="p"/>
+    </p:bldLst>
+  </p:timing>
 </p:sld>
 </file>
 
@@ -3977,7 +4339,7 @@
       </p:sp>
       <p:sp>
         <p:nvSpPr>
-          <p:cNvPr id="6" name="Text 4"/>
+          <p:cNvPr id="6" name="static_text_0139"/>
           <p:cNvSpPr/>
           <p:nvPr/>
         </p:nvSpPr>
@@ -4021,7 +4383,7 @@
       </p:sp>
       <p:sp>
         <p:nvSpPr>
-          <p:cNvPr id="7" name="Text 5"/>
+          <p:cNvPr id="7" name="static_text_0140"/>
           <p:cNvSpPr/>
           <p:nvPr/>
         </p:nvSpPr>
@@ -4088,7 +4450,7 @@
       </p:sp>
       <p:sp>
         <p:nvSpPr>
-          <p:cNvPr id="9" name="Text 7"/>
+          <p:cNvPr id="9" name="tw_text_0141"/>
           <p:cNvSpPr/>
           <p:nvPr/>
         </p:nvSpPr>
@@ -4132,7 +4494,7 @@
       </p:sp>
       <p:sp>
         <p:nvSpPr>
-          <p:cNvPr id="10" name="Text 8"/>
+          <p:cNvPr id="10" name="tw_text_0142"/>
           <p:cNvSpPr/>
           <p:nvPr/>
         </p:nvSpPr>
@@ -4228,7 +4590,7 @@
       </p:sp>
       <p:sp>
         <p:nvSpPr>
-          <p:cNvPr id="13" name="Text 11"/>
+          <p:cNvPr id="13" name="static_text_0143"/>
           <p:cNvSpPr/>
           <p:nvPr/>
         </p:nvSpPr>
@@ -4272,7 +4634,7 @@
       </p:sp>
       <p:sp>
         <p:nvSpPr>
-          <p:cNvPr id="14" name="Text 12"/>
+          <p:cNvPr id="14" name="tw_text_0144"/>
           <p:cNvSpPr/>
           <p:nvPr/>
         </p:nvSpPr>
@@ -4393,7 +4755,7 @@
       </p:sp>
       <p:sp>
         <p:nvSpPr>
-          <p:cNvPr id="18" name="Text 16"/>
+          <p:cNvPr id="18" name="static_text_0145"/>
           <p:cNvSpPr/>
           <p:nvPr/>
         </p:nvSpPr>
@@ -4437,7 +4799,7 @@
       </p:sp>
       <p:sp>
         <p:nvSpPr>
-          <p:cNvPr id="19" name="Text 17"/>
+          <p:cNvPr id="19" name="tw_text_0146"/>
           <p:cNvSpPr/>
           <p:nvPr/>
         </p:nvSpPr>
@@ -4558,7 +4920,7 @@
       </p:sp>
       <p:sp>
         <p:nvSpPr>
-          <p:cNvPr id="23" name="Text 21"/>
+          <p:cNvPr id="23" name="static_text_0147"/>
           <p:cNvSpPr/>
           <p:nvPr/>
         </p:nvSpPr>
@@ -4602,7 +4964,7 @@
       </p:sp>
       <p:sp>
         <p:nvSpPr>
-          <p:cNvPr id="24" name="Text 22"/>
+          <p:cNvPr id="24" name="tw_text_0148"/>
           <p:cNvSpPr/>
           <p:nvPr/>
         </p:nvSpPr>
@@ -4698,7 +5060,7 @@
       </p:sp>
       <p:sp>
         <p:nvSpPr>
-          <p:cNvPr id="27" name="Text 25"/>
+          <p:cNvPr id="27" name="static_text_0149"/>
           <p:cNvSpPr/>
           <p:nvPr/>
         </p:nvSpPr>
@@ -4742,7 +5104,7 @@
       </p:sp>
       <p:sp>
         <p:nvSpPr>
-          <p:cNvPr id="28" name="Text 26"/>
+          <p:cNvPr id="28" name="tw_text_0150"/>
           <p:cNvSpPr/>
           <p:nvPr/>
         </p:nvSpPr>
@@ -4809,7 +5171,7 @@
       </p:sp>
       <p:sp>
         <p:nvSpPr>
-          <p:cNvPr id="30" name="Text 28"/>
+          <p:cNvPr id="30" name="tw_text_0151"/>
           <p:cNvSpPr/>
           <p:nvPr/>
         </p:nvSpPr>
@@ -4856,6 +5218,248 @@
   <p:clrMapOvr>
     <a:masterClrMapping/>
   </p:clrMapOvr>
+  <p:timing>
+    <p:tnLst>
+      <p:par>
+        <p:cTn id="1" dur="indefinite" restart="never" nodeType="tmRoot">
+          <p:childTnLst>
+            <p:seq concurrent="1" nextAc="seek">
+              <p:cTn id="2" dur="indefinite" nodeType="mainSeq">
+                <p:childTnLst>
+                  <p:par>
+                    <p:cTn id="2" fill="hold">
+                      <p:stCondLst>
+                        <p:cond delay="0"/>
+                      </p:stCondLst>
+                      <p:childTnLst>
+                        <p:par>
+                          <p:cTn id="3" presetID="1" presetClass="entr" presetSubtype="0" fill="hold" nodeType="clickEffect">
+                            <p:stCondLst>
+                              <p:cond delay="0"/>
+                            </p:stCondLst>
+                            <p:childTnLst>
+                              <p:animEffect transition="in" filter="typewriter">
+                                <p:cBhvr>
+                                  <p:cTn id="4" dur="520" fill="hold"/>
+                                  <p:tgtEl>
+                                    <p:spTgt spid="9"/>
+                                  </p:tgtEl>
+                                </p:cBhvr>
+                              </p:animEffect>
+                            </p:childTnLst>
+                            <p:iterate type="lt">
+                              <p:tmAbs val="35"/>
+                            </p:iterate>
+                          </p:cTn>
+                        </p:par>
+                      </p:childTnLst>
+                    </p:cTn>
+                  </p:par>
+                  <p:par>
+                    <p:cTn id="5" fill="hold">
+                      <p:stCondLst>
+                        <p:cond delay="90"/>
+                      </p:stCondLst>
+                      <p:childTnLst>
+                        <p:par>
+                          <p:cTn id="6" presetID="1" presetClass="entr" presetSubtype="0" fill="hold" nodeType="clickEffect">
+                            <p:stCondLst>
+                              <p:cond delay="0"/>
+                            </p:stCondLst>
+                            <p:childTnLst>
+                              <p:animEffect transition="in" filter="typewriter">
+                                <p:cBhvr>
+                                  <p:cTn id="7" dur="565" fill="hold"/>
+                                  <p:tgtEl>
+                                    <p:spTgt spid="10"/>
+                                  </p:tgtEl>
+                                </p:cBhvr>
+                              </p:animEffect>
+                            </p:childTnLst>
+                            <p:iterate type="lt">
+                              <p:tmAbs val="35"/>
+                            </p:iterate>
+                          </p:cTn>
+                        </p:par>
+                      </p:childTnLst>
+                    </p:cTn>
+                  </p:par>
+                  <p:par>
+                    <p:cTn id="8" fill="hold">
+                      <p:stCondLst>
+                        <p:cond delay="90"/>
+                      </p:stCondLst>
+                      <p:childTnLst>
+                        <p:par>
+                          <p:cTn id="9" presetID="1" presetClass="entr" presetSubtype="0" fill="hold" nodeType="clickEffect">
+                            <p:stCondLst>
+                              <p:cond delay="0"/>
+                            </p:stCondLst>
+                            <p:childTnLst>
+                              <p:animEffect transition="in" filter="typewriter">
+                                <p:cBhvr>
+                                  <p:cTn id="10" dur="610" fill="hold"/>
+                                  <p:tgtEl>
+                                    <p:spTgt spid="14"/>
+                                  </p:tgtEl>
+                                </p:cBhvr>
+                              </p:animEffect>
+                            </p:childTnLst>
+                            <p:iterate type="lt">
+                              <p:tmAbs val="35"/>
+                            </p:iterate>
+                          </p:cTn>
+                        </p:par>
+                      </p:childTnLst>
+                    </p:cTn>
+                  </p:par>
+                  <p:par>
+                    <p:cTn id="11" fill="hold">
+                      <p:stCondLst>
+                        <p:cond delay="90"/>
+                      </p:stCondLst>
+                      <p:childTnLst>
+                        <p:par>
+                          <p:cTn id="12" presetID="1" presetClass="entr" presetSubtype="0" fill="hold" nodeType="clickEffect">
+                            <p:stCondLst>
+                              <p:cond delay="0"/>
+                            </p:stCondLst>
+                            <p:childTnLst>
+                              <p:animEffect transition="in" filter="typewriter">
+                                <p:cBhvr>
+                                  <p:cTn id="13" dur="655" fill="hold"/>
+                                  <p:tgtEl>
+                                    <p:spTgt spid="19"/>
+                                  </p:tgtEl>
+                                </p:cBhvr>
+                              </p:animEffect>
+                            </p:childTnLst>
+                            <p:iterate type="lt">
+                              <p:tmAbs val="35"/>
+                            </p:iterate>
+                          </p:cTn>
+                        </p:par>
+                      </p:childTnLst>
+                    </p:cTn>
+                  </p:par>
+                  <p:par>
+                    <p:cTn id="14" fill="hold">
+                      <p:stCondLst>
+                        <p:cond delay="90"/>
+                      </p:stCondLst>
+                      <p:childTnLst>
+                        <p:par>
+                          <p:cTn id="15" presetID="1" presetClass="entr" presetSubtype="0" fill="hold" nodeType="clickEffect">
+                            <p:stCondLst>
+                              <p:cond delay="0"/>
+                            </p:stCondLst>
+                            <p:childTnLst>
+                              <p:animEffect transition="in" filter="typewriter">
+                                <p:cBhvr>
+                                  <p:cTn id="16" dur="700" fill="hold"/>
+                                  <p:tgtEl>
+                                    <p:spTgt spid="24"/>
+                                  </p:tgtEl>
+                                </p:cBhvr>
+                              </p:animEffect>
+                            </p:childTnLst>
+                            <p:iterate type="lt">
+                              <p:tmAbs val="35"/>
+                            </p:iterate>
+                          </p:cTn>
+                        </p:par>
+                      </p:childTnLst>
+                    </p:cTn>
+                  </p:par>
+                  <p:par>
+                    <p:cTn id="17" fill="hold">
+                      <p:stCondLst>
+                        <p:cond delay="90"/>
+                      </p:stCondLst>
+                      <p:childTnLst>
+                        <p:par>
+                          <p:cTn id="18" presetID="1" presetClass="entr" presetSubtype="0" fill="hold" nodeType="clickEffect">
+                            <p:stCondLst>
+                              <p:cond delay="0"/>
+                            </p:stCondLst>
+                            <p:childTnLst>
+                              <p:animEffect transition="in" filter="typewriter">
+                                <p:cBhvr>
+                                  <p:cTn id="19" dur="745" fill="hold"/>
+                                  <p:tgtEl>
+                                    <p:spTgt spid="28"/>
+                                  </p:tgtEl>
+                                </p:cBhvr>
+                              </p:animEffect>
+                            </p:childTnLst>
+                            <p:iterate type="lt">
+                              <p:tmAbs val="35"/>
+                            </p:iterate>
+                          </p:cTn>
+                        </p:par>
+                      </p:childTnLst>
+                    </p:cTn>
+                  </p:par>
+                  <p:par>
+                    <p:cTn id="20" fill="hold">
+                      <p:stCondLst>
+                        <p:cond delay="90"/>
+                      </p:stCondLst>
+                      <p:childTnLst>
+                        <p:par>
+                          <p:cTn id="21" presetID="1" presetClass="entr" presetSubtype="0" fill="hold" nodeType="clickEffect">
+                            <p:stCondLst>
+                              <p:cond delay="0"/>
+                            </p:stCondLst>
+                            <p:childTnLst>
+                              <p:animEffect transition="in" filter="typewriter">
+                                <p:cBhvr>
+                                  <p:cTn id="22" dur="790" fill="hold"/>
+                                  <p:tgtEl>
+                                    <p:spTgt spid="30"/>
+                                  </p:tgtEl>
+                                </p:cBhvr>
+                              </p:animEffect>
+                            </p:childTnLst>
+                            <p:iterate type="lt">
+                              <p:tmAbs val="35"/>
+                            </p:iterate>
+                          </p:cTn>
+                        </p:par>
+                      </p:childTnLst>
+                    </p:cTn>
+                  </p:par>
+                </p:childTnLst>
+              </p:cTn>
+              <p:prevCondLst>
+                <p:cond evt="onPrev" delay="0">
+                  <p:tgtEl>
+                    <p:sldTgt/>
+                  </p:tgtEl>
+                </p:cond>
+              </p:prevCondLst>
+              <p:nextCondLst>
+                <p:cond evt="onNext" delay="0">
+                  <p:tgtEl>
+                    <p:sldTgt/>
+                  </p:tgtEl>
+                </p:cond>
+              </p:nextCondLst>
+            </p:seq>
+          </p:childTnLst>
+        </p:cTn>
+      </p:par>
+    </p:tnLst>
+    <p:bldLst>
+      <p:bldP spid="9" grpId="0" build="p"/>
+      <p:bldP spid="10" grpId="0" build="p"/>
+      <p:bldP spid="14" grpId="0" build="p"/>
+      <p:bldP spid="19" grpId="0" build="p"/>
+      <p:bldP spid="24" grpId="0" build="p"/>
+      <p:bldP spid="28" grpId="0" build="p"/>
+      <p:bldP spid="30" grpId="0" build="p"/>
+    </p:bldLst>
+  </p:timing>
 </p:sld>
 </file>
 
@@ -4987,7 +5591,7 @@
       </p:sp>
       <p:sp>
         <p:nvSpPr>
-          <p:cNvPr id="6" name="Text 4"/>
+          <p:cNvPr id="6" name="static_text_0152"/>
           <p:cNvSpPr/>
           <p:nvPr/>
         </p:nvSpPr>
@@ -5031,7 +5635,7 @@
       </p:sp>
       <p:sp>
         <p:nvSpPr>
-          <p:cNvPr id="7" name="Text 5"/>
+          <p:cNvPr id="7" name="static_text_0153"/>
           <p:cNvSpPr/>
           <p:nvPr/>
         </p:nvSpPr>
@@ -5098,7 +5702,7 @@
       </p:sp>
       <p:sp>
         <p:nvSpPr>
-          <p:cNvPr id="9" name="Text 7"/>
+          <p:cNvPr id="9" name="tw_text_0154"/>
           <p:cNvSpPr/>
           <p:nvPr/>
         </p:nvSpPr>
@@ -5142,7 +5746,7 @@
       </p:sp>
       <p:sp>
         <p:nvSpPr>
-          <p:cNvPr id="10" name="Text 8"/>
+          <p:cNvPr id="10" name="tw_text_0155"/>
           <p:cNvSpPr/>
           <p:nvPr/>
         </p:nvSpPr>
@@ -5238,7 +5842,7 @@
       </p:sp>
       <p:sp>
         <p:nvSpPr>
-          <p:cNvPr id="13" name="Text 11"/>
+          <p:cNvPr id="13" name="static_text_0156"/>
           <p:cNvSpPr/>
           <p:nvPr/>
         </p:nvSpPr>
@@ -5282,7 +5886,7 @@
       </p:sp>
       <p:sp>
         <p:nvSpPr>
-          <p:cNvPr id="14" name="Text 12"/>
+          <p:cNvPr id="14" name="tw_text_0157"/>
           <p:cNvSpPr/>
           <p:nvPr/>
         </p:nvSpPr>
@@ -5378,7 +5982,7 @@
       </p:sp>
       <p:sp>
         <p:nvSpPr>
-          <p:cNvPr id="17" name="Text 15"/>
+          <p:cNvPr id="17" name="static_text_0158"/>
           <p:cNvSpPr/>
           <p:nvPr/>
         </p:nvSpPr>
@@ -5422,7 +6026,7 @@
       </p:sp>
       <p:sp>
         <p:nvSpPr>
-          <p:cNvPr id="18" name="Text 16"/>
+          <p:cNvPr id="18" name="tw_text_0159"/>
           <p:cNvSpPr/>
           <p:nvPr/>
         </p:nvSpPr>
@@ -5518,7 +6122,7 @@
       </p:sp>
       <p:sp>
         <p:nvSpPr>
-          <p:cNvPr id="21" name="Text 19"/>
+          <p:cNvPr id="21" name="static_text_0160"/>
           <p:cNvSpPr/>
           <p:nvPr/>
         </p:nvSpPr>
@@ -5562,7 +6166,7 @@
       </p:sp>
       <p:sp>
         <p:nvSpPr>
-          <p:cNvPr id="22" name="Text 20"/>
+          <p:cNvPr id="22" name="tw_text_0161"/>
           <p:cNvSpPr/>
           <p:nvPr/>
         </p:nvSpPr>
@@ -5658,7 +6262,7 @@
       </p:sp>
       <p:sp>
         <p:nvSpPr>
-          <p:cNvPr id="25" name="Text 23"/>
+          <p:cNvPr id="25" name="static_text_0162"/>
           <p:cNvSpPr/>
           <p:nvPr/>
         </p:nvSpPr>
@@ -5702,7 +6306,7 @@
       </p:sp>
       <p:sp>
         <p:nvSpPr>
-          <p:cNvPr id="26" name="Text 24"/>
+          <p:cNvPr id="26" name="tw_text_0163"/>
           <p:cNvSpPr/>
           <p:nvPr/>
         </p:nvSpPr>
@@ -5773,7 +6377,7 @@
       </p:sp>
       <p:sp>
         <p:nvSpPr>
-          <p:cNvPr id="28" name="Text 26"/>
+          <p:cNvPr id="28" name="tw_text_0164"/>
           <p:cNvSpPr/>
           <p:nvPr/>
         </p:nvSpPr>
@@ -5820,6 +6424,248 @@
   <p:clrMapOvr>
     <a:masterClrMapping/>
   </p:clrMapOvr>
+  <p:timing>
+    <p:tnLst>
+      <p:par>
+        <p:cTn id="1" dur="indefinite" restart="never" nodeType="tmRoot">
+          <p:childTnLst>
+            <p:seq concurrent="1" nextAc="seek">
+              <p:cTn id="2" dur="indefinite" nodeType="mainSeq">
+                <p:childTnLst>
+                  <p:par>
+                    <p:cTn id="2" fill="hold">
+                      <p:stCondLst>
+                        <p:cond delay="0"/>
+                      </p:stCondLst>
+                      <p:childTnLst>
+                        <p:par>
+                          <p:cTn id="3" presetID="1" presetClass="entr" presetSubtype="0" fill="hold" nodeType="clickEffect">
+                            <p:stCondLst>
+                              <p:cond delay="0"/>
+                            </p:stCondLst>
+                            <p:childTnLst>
+                              <p:animEffect transition="in" filter="typewriter">
+                                <p:cBhvr>
+                                  <p:cTn id="4" dur="520" fill="hold"/>
+                                  <p:tgtEl>
+                                    <p:spTgt spid="9"/>
+                                  </p:tgtEl>
+                                </p:cBhvr>
+                              </p:animEffect>
+                            </p:childTnLst>
+                            <p:iterate type="lt">
+                              <p:tmAbs val="35"/>
+                            </p:iterate>
+                          </p:cTn>
+                        </p:par>
+                      </p:childTnLst>
+                    </p:cTn>
+                  </p:par>
+                  <p:par>
+                    <p:cTn id="5" fill="hold">
+                      <p:stCondLst>
+                        <p:cond delay="90"/>
+                      </p:stCondLst>
+                      <p:childTnLst>
+                        <p:par>
+                          <p:cTn id="6" presetID="1" presetClass="entr" presetSubtype="0" fill="hold" nodeType="clickEffect">
+                            <p:stCondLst>
+                              <p:cond delay="0"/>
+                            </p:stCondLst>
+                            <p:childTnLst>
+                              <p:animEffect transition="in" filter="typewriter">
+                                <p:cBhvr>
+                                  <p:cTn id="7" dur="565" fill="hold"/>
+                                  <p:tgtEl>
+                                    <p:spTgt spid="10"/>
+                                  </p:tgtEl>
+                                </p:cBhvr>
+                              </p:animEffect>
+                            </p:childTnLst>
+                            <p:iterate type="lt">
+                              <p:tmAbs val="35"/>
+                            </p:iterate>
+                          </p:cTn>
+                        </p:par>
+                      </p:childTnLst>
+                    </p:cTn>
+                  </p:par>
+                  <p:par>
+                    <p:cTn id="8" fill="hold">
+                      <p:stCondLst>
+                        <p:cond delay="90"/>
+                      </p:stCondLst>
+                      <p:childTnLst>
+                        <p:par>
+                          <p:cTn id="9" presetID="1" presetClass="entr" presetSubtype="0" fill="hold" nodeType="clickEffect">
+                            <p:stCondLst>
+                              <p:cond delay="0"/>
+                            </p:stCondLst>
+                            <p:childTnLst>
+                              <p:animEffect transition="in" filter="typewriter">
+                                <p:cBhvr>
+                                  <p:cTn id="10" dur="610" fill="hold"/>
+                                  <p:tgtEl>
+                                    <p:spTgt spid="14"/>
+                                  </p:tgtEl>
+                                </p:cBhvr>
+                              </p:animEffect>
+                            </p:childTnLst>
+                            <p:iterate type="lt">
+                              <p:tmAbs val="35"/>
+                            </p:iterate>
+                          </p:cTn>
+                        </p:par>
+                      </p:childTnLst>
+                    </p:cTn>
+                  </p:par>
+                  <p:par>
+                    <p:cTn id="11" fill="hold">
+                      <p:stCondLst>
+                        <p:cond delay="90"/>
+                      </p:stCondLst>
+                      <p:childTnLst>
+                        <p:par>
+                          <p:cTn id="12" presetID="1" presetClass="entr" presetSubtype="0" fill="hold" nodeType="clickEffect">
+                            <p:stCondLst>
+                              <p:cond delay="0"/>
+                            </p:stCondLst>
+                            <p:childTnLst>
+                              <p:animEffect transition="in" filter="typewriter">
+                                <p:cBhvr>
+                                  <p:cTn id="13" dur="655" fill="hold"/>
+                                  <p:tgtEl>
+                                    <p:spTgt spid="18"/>
+                                  </p:tgtEl>
+                                </p:cBhvr>
+                              </p:animEffect>
+                            </p:childTnLst>
+                            <p:iterate type="lt">
+                              <p:tmAbs val="35"/>
+                            </p:iterate>
+                          </p:cTn>
+                        </p:par>
+                      </p:childTnLst>
+                    </p:cTn>
+                  </p:par>
+                  <p:par>
+                    <p:cTn id="14" fill="hold">
+                      <p:stCondLst>
+                        <p:cond delay="90"/>
+                      </p:stCondLst>
+                      <p:childTnLst>
+                        <p:par>
+                          <p:cTn id="15" presetID="1" presetClass="entr" presetSubtype="0" fill="hold" nodeType="clickEffect">
+                            <p:stCondLst>
+                              <p:cond delay="0"/>
+                            </p:stCondLst>
+                            <p:childTnLst>
+                              <p:animEffect transition="in" filter="typewriter">
+                                <p:cBhvr>
+                                  <p:cTn id="16" dur="700" fill="hold"/>
+                                  <p:tgtEl>
+                                    <p:spTgt spid="22"/>
+                                  </p:tgtEl>
+                                </p:cBhvr>
+                              </p:animEffect>
+                            </p:childTnLst>
+                            <p:iterate type="lt">
+                              <p:tmAbs val="35"/>
+                            </p:iterate>
+                          </p:cTn>
+                        </p:par>
+                      </p:childTnLst>
+                    </p:cTn>
+                  </p:par>
+                  <p:par>
+                    <p:cTn id="17" fill="hold">
+                      <p:stCondLst>
+                        <p:cond delay="90"/>
+                      </p:stCondLst>
+                      <p:childTnLst>
+                        <p:par>
+                          <p:cTn id="18" presetID="1" presetClass="entr" presetSubtype="0" fill="hold" nodeType="clickEffect">
+                            <p:stCondLst>
+                              <p:cond delay="0"/>
+                            </p:stCondLst>
+                            <p:childTnLst>
+                              <p:animEffect transition="in" filter="typewriter">
+                                <p:cBhvr>
+                                  <p:cTn id="19" dur="745" fill="hold"/>
+                                  <p:tgtEl>
+                                    <p:spTgt spid="26"/>
+                                  </p:tgtEl>
+                                </p:cBhvr>
+                              </p:animEffect>
+                            </p:childTnLst>
+                            <p:iterate type="lt">
+                              <p:tmAbs val="35"/>
+                            </p:iterate>
+                          </p:cTn>
+                        </p:par>
+                      </p:childTnLst>
+                    </p:cTn>
+                  </p:par>
+                  <p:par>
+                    <p:cTn id="20" fill="hold">
+                      <p:stCondLst>
+                        <p:cond delay="90"/>
+                      </p:stCondLst>
+                      <p:childTnLst>
+                        <p:par>
+                          <p:cTn id="21" presetID="1" presetClass="entr" presetSubtype="0" fill="hold" nodeType="clickEffect">
+                            <p:stCondLst>
+                              <p:cond delay="0"/>
+                            </p:stCondLst>
+                            <p:childTnLst>
+                              <p:animEffect transition="in" filter="typewriter">
+                                <p:cBhvr>
+                                  <p:cTn id="22" dur="790" fill="hold"/>
+                                  <p:tgtEl>
+                                    <p:spTgt spid="28"/>
+                                  </p:tgtEl>
+                                </p:cBhvr>
+                              </p:animEffect>
+                            </p:childTnLst>
+                            <p:iterate type="lt">
+                              <p:tmAbs val="35"/>
+                            </p:iterate>
+                          </p:cTn>
+                        </p:par>
+                      </p:childTnLst>
+                    </p:cTn>
+                  </p:par>
+                </p:childTnLst>
+              </p:cTn>
+              <p:prevCondLst>
+                <p:cond evt="onPrev" delay="0">
+                  <p:tgtEl>
+                    <p:sldTgt/>
+                  </p:tgtEl>
+                </p:cond>
+              </p:prevCondLst>
+              <p:nextCondLst>
+                <p:cond evt="onNext" delay="0">
+                  <p:tgtEl>
+                    <p:sldTgt/>
+                  </p:tgtEl>
+                </p:cond>
+              </p:nextCondLst>
+            </p:seq>
+          </p:childTnLst>
+        </p:cTn>
+      </p:par>
+    </p:tnLst>
+    <p:bldLst>
+      <p:bldP spid="9" grpId="0" build="p"/>
+      <p:bldP spid="10" grpId="0" build="p"/>
+      <p:bldP spid="14" grpId="0" build="p"/>
+      <p:bldP spid="18" grpId="0" build="p"/>
+      <p:bldP spid="22" grpId="0" build="p"/>
+      <p:bldP spid="26" grpId="0" build="p"/>
+      <p:bldP spid="28" grpId="0" build="p"/>
+    </p:bldLst>
+  </p:timing>
 </p:sld>
 </file>
 
@@ -5951,7 +6797,7 @@
       </p:sp>
       <p:sp>
         <p:nvSpPr>
-          <p:cNvPr id="6" name="Text 4"/>
+          <p:cNvPr id="6" name="static_text_0165"/>
           <p:cNvSpPr/>
           <p:nvPr/>
         </p:nvSpPr>
@@ -5995,7 +6841,7 @@
       </p:sp>
       <p:sp>
         <p:nvSpPr>
-          <p:cNvPr id="7" name="Text 5"/>
+          <p:cNvPr id="7" name="static_text_0166"/>
           <p:cNvSpPr/>
           <p:nvPr/>
         </p:nvSpPr>
@@ -6062,7 +6908,7 @@
       </p:sp>
       <p:sp>
         <p:nvSpPr>
-          <p:cNvPr id="9" name="Text 7"/>
+          <p:cNvPr id="9" name="tw_text_0167"/>
           <p:cNvSpPr/>
           <p:nvPr/>
         </p:nvSpPr>
@@ -6106,7 +6952,7 @@
       </p:sp>
       <p:sp>
         <p:nvSpPr>
-          <p:cNvPr id="10" name="Text 8"/>
+          <p:cNvPr id="10" name="tw_text_0168"/>
           <p:cNvSpPr/>
           <p:nvPr/>
         </p:nvSpPr>
@@ -6177,7 +7023,7 @@
       </p:sp>
       <p:sp>
         <p:nvSpPr>
-          <p:cNvPr id="12" name="Text 10"/>
+          <p:cNvPr id="12" name="static_text_0169"/>
           <p:cNvSpPr/>
           <p:nvPr/>
         </p:nvSpPr>
@@ -6244,7 +7090,7 @@
       </p:sp>
       <p:sp>
         <p:nvSpPr>
-          <p:cNvPr id="14" name="Text 12"/>
+          <p:cNvPr id="14" name="static_text_0170"/>
           <p:cNvSpPr/>
           <p:nvPr/>
         </p:nvSpPr>
@@ -6288,7 +7134,7 @@
       </p:sp>
       <p:sp>
         <p:nvSpPr>
-          <p:cNvPr id="15" name="Text 13"/>
+          <p:cNvPr id="15" name="tw_text_0171"/>
           <p:cNvSpPr/>
           <p:nvPr/>
         </p:nvSpPr>
@@ -6359,7 +7205,7 @@
       </p:sp>
       <p:sp>
         <p:nvSpPr>
-          <p:cNvPr id="17" name="Text 15"/>
+          <p:cNvPr id="17" name="static_text_0172"/>
           <p:cNvSpPr/>
           <p:nvPr/>
         </p:nvSpPr>
@@ -6426,7 +7272,7 @@
       </p:sp>
       <p:sp>
         <p:nvSpPr>
-          <p:cNvPr id="19" name="Text 17"/>
+          <p:cNvPr id="19" name="static_text_0173"/>
           <p:cNvSpPr/>
           <p:nvPr/>
         </p:nvSpPr>
@@ -6470,7 +7316,7 @@
       </p:sp>
       <p:sp>
         <p:nvSpPr>
-          <p:cNvPr id="20" name="Text 18"/>
+          <p:cNvPr id="20" name="tw_text_0174"/>
           <p:cNvSpPr/>
           <p:nvPr/>
         </p:nvSpPr>
@@ -6541,7 +7387,7 @@
       </p:sp>
       <p:sp>
         <p:nvSpPr>
-          <p:cNvPr id="22" name="Text 20"/>
+          <p:cNvPr id="22" name="static_text_0175"/>
           <p:cNvSpPr/>
           <p:nvPr/>
         </p:nvSpPr>
@@ -6608,7 +7454,7 @@
       </p:sp>
       <p:sp>
         <p:nvSpPr>
-          <p:cNvPr id="24" name="Text 22"/>
+          <p:cNvPr id="24" name="static_text_0176"/>
           <p:cNvSpPr/>
           <p:nvPr/>
         </p:nvSpPr>
@@ -6652,7 +7498,7 @@
       </p:sp>
       <p:sp>
         <p:nvSpPr>
-          <p:cNvPr id="25" name="Text 23"/>
+          <p:cNvPr id="25" name="tw_text_0177"/>
           <p:cNvSpPr/>
           <p:nvPr/>
         </p:nvSpPr>
@@ -6723,7 +7569,7 @@
       </p:sp>
       <p:sp>
         <p:nvSpPr>
-          <p:cNvPr id="27" name="Text 25"/>
+          <p:cNvPr id="27" name="static_text_0178"/>
           <p:cNvSpPr/>
           <p:nvPr/>
         </p:nvSpPr>
@@ -6790,7 +7636,7 @@
       </p:sp>
       <p:sp>
         <p:nvSpPr>
-          <p:cNvPr id="29" name="Text 27"/>
+          <p:cNvPr id="29" name="static_text_0179"/>
           <p:cNvSpPr/>
           <p:nvPr/>
         </p:nvSpPr>
@@ -6834,7 +7680,7 @@
       </p:sp>
       <p:sp>
         <p:nvSpPr>
-          <p:cNvPr id="30" name="Text 28"/>
+          <p:cNvPr id="30" name="tw_text_0180"/>
           <p:cNvSpPr/>
           <p:nvPr/>
         </p:nvSpPr>
@@ -6930,7 +7776,7 @@
       </p:sp>
       <p:sp>
         <p:nvSpPr>
-          <p:cNvPr id="33" name="Text 31"/>
+          <p:cNvPr id="33" name="static_text_0181"/>
           <p:cNvSpPr/>
           <p:nvPr/>
         </p:nvSpPr>
@@ -6974,7 +7820,7 @@
       </p:sp>
       <p:sp>
         <p:nvSpPr>
-          <p:cNvPr id="34" name="Text 32"/>
+          <p:cNvPr id="34" name="tw_text_0182"/>
           <p:cNvSpPr/>
           <p:nvPr/>
         </p:nvSpPr>
@@ -7021,6 +7867,248 @@
   <p:clrMapOvr>
     <a:masterClrMapping/>
   </p:clrMapOvr>
+  <p:timing>
+    <p:tnLst>
+      <p:par>
+        <p:cTn id="1" dur="indefinite" restart="never" nodeType="tmRoot">
+          <p:childTnLst>
+            <p:seq concurrent="1" nextAc="seek">
+              <p:cTn id="2" dur="indefinite" nodeType="mainSeq">
+                <p:childTnLst>
+                  <p:par>
+                    <p:cTn id="2" fill="hold">
+                      <p:stCondLst>
+                        <p:cond delay="0"/>
+                      </p:stCondLst>
+                      <p:childTnLst>
+                        <p:par>
+                          <p:cTn id="3" presetID="1" presetClass="entr" presetSubtype="0" fill="hold" nodeType="clickEffect">
+                            <p:stCondLst>
+                              <p:cond delay="0"/>
+                            </p:stCondLst>
+                            <p:childTnLst>
+                              <p:animEffect transition="in" filter="typewriter">
+                                <p:cBhvr>
+                                  <p:cTn id="4" dur="520" fill="hold"/>
+                                  <p:tgtEl>
+                                    <p:spTgt spid="9"/>
+                                  </p:tgtEl>
+                                </p:cBhvr>
+                              </p:animEffect>
+                            </p:childTnLst>
+                            <p:iterate type="lt">
+                              <p:tmAbs val="35"/>
+                            </p:iterate>
+                          </p:cTn>
+                        </p:par>
+                      </p:childTnLst>
+                    </p:cTn>
+                  </p:par>
+                  <p:par>
+                    <p:cTn id="5" fill="hold">
+                      <p:stCondLst>
+                        <p:cond delay="90"/>
+                      </p:stCondLst>
+                      <p:childTnLst>
+                        <p:par>
+                          <p:cTn id="6" presetID="1" presetClass="entr" presetSubtype="0" fill="hold" nodeType="clickEffect">
+                            <p:stCondLst>
+                              <p:cond delay="0"/>
+                            </p:stCondLst>
+                            <p:childTnLst>
+                              <p:animEffect transition="in" filter="typewriter">
+                                <p:cBhvr>
+                                  <p:cTn id="7" dur="565" fill="hold"/>
+                                  <p:tgtEl>
+                                    <p:spTgt spid="10"/>
+                                  </p:tgtEl>
+                                </p:cBhvr>
+                              </p:animEffect>
+                            </p:childTnLst>
+                            <p:iterate type="lt">
+                              <p:tmAbs val="35"/>
+                            </p:iterate>
+                          </p:cTn>
+                        </p:par>
+                      </p:childTnLst>
+                    </p:cTn>
+                  </p:par>
+                  <p:par>
+                    <p:cTn id="8" fill="hold">
+                      <p:stCondLst>
+                        <p:cond delay="90"/>
+                      </p:stCondLst>
+                      <p:childTnLst>
+                        <p:par>
+                          <p:cTn id="9" presetID="1" presetClass="entr" presetSubtype="0" fill="hold" nodeType="clickEffect">
+                            <p:stCondLst>
+                              <p:cond delay="0"/>
+                            </p:stCondLst>
+                            <p:childTnLst>
+                              <p:animEffect transition="in" filter="typewriter">
+                                <p:cBhvr>
+                                  <p:cTn id="10" dur="610" fill="hold"/>
+                                  <p:tgtEl>
+                                    <p:spTgt spid="15"/>
+                                  </p:tgtEl>
+                                </p:cBhvr>
+                              </p:animEffect>
+                            </p:childTnLst>
+                            <p:iterate type="lt">
+                              <p:tmAbs val="35"/>
+                            </p:iterate>
+                          </p:cTn>
+                        </p:par>
+                      </p:childTnLst>
+                    </p:cTn>
+                  </p:par>
+                  <p:par>
+                    <p:cTn id="11" fill="hold">
+                      <p:stCondLst>
+                        <p:cond delay="90"/>
+                      </p:stCondLst>
+                      <p:childTnLst>
+                        <p:par>
+                          <p:cTn id="12" presetID="1" presetClass="entr" presetSubtype="0" fill="hold" nodeType="clickEffect">
+                            <p:stCondLst>
+                              <p:cond delay="0"/>
+                            </p:stCondLst>
+                            <p:childTnLst>
+                              <p:animEffect transition="in" filter="typewriter">
+                                <p:cBhvr>
+                                  <p:cTn id="13" dur="655" fill="hold"/>
+                                  <p:tgtEl>
+                                    <p:spTgt spid="20"/>
+                                  </p:tgtEl>
+                                </p:cBhvr>
+                              </p:animEffect>
+                            </p:childTnLst>
+                            <p:iterate type="lt">
+                              <p:tmAbs val="35"/>
+                            </p:iterate>
+                          </p:cTn>
+                        </p:par>
+                      </p:childTnLst>
+                    </p:cTn>
+                  </p:par>
+                  <p:par>
+                    <p:cTn id="14" fill="hold">
+                      <p:stCondLst>
+                        <p:cond delay="90"/>
+                      </p:stCondLst>
+                      <p:childTnLst>
+                        <p:par>
+                          <p:cTn id="15" presetID="1" presetClass="entr" presetSubtype="0" fill="hold" nodeType="clickEffect">
+                            <p:stCondLst>
+                              <p:cond delay="0"/>
+                            </p:stCondLst>
+                            <p:childTnLst>
+                              <p:animEffect transition="in" filter="typewriter">
+                                <p:cBhvr>
+                                  <p:cTn id="16" dur="700" fill="hold"/>
+                                  <p:tgtEl>
+                                    <p:spTgt spid="25"/>
+                                  </p:tgtEl>
+                                </p:cBhvr>
+                              </p:animEffect>
+                            </p:childTnLst>
+                            <p:iterate type="lt">
+                              <p:tmAbs val="35"/>
+                            </p:iterate>
+                          </p:cTn>
+                        </p:par>
+                      </p:childTnLst>
+                    </p:cTn>
+                  </p:par>
+                  <p:par>
+                    <p:cTn id="17" fill="hold">
+                      <p:stCondLst>
+                        <p:cond delay="90"/>
+                      </p:stCondLst>
+                      <p:childTnLst>
+                        <p:par>
+                          <p:cTn id="18" presetID="1" presetClass="entr" presetSubtype="0" fill="hold" nodeType="clickEffect">
+                            <p:stCondLst>
+                              <p:cond delay="0"/>
+                            </p:stCondLst>
+                            <p:childTnLst>
+                              <p:animEffect transition="in" filter="typewriter">
+                                <p:cBhvr>
+                                  <p:cTn id="19" dur="745" fill="hold"/>
+                                  <p:tgtEl>
+                                    <p:spTgt spid="30"/>
+                                  </p:tgtEl>
+                                </p:cBhvr>
+                              </p:animEffect>
+                            </p:childTnLst>
+                            <p:iterate type="lt">
+                              <p:tmAbs val="35"/>
+                            </p:iterate>
+                          </p:cTn>
+                        </p:par>
+                      </p:childTnLst>
+                    </p:cTn>
+                  </p:par>
+                  <p:par>
+                    <p:cTn id="20" fill="hold">
+                      <p:stCondLst>
+                        <p:cond delay="90"/>
+                      </p:stCondLst>
+                      <p:childTnLst>
+                        <p:par>
+                          <p:cTn id="21" presetID="1" presetClass="entr" presetSubtype="0" fill="hold" nodeType="clickEffect">
+                            <p:stCondLst>
+                              <p:cond delay="0"/>
+                            </p:stCondLst>
+                            <p:childTnLst>
+                              <p:animEffect transition="in" filter="typewriter">
+                                <p:cBhvr>
+                                  <p:cTn id="22" dur="790" fill="hold"/>
+                                  <p:tgtEl>
+                                    <p:spTgt spid="34"/>
+                                  </p:tgtEl>
+                                </p:cBhvr>
+                              </p:animEffect>
+                            </p:childTnLst>
+                            <p:iterate type="lt">
+                              <p:tmAbs val="35"/>
+                            </p:iterate>
+                          </p:cTn>
+                        </p:par>
+                      </p:childTnLst>
+                    </p:cTn>
+                  </p:par>
+                </p:childTnLst>
+              </p:cTn>
+              <p:prevCondLst>
+                <p:cond evt="onPrev" delay="0">
+                  <p:tgtEl>
+                    <p:sldTgt/>
+                  </p:tgtEl>
+                </p:cond>
+              </p:prevCondLst>
+              <p:nextCondLst>
+                <p:cond evt="onNext" delay="0">
+                  <p:tgtEl>
+                    <p:sldTgt/>
+                  </p:tgtEl>
+                </p:cond>
+              </p:nextCondLst>
+            </p:seq>
+          </p:childTnLst>
+        </p:cTn>
+      </p:par>
+    </p:tnLst>
+    <p:bldLst>
+      <p:bldP spid="9" grpId="0" build="p"/>
+      <p:bldP spid="10" grpId="0" build="p"/>
+      <p:bldP spid="15" grpId="0" build="p"/>
+      <p:bldP spid="20" grpId="0" build="p"/>
+      <p:bldP spid="25" grpId="0" build="p"/>
+      <p:bldP spid="30" grpId="0" build="p"/>
+      <p:bldP spid="34" grpId="0" build="p"/>
+    </p:bldLst>
+  </p:timing>
 </p:sld>
 </file>
 
@@ -7152,7 +8240,7 @@
       </p:sp>
       <p:sp>
         <p:nvSpPr>
-          <p:cNvPr id="6" name="Text 4"/>
+          <p:cNvPr id="6" name="static_text_0183"/>
           <p:cNvSpPr/>
           <p:nvPr/>
         </p:nvSpPr>
@@ -7196,7 +8284,7 @@
       </p:sp>
       <p:sp>
         <p:nvSpPr>
-          <p:cNvPr id="7" name="Text 5"/>
+          <p:cNvPr id="7" name="static_text_0184"/>
           <p:cNvSpPr/>
           <p:nvPr/>
         </p:nvSpPr>
@@ -7263,7 +8351,7 @@
       </p:sp>
       <p:sp>
         <p:nvSpPr>
-          <p:cNvPr id="9" name="Text 7"/>
+          <p:cNvPr id="9" name="tw_text_0185"/>
           <p:cNvSpPr/>
           <p:nvPr/>
         </p:nvSpPr>
@@ -7307,7 +8395,7 @@
       </p:sp>
       <p:sp>
         <p:nvSpPr>
-          <p:cNvPr id="10" name="Text 8"/>
+          <p:cNvPr id="10" name="tw_text_0186"/>
           <p:cNvSpPr/>
           <p:nvPr/>
         </p:nvSpPr>
@@ -7378,7 +8466,7 @@
       </p:sp>
       <p:sp>
         <p:nvSpPr>
-          <p:cNvPr id="12" name="Text 10"/>
+          <p:cNvPr id="12" name="static_text_0187"/>
           <p:cNvSpPr/>
           <p:nvPr/>
         </p:nvSpPr>
@@ -7451,7 +8539,7 @@
       </p:sp>
       <p:sp>
         <p:nvSpPr>
-          <p:cNvPr id="14" name="Text 12"/>
+          <p:cNvPr id="14" name="static_text_0188"/>
           <p:cNvSpPr/>
           <p:nvPr/>
         </p:nvSpPr>
@@ -7495,7 +8583,7 @@
       </p:sp>
       <p:sp>
         <p:nvSpPr>
-          <p:cNvPr id="15" name="Text 13"/>
+          <p:cNvPr id="15" name="tw_text_0189"/>
           <p:cNvSpPr/>
           <p:nvPr/>
         </p:nvSpPr>
@@ -7591,7 +8679,7 @@
       </p:sp>
       <p:sp>
         <p:nvSpPr>
-          <p:cNvPr id="18" name="Text 16"/>
+          <p:cNvPr id="18" name="static_text_0190"/>
           <p:cNvSpPr/>
           <p:nvPr/>
         </p:nvSpPr>
@@ -7635,7 +8723,7 @@
       </p:sp>
       <p:sp>
         <p:nvSpPr>
-          <p:cNvPr id="19" name="Text 17"/>
+          <p:cNvPr id="19" name="static_text_0191"/>
           <p:cNvSpPr/>
           <p:nvPr/>
         </p:nvSpPr>
@@ -7706,7 +8794,7 @@
       </p:sp>
       <p:sp>
         <p:nvSpPr>
-          <p:cNvPr id="21" name="Text 19"/>
+          <p:cNvPr id="21" name="tw_text_0192"/>
           <p:cNvSpPr/>
           <p:nvPr/>
         </p:nvSpPr>
@@ -7779,7 +8867,7 @@
       </p:sp>
       <p:sp>
         <p:nvSpPr>
-          <p:cNvPr id="23" name="Text 21"/>
+          <p:cNvPr id="23" name="static_text_0193"/>
           <p:cNvSpPr/>
           <p:nvPr/>
         </p:nvSpPr>
@@ -7823,7 +8911,7 @@
       </p:sp>
       <p:sp>
         <p:nvSpPr>
-          <p:cNvPr id="24" name="Text 22"/>
+          <p:cNvPr id="24" name="tw_text_0194"/>
           <p:cNvSpPr/>
           <p:nvPr/>
         </p:nvSpPr>
@@ -7919,7 +9007,7 @@
       </p:sp>
       <p:sp>
         <p:nvSpPr>
-          <p:cNvPr id="27" name="Text 25"/>
+          <p:cNvPr id="27" name="static_text_0195"/>
           <p:cNvSpPr/>
           <p:nvPr/>
         </p:nvSpPr>
@@ -7963,7 +9051,7 @@
       </p:sp>
       <p:sp>
         <p:nvSpPr>
-          <p:cNvPr id="28" name="Text 26"/>
+          <p:cNvPr id="28" name="static_text_0196"/>
           <p:cNvSpPr/>
           <p:nvPr/>
         </p:nvSpPr>
@@ -8034,7 +9122,7 @@
       </p:sp>
       <p:sp>
         <p:nvSpPr>
-          <p:cNvPr id="30" name="Text 28"/>
+          <p:cNvPr id="30" name="static_text_0197"/>
           <p:cNvSpPr/>
           <p:nvPr/>
         </p:nvSpPr>
@@ -8107,7 +9195,7 @@
       </p:sp>
       <p:sp>
         <p:nvSpPr>
-          <p:cNvPr id="32" name="Text 30"/>
+          <p:cNvPr id="32" name="static_text_0198"/>
           <p:cNvSpPr/>
           <p:nvPr/>
         </p:nvSpPr>
@@ -8151,7 +9239,7 @@
       </p:sp>
       <p:sp>
         <p:nvSpPr>
-          <p:cNvPr id="33" name="Text 31"/>
+          <p:cNvPr id="33" name="tw_text_0199"/>
           <p:cNvSpPr/>
           <p:nvPr/>
         </p:nvSpPr>
@@ -8247,7 +9335,7 @@
       </p:sp>
       <p:sp>
         <p:nvSpPr>
-          <p:cNvPr id="36" name="Text 34"/>
+          <p:cNvPr id="36" name="static_text_0200"/>
           <p:cNvSpPr/>
           <p:nvPr/>
         </p:nvSpPr>
@@ -8291,7 +9379,7 @@
       </p:sp>
       <p:sp>
         <p:nvSpPr>
-          <p:cNvPr id="37" name="Text 35"/>
+          <p:cNvPr id="37" name="static_text_0201"/>
           <p:cNvSpPr/>
           <p:nvPr/>
         </p:nvSpPr>
@@ -8358,7 +9446,7 @@
       </p:sp>
       <p:sp>
         <p:nvSpPr>
-          <p:cNvPr id="39" name="Text 37"/>
+          <p:cNvPr id="39" name="static_text_0202"/>
           <p:cNvSpPr/>
           <p:nvPr/>
         </p:nvSpPr>
@@ -8405,6 +9493,218 @@
   <p:clrMapOvr>
     <a:masterClrMapping/>
   </p:clrMapOvr>
+  <p:timing>
+    <p:tnLst>
+      <p:par>
+        <p:cTn id="1" dur="indefinite" restart="never" nodeType="tmRoot">
+          <p:childTnLst>
+            <p:seq concurrent="1" nextAc="seek">
+              <p:cTn id="2" dur="indefinite" nodeType="mainSeq">
+                <p:childTnLst>
+                  <p:par>
+                    <p:cTn id="2" fill="hold">
+                      <p:stCondLst>
+                        <p:cond delay="0"/>
+                      </p:stCondLst>
+                      <p:childTnLst>
+                        <p:par>
+                          <p:cTn id="3" presetID="1" presetClass="entr" presetSubtype="0" fill="hold" nodeType="clickEffect">
+                            <p:stCondLst>
+                              <p:cond delay="0"/>
+                            </p:stCondLst>
+                            <p:childTnLst>
+                              <p:animEffect transition="in" filter="typewriter">
+                                <p:cBhvr>
+                                  <p:cTn id="4" dur="520" fill="hold"/>
+                                  <p:tgtEl>
+                                    <p:spTgt spid="9"/>
+                                  </p:tgtEl>
+                                </p:cBhvr>
+                              </p:animEffect>
+                            </p:childTnLst>
+                            <p:iterate type="lt">
+                              <p:tmAbs val="35"/>
+                            </p:iterate>
+                          </p:cTn>
+                        </p:par>
+                      </p:childTnLst>
+                    </p:cTn>
+                  </p:par>
+                  <p:par>
+                    <p:cTn id="5" fill="hold">
+                      <p:stCondLst>
+                        <p:cond delay="90"/>
+                      </p:stCondLst>
+                      <p:childTnLst>
+                        <p:par>
+                          <p:cTn id="6" presetID="1" presetClass="entr" presetSubtype="0" fill="hold" nodeType="clickEffect">
+                            <p:stCondLst>
+                              <p:cond delay="0"/>
+                            </p:stCondLst>
+                            <p:childTnLst>
+                              <p:animEffect transition="in" filter="typewriter">
+                                <p:cBhvr>
+                                  <p:cTn id="7" dur="565" fill="hold"/>
+                                  <p:tgtEl>
+                                    <p:spTgt spid="10"/>
+                                  </p:tgtEl>
+                                </p:cBhvr>
+                              </p:animEffect>
+                            </p:childTnLst>
+                            <p:iterate type="lt">
+                              <p:tmAbs val="35"/>
+                            </p:iterate>
+                          </p:cTn>
+                        </p:par>
+                      </p:childTnLst>
+                    </p:cTn>
+                  </p:par>
+                  <p:par>
+                    <p:cTn id="8" fill="hold">
+                      <p:stCondLst>
+                        <p:cond delay="90"/>
+                      </p:stCondLst>
+                      <p:childTnLst>
+                        <p:par>
+                          <p:cTn id="9" presetID="1" presetClass="entr" presetSubtype="0" fill="hold" nodeType="clickEffect">
+                            <p:stCondLst>
+                              <p:cond delay="0"/>
+                            </p:stCondLst>
+                            <p:childTnLst>
+                              <p:animEffect transition="in" filter="typewriter">
+                                <p:cBhvr>
+                                  <p:cTn id="10" dur="610" fill="hold"/>
+                                  <p:tgtEl>
+                                    <p:spTgt spid="15"/>
+                                  </p:tgtEl>
+                                </p:cBhvr>
+                              </p:animEffect>
+                            </p:childTnLst>
+                            <p:iterate type="lt">
+                              <p:tmAbs val="35"/>
+                            </p:iterate>
+                          </p:cTn>
+                        </p:par>
+                      </p:childTnLst>
+                    </p:cTn>
+                  </p:par>
+                  <p:par>
+                    <p:cTn id="11" fill="hold">
+                      <p:stCondLst>
+                        <p:cond delay="90"/>
+                      </p:stCondLst>
+                      <p:childTnLst>
+                        <p:par>
+                          <p:cTn id="12" presetID="1" presetClass="entr" presetSubtype="0" fill="hold" nodeType="clickEffect">
+                            <p:stCondLst>
+                              <p:cond delay="0"/>
+                            </p:stCondLst>
+                            <p:childTnLst>
+                              <p:animEffect transition="in" filter="typewriter">
+                                <p:cBhvr>
+                                  <p:cTn id="13" dur="655" fill="hold"/>
+                                  <p:tgtEl>
+                                    <p:spTgt spid="21"/>
+                                  </p:tgtEl>
+                                </p:cBhvr>
+                              </p:animEffect>
+                            </p:childTnLst>
+                            <p:iterate type="lt">
+                              <p:tmAbs val="35"/>
+                            </p:iterate>
+                          </p:cTn>
+                        </p:par>
+                      </p:childTnLst>
+                    </p:cTn>
+                  </p:par>
+                  <p:par>
+                    <p:cTn id="14" fill="hold">
+                      <p:stCondLst>
+                        <p:cond delay="90"/>
+                      </p:stCondLst>
+                      <p:childTnLst>
+                        <p:par>
+                          <p:cTn id="15" presetID="1" presetClass="entr" presetSubtype="0" fill="hold" nodeType="clickEffect">
+                            <p:stCondLst>
+                              <p:cond delay="0"/>
+                            </p:stCondLst>
+                            <p:childTnLst>
+                              <p:animEffect transition="in" filter="typewriter">
+                                <p:cBhvr>
+                                  <p:cTn id="16" dur="700" fill="hold"/>
+                                  <p:tgtEl>
+                                    <p:spTgt spid="24"/>
+                                  </p:tgtEl>
+                                </p:cBhvr>
+                              </p:animEffect>
+                            </p:childTnLst>
+                            <p:iterate type="lt">
+                              <p:tmAbs val="35"/>
+                            </p:iterate>
+                          </p:cTn>
+                        </p:par>
+                      </p:childTnLst>
+                    </p:cTn>
+                  </p:par>
+                  <p:par>
+                    <p:cTn id="17" fill="hold">
+                      <p:stCondLst>
+                        <p:cond delay="90"/>
+                      </p:stCondLst>
+                      <p:childTnLst>
+                        <p:par>
+                          <p:cTn id="18" presetID="1" presetClass="entr" presetSubtype="0" fill="hold" nodeType="clickEffect">
+                            <p:stCondLst>
+                              <p:cond delay="0"/>
+                            </p:stCondLst>
+                            <p:childTnLst>
+                              <p:animEffect transition="in" filter="typewriter">
+                                <p:cBhvr>
+                                  <p:cTn id="19" dur="745" fill="hold"/>
+                                  <p:tgtEl>
+                                    <p:spTgt spid="33"/>
+                                  </p:tgtEl>
+                                </p:cBhvr>
+                              </p:animEffect>
+                            </p:childTnLst>
+                            <p:iterate type="lt">
+                              <p:tmAbs val="35"/>
+                            </p:iterate>
+                          </p:cTn>
+                        </p:par>
+                      </p:childTnLst>
+                    </p:cTn>
+                  </p:par>
+                </p:childTnLst>
+              </p:cTn>
+              <p:prevCondLst>
+                <p:cond evt="onPrev" delay="0">
+                  <p:tgtEl>
+                    <p:sldTgt/>
+                  </p:tgtEl>
+                </p:cond>
+              </p:prevCondLst>
+              <p:nextCondLst>
+                <p:cond evt="onNext" delay="0">
+                  <p:tgtEl>
+                    <p:sldTgt/>
+                  </p:tgtEl>
+                </p:cond>
+              </p:nextCondLst>
+            </p:seq>
+          </p:childTnLst>
+        </p:cTn>
+      </p:par>
+    </p:tnLst>
+    <p:bldLst>
+      <p:bldP spid="9" grpId="0" build="p"/>
+      <p:bldP spid="10" grpId="0" build="p"/>
+      <p:bldP spid="15" grpId="0" build="p"/>
+      <p:bldP spid="21" grpId="0" build="p"/>
+      <p:bldP spid="24" grpId="0" build="p"/>
+      <p:bldP spid="33" grpId="0" build="p"/>
+    </p:bldLst>
+  </p:timing>
 </p:sld>
 </file>
 
@@ -8536,7 +9836,7 @@
       </p:sp>
       <p:sp>
         <p:nvSpPr>
-          <p:cNvPr id="6" name="Text 4"/>
+          <p:cNvPr id="6" name="static_text_0203"/>
           <p:cNvSpPr/>
           <p:nvPr/>
         </p:nvSpPr>
@@ -8580,7 +9880,7 @@
       </p:sp>
       <p:sp>
         <p:nvSpPr>
-          <p:cNvPr id="7" name="Text 5"/>
+          <p:cNvPr id="7" name="static_text_0204"/>
           <p:cNvSpPr/>
           <p:nvPr/>
         </p:nvSpPr>
@@ -8647,7 +9947,7 @@
       </p:sp>
       <p:sp>
         <p:nvSpPr>
-          <p:cNvPr id="9" name="Text 7"/>
+          <p:cNvPr id="9" name="tw_text_0205"/>
           <p:cNvSpPr/>
           <p:nvPr/>
         </p:nvSpPr>
@@ -8691,7 +9991,7 @@
       </p:sp>
       <p:sp>
         <p:nvSpPr>
-          <p:cNvPr id="10" name="Text 8"/>
+          <p:cNvPr id="10" name="tw_text_0206"/>
           <p:cNvSpPr/>
           <p:nvPr/>
         </p:nvSpPr>
@@ -8764,7 +10064,7 @@
       </p:sp>
       <p:sp>
         <p:nvSpPr>
-          <p:cNvPr id="12" name="Text 10"/>
+          <p:cNvPr id="12" name="static_text_0207"/>
           <p:cNvSpPr/>
           <p:nvPr/>
         </p:nvSpPr>
@@ -8808,7 +10108,7 @@
       </p:sp>
       <p:sp>
         <p:nvSpPr>
-          <p:cNvPr id="13" name="Text 11"/>
+          <p:cNvPr id="13" name="static_text_0208"/>
           <p:cNvSpPr/>
           <p:nvPr/>
         </p:nvSpPr>
@@ -8852,7 +10152,7 @@
       </p:sp>
       <p:sp>
         <p:nvSpPr>
-          <p:cNvPr id="14" name="Text 12"/>
+          <p:cNvPr id="14" name="tw_text_0209"/>
           <p:cNvSpPr/>
           <p:nvPr/>
         </p:nvSpPr>
@@ -8925,7 +10225,7 @@
       </p:sp>
       <p:sp>
         <p:nvSpPr>
-          <p:cNvPr id="16" name="Text 14"/>
+          <p:cNvPr id="16" name="static_text_0210"/>
           <p:cNvSpPr/>
           <p:nvPr/>
         </p:nvSpPr>
@@ -8969,7 +10269,7 @@
       </p:sp>
       <p:sp>
         <p:nvSpPr>
-          <p:cNvPr id="17" name="Text 15"/>
+          <p:cNvPr id="17" name="static_text_0211"/>
           <p:cNvSpPr/>
           <p:nvPr/>
         </p:nvSpPr>
@@ -9013,7 +10313,7 @@
       </p:sp>
       <p:sp>
         <p:nvSpPr>
-          <p:cNvPr id="18" name="Text 16"/>
+          <p:cNvPr id="18" name="tw_text_0212"/>
           <p:cNvSpPr/>
           <p:nvPr/>
         </p:nvSpPr>
@@ -9086,7 +10386,7 @@
       </p:sp>
       <p:sp>
         <p:nvSpPr>
-          <p:cNvPr id="20" name="Text 18"/>
+          <p:cNvPr id="20" name="static_text_0213"/>
           <p:cNvSpPr/>
           <p:nvPr/>
         </p:nvSpPr>
@@ -9130,7 +10430,7 @@
       </p:sp>
       <p:sp>
         <p:nvSpPr>
-          <p:cNvPr id="21" name="Text 19"/>
+          <p:cNvPr id="21" name="static_text_0214"/>
           <p:cNvSpPr/>
           <p:nvPr/>
         </p:nvSpPr>
@@ -9174,7 +10474,7 @@
       </p:sp>
       <p:sp>
         <p:nvSpPr>
-          <p:cNvPr id="22" name="Text 20"/>
+          <p:cNvPr id="22" name="tw_text_0215"/>
           <p:cNvSpPr/>
           <p:nvPr/>
         </p:nvSpPr>
@@ -9245,7 +10545,7 @@
       </p:sp>
       <p:sp>
         <p:nvSpPr>
-          <p:cNvPr id="24" name="Text 22"/>
+          <p:cNvPr id="24" name="static_text_0216"/>
           <p:cNvSpPr/>
           <p:nvPr/>
         </p:nvSpPr>
@@ -9289,7 +10589,7 @@
       </p:sp>
       <p:sp>
         <p:nvSpPr>
-          <p:cNvPr id="25" name="Text 23"/>
+          <p:cNvPr id="25" name="tw_text_0217"/>
           <p:cNvSpPr/>
           <p:nvPr/>
         </p:nvSpPr>
@@ -9385,7 +10685,7 @@
       </p:sp>
       <p:sp>
         <p:nvSpPr>
-          <p:cNvPr id="28" name="Text 26"/>
+          <p:cNvPr id="28" name="static_text_0218"/>
           <p:cNvSpPr/>
           <p:nvPr/>
         </p:nvSpPr>
@@ -9429,7 +10729,7 @@
       </p:sp>
       <p:sp>
         <p:nvSpPr>
-          <p:cNvPr id="29" name="Text 27"/>
+          <p:cNvPr id="29" name="tw_text_0219"/>
           <p:cNvSpPr/>
           <p:nvPr/>
         </p:nvSpPr>
@@ -9476,6 +10776,248 @@
   <p:clrMapOvr>
     <a:masterClrMapping/>
   </p:clrMapOvr>
+  <p:timing>
+    <p:tnLst>
+      <p:par>
+        <p:cTn id="1" dur="indefinite" restart="never" nodeType="tmRoot">
+          <p:childTnLst>
+            <p:seq concurrent="1" nextAc="seek">
+              <p:cTn id="2" dur="indefinite" nodeType="mainSeq">
+                <p:childTnLst>
+                  <p:par>
+                    <p:cTn id="2" fill="hold">
+                      <p:stCondLst>
+                        <p:cond delay="0"/>
+                      </p:stCondLst>
+                      <p:childTnLst>
+                        <p:par>
+                          <p:cTn id="3" presetID="1" presetClass="entr" presetSubtype="0" fill="hold" nodeType="clickEffect">
+                            <p:stCondLst>
+                              <p:cond delay="0"/>
+                            </p:stCondLst>
+                            <p:childTnLst>
+                              <p:animEffect transition="in" filter="typewriter">
+                                <p:cBhvr>
+                                  <p:cTn id="4" dur="520" fill="hold"/>
+                                  <p:tgtEl>
+                                    <p:spTgt spid="9"/>
+                                  </p:tgtEl>
+                                </p:cBhvr>
+                              </p:animEffect>
+                            </p:childTnLst>
+                            <p:iterate type="lt">
+                              <p:tmAbs val="35"/>
+                            </p:iterate>
+                          </p:cTn>
+                        </p:par>
+                      </p:childTnLst>
+                    </p:cTn>
+                  </p:par>
+                  <p:par>
+                    <p:cTn id="5" fill="hold">
+                      <p:stCondLst>
+                        <p:cond delay="90"/>
+                      </p:stCondLst>
+                      <p:childTnLst>
+                        <p:par>
+                          <p:cTn id="6" presetID="1" presetClass="entr" presetSubtype="0" fill="hold" nodeType="clickEffect">
+                            <p:stCondLst>
+                              <p:cond delay="0"/>
+                            </p:stCondLst>
+                            <p:childTnLst>
+                              <p:animEffect transition="in" filter="typewriter">
+                                <p:cBhvr>
+                                  <p:cTn id="7" dur="565" fill="hold"/>
+                                  <p:tgtEl>
+                                    <p:spTgt spid="10"/>
+                                  </p:tgtEl>
+                                </p:cBhvr>
+                              </p:animEffect>
+                            </p:childTnLst>
+                            <p:iterate type="lt">
+                              <p:tmAbs val="35"/>
+                            </p:iterate>
+                          </p:cTn>
+                        </p:par>
+                      </p:childTnLst>
+                    </p:cTn>
+                  </p:par>
+                  <p:par>
+                    <p:cTn id="8" fill="hold">
+                      <p:stCondLst>
+                        <p:cond delay="90"/>
+                      </p:stCondLst>
+                      <p:childTnLst>
+                        <p:par>
+                          <p:cTn id="9" presetID="1" presetClass="entr" presetSubtype="0" fill="hold" nodeType="clickEffect">
+                            <p:stCondLst>
+                              <p:cond delay="0"/>
+                            </p:stCondLst>
+                            <p:childTnLst>
+                              <p:animEffect transition="in" filter="typewriter">
+                                <p:cBhvr>
+                                  <p:cTn id="10" dur="610" fill="hold"/>
+                                  <p:tgtEl>
+                                    <p:spTgt spid="14"/>
+                                  </p:tgtEl>
+                                </p:cBhvr>
+                              </p:animEffect>
+                            </p:childTnLst>
+                            <p:iterate type="lt">
+                              <p:tmAbs val="35"/>
+                            </p:iterate>
+                          </p:cTn>
+                        </p:par>
+                      </p:childTnLst>
+                    </p:cTn>
+                  </p:par>
+                  <p:par>
+                    <p:cTn id="11" fill="hold">
+                      <p:stCondLst>
+                        <p:cond delay="90"/>
+                      </p:stCondLst>
+                      <p:childTnLst>
+                        <p:par>
+                          <p:cTn id="12" presetID="1" presetClass="entr" presetSubtype="0" fill="hold" nodeType="clickEffect">
+                            <p:stCondLst>
+                              <p:cond delay="0"/>
+                            </p:stCondLst>
+                            <p:childTnLst>
+                              <p:animEffect transition="in" filter="typewriter">
+                                <p:cBhvr>
+                                  <p:cTn id="13" dur="655" fill="hold"/>
+                                  <p:tgtEl>
+                                    <p:spTgt spid="18"/>
+                                  </p:tgtEl>
+                                </p:cBhvr>
+                              </p:animEffect>
+                            </p:childTnLst>
+                            <p:iterate type="lt">
+                              <p:tmAbs val="35"/>
+                            </p:iterate>
+                          </p:cTn>
+                        </p:par>
+                      </p:childTnLst>
+                    </p:cTn>
+                  </p:par>
+                  <p:par>
+                    <p:cTn id="14" fill="hold">
+                      <p:stCondLst>
+                        <p:cond delay="90"/>
+                      </p:stCondLst>
+                      <p:childTnLst>
+                        <p:par>
+                          <p:cTn id="15" presetID="1" presetClass="entr" presetSubtype="0" fill="hold" nodeType="clickEffect">
+                            <p:stCondLst>
+                              <p:cond delay="0"/>
+                            </p:stCondLst>
+                            <p:childTnLst>
+                              <p:animEffect transition="in" filter="typewriter">
+                                <p:cBhvr>
+                                  <p:cTn id="16" dur="700" fill="hold"/>
+                                  <p:tgtEl>
+                                    <p:spTgt spid="22"/>
+                                  </p:tgtEl>
+                                </p:cBhvr>
+                              </p:animEffect>
+                            </p:childTnLst>
+                            <p:iterate type="lt">
+                              <p:tmAbs val="35"/>
+                            </p:iterate>
+                          </p:cTn>
+                        </p:par>
+                      </p:childTnLst>
+                    </p:cTn>
+                  </p:par>
+                  <p:par>
+                    <p:cTn id="17" fill="hold">
+                      <p:stCondLst>
+                        <p:cond delay="90"/>
+                      </p:stCondLst>
+                      <p:childTnLst>
+                        <p:par>
+                          <p:cTn id="18" presetID="1" presetClass="entr" presetSubtype="0" fill="hold" nodeType="clickEffect">
+                            <p:stCondLst>
+                              <p:cond delay="0"/>
+                            </p:stCondLst>
+                            <p:childTnLst>
+                              <p:animEffect transition="in" filter="typewriter">
+                                <p:cBhvr>
+                                  <p:cTn id="19" dur="745" fill="hold"/>
+                                  <p:tgtEl>
+                                    <p:spTgt spid="25"/>
+                                  </p:tgtEl>
+                                </p:cBhvr>
+                              </p:animEffect>
+                            </p:childTnLst>
+                            <p:iterate type="lt">
+                              <p:tmAbs val="35"/>
+                            </p:iterate>
+                          </p:cTn>
+                        </p:par>
+                      </p:childTnLst>
+                    </p:cTn>
+                  </p:par>
+                  <p:par>
+                    <p:cTn id="20" fill="hold">
+                      <p:stCondLst>
+                        <p:cond delay="90"/>
+                      </p:stCondLst>
+                      <p:childTnLst>
+                        <p:par>
+                          <p:cTn id="21" presetID="1" presetClass="entr" presetSubtype="0" fill="hold" nodeType="clickEffect">
+                            <p:stCondLst>
+                              <p:cond delay="0"/>
+                            </p:stCondLst>
+                            <p:childTnLst>
+                              <p:animEffect transition="in" filter="typewriter">
+                                <p:cBhvr>
+                                  <p:cTn id="22" dur="790" fill="hold"/>
+                                  <p:tgtEl>
+                                    <p:spTgt spid="29"/>
+                                  </p:tgtEl>
+                                </p:cBhvr>
+                              </p:animEffect>
+                            </p:childTnLst>
+                            <p:iterate type="lt">
+                              <p:tmAbs val="35"/>
+                            </p:iterate>
+                          </p:cTn>
+                        </p:par>
+                      </p:childTnLst>
+                    </p:cTn>
+                  </p:par>
+                </p:childTnLst>
+              </p:cTn>
+              <p:prevCondLst>
+                <p:cond evt="onPrev" delay="0">
+                  <p:tgtEl>
+                    <p:sldTgt/>
+                  </p:tgtEl>
+                </p:cond>
+              </p:prevCondLst>
+              <p:nextCondLst>
+                <p:cond evt="onNext" delay="0">
+                  <p:tgtEl>
+                    <p:sldTgt/>
+                  </p:tgtEl>
+                </p:cond>
+              </p:nextCondLst>
+            </p:seq>
+          </p:childTnLst>
+        </p:cTn>
+      </p:par>
+    </p:tnLst>
+    <p:bldLst>
+      <p:bldP spid="9" grpId="0" build="p"/>
+      <p:bldP spid="10" grpId="0" build="p"/>
+      <p:bldP spid="14" grpId="0" build="p"/>
+      <p:bldP spid="18" grpId="0" build="p"/>
+      <p:bldP spid="22" grpId="0" build="p"/>
+      <p:bldP spid="25" grpId="0" build="p"/>
+      <p:bldP spid="29" grpId="0" build="p"/>
+    </p:bldLst>
+  </p:timing>
 </p:sld>
 </file>
 
@@ -9607,7 +11149,7 @@
       </p:sp>
       <p:sp>
         <p:nvSpPr>
-          <p:cNvPr id="6" name="Text 4"/>
+          <p:cNvPr id="6" name="static_text_0220"/>
           <p:cNvSpPr/>
           <p:nvPr/>
         </p:nvSpPr>
@@ -9651,7 +11193,7 @@
       </p:sp>
       <p:sp>
         <p:nvSpPr>
-          <p:cNvPr id="7" name="Text 5"/>
+          <p:cNvPr id="7" name="static_text_0221"/>
           <p:cNvSpPr/>
           <p:nvPr/>
         </p:nvSpPr>
@@ -9718,7 +11260,7 @@
       </p:sp>
       <p:sp>
         <p:nvSpPr>
-          <p:cNvPr id="9" name="Text 7"/>
+          <p:cNvPr id="9" name="tw_text_0222"/>
           <p:cNvSpPr/>
           <p:nvPr/>
         </p:nvSpPr>
@@ -9762,7 +11304,7 @@
       </p:sp>
       <p:sp>
         <p:nvSpPr>
-          <p:cNvPr id="10" name="Text 8"/>
+          <p:cNvPr id="10" name="tw_text_0223"/>
           <p:cNvSpPr/>
           <p:nvPr/>
         </p:nvSpPr>
@@ -9884,7 +11426,7 @@
       </p:pic>
       <p:sp>
         <p:nvSpPr>
-          <p:cNvPr id="14" name="Text 11"/>
+          <p:cNvPr id="14" name="static_text_0224"/>
           <p:cNvSpPr/>
           <p:nvPr/>
         </p:nvSpPr>
@@ -9928,7 +11470,7 @@
       </p:sp>
       <p:sp>
         <p:nvSpPr>
-          <p:cNvPr id="15" name="Text 12"/>
+          <p:cNvPr id="15" name="tw_text_0225"/>
           <p:cNvSpPr/>
           <p:nvPr/>
         </p:nvSpPr>
@@ -10024,7 +11566,7 @@
       </p:sp>
       <p:sp>
         <p:nvSpPr>
-          <p:cNvPr id="18" name="Text 15"/>
+          <p:cNvPr id="18" name="static_text_0226"/>
           <p:cNvSpPr/>
           <p:nvPr/>
         </p:nvSpPr>
@@ -10068,7 +11610,7 @@
       </p:sp>
       <p:sp>
         <p:nvSpPr>
-          <p:cNvPr id="19" name="Text 16"/>
+          <p:cNvPr id="19" name="tw_text_0227"/>
           <p:cNvSpPr/>
           <p:nvPr/>
         </p:nvSpPr>
@@ -10164,7 +11706,7 @@
       </p:sp>
       <p:sp>
         <p:nvSpPr>
-          <p:cNvPr id="22" name="Text 19"/>
+          <p:cNvPr id="22" name="static_text_0228"/>
           <p:cNvSpPr/>
           <p:nvPr/>
         </p:nvSpPr>
@@ -10208,7 +11750,7 @@
       </p:sp>
       <p:sp>
         <p:nvSpPr>
-          <p:cNvPr id="23" name="Text 20"/>
+          <p:cNvPr id="23" name="tw_text_0229"/>
           <p:cNvSpPr/>
           <p:nvPr/>
         </p:nvSpPr>
@@ -10304,7 +11846,7 @@
       </p:sp>
       <p:sp>
         <p:nvSpPr>
-          <p:cNvPr id="26" name="Text 23"/>
+          <p:cNvPr id="26" name="static_text_0230"/>
           <p:cNvSpPr/>
           <p:nvPr/>
         </p:nvSpPr>
@@ -10348,7 +11890,7 @@
       </p:sp>
       <p:sp>
         <p:nvSpPr>
-          <p:cNvPr id="27" name="Text 24"/>
+          <p:cNvPr id="27" name="tw_text_0231"/>
           <p:cNvSpPr/>
           <p:nvPr/>
         </p:nvSpPr>
@@ -10444,7 +11986,7 @@
       </p:sp>
       <p:sp>
         <p:nvSpPr>
-          <p:cNvPr id="30" name="Text 27"/>
+          <p:cNvPr id="30" name="static_text_0232"/>
           <p:cNvSpPr/>
           <p:nvPr/>
         </p:nvSpPr>
@@ -10488,7 +12030,7 @@
       </p:sp>
       <p:sp>
         <p:nvSpPr>
-          <p:cNvPr id="31" name="Text 28"/>
+          <p:cNvPr id="31" name="tw_text_0233"/>
           <p:cNvSpPr/>
           <p:nvPr/>
         </p:nvSpPr>
@@ -10555,7 +12097,7 @@
       </p:sp>
       <p:sp>
         <p:nvSpPr>
-          <p:cNvPr id="33" name="Text 30"/>
+          <p:cNvPr id="33" name="static_text_0234"/>
           <p:cNvSpPr/>
           <p:nvPr/>
         </p:nvSpPr>
@@ -10602,6 +12144,248 @@
   <p:clrMapOvr>
     <a:masterClrMapping/>
   </p:clrMapOvr>
+  <p:timing>
+    <p:tnLst>
+      <p:par>
+        <p:cTn id="1" dur="indefinite" restart="never" nodeType="tmRoot">
+          <p:childTnLst>
+            <p:seq concurrent="1" nextAc="seek">
+              <p:cTn id="2" dur="indefinite" nodeType="mainSeq">
+                <p:childTnLst>
+                  <p:par>
+                    <p:cTn id="2" fill="hold">
+                      <p:stCondLst>
+                        <p:cond delay="0"/>
+                      </p:stCondLst>
+                      <p:childTnLst>
+                        <p:par>
+                          <p:cTn id="3" presetID="1" presetClass="entr" presetSubtype="0" fill="hold" nodeType="clickEffect">
+                            <p:stCondLst>
+                              <p:cond delay="0"/>
+                            </p:stCondLst>
+                            <p:childTnLst>
+                              <p:animEffect transition="in" filter="typewriter">
+                                <p:cBhvr>
+                                  <p:cTn id="4" dur="520" fill="hold"/>
+                                  <p:tgtEl>
+                                    <p:spTgt spid="9"/>
+                                  </p:tgtEl>
+                                </p:cBhvr>
+                              </p:animEffect>
+                            </p:childTnLst>
+                            <p:iterate type="lt">
+                              <p:tmAbs val="35"/>
+                            </p:iterate>
+                          </p:cTn>
+                        </p:par>
+                      </p:childTnLst>
+                    </p:cTn>
+                  </p:par>
+                  <p:par>
+                    <p:cTn id="5" fill="hold">
+                      <p:stCondLst>
+                        <p:cond delay="90"/>
+                      </p:stCondLst>
+                      <p:childTnLst>
+                        <p:par>
+                          <p:cTn id="6" presetID="1" presetClass="entr" presetSubtype="0" fill="hold" nodeType="clickEffect">
+                            <p:stCondLst>
+                              <p:cond delay="0"/>
+                            </p:stCondLst>
+                            <p:childTnLst>
+                              <p:animEffect transition="in" filter="typewriter">
+                                <p:cBhvr>
+                                  <p:cTn id="7" dur="565" fill="hold"/>
+                                  <p:tgtEl>
+                                    <p:spTgt spid="10"/>
+                                  </p:tgtEl>
+                                </p:cBhvr>
+                              </p:animEffect>
+                            </p:childTnLst>
+                            <p:iterate type="lt">
+                              <p:tmAbs val="35"/>
+                            </p:iterate>
+                          </p:cTn>
+                        </p:par>
+                      </p:childTnLst>
+                    </p:cTn>
+                  </p:par>
+                  <p:par>
+                    <p:cTn id="8" fill="hold">
+                      <p:stCondLst>
+                        <p:cond delay="90"/>
+                      </p:stCondLst>
+                      <p:childTnLst>
+                        <p:par>
+                          <p:cTn id="9" presetID="1" presetClass="entr" presetSubtype="0" fill="hold" nodeType="clickEffect">
+                            <p:stCondLst>
+                              <p:cond delay="0"/>
+                            </p:stCondLst>
+                            <p:childTnLst>
+                              <p:animEffect transition="in" filter="typewriter">
+                                <p:cBhvr>
+                                  <p:cTn id="10" dur="610" fill="hold"/>
+                                  <p:tgtEl>
+                                    <p:spTgt spid="15"/>
+                                  </p:tgtEl>
+                                </p:cBhvr>
+                              </p:animEffect>
+                            </p:childTnLst>
+                            <p:iterate type="lt">
+                              <p:tmAbs val="35"/>
+                            </p:iterate>
+                          </p:cTn>
+                        </p:par>
+                      </p:childTnLst>
+                    </p:cTn>
+                  </p:par>
+                  <p:par>
+                    <p:cTn id="11" fill="hold">
+                      <p:stCondLst>
+                        <p:cond delay="90"/>
+                      </p:stCondLst>
+                      <p:childTnLst>
+                        <p:par>
+                          <p:cTn id="12" presetID="1" presetClass="entr" presetSubtype="0" fill="hold" nodeType="clickEffect">
+                            <p:stCondLst>
+                              <p:cond delay="0"/>
+                            </p:stCondLst>
+                            <p:childTnLst>
+                              <p:animEffect transition="in" filter="typewriter">
+                                <p:cBhvr>
+                                  <p:cTn id="13" dur="655" fill="hold"/>
+                                  <p:tgtEl>
+                                    <p:spTgt spid="19"/>
+                                  </p:tgtEl>
+                                </p:cBhvr>
+                              </p:animEffect>
+                            </p:childTnLst>
+                            <p:iterate type="lt">
+                              <p:tmAbs val="35"/>
+                            </p:iterate>
+                          </p:cTn>
+                        </p:par>
+                      </p:childTnLst>
+                    </p:cTn>
+                  </p:par>
+                  <p:par>
+                    <p:cTn id="14" fill="hold">
+                      <p:stCondLst>
+                        <p:cond delay="90"/>
+                      </p:stCondLst>
+                      <p:childTnLst>
+                        <p:par>
+                          <p:cTn id="15" presetID="1" presetClass="entr" presetSubtype="0" fill="hold" nodeType="clickEffect">
+                            <p:stCondLst>
+                              <p:cond delay="0"/>
+                            </p:stCondLst>
+                            <p:childTnLst>
+                              <p:animEffect transition="in" filter="typewriter">
+                                <p:cBhvr>
+                                  <p:cTn id="16" dur="700" fill="hold"/>
+                                  <p:tgtEl>
+                                    <p:spTgt spid="23"/>
+                                  </p:tgtEl>
+                                </p:cBhvr>
+                              </p:animEffect>
+                            </p:childTnLst>
+                            <p:iterate type="lt">
+                              <p:tmAbs val="35"/>
+                            </p:iterate>
+                          </p:cTn>
+                        </p:par>
+                      </p:childTnLst>
+                    </p:cTn>
+                  </p:par>
+                  <p:par>
+                    <p:cTn id="17" fill="hold">
+                      <p:stCondLst>
+                        <p:cond delay="90"/>
+                      </p:stCondLst>
+                      <p:childTnLst>
+                        <p:par>
+                          <p:cTn id="18" presetID="1" presetClass="entr" presetSubtype="0" fill="hold" nodeType="clickEffect">
+                            <p:stCondLst>
+                              <p:cond delay="0"/>
+                            </p:stCondLst>
+                            <p:childTnLst>
+                              <p:animEffect transition="in" filter="typewriter">
+                                <p:cBhvr>
+                                  <p:cTn id="19" dur="745" fill="hold"/>
+                                  <p:tgtEl>
+                                    <p:spTgt spid="27"/>
+                                  </p:tgtEl>
+                                </p:cBhvr>
+                              </p:animEffect>
+                            </p:childTnLst>
+                            <p:iterate type="lt">
+                              <p:tmAbs val="35"/>
+                            </p:iterate>
+                          </p:cTn>
+                        </p:par>
+                      </p:childTnLst>
+                    </p:cTn>
+                  </p:par>
+                  <p:par>
+                    <p:cTn id="20" fill="hold">
+                      <p:stCondLst>
+                        <p:cond delay="90"/>
+                      </p:stCondLst>
+                      <p:childTnLst>
+                        <p:par>
+                          <p:cTn id="21" presetID="1" presetClass="entr" presetSubtype="0" fill="hold" nodeType="clickEffect">
+                            <p:stCondLst>
+                              <p:cond delay="0"/>
+                            </p:stCondLst>
+                            <p:childTnLst>
+                              <p:animEffect transition="in" filter="typewriter">
+                                <p:cBhvr>
+                                  <p:cTn id="22" dur="790" fill="hold"/>
+                                  <p:tgtEl>
+                                    <p:spTgt spid="31"/>
+                                  </p:tgtEl>
+                                </p:cBhvr>
+                              </p:animEffect>
+                            </p:childTnLst>
+                            <p:iterate type="lt">
+                              <p:tmAbs val="35"/>
+                            </p:iterate>
+                          </p:cTn>
+                        </p:par>
+                      </p:childTnLst>
+                    </p:cTn>
+                  </p:par>
+                </p:childTnLst>
+              </p:cTn>
+              <p:prevCondLst>
+                <p:cond evt="onPrev" delay="0">
+                  <p:tgtEl>
+                    <p:sldTgt/>
+                  </p:tgtEl>
+                </p:cond>
+              </p:prevCondLst>
+              <p:nextCondLst>
+                <p:cond evt="onNext" delay="0">
+                  <p:tgtEl>
+                    <p:sldTgt/>
+                  </p:tgtEl>
+                </p:cond>
+              </p:nextCondLst>
+            </p:seq>
+          </p:childTnLst>
+        </p:cTn>
+      </p:par>
+    </p:tnLst>
+    <p:bldLst>
+      <p:bldP spid="9" grpId="0" build="p"/>
+      <p:bldP spid="10" grpId="0" build="p"/>
+      <p:bldP spid="15" grpId="0" build="p"/>
+      <p:bldP spid="19" grpId="0" build="p"/>
+      <p:bldP spid="23" grpId="0" build="p"/>
+      <p:bldP spid="27" grpId="0" build="p"/>
+      <p:bldP spid="31" grpId="0" build="p"/>
+    </p:bldLst>
+  </p:timing>
 </p:sld>
 </file>
 
@@ -10733,7 +12517,7 @@
       </p:sp>
       <p:sp>
         <p:nvSpPr>
-          <p:cNvPr id="6" name="Text 4"/>
+          <p:cNvPr id="6" name="static_text_0235"/>
           <p:cNvSpPr/>
           <p:nvPr/>
         </p:nvSpPr>
@@ -10777,7 +12561,7 @@
       </p:sp>
       <p:sp>
         <p:nvSpPr>
-          <p:cNvPr id="7" name="Text 5"/>
+          <p:cNvPr id="7" name="static_text_0236"/>
           <p:cNvSpPr/>
           <p:nvPr/>
         </p:nvSpPr>
@@ -10844,7 +12628,7 @@
       </p:sp>
       <p:sp>
         <p:nvSpPr>
-          <p:cNvPr id="9" name="Text 7"/>
+          <p:cNvPr id="9" name="tw_text_0237"/>
           <p:cNvSpPr/>
           <p:nvPr/>
         </p:nvSpPr>
@@ -10888,7 +12672,7 @@
       </p:sp>
       <p:sp>
         <p:nvSpPr>
-          <p:cNvPr id="10" name="Text 8"/>
+          <p:cNvPr id="10" name="tw_text_0238"/>
           <p:cNvSpPr/>
           <p:nvPr/>
         </p:nvSpPr>
@@ -10984,7 +12768,7 @@
       </p:sp>
       <p:sp>
         <p:nvSpPr>
-          <p:cNvPr id="13" name="Text 11"/>
+          <p:cNvPr id="13" name="static_text_0239"/>
           <p:cNvSpPr/>
           <p:nvPr/>
         </p:nvSpPr>
@@ -11028,7 +12812,7 @@
       </p:sp>
       <p:sp>
         <p:nvSpPr>
-          <p:cNvPr id="14" name="Text 12"/>
+          <p:cNvPr id="14" name="tw_text_0240"/>
           <p:cNvSpPr/>
           <p:nvPr/>
         </p:nvSpPr>
@@ -11184,7 +12968,7 @@
       </p:sp>
       <p:sp>
         <p:nvSpPr>
-          <p:cNvPr id="17" name="Text 15"/>
+          <p:cNvPr id="17" name="static_text_0241"/>
           <p:cNvSpPr/>
           <p:nvPr/>
         </p:nvSpPr>
@@ -11228,7 +13012,7 @@
       </p:sp>
       <p:sp>
         <p:nvSpPr>
-          <p:cNvPr id="18" name="Text 16"/>
+          <p:cNvPr id="18" name="tw_text_0242"/>
           <p:cNvSpPr/>
           <p:nvPr/>
         </p:nvSpPr>
@@ -11384,7 +13168,7 @@
       </p:sp>
       <p:sp>
         <p:nvSpPr>
-          <p:cNvPr id="21" name="Text 19"/>
+          <p:cNvPr id="21" name="static_text_0243"/>
           <p:cNvSpPr/>
           <p:nvPr/>
         </p:nvSpPr>
@@ -11428,7 +13212,7 @@
       </p:sp>
       <p:sp>
         <p:nvSpPr>
-          <p:cNvPr id="22" name="Text 20"/>
+          <p:cNvPr id="22" name="tw_text_0244"/>
           <p:cNvSpPr/>
           <p:nvPr/>
         </p:nvSpPr>
@@ -11584,7 +13368,7 @@
       </p:sp>
       <p:sp>
         <p:nvSpPr>
-          <p:cNvPr id="25" name="Text 23"/>
+          <p:cNvPr id="25" name="static_text_0245"/>
           <p:cNvSpPr/>
           <p:nvPr/>
         </p:nvSpPr>
@@ -11628,7 +13412,7 @@
       </p:sp>
       <p:sp>
         <p:nvSpPr>
-          <p:cNvPr id="26" name="Text 24"/>
+          <p:cNvPr id="26" name="tw_text_0246"/>
           <p:cNvSpPr/>
           <p:nvPr/>
         </p:nvSpPr>
@@ -11759,7 +13543,7 @@
       </p:sp>
       <p:sp>
         <p:nvSpPr>
-          <p:cNvPr id="28" name="Text 26"/>
+          <p:cNvPr id="28" name="tw_text_0247"/>
           <p:cNvSpPr/>
           <p:nvPr/>
         </p:nvSpPr>
@@ -11806,6 +13590,248 @@
   <p:clrMapOvr>
     <a:masterClrMapping/>
   </p:clrMapOvr>
+  <p:timing>
+    <p:tnLst>
+      <p:par>
+        <p:cTn id="1" dur="indefinite" restart="never" nodeType="tmRoot">
+          <p:childTnLst>
+            <p:seq concurrent="1" nextAc="seek">
+              <p:cTn id="2" dur="indefinite" nodeType="mainSeq">
+                <p:childTnLst>
+                  <p:par>
+                    <p:cTn id="2" fill="hold">
+                      <p:stCondLst>
+                        <p:cond delay="0"/>
+                      </p:stCondLst>
+                      <p:childTnLst>
+                        <p:par>
+                          <p:cTn id="3" presetID="1" presetClass="entr" presetSubtype="0" fill="hold" nodeType="clickEffect">
+                            <p:stCondLst>
+                              <p:cond delay="0"/>
+                            </p:stCondLst>
+                            <p:childTnLst>
+                              <p:animEffect transition="in" filter="typewriter">
+                                <p:cBhvr>
+                                  <p:cTn id="4" dur="520" fill="hold"/>
+                                  <p:tgtEl>
+                                    <p:spTgt spid="9"/>
+                                  </p:tgtEl>
+                                </p:cBhvr>
+                              </p:animEffect>
+                            </p:childTnLst>
+                            <p:iterate type="lt">
+                              <p:tmAbs val="35"/>
+                            </p:iterate>
+                          </p:cTn>
+                        </p:par>
+                      </p:childTnLst>
+                    </p:cTn>
+                  </p:par>
+                  <p:par>
+                    <p:cTn id="5" fill="hold">
+                      <p:stCondLst>
+                        <p:cond delay="90"/>
+                      </p:stCondLst>
+                      <p:childTnLst>
+                        <p:par>
+                          <p:cTn id="6" presetID="1" presetClass="entr" presetSubtype="0" fill="hold" nodeType="clickEffect">
+                            <p:stCondLst>
+                              <p:cond delay="0"/>
+                            </p:stCondLst>
+                            <p:childTnLst>
+                              <p:animEffect transition="in" filter="typewriter">
+                                <p:cBhvr>
+                                  <p:cTn id="7" dur="565" fill="hold"/>
+                                  <p:tgtEl>
+                                    <p:spTgt spid="10"/>
+                                  </p:tgtEl>
+                                </p:cBhvr>
+                              </p:animEffect>
+                            </p:childTnLst>
+                            <p:iterate type="lt">
+                              <p:tmAbs val="35"/>
+                            </p:iterate>
+                          </p:cTn>
+                        </p:par>
+                      </p:childTnLst>
+                    </p:cTn>
+                  </p:par>
+                  <p:par>
+                    <p:cTn id="8" fill="hold">
+                      <p:stCondLst>
+                        <p:cond delay="90"/>
+                      </p:stCondLst>
+                      <p:childTnLst>
+                        <p:par>
+                          <p:cTn id="9" presetID="1" presetClass="entr" presetSubtype="0" fill="hold" nodeType="clickEffect">
+                            <p:stCondLst>
+                              <p:cond delay="0"/>
+                            </p:stCondLst>
+                            <p:childTnLst>
+                              <p:animEffect transition="in" filter="typewriter">
+                                <p:cBhvr>
+                                  <p:cTn id="10" dur="610" fill="hold"/>
+                                  <p:tgtEl>
+                                    <p:spTgt spid="14"/>
+                                  </p:tgtEl>
+                                </p:cBhvr>
+                              </p:animEffect>
+                            </p:childTnLst>
+                            <p:iterate type="lt">
+                              <p:tmAbs val="35"/>
+                            </p:iterate>
+                          </p:cTn>
+                        </p:par>
+                      </p:childTnLst>
+                    </p:cTn>
+                  </p:par>
+                  <p:par>
+                    <p:cTn id="11" fill="hold">
+                      <p:stCondLst>
+                        <p:cond delay="90"/>
+                      </p:stCondLst>
+                      <p:childTnLst>
+                        <p:par>
+                          <p:cTn id="12" presetID="1" presetClass="entr" presetSubtype="0" fill="hold" nodeType="clickEffect">
+                            <p:stCondLst>
+                              <p:cond delay="0"/>
+                            </p:stCondLst>
+                            <p:childTnLst>
+                              <p:animEffect transition="in" filter="typewriter">
+                                <p:cBhvr>
+                                  <p:cTn id="13" dur="655" fill="hold"/>
+                                  <p:tgtEl>
+                                    <p:spTgt spid="18"/>
+                                  </p:tgtEl>
+                                </p:cBhvr>
+                              </p:animEffect>
+                            </p:childTnLst>
+                            <p:iterate type="lt">
+                              <p:tmAbs val="35"/>
+                            </p:iterate>
+                          </p:cTn>
+                        </p:par>
+                      </p:childTnLst>
+                    </p:cTn>
+                  </p:par>
+                  <p:par>
+                    <p:cTn id="14" fill="hold">
+                      <p:stCondLst>
+                        <p:cond delay="90"/>
+                      </p:stCondLst>
+                      <p:childTnLst>
+                        <p:par>
+                          <p:cTn id="15" presetID="1" presetClass="entr" presetSubtype="0" fill="hold" nodeType="clickEffect">
+                            <p:stCondLst>
+                              <p:cond delay="0"/>
+                            </p:stCondLst>
+                            <p:childTnLst>
+                              <p:animEffect transition="in" filter="typewriter">
+                                <p:cBhvr>
+                                  <p:cTn id="16" dur="700" fill="hold"/>
+                                  <p:tgtEl>
+                                    <p:spTgt spid="22"/>
+                                  </p:tgtEl>
+                                </p:cBhvr>
+                              </p:animEffect>
+                            </p:childTnLst>
+                            <p:iterate type="lt">
+                              <p:tmAbs val="35"/>
+                            </p:iterate>
+                          </p:cTn>
+                        </p:par>
+                      </p:childTnLst>
+                    </p:cTn>
+                  </p:par>
+                  <p:par>
+                    <p:cTn id="17" fill="hold">
+                      <p:stCondLst>
+                        <p:cond delay="90"/>
+                      </p:stCondLst>
+                      <p:childTnLst>
+                        <p:par>
+                          <p:cTn id="18" presetID="1" presetClass="entr" presetSubtype="0" fill="hold" nodeType="clickEffect">
+                            <p:stCondLst>
+                              <p:cond delay="0"/>
+                            </p:stCondLst>
+                            <p:childTnLst>
+                              <p:animEffect transition="in" filter="typewriter">
+                                <p:cBhvr>
+                                  <p:cTn id="19" dur="745" fill="hold"/>
+                                  <p:tgtEl>
+                                    <p:spTgt spid="26"/>
+                                  </p:tgtEl>
+                                </p:cBhvr>
+                              </p:animEffect>
+                            </p:childTnLst>
+                            <p:iterate type="lt">
+                              <p:tmAbs val="35"/>
+                            </p:iterate>
+                          </p:cTn>
+                        </p:par>
+                      </p:childTnLst>
+                    </p:cTn>
+                  </p:par>
+                  <p:par>
+                    <p:cTn id="20" fill="hold">
+                      <p:stCondLst>
+                        <p:cond delay="90"/>
+                      </p:stCondLst>
+                      <p:childTnLst>
+                        <p:par>
+                          <p:cTn id="21" presetID="1" presetClass="entr" presetSubtype="0" fill="hold" nodeType="clickEffect">
+                            <p:stCondLst>
+                              <p:cond delay="0"/>
+                            </p:stCondLst>
+                            <p:childTnLst>
+                              <p:animEffect transition="in" filter="typewriter">
+                                <p:cBhvr>
+                                  <p:cTn id="22" dur="790" fill="hold"/>
+                                  <p:tgtEl>
+                                    <p:spTgt spid="28"/>
+                                  </p:tgtEl>
+                                </p:cBhvr>
+                              </p:animEffect>
+                            </p:childTnLst>
+                            <p:iterate type="lt">
+                              <p:tmAbs val="35"/>
+                            </p:iterate>
+                          </p:cTn>
+                        </p:par>
+                      </p:childTnLst>
+                    </p:cTn>
+                  </p:par>
+                </p:childTnLst>
+              </p:cTn>
+              <p:prevCondLst>
+                <p:cond evt="onPrev" delay="0">
+                  <p:tgtEl>
+                    <p:sldTgt/>
+                  </p:tgtEl>
+                </p:cond>
+              </p:prevCondLst>
+              <p:nextCondLst>
+                <p:cond evt="onNext" delay="0">
+                  <p:tgtEl>
+                    <p:sldTgt/>
+                  </p:tgtEl>
+                </p:cond>
+              </p:nextCondLst>
+            </p:seq>
+          </p:childTnLst>
+        </p:cTn>
+      </p:par>
+    </p:tnLst>
+    <p:bldLst>
+      <p:bldP spid="9" grpId="0" build="p"/>
+      <p:bldP spid="10" grpId="0" build="p"/>
+      <p:bldP spid="14" grpId="0" build="p"/>
+      <p:bldP spid="18" grpId="0" build="p"/>
+      <p:bldP spid="22" grpId="0" build="p"/>
+      <p:bldP spid="26" grpId="0" build="p"/>
+      <p:bldP spid="28" grpId="0" build="p"/>
+    </p:bldLst>
+  </p:timing>
 </p:sld>
 </file>
 
@@ -11937,7 +13963,7 @@
       </p:sp>
       <p:sp>
         <p:nvSpPr>
-          <p:cNvPr id="6" name="Text 4"/>
+          <p:cNvPr id="6" name="static_text_0248"/>
           <p:cNvSpPr/>
           <p:nvPr/>
         </p:nvSpPr>
@@ -11981,7 +14007,7 @@
       </p:sp>
       <p:sp>
         <p:nvSpPr>
-          <p:cNvPr id="7" name="Text 5"/>
+          <p:cNvPr id="7" name="static_text_0249"/>
           <p:cNvSpPr/>
           <p:nvPr/>
         </p:nvSpPr>
@@ -12048,7 +14074,7 @@
       </p:sp>
       <p:sp>
         <p:nvSpPr>
-          <p:cNvPr id="9" name="Text 7"/>
+          <p:cNvPr id="9" name="tw_text_0250"/>
           <p:cNvSpPr/>
           <p:nvPr/>
         </p:nvSpPr>
@@ -12092,7 +14118,7 @@
       </p:sp>
       <p:sp>
         <p:nvSpPr>
-          <p:cNvPr id="10" name="Text 8"/>
+          <p:cNvPr id="10" name="tw_text_0251"/>
           <p:cNvSpPr/>
           <p:nvPr/>
         </p:nvSpPr>
@@ -12163,7 +14189,7 @@
       </p:sp>
       <p:sp>
         <p:nvSpPr>
-          <p:cNvPr id="12" name="Text 10"/>
+          <p:cNvPr id="12" name="static_text_0252"/>
           <p:cNvSpPr/>
           <p:nvPr/>
         </p:nvSpPr>
@@ -12207,7 +14233,7 @@
       </p:sp>
       <p:sp>
         <p:nvSpPr>
-          <p:cNvPr id="13" name="Text 11"/>
+          <p:cNvPr id="13" name="static_text_0253"/>
           <p:cNvSpPr/>
           <p:nvPr/>
         </p:nvSpPr>
@@ -12251,7 +14277,7 @@
       </p:sp>
       <p:sp>
         <p:nvSpPr>
-          <p:cNvPr id="14" name="Text 12"/>
+          <p:cNvPr id="14" name="static_text_0254"/>
           <p:cNvSpPr/>
           <p:nvPr/>
         </p:nvSpPr>
@@ -12295,7 +14321,7 @@
       </p:sp>
       <p:sp>
         <p:nvSpPr>
-          <p:cNvPr id="15" name="Text 13"/>
+          <p:cNvPr id="15" name="static_text_0255"/>
           <p:cNvSpPr/>
           <p:nvPr/>
         </p:nvSpPr>
@@ -12362,7 +14388,7 @@
       </p:sp>
       <p:sp>
         <p:nvSpPr>
-          <p:cNvPr id="17" name="Text 15"/>
+          <p:cNvPr id="17" name="static_text_0256"/>
           <p:cNvSpPr/>
           <p:nvPr/>
         </p:nvSpPr>
@@ -12406,7 +14432,7 @@
       </p:sp>
       <p:sp>
         <p:nvSpPr>
-          <p:cNvPr id="18" name="Text 16"/>
+          <p:cNvPr id="18" name="static_text_0257"/>
           <p:cNvSpPr/>
           <p:nvPr/>
         </p:nvSpPr>
@@ -12450,7 +14476,7 @@
       </p:sp>
       <p:sp>
         <p:nvSpPr>
-          <p:cNvPr id="19" name="Text 17"/>
+          <p:cNvPr id="19" name="tw_text_0258"/>
           <p:cNvSpPr/>
           <p:nvPr/>
         </p:nvSpPr>
@@ -12494,7 +14520,7 @@
       </p:sp>
       <p:sp>
         <p:nvSpPr>
-          <p:cNvPr id="20" name="Text 18"/>
+          <p:cNvPr id="20" name="tw_text_0259"/>
           <p:cNvSpPr/>
           <p:nvPr/>
         </p:nvSpPr>
@@ -12563,7 +14589,7 @@
       </p:sp>
       <p:sp>
         <p:nvSpPr>
-          <p:cNvPr id="22" name="Text 20"/>
+          <p:cNvPr id="22" name="static_text_0260"/>
           <p:cNvSpPr/>
           <p:nvPr/>
         </p:nvSpPr>
@@ -12607,7 +14633,7 @@
       </p:sp>
       <p:sp>
         <p:nvSpPr>
-          <p:cNvPr id="23" name="Text 21"/>
+          <p:cNvPr id="23" name="static_text_0261"/>
           <p:cNvSpPr/>
           <p:nvPr/>
         </p:nvSpPr>
@@ -12651,7 +14677,7 @@
       </p:sp>
       <p:sp>
         <p:nvSpPr>
-          <p:cNvPr id="24" name="Text 22"/>
+          <p:cNvPr id="24" name="tw_text_0262"/>
           <p:cNvSpPr/>
           <p:nvPr/>
         </p:nvSpPr>
@@ -12695,7 +14721,7 @@
       </p:sp>
       <p:sp>
         <p:nvSpPr>
-          <p:cNvPr id="25" name="Text 23"/>
+          <p:cNvPr id="25" name="tw_text_0263"/>
           <p:cNvSpPr/>
           <p:nvPr/>
         </p:nvSpPr>
@@ -12739,7 +14765,7 @@
       </p:sp>
       <p:sp>
         <p:nvSpPr>
-          <p:cNvPr id="26" name="Text 24"/>
+          <p:cNvPr id="26" name="tw_text_0264"/>
           <p:cNvSpPr/>
           <p:nvPr/>
         </p:nvSpPr>
@@ -12783,7 +14809,7 @@
       </p:sp>
       <p:sp>
         <p:nvSpPr>
-          <p:cNvPr id="27" name="Text 25"/>
+          <p:cNvPr id="27" name="static_text_0265"/>
           <p:cNvSpPr/>
           <p:nvPr/>
         </p:nvSpPr>
@@ -12827,7 +14853,7 @@
       </p:sp>
       <p:sp>
         <p:nvSpPr>
-          <p:cNvPr id="28" name="Text 26"/>
+          <p:cNvPr id="28" name="tw_text_0266"/>
           <p:cNvSpPr/>
           <p:nvPr/>
         </p:nvSpPr>
@@ -12871,7 +14897,7 @@
       </p:sp>
       <p:sp>
         <p:nvSpPr>
-          <p:cNvPr id="29" name="Text 27"/>
+          <p:cNvPr id="29" name="static_text_0267"/>
           <p:cNvSpPr/>
           <p:nvPr/>
         </p:nvSpPr>
@@ -12940,7 +14966,7 @@
       </p:sp>
       <p:sp>
         <p:nvSpPr>
-          <p:cNvPr id="31" name="Text 29"/>
+          <p:cNvPr id="31" name="tw_text_0268"/>
           <p:cNvSpPr/>
           <p:nvPr/>
         </p:nvSpPr>
@@ -12984,7 +15010,7 @@
       </p:sp>
       <p:sp>
         <p:nvSpPr>
-          <p:cNvPr id="32" name="Text 30"/>
+          <p:cNvPr id="32" name="static_text_0269"/>
           <p:cNvSpPr/>
           <p:nvPr/>
         </p:nvSpPr>
@@ -13028,7 +15054,7 @@
       </p:sp>
       <p:sp>
         <p:nvSpPr>
-          <p:cNvPr id="33" name="Text 31"/>
+          <p:cNvPr id="33" name="tw_text_0270"/>
           <p:cNvSpPr/>
           <p:nvPr/>
         </p:nvSpPr>
@@ -13072,7 +15098,7 @@
       </p:sp>
       <p:sp>
         <p:nvSpPr>
-          <p:cNvPr id="34" name="Text 32"/>
+          <p:cNvPr id="34" name="static_text_0271"/>
           <p:cNvSpPr/>
           <p:nvPr/>
         </p:nvSpPr>
@@ -13116,7 +15142,7 @@
       </p:sp>
       <p:sp>
         <p:nvSpPr>
-          <p:cNvPr id="35" name="Text 33"/>
+          <p:cNvPr id="35" name="tw_text_0272"/>
           <p:cNvSpPr/>
           <p:nvPr/>
         </p:nvSpPr>
@@ -13160,7 +15186,7 @@
       </p:sp>
       <p:sp>
         <p:nvSpPr>
-          <p:cNvPr id="36" name="Text 34"/>
+          <p:cNvPr id="36" name="static_text_0273"/>
           <p:cNvSpPr/>
           <p:nvPr/>
         </p:nvSpPr>
@@ -13204,7 +15230,7 @@
       </p:sp>
       <p:sp>
         <p:nvSpPr>
-          <p:cNvPr id="37" name="Text 35"/>
+          <p:cNvPr id="37" name="tw_text_0274"/>
           <p:cNvSpPr/>
           <p:nvPr/>
         </p:nvSpPr>
@@ -13248,7 +15274,7 @@
       </p:sp>
       <p:sp>
         <p:nvSpPr>
-          <p:cNvPr id="38" name="Text 36"/>
+          <p:cNvPr id="38" name="static_text_0275"/>
           <p:cNvSpPr/>
           <p:nvPr/>
         </p:nvSpPr>
@@ -13292,7 +15318,7 @@
       </p:sp>
       <p:sp>
         <p:nvSpPr>
-          <p:cNvPr id="39" name="Text 37"/>
+          <p:cNvPr id="39" name="tw_text_0276"/>
           <p:cNvSpPr/>
           <p:nvPr/>
         </p:nvSpPr>
@@ -13339,6 +15365,428 @@
   <p:clrMapOvr>
     <a:masterClrMapping/>
   </p:clrMapOvr>
+  <p:timing>
+    <p:tnLst>
+      <p:par>
+        <p:cTn id="1" dur="indefinite" restart="never" nodeType="tmRoot">
+          <p:childTnLst>
+            <p:seq concurrent="1" nextAc="seek">
+              <p:cTn id="2" dur="indefinite" nodeType="mainSeq">
+                <p:childTnLst>
+                  <p:par>
+                    <p:cTn id="2" fill="hold">
+                      <p:stCondLst>
+                        <p:cond delay="0"/>
+                      </p:stCondLst>
+                      <p:childTnLst>
+                        <p:par>
+                          <p:cTn id="3" presetID="1" presetClass="entr" presetSubtype="0" fill="hold" nodeType="clickEffect">
+                            <p:stCondLst>
+                              <p:cond delay="0"/>
+                            </p:stCondLst>
+                            <p:childTnLst>
+                              <p:animEffect transition="in" filter="typewriter">
+                                <p:cBhvr>
+                                  <p:cTn id="4" dur="520" fill="hold"/>
+                                  <p:tgtEl>
+                                    <p:spTgt spid="9"/>
+                                  </p:tgtEl>
+                                </p:cBhvr>
+                              </p:animEffect>
+                            </p:childTnLst>
+                            <p:iterate type="lt">
+                              <p:tmAbs val="35"/>
+                            </p:iterate>
+                          </p:cTn>
+                        </p:par>
+                      </p:childTnLst>
+                    </p:cTn>
+                  </p:par>
+                  <p:par>
+                    <p:cTn id="5" fill="hold">
+                      <p:stCondLst>
+                        <p:cond delay="90"/>
+                      </p:stCondLst>
+                      <p:childTnLst>
+                        <p:par>
+                          <p:cTn id="6" presetID="1" presetClass="entr" presetSubtype="0" fill="hold" nodeType="clickEffect">
+                            <p:stCondLst>
+                              <p:cond delay="0"/>
+                            </p:stCondLst>
+                            <p:childTnLst>
+                              <p:animEffect transition="in" filter="typewriter">
+                                <p:cBhvr>
+                                  <p:cTn id="7" dur="565" fill="hold"/>
+                                  <p:tgtEl>
+                                    <p:spTgt spid="10"/>
+                                  </p:tgtEl>
+                                </p:cBhvr>
+                              </p:animEffect>
+                            </p:childTnLst>
+                            <p:iterate type="lt">
+                              <p:tmAbs val="35"/>
+                            </p:iterate>
+                          </p:cTn>
+                        </p:par>
+                      </p:childTnLst>
+                    </p:cTn>
+                  </p:par>
+                  <p:par>
+                    <p:cTn id="8" fill="hold">
+                      <p:stCondLst>
+                        <p:cond delay="90"/>
+                      </p:stCondLst>
+                      <p:childTnLst>
+                        <p:par>
+                          <p:cTn id="9" presetID="1" presetClass="entr" presetSubtype="0" fill="hold" nodeType="clickEffect">
+                            <p:stCondLst>
+                              <p:cond delay="0"/>
+                            </p:stCondLst>
+                            <p:childTnLst>
+                              <p:animEffect transition="in" filter="typewriter">
+                                <p:cBhvr>
+                                  <p:cTn id="10" dur="610" fill="hold"/>
+                                  <p:tgtEl>
+                                    <p:spTgt spid="19"/>
+                                  </p:tgtEl>
+                                </p:cBhvr>
+                              </p:animEffect>
+                            </p:childTnLst>
+                            <p:iterate type="lt">
+                              <p:tmAbs val="35"/>
+                            </p:iterate>
+                          </p:cTn>
+                        </p:par>
+                      </p:childTnLst>
+                    </p:cTn>
+                  </p:par>
+                  <p:par>
+                    <p:cTn id="11" fill="hold">
+                      <p:stCondLst>
+                        <p:cond delay="90"/>
+                      </p:stCondLst>
+                      <p:childTnLst>
+                        <p:par>
+                          <p:cTn id="12" presetID="1" presetClass="entr" presetSubtype="0" fill="hold" nodeType="clickEffect">
+                            <p:stCondLst>
+                              <p:cond delay="0"/>
+                            </p:stCondLst>
+                            <p:childTnLst>
+                              <p:animEffect transition="in" filter="typewriter">
+                                <p:cBhvr>
+                                  <p:cTn id="13" dur="655" fill="hold"/>
+                                  <p:tgtEl>
+                                    <p:spTgt spid="20"/>
+                                  </p:tgtEl>
+                                </p:cBhvr>
+                              </p:animEffect>
+                            </p:childTnLst>
+                            <p:iterate type="lt">
+                              <p:tmAbs val="35"/>
+                            </p:iterate>
+                          </p:cTn>
+                        </p:par>
+                      </p:childTnLst>
+                    </p:cTn>
+                  </p:par>
+                  <p:par>
+                    <p:cTn id="14" fill="hold">
+                      <p:stCondLst>
+                        <p:cond delay="90"/>
+                      </p:stCondLst>
+                      <p:childTnLst>
+                        <p:par>
+                          <p:cTn id="15" presetID="1" presetClass="entr" presetSubtype="0" fill="hold" nodeType="clickEffect">
+                            <p:stCondLst>
+                              <p:cond delay="0"/>
+                            </p:stCondLst>
+                            <p:childTnLst>
+                              <p:animEffect transition="in" filter="typewriter">
+                                <p:cBhvr>
+                                  <p:cTn id="16" dur="700" fill="hold"/>
+                                  <p:tgtEl>
+                                    <p:spTgt spid="24"/>
+                                  </p:tgtEl>
+                                </p:cBhvr>
+                              </p:animEffect>
+                            </p:childTnLst>
+                            <p:iterate type="lt">
+                              <p:tmAbs val="35"/>
+                            </p:iterate>
+                          </p:cTn>
+                        </p:par>
+                      </p:childTnLst>
+                    </p:cTn>
+                  </p:par>
+                  <p:par>
+                    <p:cTn id="17" fill="hold">
+                      <p:stCondLst>
+                        <p:cond delay="90"/>
+                      </p:stCondLst>
+                      <p:childTnLst>
+                        <p:par>
+                          <p:cTn id="18" presetID="1" presetClass="entr" presetSubtype="0" fill="hold" nodeType="clickEffect">
+                            <p:stCondLst>
+                              <p:cond delay="0"/>
+                            </p:stCondLst>
+                            <p:childTnLst>
+                              <p:animEffect transition="in" filter="typewriter">
+                                <p:cBhvr>
+                                  <p:cTn id="19" dur="745" fill="hold"/>
+                                  <p:tgtEl>
+                                    <p:spTgt spid="25"/>
+                                  </p:tgtEl>
+                                </p:cBhvr>
+                              </p:animEffect>
+                            </p:childTnLst>
+                            <p:iterate type="lt">
+                              <p:tmAbs val="35"/>
+                            </p:iterate>
+                          </p:cTn>
+                        </p:par>
+                      </p:childTnLst>
+                    </p:cTn>
+                  </p:par>
+                  <p:par>
+                    <p:cTn id="20" fill="hold">
+                      <p:stCondLst>
+                        <p:cond delay="90"/>
+                      </p:stCondLst>
+                      <p:childTnLst>
+                        <p:par>
+                          <p:cTn id="21" presetID="1" presetClass="entr" presetSubtype="0" fill="hold" nodeType="clickEffect">
+                            <p:stCondLst>
+                              <p:cond delay="0"/>
+                            </p:stCondLst>
+                            <p:childTnLst>
+                              <p:animEffect transition="in" filter="typewriter">
+                                <p:cBhvr>
+                                  <p:cTn id="22" dur="790" fill="hold"/>
+                                  <p:tgtEl>
+                                    <p:spTgt spid="26"/>
+                                  </p:tgtEl>
+                                </p:cBhvr>
+                              </p:animEffect>
+                            </p:childTnLst>
+                            <p:iterate type="lt">
+                              <p:tmAbs val="35"/>
+                            </p:iterate>
+                          </p:cTn>
+                        </p:par>
+                      </p:childTnLst>
+                    </p:cTn>
+                  </p:par>
+                  <p:par>
+                    <p:cTn id="23" fill="hold">
+                      <p:stCondLst>
+                        <p:cond delay="90"/>
+                      </p:stCondLst>
+                      <p:childTnLst>
+                        <p:par>
+                          <p:cTn id="24" presetID="1" presetClass="entr" presetSubtype="0" fill="hold" nodeType="clickEffect">
+                            <p:stCondLst>
+                              <p:cond delay="0"/>
+                            </p:stCondLst>
+                            <p:childTnLst>
+                              <p:animEffect transition="in" filter="typewriter">
+                                <p:cBhvr>
+                                  <p:cTn id="25" dur="835" fill="hold"/>
+                                  <p:tgtEl>
+                                    <p:spTgt spid="28"/>
+                                  </p:tgtEl>
+                                </p:cBhvr>
+                              </p:animEffect>
+                            </p:childTnLst>
+                            <p:iterate type="lt">
+                              <p:tmAbs val="35"/>
+                            </p:iterate>
+                          </p:cTn>
+                        </p:par>
+                      </p:childTnLst>
+                    </p:cTn>
+                  </p:par>
+                  <p:par>
+                    <p:cTn id="26" fill="hold">
+                      <p:stCondLst>
+                        <p:cond delay="90"/>
+                      </p:stCondLst>
+                      <p:childTnLst>
+                        <p:par>
+                          <p:cTn id="27" presetID="1" presetClass="entr" presetSubtype="0" fill="hold" nodeType="clickEffect">
+                            <p:stCondLst>
+                              <p:cond delay="0"/>
+                            </p:stCondLst>
+                            <p:childTnLst>
+                              <p:animEffect transition="in" filter="typewriter">
+                                <p:cBhvr>
+                                  <p:cTn id="28" dur="880" fill="hold"/>
+                                  <p:tgtEl>
+                                    <p:spTgt spid="31"/>
+                                  </p:tgtEl>
+                                </p:cBhvr>
+                              </p:animEffect>
+                            </p:childTnLst>
+                            <p:iterate type="lt">
+                              <p:tmAbs val="35"/>
+                            </p:iterate>
+                          </p:cTn>
+                        </p:par>
+                      </p:childTnLst>
+                    </p:cTn>
+                  </p:par>
+                  <p:par>
+                    <p:cTn id="29" fill="hold">
+                      <p:stCondLst>
+                        <p:cond delay="90"/>
+                      </p:stCondLst>
+                      <p:childTnLst>
+                        <p:par>
+                          <p:cTn id="30" presetID="1" presetClass="entr" presetSubtype="0" fill="hold" nodeType="clickEffect">
+                            <p:stCondLst>
+                              <p:cond delay="0"/>
+                            </p:stCondLst>
+                            <p:childTnLst>
+                              <p:animEffect transition="in" filter="typewriter">
+                                <p:cBhvr>
+                                  <p:cTn id="31" dur="925" fill="hold"/>
+                                  <p:tgtEl>
+                                    <p:spTgt spid="33"/>
+                                  </p:tgtEl>
+                                </p:cBhvr>
+                              </p:animEffect>
+                            </p:childTnLst>
+                            <p:iterate type="lt">
+                              <p:tmAbs val="35"/>
+                            </p:iterate>
+                          </p:cTn>
+                        </p:par>
+                      </p:childTnLst>
+                    </p:cTn>
+                  </p:par>
+                  <p:par>
+                    <p:cTn id="32" fill="hold">
+                      <p:stCondLst>
+                        <p:cond delay="90"/>
+                      </p:stCondLst>
+                      <p:childTnLst>
+                        <p:par>
+                          <p:cTn id="33" presetID="1" presetClass="entr" presetSubtype="0" fill="hold" nodeType="clickEffect">
+                            <p:stCondLst>
+                              <p:cond delay="0"/>
+                            </p:stCondLst>
+                            <p:childTnLst>
+                              <p:animEffect transition="in" filter="typewriter">
+                                <p:cBhvr>
+                                  <p:cTn id="34" dur="970" fill="hold"/>
+                                  <p:tgtEl>
+                                    <p:spTgt spid="35"/>
+                                  </p:tgtEl>
+                                </p:cBhvr>
+                              </p:animEffect>
+                            </p:childTnLst>
+                            <p:iterate type="lt">
+                              <p:tmAbs val="35"/>
+                            </p:iterate>
+                          </p:cTn>
+                        </p:par>
+                      </p:childTnLst>
+                    </p:cTn>
+                  </p:par>
+                  <p:par>
+                    <p:cTn id="35" fill="hold">
+                      <p:stCondLst>
+                        <p:cond delay="90"/>
+                      </p:stCondLst>
+                      <p:childTnLst>
+                        <p:par>
+                          <p:cTn id="36" presetID="1" presetClass="entr" presetSubtype="0" fill="hold" nodeType="clickEffect">
+                            <p:stCondLst>
+                              <p:cond delay="0"/>
+                            </p:stCondLst>
+                            <p:childTnLst>
+                              <p:animEffect transition="in" filter="typewriter">
+                                <p:cBhvr>
+                                  <p:cTn id="37" dur="1015" fill="hold"/>
+                                  <p:tgtEl>
+                                    <p:spTgt spid="37"/>
+                                  </p:tgtEl>
+                                </p:cBhvr>
+                              </p:animEffect>
+                            </p:childTnLst>
+                            <p:iterate type="lt">
+                              <p:tmAbs val="35"/>
+                            </p:iterate>
+                          </p:cTn>
+                        </p:par>
+                      </p:childTnLst>
+                    </p:cTn>
+                  </p:par>
+                  <p:par>
+                    <p:cTn id="38" fill="hold">
+                      <p:stCondLst>
+                        <p:cond delay="90"/>
+                      </p:stCondLst>
+                      <p:childTnLst>
+                        <p:par>
+                          <p:cTn id="39" presetID="1" presetClass="entr" presetSubtype="0" fill="hold" nodeType="clickEffect">
+                            <p:stCondLst>
+                              <p:cond delay="0"/>
+                            </p:stCondLst>
+                            <p:childTnLst>
+                              <p:animEffect transition="in" filter="typewriter">
+                                <p:cBhvr>
+                                  <p:cTn id="40" dur="1060" fill="hold"/>
+                                  <p:tgtEl>
+                                    <p:spTgt spid="39"/>
+                                  </p:tgtEl>
+                                </p:cBhvr>
+                              </p:animEffect>
+                            </p:childTnLst>
+                            <p:iterate type="lt">
+                              <p:tmAbs val="35"/>
+                            </p:iterate>
+                          </p:cTn>
+                        </p:par>
+                      </p:childTnLst>
+                    </p:cTn>
+                  </p:par>
+                </p:childTnLst>
+              </p:cTn>
+              <p:prevCondLst>
+                <p:cond evt="onPrev" delay="0">
+                  <p:tgtEl>
+                    <p:sldTgt/>
+                  </p:tgtEl>
+                </p:cond>
+              </p:prevCondLst>
+              <p:nextCondLst>
+                <p:cond evt="onNext" delay="0">
+                  <p:tgtEl>
+                    <p:sldTgt/>
+                  </p:tgtEl>
+                </p:cond>
+              </p:nextCondLst>
+            </p:seq>
+          </p:childTnLst>
+        </p:cTn>
+      </p:par>
+    </p:tnLst>
+    <p:bldLst>
+      <p:bldP spid="9" grpId="0" build="p"/>
+      <p:bldP spid="10" grpId="0" build="p"/>
+      <p:bldP spid="19" grpId="0" build="p"/>
+      <p:bldP spid="20" grpId="0" build="p"/>
+      <p:bldP spid="24" grpId="0" build="p"/>
+      <p:bldP spid="25" grpId="0" build="p"/>
+      <p:bldP spid="26" grpId="0" build="p"/>
+      <p:bldP spid="28" grpId="0" build="p"/>
+      <p:bldP spid="31" grpId="0" build="p"/>
+      <p:bldP spid="33" grpId="0" build="p"/>
+      <p:bldP spid="35" grpId="0" build="p"/>
+      <p:bldP spid="37" grpId="0" build="p"/>
+      <p:bldP spid="39" grpId="0" build="p"/>
+    </p:bldLst>
+  </p:timing>
 </p:sld>
 </file>
 
@@ -13470,7 +15918,7 @@
       </p:sp>
       <p:sp>
         <p:nvSpPr>
-          <p:cNvPr id="6" name="Text 4"/>
+          <p:cNvPr id="6" name="static_text_0277"/>
           <p:cNvSpPr/>
           <p:nvPr/>
         </p:nvSpPr>
@@ -13514,7 +15962,7 @@
       </p:sp>
       <p:sp>
         <p:nvSpPr>
-          <p:cNvPr id="7" name="Text 5"/>
+          <p:cNvPr id="7" name="static_text_0278"/>
           <p:cNvSpPr/>
           <p:nvPr/>
         </p:nvSpPr>
@@ -13581,7 +16029,7 @@
       </p:sp>
       <p:sp>
         <p:nvSpPr>
-          <p:cNvPr id="9" name="Text 7"/>
+          <p:cNvPr id="9" name="tw_text_0279"/>
           <p:cNvSpPr/>
           <p:nvPr/>
         </p:nvSpPr>
@@ -13625,7 +16073,7 @@
       </p:sp>
       <p:sp>
         <p:nvSpPr>
-          <p:cNvPr id="10" name="Text 8"/>
+          <p:cNvPr id="10" name="tw_text_0280"/>
           <p:cNvSpPr/>
           <p:nvPr/>
         </p:nvSpPr>
@@ -13744,7 +16192,7 @@
       </p:sp>
       <p:sp>
         <p:nvSpPr>
-          <p:cNvPr id="14" name="Text 12"/>
+          <p:cNvPr id="14" name="static_text_0281"/>
           <p:cNvSpPr/>
           <p:nvPr/>
         </p:nvSpPr>
@@ -13788,7 +16236,7 @@
       </p:sp>
       <p:sp>
         <p:nvSpPr>
-          <p:cNvPr id="15" name="Text 13"/>
+          <p:cNvPr id="15" name="static_text_0282"/>
           <p:cNvSpPr/>
           <p:nvPr/>
         </p:nvSpPr>
@@ -13832,7 +16280,7 @@
       </p:sp>
       <p:sp>
         <p:nvSpPr>
-          <p:cNvPr id="16" name="Text 14"/>
+          <p:cNvPr id="16" name="tw_text_0283"/>
           <p:cNvSpPr/>
           <p:nvPr/>
         </p:nvSpPr>
@@ -13928,7 +16376,7 @@
       </p:sp>
       <p:sp>
         <p:nvSpPr>
-          <p:cNvPr id="19" name="Text 17"/>
+          <p:cNvPr id="19" name="static_text_0284"/>
           <p:cNvSpPr/>
           <p:nvPr/>
         </p:nvSpPr>
@@ -13972,7 +16420,7 @@
       </p:sp>
       <p:sp>
         <p:nvSpPr>
-          <p:cNvPr id="20" name="Text 18"/>
+          <p:cNvPr id="20" name="static_text_0285"/>
           <p:cNvSpPr/>
           <p:nvPr/>
         </p:nvSpPr>
@@ -14016,7 +16464,7 @@
       </p:sp>
       <p:sp>
         <p:nvSpPr>
-          <p:cNvPr id="21" name="Text 19"/>
+          <p:cNvPr id="21" name="tw_text_0286"/>
           <p:cNvSpPr/>
           <p:nvPr/>
         </p:nvSpPr>
@@ -14112,7 +16560,7 @@
       </p:sp>
       <p:sp>
         <p:nvSpPr>
-          <p:cNvPr id="24" name="Text 22"/>
+          <p:cNvPr id="24" name="static_text_0287"/>
           <p:cNvSpPr/>
           <p:nvPr/>
         </p:nvSpPr>
@@ -14156,7 +16604,7 @@
       </p:sp>
       <p:sp>
         <p:nvSpPr>
-          <p:cNvPr id="25" name="Text 23"/>
+          <p:cNvPr id="25" name="static_text_0288"/>
           <p:cNvSpPr/>
           <p:nvPr/>
         </p:nvSpPr>
@@ -14200,7 +16648,7 @@
       </p:sp>
       <p:sp>
         <p:nvSpPr>
-          <p:cNvPr id="26" name="Text 24"/>
+          <p:cNvPr id="26" name="tw_text_0289"/>
           <p:cNvSpPr/>
           <p:nvPr/>
         </p:nvSpPr>
@@ -14296,7 +16744,7 @@
       </p:sp>
       <p:sp>
         <p:nvSpPr>
-          <p:cNvPr id="29" name="Text 27"/>
+          <p:cNvPr id="29" name="static_text_0290"/>
           <p:cNvSpPr/>
           <p:nvPr/>
         </p:nvSpPr>
@@ -14340,7 +16788,7 @@
       </p:sp>
       <p:sp>
         <p:nvSpPr>
-          <p:cNvPr id="30" name="Text 28"/>
+          <p:cNvPr id="30" name="static_text_0291"/>
           <p:cNvSpPr/>
           <p:nvPr/>
         </p:nvSpPr>
@@ -14384,7 +16832,7 @@
       </p:sp>
       <p:sp>
         <p:nvSpPr>
-          <p:cNvPr id="31" name="Text 29"/>
+          <p:cNvPr id="31" name="tw_text_0292"/>
           <p:cNvSpPr/>
           <p:nvPr/>
         </p:nvSpPr>
@@ -14480,7 +16928,7 @@
       </p:sp>
       <p:sp>
         <p:nvSpPr>
-          <p:cNvPr id="34" name="Text 32"/>
+          <p:cNvPr id="34" name="static_text_0293"/>
           <p:cNvSpPr/>
           <p:nvPr/>
         </p:nvSpPr>
@@ -14524,7 +16972,7 @@
       </p:sp>
       <p:sp>
         <p:nvSpPr>
-          <p:cNvPr id="35" name="Text 33"/>
+          <p:cNvPr id="35" name="static_text_0294"/>
           <p:cNvSpPr/>
           <p:nvPr/>
         </p:nvSpPr>
@@ -14568,7 +17016,7 @@
       </p:sp>
       <p:sp>
         <p:nvSpPr>
-          <p:cNvPr id="36" name="Text 34"/>
+          <p:cNvPr id="36" name="tw_text_0295"/>
           <p:cNvSpPr/>
           <p:nvPr/>
         </p:nvSpPr>
@@ -14664,7 +17112,7 @@
       </p:sp>
       <p:sp>
         <p:nvSpPr>
-          <p:cNvPr id="39" name="Text 37"/>
+          <p:cNvPr id="39" name="static_text_0296"/>
           <p:cNvSpPr/>
           <p:nvPr/>
         </p:nvSpPr>
@@ -14708,7 +17156,7 @@
       </p:sp>
       <p:sp>
         <p:nvSpPr>
-          <p:cNvPr id="40" name="Text 38"/>
+          <p:cNvPr id="40" name="tw_text_0297"/>
           <p:cNvSpPr/>
           <p:nvPr/>
         </p:nvSpPr>
@@ -14755,6 +17203,278 @@
   <p:clrMapOvr>
     <a:masterClrMapping/>
   </p:clrMapOvr>
+  <p:timing>
+    <p:tnLst>
+      <p:par>
+        <p:cTn id="1" dur="indefinite" restart="never" nodeType="tmRoot">
+          <p:childTnLst>
+            <p:seq concurrent="1" nextAc="seek">
+              <p:cTn id="2" dur="indefinite" nodeType="mainSeq">
+                <p:childTnLst>
+                  <p:par>
+                    <p:cTn id="2" fill="hold">
+                      <p:stCondLst>
+                        <p:cond delay="0"/>
+                      </p:stCondLst>
+                      <p:childTnLst>
+                        <p:par>
+                          <p:cTn id="3" presetID="1" presetClass="entr" presetSubtype="0" fill="hold" nodeType="clickEffect">
+                            <p:stCondLst>
+                              <p:cond delay="0"/>
+                            </p:stCondLst>
+                            <p:childTnLst>
+                              <p:animEffect transition="in" filter="typewriter">
+                                <p:cBhvr>
+                                  <p:cTn id="4" dur="520" fill="hold"/>
+                                  <p:tgtEl>
+                                    <p:spTgt spid="9"/>
+                                  </p:tgtEl>
+                                </p:cBhvr>
+                              </p:animEffect>
+                            </p:childTnLst>
+                            <p:iterate type="lt">
+                              <p:tmAbs val="35"/>
+                            </p:iterate>
+                          </p:cTn>
+                        </p:par>
+                      </p:childTnLst>
+                    </p:cTn>
+                  </p:par>
+                  <p:par>
+                    <p:cTn id="5" fill="hold">
+                      <p:stCondLst>
+                        <p:cond delay="90"/>
+                      </p:stCondLst>
+                      <p:childTnLst>
+                        <p:par>
+                          <p:cTn id="6" presetID="1" presetClass="entr" presetSubtype="0" fill="hold" nodeType="clickEffect">
+                            <p:stCondLst>
+                              <p:cond delay="0"/>
+                            </p:stCondLst>
+                            <p:childTnLst>
+                              <p:animEffect transition="in" filter="typewriter">
+                                <p:cBhvr>
+                                  <p:cTn id="7" dur="565" fill="hold"/>
+                                  <p:tgtEl>
+                                    <p:spTgt spid="10"/>
+                                  </p:tgtEl>
+                                </p:cBhvr>
+                              </p:animEffect>
+                            </p:childTnLst>
+                            <p:iterate type="lt">
+                              <p:tmAbs val="35"/>
+                            </p:iterate>
+                          </p:cTn>
+                        </p:par>
+                      </p:childTnLst>
+                    </p:cTn>
+                  </p:par>
+                  <p:par>
+                    <p:cTn id="8" fill="hold">
+                      <p:stCondLst>
+                        <p:cond delay="90"/>
+                      </p:stCondLst>
+                      <p:childTnLst>
+                        <p:par>
+                          <p:cTn id="9" presetID="1" presetClass="entr" presetSubtype="0" fill="hold" nodeType="clickEffect">
+                            <p:stCondLst>
+                              <p:cond delay="0"/>
+                            </p:stCondLst>
+                            <p:childTnLst>
+                              <p:animEffect transition="in" filter="typewriter">
+                                <p:cBhvr>
+                                  <p:cTn id="10" dur="610" fill="hold"/>
+                                  <p:tgtEl>
+                                    <p:spTgt spid="16"/>
+                                  </p:tgtEl>
+                                </p:cBhvr>
+                              </p:animEffect>
+                            </p:childTnLst>
+                            <p:iterate type="lt">
+                              <p:tmAbs val="35"/>
+                            </p:iterate>
+                          </p:cTn>
+                        </p:par>
+                      </p:childTnLst>
+                    </p:cTn>
+                  </p:par>
+                  <p:par>
+                    <p:cTn id="11" fill="hold">
+                      <p:stCondLst>
+                        <p:cond delay="90"/>
+                      </p:stCondLst>
+                      <p:childTnLst>
+                        <p:par>
+                          <p:cTn id="12" presetID="1" presetClass="entr" presetSubtype="0" fill="hold" nodeType="clickEffect">
+                            <p:stCondLst>
+                              <p:cond delay="0"/>
+                            </p:stCondLst>
+                            <p:childTnLst>
+                              <p:animEffect transition="in" filter="typewriter">
+                                <p:cBhvr>
+                                  <p:cTn id="13" dur="655" fill="hold"/>
+                                  <p:tgtEl>
+                                    <p:spTgt spid="21"/>
+                                  </p:tgtEl>
+                                </p:cBhvr>
+                              </p:animEffect>
+                            </p:childTnLst>
+                            <p:iterate type="lt">
+                              <p:tmAbs val="35"/>
+                            </p:iterate>
+                          </p:cTn>
+                        </p:par>
+                      </p:childTnLst>
+                    </p:cTn>
+                  </p:par>
+                  <p:par>
+                    <p:cTn id="14" fill="hold">
+                      <p:stCondLst>
+                        <p:cond delay="90"/>
+                      </p:stCondLst>
+                      <p:childTnLst>
+                        <p:par>
+                          <p:cTn id="15" presetID="1" presetClass="entr" presetSubtype="0" fill="hold" nodeType="clickEffect">
+                            <p:stCondLst>
+                              <p:cond delay="0"/>
+                            </p:stCondLst>
+                            <p:childTnLst>
+                              <p:animEffect transition="in" filter="typewriter">
+                                <p:cBhvr>
+                                  <p:cTn id="16" dur="700" fill="hold"/>
+                                  <p:tgtEl>
+                                    <p:spTgt spid="26"/>
+                                  </p:tgtEl>
+                                </p:cBhvr>
+                              </p:animEffect>
+                            </p:childTnLst>
+                            <p:iterate type="lt">
+                              <p:tmAbs val="35"/>
+                            </p:iterate>
+                          </p:cTn>
+                        </p:par>
+                      </p:childTnLst>
+                    </p:cTn>
+                  </p:par>
+                  <p:par>
+                    <p:cTn id="17" fill="hold">
+                      <p:stCondLst>
+                        <p:cond delay="90"/>
+                      </p:stCondLst>
+                      <p:childTnLst>
+                        <p:par>
+                          <p:cTn id="18" presetID="1" presetClass="entr" presetSubtype="0" fill="hold" nodeType="clickEffect">
+                            <p:stCondLst>
+                              <p:cond delay="0"/>
+                            </p:stCondLst>
+                            <p:childTnLst>
+                              <p:animEffect transition="in" filter="typewriter">
+                                <p:cBhvr>
+                                  <p:cTn id="19" dur="745" fill="hold"/>
+                                  <p:tgtEl>
+                                    <p:spTgt spid="31"/>
+                                  </p:tgtEl>
+                                </p:cBhvr>
+                              </p:animEffect>
+                            </p:childTnLst>
+                            <p:iterate type="lt">
+                              <p:tmAbs val="35"/>
+                            </p:iterate>
+                          </p:cTn>
+                        </p:par>
+                      </p:childTnLst>
+                    </p:cTn>
+                  </p:par>
+                  <p:par>
+                    <p:cTn id="20" fill="hold">
+                      <p:stCondLst>
+                        <p:cond delay="90"/>
+                      </p:stCondLst>
+                      <p:childTnLst>
+                        <p:par>
+                          <p:cTn id="21" presetID="1" presetClass="entr" presetSubtype="0" fill="hold" nodeType="clickEffect">
+                            <p:stCondLst>
+                              <p:cond delay="0"/>
+                            </p:stCondLst>
+                            <p:childTnLst>
+                              <p:animEffect transition="in" filter="typewriter">
+                                <p:cBhvr>
+                                  <p:cTn id="22" dur="790" fill="hold"/>
+                                  <p:tgtEl>
+                                    <p:spTgt spid="36"/>
+                                  </p:tgtEl>
+                                </p:cBhvr>
+                              </p:animEffect>
+                            </p:childTnLst>
+                            <p:iterate type="lt">
+                              <p:tmAbs val="35"/>
+                            </p:iterate>
+                          </p:cTn>
+                        </p:par>
+                      </p:childTnLst>
+                    </p:cTn>
+                  </p:par>
+                  <p:par>
+                    <p:cTn id="23" fill="hold">
+                      <p:stCondLst>
+                        <p:cond delay="90"/>
+                      </p:stCondLst>
+                      <p:childTnLst>
+                        <p:par>
+                          <p:cTn id="24" presetID="1" presetClass="entr" presetSubtype="0" fill="hold" nodeType="clickEffect">
+                            <p:stCondLst>
+                              <p:cond delay="0"/>
+                            </p:stCondLst>
+                            <p:childTnLst>
+                              <p:animEffect transition="in" filter="typewriter">
+                                <p:cBhvr>
+                                  <p:cTn id="25" dur="835" fill="hold"/>
+                                  <p:tgtEl>
+                                    <p:spTgt spid="40"/>
+                                  </p:tgtEl>
+                                </p:cBhvr>
+                              </p:animEffect>
+                            </p:childTnLst>
+                            <p:iterate type="lt">
+                              <p:tmAbs val="35"/>
+                            </p:iterate>
+                          </p:cTn>
+                        </p:par>
+                      </p:childTnLst>
+                    </p:cTn>
+                  </p:par>
+                </p:childTnLst>
+              </p:cTn>
+              <p:prevCondLst>
+                <p:cond evt="onPrev" delay="0">
+                  <p:tgtEl>
+                    <p:sldTgt/>
+                  </p:tgtEl>
+                </p:cond>
+              </p:prevCondLst>
+              <p:nextCondLst>
+                <p:cond evt="onNext" delay="0">
+                  <p:tgtEl>
+                    <p:sldTgt/>
+                  </p:tgtEl>
+                </p:cond>
+              </p:nextCondLst>
+            </p:seq>
+          </p:childTnLst>
+        </p:cTn>
+      </p:par>
+    </p:tnLst>
+    <p:bldLst>
+      <p:bldP spid="9" grpId="0" build="p"/>
+      <p:bldP spid="10" grpId="0" build="p"/>
+      <p:bldP spid="16" grpId="0" build="p"/>
+      <p:bldP spid="21" grpId="0" build="p"/>
+      <p:bldP spid="26" grpId="0" build="p"/>
+      <p:bldP spid="31" grpId="0" build="p"/>
+      <p:bldP spid="36" grpId="0" build="p"/>
+      <p:bldP spid="40" grpId="0" build="p"/>
+    </p:bldLst>
+  </p:timing>
 </p:sld>
 </file>
 
@@ -14886,7 +17606,7 @@
       </p:sp>
       <p:sp>
         <p:nvSpPr>
-          <p:cNvPr id="6" name="Text 4"/>
+          <p:cNvPr id="6" name="static_text_0298"/>
           <p:cNvSpPr/>
           <p:nvPr/>
         </p:nvSpPr>
@@ -14930,7 +17650,7 @@
       </p:sp>
       <p:sp>
         <p:nvSpPr>
-          <p:cNvPr id="7" name="Text 5"/>
+          <p:cNvPr id="7" name="static_text_0299"/>
           <p:cNvSpPr/>
           <p:nvPr/>
         </p:nvSpPr>
@@ -14997,7 +17717,7 @@
       </p:sp>
       <p:sp>
         <p:nvSpPr>
-          <p:cNvPr id="9" name="Text 7"/>
+          <p:cNvPr id="9" name="tw_text_0300"/>
           <p:cNvSpPr/>
           <p:nvPr/>
         </p:nvSpPr>
@@ -15041,7 +17761,7 @@
       </p:sp>
       <p:sp>
         <p:nvSpPr>
-          <p:cNvPr id="10" name="Text 8"/>
+          <p:cNvPr id="10" name="tw_text_0301"/>
           <p:cNvSpPr/>
           <p:nvPr/>
         </p:nvSpPr>
@@ -15137,7 +17857,7 @@
       </p:sp>
       <p:sp>
         <p:nvSpPr>
-          <p:cNvPr id="13" name="Text 11"/>
+          <p:cNvPr id="13" name="static_text_0302"/>
           <p:cNvSpPr/>
           <p:nvPr/>
         </p:nvSpPr>
@@ -15181,7 +17901,7 @@
       </p:sp>
       <p:sp>
         <p:nvSpPr>
-          <p:cNvPr id="14" name="Text 12"/>
+          <p:cNvPr id="14" name="tw_text_0303"/>
           <p:cNvSpPr/>
           <p:nvPr/>
         </p:nvSpPr>
@@ -15337,7 +18057,7 @@
       </p:sp>
       <p:sp>
         <p:nvSpPr>
-          <p:cNvPr id="17" name="Text 15"/>
+          <p:cNvPr id="17" name="static_text_0304"/>
           <p:cNvSpPr/>
           <p:nvPr/>
         </p:nvSpPr>
@@ -15381,7 +18101,7 @@
       </p:sp>
       <p:sp>
         <p:nvSpPr>
-          <p:cNvPr id="18" name="Text 16"/>
+          <p:cNvPr id="18" name="tw_text_0305"/>
           <p:cNvSpPr/>
           <p:nvPr/>
         </p:nvSpPr>
@@ -15537,7 +18257,7 @@
       </p:sp>
       <p:sp>
         <p:nvSpPr>
-          <p:cNvPr id="21" name="Text 19"/>
+          <p:cNvPr id="21" name="static_text_0306"/>
           <p:cNvSpPr/>
           <p:nvPr/>
         </p:nvSpPr>
@@ -15581,7 +18301,7 @@
       </p:sp>
       <p:sp>
         <p:nvSpPr>
-          <p:cNvPr id="22" name="Text 20"/>
+          <p:cNvPr id="22" name="tw_text_0307"/>
           <p:cNvSpPr/>
           <p:nvPr/>
         </p:nvSpPr>
@@ -15705,7 +18425,7 @@
       </p:sp>
       <p:sp>
         <p:nvSpPr>
-          <p:cNvPr id="23" name="Text 21"/>
+          <p:cNvPr id="23" name="tw_text_0308"/>
           <p:cNvSpPr/>
           <p:nvPr/>
         </p:nvSpPr>
@@ -15752,6 +18472,218 @@
   <p:clrMapOvr>
     <a:masterClrMapping/>
   </p:clrMapOvr>
+  <p:timing>
+    <p:tnLst>
+      <p:par>
+        <p:cTn id="1" dur="indefinite" restart="never" nodeType="tmRoot">
+          <p:childTnLst>
+            <p:seq concurrent="1" nextAc="seek">
+              <p:cTn id="2" dur="indefinite" nodeType="mainSeq">
+                <p:childTnLst>
+                  <p:par>
+                    <p:cTn id="2" fill="hold">
+                      <p:stCondLst>
+                        <p:cond delay="0"/>
+                      </p:stCondLst>
+                      <p:childTnLst>
+                        <p:par>
+                          <p:cTn id="3" presetID="1" presetClass="entr" presetSubtype="0" fill="hold" nodeType="clickEffect">
+                            <p:stCondLst>
+                              <p:cond delay="0"/>
+                            </p:stCondLst>
+                            <p:childTnLst>
+                              <p:animEffect transition="in" filter="typewriter">
+                                <p:cBhvr>
+                                  <p:cTn id="4" dur="520" fill="hold"/>
+                                  <p:tgtEl>
+                                    <p:spTgt spid="9"/>
+                                  </p:tgtEl>
+                                </p:cBhvr>
+                              </p:animEffect>
+                            </p:childTnLst>
+                            <p:iterate type="lt">
+                              <p:tmAbs val="35"/>
+                            </p:iterate>
+                          </p:cTn>
+                        </p:par>
+                      </p:childTnLst>
+                    </p:cTn>
+                  </p:par>
+                  <p:par>
+                    <p:cTn id="5" fill="hold">
+                      <p:stCondLst>
+                        <p:cond delay="90"/>
+                      </p:stCondLst>
+                      <p:childTnLst>
+                        <p:par>
+                          <p:cTn id="6" presetID="1" presetClass="entr" presetSubtype="0" fill="hold" nodeType="clickEffect">
+                            <p:stCondLst>
+                              <p:cond delay="0"/>
+                            </p:stCondLst>
+                            <p:childTnLst>
+                              <p:animEffect transition="in" filter="typewriter">
+                                <p:cBhvr>
+                                  <p:cTn id="7" dur="565" fill="hold"/>
+                                  <p:tgtEl>
+                                    <p:spTgt spid="10"/>
+                                  </p:tgtEl>
+                                </p:cBhvr>
+                              </p:animEffect>
+                            </p:childTnLst>
+                            <p:iterate type="lt">
+                              <p:tmAbs val="35"/>
+                            </p:iterate>
+                          </p:cTn>
+                        </p:par>
+                      </p:childTnLst>
+                    </p:cTn>
+                  </p:par>
+                  <p:par>
+                    <p:cTn id="8" fill="hold">
+                      <p:stCondLst>
+                        <p:cond delay="90"/>
+                      </p:stCondLst>
+                      <p:childTnLst>
+                        <p:par>
+                          <p:cTn id="9" presetID="1" presetClass="entr" presetSubtype="0" fill="hold" nodeType="clickEffect">
+                            <p:stCondLst>
+                              <p:cond delay="0"/>
+                            </p:stCondLst>
+                            <p:childTnLst>
+                              <p:animEffect transition="in" filter="typewriter">
+                                <p:cBhvr>
+                                  <p:cTn id="10" dur="610" fill="hold"/>
+                                  <p:tgtEl>
+                                    <p:spTgt spid="14"/>
+                                  </p:tgtEl>
+                                </p:cBhvr>
+                              </p:animEffect>
+                            </p:childTnLst>
+                            <p:iterate type="lt">
+                              <p:tmAbs val="35"/>
+                            </p:iterate>
+                          </p:cTn>
+                        </p:par>
+                      </p:childTnLst>
+                    </p:cTn>
+                  </p:par>
+                  <p:par>
+                    <p:cTn id="11" fill="hold">
+                      <p:stCondLst>
+                        <p:cond delay="90"/>
+                      </p:stCondLst>
+                      <p:childTnLst>
+                        <p:par>
+                          <p:cTn id="12" presetID="1" presetClass="entr" presetSubtype="0" fill="hold" nodeType="clickEffect">
+                            <p:stCondLst>
+                              <p:cond delay="0"/>
+                            </p:stCondLst>
+                            <p:childTnLst>
+                              <p:animEffect transition="in" filter="typewriter">
+                                <p:cBhvr>
+                                  <p:cTn id="13" dur="655" fill="hold"/>
+                                  <p:tgtEl>
+                                    <p:spTgt spid="18"/>
+                                  </p:tgtEl>
+                                </p:cBhvr>
+                              </p:animEffect>
+                            </p:childTnLst>
+                            <p:iterate type="lt">
+                              <p:tmAbs val="35"/>
+                            </p:iterate>
+                          </p:cTn>
+                        </p:par>
+                      </p:childTnLst>
+                    </p:cTn>
+                  </p:par>
+                  <p:par>
+                    <p:cTn id="14" fill="hold">
+                      <p:stCondLst>
+                        <p:cond delay="90"/>
+                      </p:stCondLst>
+                      <p:childTnLst>
+                        <p:par>
+                          <p:cTn id="15" presetID="1" presetClass="entr" presetSubtype="0" fill="hold" nodeType="clickEffect">
+                            <p:stCondLst>
+                              <p:cond delay="0"/>
+                            </p:stCondLst>
+                            <p:childTnLst>
+                              <p:animEffect transition="in" filter="typewriter">
+                                <p:cBhvr>
+                                  <p:cTn id="16" dur="700" fill="hold"/>
+                                  <p:tgtEl>
+                                    <p:spTgt spid="22"/>
+                                  </p:tgtEl>
+                                </p:cBhvr>
+                              </p:animEffect>
+                            </p:childTnLst>
+                            <p:iterate type="lt">
+                              <p:tmAbs val="35"/>
+                            </p:iterate>
+                          </p:cTn>
+                        </p:par>
+                      </p:childTnLst>
+                    </p:cTn>
+                  </p:par>
+                  <p:par>
+                    <p:cTn id="17" fill="hold">
+                      <p:stCondLst>
+                        <p:cond delay="90"/>
+                      </p:stCondLst>
+                      <p:childTnLst>
+                        <p:par>
+                          <p:cTn id="18" presetID="1" presetClass="entr" presetSubtype="0" fill="hold" nodeType="clickEffect">
+                            <p:stCondLst>
+                              <p:cond delay="0"/>
+                            </p:stCondLst>
+                            <p:childTnLst>
+                              <p:animEffect transition="in" filter="typewriter">
+                                <p:cBhvr>
+                                  <p:cTn id="19" dur="745" fill="hold"/>
+                                  <p:tgtEl>
+                                    <p:spTgt spid="23"/>
+                                  </p:tgtEl>
+                                </p:cBhvr>
+                              </p:animEffect>
+                            </p:childTnLst>
+                            <p:iterate type="lt">
+                              <p:tmAbs val="35"/>
+                            </p:iterate>
+                          </p:cTn>
+                        </p:par>
+                      </p:childTnLst>
+                    </p:cTn>
+                  </p:par>
+                </p:childTnLst>
+              </p:cTn>
+              <p:prevCondLst>
+                <p:cond evt="onPrev" delay="0">
+                  <p:tgtEl>
+                    <p:sldTgt/>
+                  </p:tgtEl>
+                </p:cond>
+              </p:prevCondLst>
+              <p:nextCondLst>
+                <p:cond evt="onNext" delay="0">
+                  <p:tgtEl>
+                    <p:sldTgt/>
+                  </p:tgtEl>
+                </p:cond>
+              </p:nextCondLst>
+            </p:seq>
+          </p:childTnLst>
+        </p:cTn>
+      </p:par>
+    </p:tnLst>
+    <p:bldLst>
+      <p:bldP spid="9" grpId="0" build="p"/>
+      <p:bldP spid="10" grpId="0" build="p"/>
+      <p:bldP spid="14" grpId="0" build="p"/>
+      <p:bldP spid="18" grpId="0" build="p"/>
+      <p:bldP spid="22" grpId="0" build="p"/>
+      <p:bldP spid="23" grpId="0" build="p"/>
+    </p:bldLst>
+  </p:timing>
 </p:sld>
 </file>
 
@@ -15883,7 +18815,7 @@
       </p:sp>
       <p:sp>
         <p:nvSpPr>
-          <p:cNvPr id="6" name="Text 4"/>
+          <p:cNvPr id="6" name="static_text_0018"/>
           <p:cNvSpPr/>
           <p:nvPr/>
         </p:nvSpPr>
@@ -15927,7 +18859,7 @@
       </p:sp>
       <p:sp>
         <p:nvSpPr>
-          <p:cNvPr id="7" name="Text 5"/>
+          <p:cNvPr id="7" name="static_text_0019"/>
           <p:cNvSpPr/>
           <p:nvPr/>
         </p:nvSpPr>
@@ -15994,7 +18926,7 @@
       </p:sp>
       <p:sp>
         <p:nvSpPr>
-          <p:cNvPr id="9" name="Text 7"/>
+          <p:cNvPr id="9" name="tw_text_0020"/>
           <p:cNvSpPr/>
           <p:nvPr/>
         </p:nvSpPr>
@@ -16038,7 +18970,7 @@
       </p:sp>
       <p:sp>
         <p:nvSpPr>
-          <p:cNvPr id="10" name="Text 8"/>
+          <p:cNvPr id="10" name="tw_text_0021"/>
           <p:cNvSpPr/>
           <p:nvPr/>
         </p:nvSpPr>
@@ -16130,7 +19062,7 @@
       </p:sp>
       <p:sp>
         <p:nvSpPr>
-          <p:cNvPr id="13" name="Text 11"/>
+          <p:cNvPr id="13" name="static_text_0022"/>
           <p:cNvSpPr/>
           <p:nvPr/>
         </p:nvSpPr>
@@ -16174,7 +19106,7 @@
       </p:sp>
       <p:sp>
         <p:nvSpPr>
-          <p:cNvPr id="14" name="Text 12"/>
+          <p:cNvPr id="14" name="static_text_0023"/>
           <p:cNvSpPr/>
           <p:nvPr/>
         </p:nvSpPr>
@@ -16218,7 +19150,7 @@
       </p:sp>
       <p:sp>
         <p:nvSpPr>
-          <p:cNvPr id="15" name="Text 13"/>
+          <p:cNvPr id="15" name="tw_text_0024"/>
           <p:cNvSpPr/>
           <p:nvPr/>
         </p:nvSpPr>
@@ -16287,7 +19219,7 @@
       </p:sp>
       <p:sp>
         <p:nvSpPr>
-          <p:cNvPr id="17" name="Text 15"/>
+          <p:cNvPr id="17" name="static_text_0025"/>
           <p:cNvSpPr/>
           <p:nvPr/>
         </p:nvSpPr>
@@ -16331,7 +19263,7 @@
       </p:sp>
       <p:sp>
         <p:nvSpPr>
-          <p:cNvPr id="18" name="Text 16"/>
+          <p:cNvPr id="18" name="static_text_0026"/>
           <p:cNvSpPr/>
           <p:nvPr/>
         </p:nvSpPr>
@@ -16375,7 +19307,7 @@
       </p:sp>
       <p:sp>
         <p:nvSpPr>
-          <p:cNvPr id="19" name="Text 17"/>
+          <p:cNvPr id="19" name="tw_text_0027"/>
           <p:cNvSpPr/>
           <p:nvPr/>
         </p:nvSpPr>
@@ -16444,7 +19376,7 @@
       </p:sp>
       <p:sp>
         <p:nvSpPr>
-          <p:cNvPr id="21" name="Text 19"/>
+          <p:cNvPr id="21" name="static_text_0028"/>
           <p:cNvSpPr/>
           <p:nvPr/>
         </p:nvSpPr>
@@ -16488,7 +19420,7 @@
       </p:sp>
       <p:sp>
         <p:nvSpPr>
-          <p:cNvPr id="22" name="Text 20"/>
+          <p:cNvPr id="22" name="static_text_0029"/>
           <p:cNvSpPr/>
           <p:nvPr/>
         </p:nvSpPr>
@@ -16532,7 +19464,7 @@
       </p:sp>
       <p:sp>
         <p:nvSpPr>
-          <p:cNvPr id="23" name="Text 21"/>
+          <p:cNvPr id="23" name="tw_text_0030"/>
           <p:cNvSpPr/>
           <p:nvPr/>
         </p:nvSpPr>
@@ -16601,7 +19533,7 @@
       </p:sp>
       <p:sp>
         <p:nvSpPr>
-          <p:cNvPr id="25" name="Text 23"/>
+          <p:cNvPr id="25" name="static_text_0031"/>
           <p:cNvSpPr/>
           <p:nvPr/>
         </p:nvSpPr>
@@ -16645,7 +19577,7 @@
       </p:sp>
       <p:sp>
         <p:nvSpPr>
-          <p:cNvPr id="26" name="Text 24"/>
+          <p:cNvPr id="26" name="static_text_0032"/>
           <p:cNvSpPr/>
           <p:nvPr/>
         </p:nvSpPr>
@@ -16689,7 +19621,7 @@
       </p:sp>
       <p:sp>
         <p:nvSpPr>
-          <p:cNvPr id="27" name="Text 25"/>
+          <p:cNvPr id="27" name="tw_text_0033"/>
           <p:cNvSpPr/>
           <p:nvPr/>
         </p:nvSpPr>
@@ -16758,7 +19690,7 @@
       </p:sp>
       <p:sp>
         <p:nvSpPr>
-          <p:cNvPr id="29" name="Text 27"/>
+          <p:cNvPr id="29" name="static_text_0034"/>
           <p:cNvSpPr/>
           <p:nvPr/>
         </p:nvSpPr>
@@ -16802,7 +19734,7 @@
       </p:sp>
       <p:sp>
         <p:nvSpPr>
-          <p:cNvPr id="30" name="Text 28"/>
+          <p:cNvPr id="30" name="static_text_0035"/>
           <p:cNvSpPr/>
           <p:nvPr/>
         </p:nvSpPr>
@@ -16846,7 +19778,7 @@
       </p:sp>
       <p:sp>
         <p:nvSpPr>
-          <p:cNvPr id="31" name="Text 29"/>
+          <p:cNvPr id="31" name="tw_text_0036"/>
           <p:cNvSpPr/>
           <p:nvPr/>
         </p:nvSpPr>
@@ -16917,7 +19849,7 @@
       </p:sp>
       <p:sp>
         <p:nvSpPr>
-          <p:cNvPr id="33" name="Text 31"/>
+          <p:cNvPr id="33" name="tw_text_0037"/>
           <p:cNvSpPr/>
           <p:nvPr/>
         </p:nvSpPr>
@@ -16964,6 +19896,278 @@
   <p:clrMapOvr>
     <a:masterClrMapping/>
   </p:clrMapOvr>
+  <p:timing>
+    <p:tnLst>
+      <p:par>
+        <p:cTn id="1" dur="indefinite" restart="never" nodeType="tmRoot">
+          <p:childTnLst>
+            <p:seq concurrent="1" nextAc="seek">
+              <p:cTn id="2" dur="indefinite" nodeType="mainSeq">
+                <p:childTnLst>
+                  <p:par>
+                    <p:cTn id="2" fill="hold">
+                      <p:stCondLst>
+                        <p:cond delay="0"/>
+                      </p:stCondLst>
+                      <p:childTnLst>
+                        <p:par>
+                          <p:cTn id="3" presetID="1" presetClass="entr" presetSubtype="0" fill="hold" nodeType="clickEffect">
+                            <p:stCondLst>
+                              <p:cond delay="0"/>
+                            </p:stCondLst>
+                            <p:childTnLst>
+                              <p:animEffect transition="in" filter="typewriter">
+                                <p:cBhvr>
+                                  <p:cTn id="4" dur="520" fill="hold"/>
+                                  <p:tgtEl>
+                                    <p:spTgt spid="9"/>
+                                  </p:tgtEl>
+                                </p:cBhvr>
+                              </p:animEffect>
+                            </p:childTnLst>
+                            <p:iterate type="lt">
+                              <p:tmAbs val="35"/>
+                            </p:iterate>
+                          </p:cTn>
+                        </p:par>
+                      </p:childTnLst>
+                    </p:cTn>
+                  </p:par>
+                  <p:par>
+                    <p:cTn id="5" fill="hold">
+                      <p:stCondLst>
+                        <p:cond delay="90"/>
+                      </p:stCondLst>
+                      <p:childTnLst>
+                        <p:par>
+                          <p:cTn id="6" presetID="1" presetClass="entr" presetSubtype="0" fill="hold" nodeType="clickEffect">
+                            <p:stCondLst>
+                              <p:cond delay="0"/>
+                            </p:stCondLst>
+                            <p:childTnLst>
+                              <p:animEffect transition="in" filter="typewriter">
+                                <p:cBhvr>
+                                  <p:cTn id="7" dur="565" fill="hold"/>
+                                  <p:tgtEl>
+                                    <p:spTgt spid="10"/>
+                                  </p:tgtEl>
+                                </p:cBhvr>
+                              </p:animEffect>
+                            </p:childTnLst>
+                            <p:iterate type="lt">
+                              <p:tmAbs val="35"/>
+                            </p:iterate>
+                          </p:cTn>
+                        </p:par>
+                      </p:childTnLst>
+                    </p:cTn>
+                  </p:par>
+                  <p:par>
+                    <p:cTn id="8" fill="hold">
+                      <p:stCondLst>
+                        <p:cond delay="90"/>
+                      </p:stCondLst>
+                      <p:childTnLst>
+                        <p:par>
+                          <p:cTn id="9" presetID="1" presetClass="entr" presetSubtype="0" fill="hold" nodeType="clickEffect">
+                            <p:stCondLst>
+                              <p:cond delay="0"/>
+                            </p:stCondLst>
+                            <p:childTnLst>
+                              <p:animEffect transition="in" filter="typewriter">
+                                <p:cBhvr>
+                                  <p:cTn id="10" dur="610" fill="hold"/>
+                                  <p:tgtEl>
+                                    <p:spTgt spid="15"/>
+                                  </p:tgtEl>
+                                </p:cBhvr>
+                              </p:animEffect>
+                            </p:childTnLst>
+                            <p:iterate type="lt">
+                              <p:tmAbs val="35"/>
+                            </p:iterate>
+                          </p:cTn>
+                        </p:par>
+                      </p:childTnLst>
+                    </p:cTn>
+                  </p:par>
+                  <p:par>
+                    <p:cTn id="11" fill="hold">
+                      <p:stCondLst>
+                        <p:cond delay="90"/>
+                      </p:stCondLst>
+                      <p:childTnLst>
+                        <p:par>
+                          <p:cTn id="12" presetID="1" presetClass="entr" presetSubtype="0" fill="hold" nodeType="clickEffect">
+                            <p:stCondLst>
+                              <p:cond delay="0"/>
+                            </p:stCondLst>
+                            <p:childTnLst>
+                              <p:animEffect transition="in" filter="typewriter">
+                                <p:cBhvr>
+                                  <p:cTn id="13" dur="655" fill="hold"/>
+                                  <p:tgtEl>
+                                    <p:spTgt spid="19"/>
+                                  </p:tgtEl>
+                                </p:cBhvr>
+                              </p:animEffect>
+                            </p:childTnLst>
+                            <p:iterate type="lt">
+                              <p:tmAbs val="35"/>
+                            </p:iterate>
+                          </p:cTn>
+                        </p:par>
+                      </p:childTnLst>
+                    </p:cTn>
+                  </p:par>
+                  <p:par>
+                    <p:cTn id="14" fill="hold">
+                      <p:stCondLst>
+                        <p:cond delay="90"/>
+                      </p:stCondLst>
+                      <p:childTnLst>
+                        <p:par>
+                          <p:cTn id="15" presetID="1" presetClass="entr" presetSubtype="0" fill="hold" nodeType="clickEffect">
+                            <p:stCondLst>
+                              <p:cond delay="0"/>
+                            </p:stCondLst>
+                            <p:childTnLst>
+                              <p:animEffect transition="in" filter="typewriter">
+                                <p:cBhvr>
+                                  <p:cTn id="16" dur="700" fill="hold"/>
+                                  <p:tgtEl>
+                                    <p:spTgt spid="23"/>
+                                  </p:tgtEl>
+                                </p:cBhvr>
+                              </p:animEffect>
+                            </p:childTnLst>
+                            <p:iterate type="lt">
+                              <p:tmAbs val="35"/>
+                            </p:iterate>
+                          </p:cTn>
+                        </p:par>
+                      </p:childTnLst>
+                    </p:cTn>
+                  </p:par>
+                  <p:par>
+                    <p:cTn id="17" fill="hold">
+                      <p:stCondLst>
+                        <p:cond delay="90"/>
+                      </p:stCondLst>
+                      <p:childTnLst>
+                        <p:par>
+                          <p:cTn id="18" presetID="1" presetClass="entr" presetSubtype="0" fill="hold" nodeType="clickEffect">
+                            <p:stCondLst>
+                              <p:cond delay="0"/>
+                            </p:stCondLst>
+                            <p:childTnLst>
+                              <p:animEffect transition="in" filter="typewriter">
+                                <p:cBhvr>
+                                  <p:cTn id="19" dur="745" fill="hold"/>
+                                  <p:tgtEl>
+                                    <p:spTgt spid="27"/>
+                                  </p:tgtEl>
+                                </p:cBhvr>
+                              </p:animEffect>
+                            </p:childTnLst>
+                            <p:iterate type="lt">
+                              <p:tmAbs val="35"/>
+                            </p:iterate>
+                          </p:cTn>
+                        </p:par>
+                      </p:childTnLst>
+                    </p:cTn>
+                  </p:par>
+                  <p:par>
+                    <p:cTn id="20" fill="hold">
+                      <p:stCondLst>
+                        <p:cond delay="90"/>
+                      </p:stCondLst>
+                      <p:childTnLst>
+                        <p:par>
+                          <p:cTn id="21" presetID="1" presetClass="entr" presetSubtype="0" fill="hold" nodeType="clickEffect">
+                            <p:stCondLst>
+                              <p:cond delay="0"/>
+                            </p:stCondLst>
+                            <p:childTnLst>
+                              <p:animEffect transition="in" filter="typewriter">
+                                <p:cBhvr>
+                                  <p:cTn id="22" dur="790" fill="hold"/>
+                                  <p:tgtEl>
+                                    <p:spTgt spid="31"/>
+                                  </p:tgtEl>
+                                </p:cBhvr>
+                              </p:animEffect>
+                            </p:childTnLst>
+                            <p:iterate type="lt">
+                              <p:tmAbs val="35"/>
+                            </p:iterate>
+                          </p:cTn>
+                        </p:par>
+                      </p:childTnLst>
+                    </p:cTn>
+                  </p:par>
+                  <p:par>
+                    <p:cTn id="23" fill="hold">
+                      <p:stCondLst>
+                        <p:cond delay="90"/>
+                      </p:stCondLst>
+                      <p:childTnLst>
+                        <p:par>
+                          <p:cTn id="24" presetID="1" presetClass="entr" presetSubtype="0" fill="hold" nodeType="clickEffect">
+                            <p:stCondLst>
+                              <p:cond delay="0"/>
+                            </p:stCondLst>
+                            <p:childTnLst>
+                              <p:animEffect transition="in" filter="typewriter">
+                                <p:cBhvr>
+                                  <p:cTn id="25" dur="835" fill="hold"/>
+                                  <p:tgtEl>
+                                    <p:spTgt spid="33"/>
+                                  </p:tgtEl>
+                                </p:cBhvr>
+                              </p:animEffect>
+                            </p:childTnLst>
+                            <p:iterate type="lt">
+                              <p:tmAbs val="35"/>
+                            </p:iterate>
+                          </p:cTn>
+                        </p:par>
+                      </p:childTnLst>
+                    </p:cTn>
+                  </p:par>
+                </p:childTnLst>
+              </p:cTn>
+              <p:prevCondLst>
+                <p:cond evt="onPrev" delay="0">
+                  <p:tgtEl>
+                    <p:sldTgt/>
+                  </p:tgtEl>
+                </p:cond>
+              </p:prevCondLst>
+              <p:nextCondLst>
+                <p:cond evt="onNext" delay="0">
+                  <p:tgtEl>
+                    <p:sldTgt/>
+                  </p:tgtEl>
+                </p:cond>
+              </p:nextCondLst>
+            </p:seq>
+          </p:childTnLst>
+        </p:cTn>
+      </p:par>
+    </p:tnLst>
+    <p:bldLst>
+      <p:bldP spid="9" grpId="0" build="p"/>
+      <p:bldP spid="10" grpId="0" build="p"/>
+      <p:bldP spid="15" grpId="0" build="p"/>
+      <p:bldP spid="19" grpId="0" build="p"/>
+      <p:bldP spid="23" grpId="0" build="p"/>
+      <p:bldP spid="27" grpId="0" build="p"/>
+      <p:bldP spid="31" grpId="0" build="p"/>
+      <p:bldP spid="33" grpId="0" build="p"/>
+    </p:bldLst>
+  </p:timing>
 </p:sld>
 </file>
 
@@ -17095,7 +20299,7 @@
       </p:sp>
       <p:sp>
         <p:nvSpPr>
-          <p:cNvPr id="6" name="Text 4"/>
+          <p:cNvPr id="6" name="static_text_0309"/>
           <p:cNvSpPr/>
           <p:nvPr/>
         </p:nvSpPr>
@@ -17139,7 +20343,7 @@
       </p:sp>
       <p:sp>
         <p:nvSpPr>
-          <p:cNvPr id="7" name="Text 5"/>
+          <p:cNvPr id="7" name="static_text_0310"/>
           <p:cNvSpPr/>
           <p:nvPr/>
         </p:nvSpPr>
@@ -17206,7 +20410,7 @@
       </p:sp>
       <p:sp>
         <p:nvSpPr>
-          <p:cNvPr id="9" name="Text 7"/>
+          <p:cNvPr id="9" name="tw_text_0311"/>
           <p:cNvSpPr/>
           <p:nvPr/>
         </p:nvSpPr>
@@ -17250,7 +20454,7 @@
       </p:sp>
       <p:sp>
         <p:nvSpPr>
-          <p:cNvPr id="10" name="Text 8"/>
+          <p:cNvPr id="10" name="tw_text_0312"/>
           <p:cNvSpPr/>
           <p:nvPr/>
         </p:nvSpPr>
@@ -17346,7 +20550,7 @@
       </p:sp>
       <p:sp>
         <p:nvSpPr>
-          <p:cNvPr id="13" name="Text 11"/>
+          <p:cNvPr id="13" name="static_text_0313"/>
           <p:cNvSpPr/>
           <p:nvPr/>
         </p:nvSpPr>
@@ -17390,7 +20594,7 @@
       </p:sp>
       <p:sp>
         <p:nvSpPr>
-          <p:cNvPr id="14" name="Text 12"/>
+          <p:cNvPr id="14" name="tw_text_0314"/>
           <p:cNvSpPr/>
           <p:nvPr/>
         </p:nvSpPr>
@@ -17486,7 +20690,7 @@
       </p:sp>
       <p:sp>
         <p:nvSpPr>
-          <p:cNvPr id="17" name="Text 15"/>
+          <p:cNvPr id="17" name="static_text_0315"/>
           <p:cNvSpPr/>
           <p:nvPr/>
         </p:nvSpPr>
@@ -17530,7 +20734,7 @@
       </p:sp>
       <p:sp>
         <p:nvSpPr>
-          <p:cNvPr id="18" name="Text 16"/>
+          <p:cNvPr id="18" name="tw_text_0316"/>
           <p:cNvSpPr/>
           <p:nvPr/>
         </p:nvSpPr>
@@ -17626,7 +20830,7 @@
       </p:sp>
       <p:sp>
         <p:nvSpPr>
-          <p:cNvPr id="21" name="Text 19"/>
+          <p:cNvPr id="21" name="static_text_0317"/>
           <p:cNvSpPr/>
           <p:nvPr/>
         </p:nvSpPr>
@@ -17670,7 +20874,7 @@
       </p:sp>
       <p:sp>
         <p:nvSpPr>
-          <p:cNvPr id="22" name="Text 20"/>
+          <p:cNvPr id="22" name="tw_text_0318"/>
           <p:cNvSpPr/>
           <p:nvPr/>
         </p:nvSpPr>
@@ -17741,7 +20945,7 @@
       </p:sp>
       <p:sp>
         <p:nvSpPr>
-          <p:cNvPr id="24" name="Text 22"/>
+          <p:cNvPr id="24" name="tw_text_0319"/>
           <p:cNvSpPr/>
           <p:nvPr/>
         </p:nvSpPr>
@@ -17812,7 +21016,7 @@
       </p:sp>
       <p:sp>
         <p:nvSpPr>
-          <p:cNvPr id="26" name="Text 24"/>
+          <p:cNvPr id="26" name="tw_text_0320"/>
           <p:cNvSpPr/>
           <p:nvPr/>
         </p:nvSpPr>
@@ -17856,7 +21060,7 @@
       </p:sp>
       <p:sp>
         <p:nvSpPr>
-          <p:cNvPr id="27" name="Text 25"/>
+          <p:cNvPr id="27" name="tw_text_0321"/>
           <p:cNvSpPr/>
           <p:nvPr/>
         </p:nvSpPr>
@@ -17903,6 +21107,278 @@
   <p:clrMapOvr>
     <a:masterClrMapping/>
   </p:clrMapOvr>
+  <p:timing>
+    <p:tnLst>
+      <p:par>
+        <p:cTn id="1" dur="indefinite" restart="never" nodeType="tmRoot">
+          <p:childTnLst>
+            <p:seq concurrent="1" nextAc="seek">
+              <p:cTn id="2" dur="indefinite" nodeType="mainSeq">
+                <p:childTnLst>
+                  <p:par>
+                    <p:cTn id="2" fill="hold">
+                      <p:stCondLst>
+                        <p:cond delay="0"/>
+                      </p:stCondLst>
+                      <p:childTnLst>
+                        <p:par>
+                          <p:cTn id="3" presetID="1" presetClass="entr" presetSubtype="0" fill="hold" nodeType="clickEffect">
+                            <p:stCondLst>
+                              <p:cond delay="0"/>
+                            </p:stCondLst>
+                            <p:childTnLst>
+                              <p:animEffect transition="in" filter="typewriter">
+                                <p:cBhvr>
+                                  <p:cTn id="4" dur="520" fill="hold"/>
+                                  <p:tgtEl>
+                                    <p:spTgt spid="9"/>
+                                  </p:tgtEl>
+                                </p:cBhvr>
+                              </p:animEffect>
+                            </p:childTnLst>
+                            <p:iterate type="lt">
+                              <p:tmAbs val="35"/>
+                            </p:iterate>
+                          </p:cTn>
+                        </p:par>
+                      </p:childTnLst>
+                    </p:cTn>
+                  </p:par>
+                  <p:par>
+                    <p:cTn id="5" fill="hold">
+                      <p:stCondLst>
+                        <p:cond delay="90"/>
+                      </p:stCondLst>
+                      <p:childTnLst>
+                        <p:par>
+                          <p:cTn id="6" presetID="1" presetClass="entr" presetSubtype="0" fill="hold" nodeType="clickEffect">
+                            <p:stCondLst>
+                              <p:cond delay="0"/>
+                            </p:stCondLst>
+                            <p:childTnLst>
+                              <p:animEffect transition="in" filter="typewriter">
+                                <p:cBhvr>
+                                  <p:cTn id="7" dur="565" fill="hold"/>
+                                  <p:tgtEl>
+                                    <p:spTgt spid="10"/>
+                                  </p:tgtEl>
+                                </p:cBhvr>
+                              </p:animEffect>
+                            </p:childTnLst>
+                            <p:iterate type="lt">
+                              <p:tmAbs val="35"/>
+                            </p:iterate>
+                          </p:cTn>
+                        </p:par>
+                      </p:childTnLst>
+                    </p:cTn>
+                  </p:par>
+                  <p:par>
+                    <p:cTn id="8" fill="hold">
+                      <p:stCondLst>
+                        <p:cond delay="90"/>
+                      </p:stCondLst>
+                      <p:childTnLst>
+                        <p:par>
+                          <p:cTn id="9" presetID="1" presetClass="entr" presetSubtype="0" fill="hold" nodeType="clickEffect">
+                            <p:stCondLst>
+                              <p:cond delay="0"/>
+                            </p:stCondLst>
+                            <p:childTnLst>
+                              <p:animEffect transition="in" filter="typewriter">
+                                <p:cBhvr>
+                                  <p:cTn id="10" dur="610" fill="hold"/>
+                                  <p:tgtEl>
+                                    <p:spTgt spid="14"/>
+                                  </p:tgtEl>
+                                </p:cBhvr>
+                              </p:animEffect>
+                            </p:childTnLst>
+                            <p:iterate type="lt">
+                              <p:tmAbs val="35"/>
+                            </p:iterate>
+                          </p:cTn>
+                        </p:par>
+                      </p:childTnLst>
+                    </p:cTn>
+                  </p:par>
+                  <p:par>
+                    <p:cTn id="11" fill="hold">
+                      <p:stCondLst>
+                        <p:cond delay="90"/>
+                      </p:stCondLst>
+                      <p:childTnLst>
+                        <p:par>
+                          <p:cTn id="12" presetID="1" presetClass="entr" presetSubtype="0" fill="hold" nodeType="clickEffect">
+                            <p:stCondLst>
+                              <p:cond delay="0"/>
+                            </p:stCondLst>
+                            <p:childTnLst>
+                              <p:animEffect transition="in" filter="typewriter">
+                                <p:cBhvr>
+                                  <p:cTn id="13" dur="655" fill="hold"/>
+                                  <p:tgtEl>
+                                    <p:spTgt spid="18"/>
+                                  </p:tgtEl>
+                                </p:cBhvr>
+                              </p:animEffect>
+                            </p:childTnLst>
+                            <p:iterate type="lt">
+                              <p:tmAbs val="35"/>
+                            </p:iterate>
+                          </p:cTn>
+                        </p:par>
+                      </p:childTnLst>
+                    </p:cTn>
+                  </p:par>
+                  <p:par>
+                    <p:cTn id="14" fill="hold">
+                      <p:stCondLst>
+                        <p:cond delay="90"/>
+                      </p:stCondLst>
+                      <p:childTnLst>
+                        <p:par>
+                          <p:cTn id="15" presetID="1" presetClass="entr" presetSubtype="0" fill="hold" nodeType="clickEffect">
+                            <p:stCondLst>
+                              <p:cond delay="0"/>
+                            </p:stCondLst>
+                            <p:childTnLst>
+                              <p:animEffect transition="in" filter="typewriter">
+                                <p:cBhvr>
+                                  <p:cTn id="16" dur="700" fill="hold"/>
+                                  <p:tgtEl>
+                                    <p:spTgt spid="22"/>
+                                  </p:tgtEl>
+                                </p:cBhvr>
+                              </p:animEffect>
+                            </p:childTnLst>
+                            <p:iterate type="lt">
+                              <p:tmAbs val="35"/>
+                            </p:iterate>
+                          </p:cTn>
+                        </p:par>
+                      </p:childTnLst>
+                    </p:cTn>
+                  </p:par>
+                  <p:par>
+                    <p:cTn id="17" fill="hold">
+                      <p:stCondLst>
+                        <p:cond delay="90"/>
+                      </p:stCondLst>
+                      <p:childTnLst>
+                        <p:par>
+                          <p:cTn id="18" presetID="1" presetClass="entr" presetSubtype="0" fill="hold" nodeType="clickEffect">
+                            <p:stCondLst>
+                              <p:cond delay="0"/>
+                            </p:stCondLst>
+                            <p:childTnLst>
+                              <p:animEffect transition="in" filter="typewriter">
+                                <p:cBhvr>
+                                  <p:cTn id="19" dur="745" fill="hold"/>
+                                  <p:tgtEl>
+                                    <p:spTgt spid="24"/>
+                                  </p:tgtEl>
+                                </p:cBhvr>
+                              </p:animEffect>
+                            </p:childTnLst>
+                            <p:iterate type="lt">
+                              <p:tmAbs val="35"/>
+                            </p:iterate>
+                          </p:cTn>
+                        </p:par>
+                      </p:childTnLst>
+                    </p:cTn>
+                  </p:par>
+                  <p:par>
+                    <p:cTn id="20" fill="hold">
+                      <p:stCondLst>
+                        <p:cond delay="90"/>
+                      </p:stCondLst>
+                      <p:childTnLst>
+                        <p:par>
+                          <p:cTn id="21" presetID="1" presetClass="entr" presetSubtype="0" fill="hold" nodeType="clickEffect">
+                            <p:stCondLst>
+                              <p:cond delay="0"/>
+                            </p:stCondLst>
+                            <p:childTnLst>
+                              <p:animEffect transition="in" filter="typewriter">
+                                <p:cBhvr>
+                                  <p:cTn id="22" dur="790" fill="hold"/>
+                                  <p:tgtEl>
+                                    <p:spTgt spid="26"/>
+                                  </p:tgtEl>
+                                </p:cBhvr>
+                              </p:animEffect>
+                            </p:childTnLst>
+                            <p:iterate type="lt">
+                              <p:tmAbs val="35"/>
+                            </p:iterate>
+                          </p:cTn>
+                        </p:par>
+                      </p:childTnLst>
+                    </p:cTn>
+                  </p:par>
+                  <p:par>
+                    <p:cTn id="23" fill="hold">
+                      <p:stCondLst>
+                        <p:cond delay="90"/>
+                      </p:stCondLst>
+                      <p:childTnLst>
+                        <p:par>
+                          <p:cTn id="24" presetID="1" presetClass="entr" presetSubtype="0" fill="hold" nodeType="clickEffect">
+                            <p:stCondLst>
+                              <p:cond delay="0"/>
+                            </p:stCondLst>
+                            <p:childTnLst>
+                              <p:animEffect transition="in" filter="typewriter">
+                                <p:cBhvr>
+                                  <p:cTn id="25" dur="835" fill="hold"/>
+                                  <p:tgtEl>
+                                    <p:spTgt spid="27"/>
+                                  </p:tgtEl>
+                                </p:cBhvr>
+                              </p:animEffect>
+                            </p:childTnLst>
+                            <p:iterate type="lt">
+                              <p:tmAbs val="35"/>
+                            </p:iterate>
+                          </p:cTn>
+                        </p:par>
+                      </p:childTnLst>
+                    </p:cTn>
+                  </p:par>
+                </p:childTnLst>
+              </p:cTn>
+              <p:prevCondLst>
+                <p:cond evt="onPrev" delay="0">
+                  <p:tgtEl>
+                    <p:sldTgt/>
+                  </p:tgtEl>
+                </p:cond>
+              </p:prevCondLst>
+              <p:nextCondLst>
+                <p:cond evt="onNext" delay="0">
+                  <p:tgtEl>
+                    <p:sldTgt/>
+                  </p:tgtEl>
+                </p:cond>
+              </p:nextCondLst>
+            </p:seq>
+          </p:childTnLst>
+        </p:cTn>
+      </p:par>
+    </p:tnLst>
+    <p:bldLst>
+      <p:bldP spid="9" grpId="0" build="p"/>
+      <p:bldP spid="10" grpId="0" build="p"/>
+      <p:bldP spid="14" grpId="0" build="p"/>
+      <p:bldP spid="18" grpId="0" build="p"/>
+      <p:bldP spid="22" grpId="0" build="p"/>
+      <p:bldP spid="24" grpId="0" build="p"/>
+      <p:bldP spid="26" grpId="0" build="p"/>
+      <p:bldP spid="27" grpId="0" build="p"/>
+    </p:bldLst>
+  </p:timing>
 </p:sld>
 </file>
 
@@ -18034,7 +21510,7 @@
       </p:sp>
       <p:sp>
         <p:nvSpPr>
-          <p:cNvPr id="6" name="Text 4"/>
+          <p:cNvPr id="6" name="static_text_0322"/>
           <p:cNvSpPr/>
           <p:nvPr/>
         </p:nvSpPr>
@@ -18078,7 +21554,7 @@
       </p:sp>
       <p:sp>
         <p:nvSpPr>
-          <p:cNvPr id="7" name="Text 5"/>
+          <p:cNvPr id="7" name="static_text_0323"/>
           <p:cNvSpPr/>
           <p:nvPr/>
         </p:nvSpPr>
@@ -18145,7 +21621,7 @@
       </p:sp>
       <p:sp>
         <p:nvSpPr>
-          <p:cNvPr id="9" name="Text 7"/>
+          <p:cNvPr id="9" name="static_text_0324"/>
           <p:cNvSpPr/>
           <p:nvPr/>
         </p:nvSpPr>
@@ -18189,7 +21665,7 @@
       </p:sp>
       <p:sp>
         <p:nvSpPr>
-          <p:cNvPr id="10" name="Text 8"/>
+          <p:cNvPr id="10" name="tw_text_0325"/>
           <p:cNvSpPr/>
           <p:nvPr/>
         </p:nvSpPr>
@@ -18260,7 +21736,7 @@
       </p:sp>
       <p:sp>
         <p:nvSpPr>
-          <p:cNvPr id="12" name="Text 10"/>
+          <p:cNvPr id="12" name="static_text_0326"/>
           <p:cNvSpPr/>
           <p:nvPr/>
         </p:nvSpPr>
@@ -18304,7 +21780,7 @@
       </p:sp>
       <p:sp>
         <p:nvSpPr>
-          <p:cNvPr id="13" name="Text 11"/>
+          <p:cNvPr id="13" name="tw_text_0327"/>
           <p:cNvSpPr/>
           <p:nvPr/>
         </p:nvSpPr>
@@ -18348,7 +21824,7 @@
       </p:sp>
       <p:sp>
         <p:nvSpPr>
-          <p:cNvPr id="14" name="Text 12"/>
+          <p:cNvPr id="14" name="tw_text_0328"/>
           <p:cNvSpPr/>
           <p:nvPr/>
         </p:nvSpPr>
@@ -18419,7 +21895,7 @@
       </p:sp>
       <p:sp>
         <p:nvSpPr>
-          <p:cNvPr id="16" name="Text 14"/>
+          <p:cNvPr id="16" name="static_text_0329"/>
           <p:cNvSpPr/>
           <p:nvPr/>
         </p:nvSpPr>
@@ -18463,7 +21939,7 @@
       </p:sp>
       <p:sp>
         <p:nvSpPr>
-          <p:cNvPr id="17" name="Text 15"/>
+          <p:cNvPr id="17" name="tw_text_0330"/>
           <p:cNvSpPr/>
           <p:nvPr/>
         </p:nvSpPr>
@@ -18507,7 +21983,7 @@
       </p:sp>
       <p:sp>
         <p:nvSpPr>
-          <p:cNvPr id="18" name="Text 16"/>
+          <p:cNvPr id="18" name="tw_text_0331"/>
           <p:cNvSpPr/>
           <p:nvPr/>
         </p:nvSpPr>
@@ -18578,7 +22054,7 @@
       </p:sp>
       <p:sp>
         <p:nvSpPr>
-          <p:cNvPr id="20" name="Text 18"/>
+          <p:cNvPr id="20" name="static_text_0332"/>
           <p:cNvSpPr/>
           <p:nvPr/>
         </p:nvSpPr>
@@ -18622,7 +22098,7 @@
       </p:sp>
       <p:sp>
         <p:nvSpPr>
-          <p:cNvPr id="21" name="Text 19"/>
+          <p:cNvPr id="21" name="tw_text_0333"/>
           <p:cNvSpPr/>
           <p:nvPr/>
         </p:nvSpPr>
@@ -18666,7 +22142,7 @@
       </p:sp>
       <p:sp>
         <p:nvSpPr>
-          <p:cNvPr id="22" name="Text 20"/>
+          <p:cNvPr id="22" name="tw_text_0334"/>
           <p:cNvSpPr/>
           <p:nvPr/>
         </p:nvSpPr>
@@ -18737,7 +22213,7 @@
       </p:sp>
       <p:sp>
         <p:nvSpPr>
-          <p:cNvPr id="24" name="Text 22"/>
+          <p:cNvPr id="24" name="static_text_0335"/>
           <p:cNvSpPr/>
           <p:nvPr/>
         </p:nvSpPr>
@@ -18781,7 +22257,7 @@
       </p:sp>
       <p:sp>
         <p:nvSpPr>
-          <p:cNvPr id="25" name="Text 23"/>
+          <p:cNvPr id="25" name="tw_text_0336"/>
           <p:cNvSpPr/>
           <p:nvPr/>
         </p:nvSpPr>
@@ -18825,7 +22301,7 @@
       </p:sp>
       <p:sp>
         <p:nvSpPr>
-          <p:cNvPr id="26" name="Text 24"/>
+          <p:cNvPr id="26" name="tw_text_0337"/>
           <p:cNvSpPr/>
           <p:nvPr/>
         </p:nvSpPr>
@@ -18896,7 +22372,7 @@
       </p:sp>
       <p:sp>
         <p:nvSpPr>
-          <p:cNvPr id="28" name="Text 26"/>
+          <p:cNvPr id="28" name="static_text_0338"/>
           <p:cNvSpPr/>
           <p:nvPr/>
         </p:nvSpPr>
@@ -18940,7 +22416,7 @@
       </p:sp>
       <p:sp>
         <p:nvSpPr>
-          <p:cNvPr id="29" name="Text 27"/>
+          <p:cNvPr id="29" name="tw_text_0339"/>
           <p:cNvSpPr/>
           <p:nvPr/>
         </p:nvSpPr>
@@ -18984,7 +22460,7 @@
       </p:sp>
       <p:sp>
         <p:nvSpPr>
-          <p:cNvPr id="30" name="Text 28"/>
+          <p:cNvPr id="30" name="tw_text_0340"/>
           <p:cNvSpPr/>
           <p:nvPr/>
         </p:nvSpPr>
@@ -19055,7 +22531,7 @@
       </p:sp>
       <p:sp>
         <p:nvSpPr>
-          <p:cNvPr id="32" name="Text 30"/>
+          <p:cNvPr id="32" name="static_text_0341"/>
           <p:cNvSpPr/>
           <p:nvPr/>
         </p:nvSpPr>
@@ -19099,7 +22575,7 @@
       </p:sp>
       <p:sp>
         <p:nvSpPr>
-          <p:cNvPr id="33" name="Text 31"/>
+          <p:cNvPr id="33" name="tw_text_0342"/>
           <p:cNvSpPr/>
           <p:nvPr/>
         </p:nvSpPr>
@@ -19143,7 +22619,7 @@
       </p:sp>
       <p:sp>
         <p:nvSpPr>
-          <p:cNvPr id="34" name="Text 32"/>
+          <p:cNvPr id="34" name="tw_text_0343"/>
           <p:cNvSpPr/>
           <p:nvPr/>
         </p:nvSpPr>
@@ -19214,7 +22690,7 @@
       </p:sp>
       <p:sp>
         <p:nvSpPr>
-          <p:cNvPr id="36" name="Text 34"/>
+          <p:cNvPr id="36" name="static_text_0344"/>
           <p:cNvSpPr/>
           <p:nvPr/>
         </p:nvSpPr>
@@ -19261,6 +22737,428 @@
   <p:clrMapOvr>
     <a:masterClrMapping/>
   </p:clrMapOvr>
+  <p:timing>
+    <p:tnLst>
+      <p:par>
+        <p:cTn id="1" dur="indefinite" restart="never" nodeType="tmRoot">
+          <p:childTnLst>
+            <p:seq concurrent="1" nextAc="seek">
+              <p:cTn id="2" dur="indefinite" nodeType="mainSeq">
+                <p:childTnLst>
+                  <p:par>
+                    <p:cTn id="2" fill="hold">
+                      <p:stCondLst>
+                        <p:cond delay="0"/>
+                      </p:stCondLst>
+                      <p:childTnLst>
+                        <p:par>
+                          <p:cTn id="3" presetID="1" presetClass="entr" presetSubtype="0" fill="hold" nodeType="clickEffect">
+                            <p:stCondLst>
+                              <p:cond delay="0"/>
+                            </p:stCondLst>
+                            <p:childTnLst>
+                              <p:animEffect transition="in" filter="typewriter">
+                                <p:cBhvr>
+                                  <p:cTn id="4" dur="520" fill="hold"/>
+                                  <p:tgtEl>
+                                    <p:spTgt spid="10"/>
+                                  </p:tgtEl>
+                                </p:cBhvr>
+                              </p:animEffect>
+                            </p:childTnLst>
+                            <p:iterate type="lt">
+                              <p:tmAbs val="35"/>
+                            </p:iterate>
+                          </p:cTn>
+                        </p:par>
+                      </p:childTnLst>
+                    </p:cTn>
+                  </p:par>
+                  <p:par>
+                    <p:cTn id="5" fill="hold">
+                      <p:stCondLst>
+                        <p:cond delay="90"/>
+                      </p:stCondLst>
+                      <p:childTnLst>
+                        <p:par>
+                          <p:cTn id="6" presetID="1" presetClass="entr" presetSubtype="0" fill="hold" nodeType="clickEffect">
+                            <p:stCondLst>
+                              <p:cond delay="0"/>
+                            </p:stCondLst>
+                            <p:childTnLst>
+                              <p:animEffect transition="in" filter="typewriter">
+                                <p:cBhvr>
+                                  <p:cTn id="7" dur="565" fill="hold"/>
+                                  <p:tgtEl>
+                                    <p:spTgt spid="13"/>
+                                  </p:tgtEl>
+                                </p:cBhvr>
+                              </p:animEffect>
+                            </p:childTnLst>
+                            <p:iterate type="lt">
+                              <p:tmAbs val="35"/>
+                            </p:iterate>
+                          </p:cTn>
+                        </p:par>
+                      </p:childTnLst>
+                    </p:cTn>
+                  </p:par>
+                  <p:par>
+                    <p:cTn id="8" fill="hold">
+                      <p:stCondLst>
+                        <p:cond delay="90"/>
+                      </p:stCondLst>
+                      <p:childTnLst>
+                        <p:par>
+                          <p:cTn id="9" presetID="1" presetClass="entr" presetSubtype="0" fill="hold" nodeType="clickEffect">
+                            <p:stCondLst>
+                              <p:cond delay="0"/>
+                            </p:stCondLst>
+                            <p:childTnLst>
+                              <p:animEffect transition="in" filter="typewriter">
+                                <p:cBhvr>
+                                  <p:cTn id="10" dur="610" fill="hold"/>
+                                  <p:tgtEl>
+                                    <p:spTgt spid="14"/>
+                                  </p:tgtEl>
+                                </p:cBhvr>
+                              </p:animEffect>
+                            </p:childTnLst>
+                            <p:iterate type="lt">
+                              <p:tmAbs val="35"/>
+                            </p:iterate>
+                          </p:cTn>
+                        </p:par>
+                      </p:childTnLst>
+                    </p:cTn>
+                  </p:par>
+                  <p:par>
+                    <p:cTn id="11" fill="hold">
+                      <p:stCondLst>
+                        <p:cond delay="90"/>
+                      </p:stCondLst>
+                      <p:childTnLst>
+                        <p:par>
+                          <p:cTn id="12" presetID="1" presetClass="entr" presetSubtype="0" fill="hold" nodeType="clickEffect">
+                            <p:stCondLst>
+                              <p:cond delay="0"/>
+                            </p:stCondLst>
+                            <p:childTnLst>
+                              <p:animEffect transition="in" filter="typewriter">
+                                <p:cBhvr>
+                                  <p:cTn id="13" dur="655" fill="hold"/>
+                                  <p:tgtEl>
+                                    <p:spTgt spid="17"/>
+                                  </p:tgtEl>
+                                </p:cBhvr>
+                              </p:animEffect>
+                            </p:childTnLst>
+                            <p:iterate type="lt">
+                              <p:tmAbs val="35"/>
+                            </p:iterate>
+                          </p:cTn>
+                        </p:par>
+                      </p:childTnLst>
+                    </p:cTn>
+                  </p:par>
+                  <p:par>
+                    <p:cTn id="14" fill="hold">
+                      <p:stCondLst>
+                        <p:cond delay="90"/>
+                      </p:stCondLst>
+                      <p:childTnLst>
+                        <p:par>
+                          <p:cTn id="15" presetID="1" presetClass="entr" presetSubtype="0" fill="hold" nodeType="clickEffect">
+                            <p:stCondLst>
+                              <p:cond delay="0"/>
+                            </p:stCondLst>
+                            <p:childTnLst>
+                              <p:animEffect transition="in" filter="typewriter">
+                                <p:cBhvr>
+                                  <p:cTn id="16" dur="700" fill="hold"/>
+                                  <p:tgtEl>
+                                    <p:spTgt spid="18"/>
+                                  </p:tgtEl>
+                                </p:cBhvr>
+                              </p:animEffect>
+                            </p:childTnLst>
+                            <p:iterate type="lt">
+                              <p:tmAbs val="35"/>
+                            </p:iterate>
+                          </p:cTn>
+                        </p:par>
+                      </p:childTnLst>
+                    </p:cTn>
+                  </p:par>
+                  <p:par>
+                    <p:cTn id="17" fill="hold">
+                      <p:stCondLst>
+                        <p:cond delay="90"/>
+                      </p:stCondLst>
+                      <p:childTnLst>
+                        <p:par>
+                          <p:cTn id="18" presetID="1" presetClass="entr" presetSubtype="0" fill="hold" nodeType="clickEffect">
+                            <p:stCondLst>
+                              <p:cond delay="0"/>
+                            </p:stCondLst>
+                            <p:childTnLst>
+                              <p:animEffect transition="in" filter="typewriter">
+                                <p:cBhvr>
+                                  <p:cTn id="19" dur="745" fill="hold"/>
+                                  <p:tgtEl>
+                                    <p:spTgt spid="21"/>
+                                  </p:tgtEl>
+                                </p:cBhvr>
+                              </p:animEffect>
+                            </p:childTnLst>
+                            <p:iterate type="lt">
+                              <p:tmAbs val="35"/>
+                            </p:iterate>
+                          </p:cTn>
+                        </p:par>
+                      </p:childTnLst>
+                    </p:cTn>
+                  </p:par>
+                  <p:par>
+                    <p:cTn id="20" fill="hold">
+                      <p:stCondLst>
+                        <p:cond delay="90"/>
+                      </p:stCondLst>
+                      <p:childTnLst>
+                        <p:par>
+                          <p:cTn id="21" presetID="1" presetClass="entr" presetSubtype="0" fill="hold" nodeType="clickEffect">
+                            <p:stCondLst>
+                              <p:cond delay="0"/>
+                            </p:stCondLst>
+                            <p:childTnLst>
+                              <p:animEffect transition="in" filter="typewriter">
+                                <p:cBhvr>
+                                  <p:cTn id="22" dur="790" fill="hold"/>
+                                  <p:tgtEl>
+                                    <p:spTgt spid="22"/>
+                                  </p:tgtEl>
+                                </p:cBhvr>
+                              </p:animEffect>
+                            </p:childTnLst>
+                            <p:iterate type="lt">
+                              <p:tmAbs val="35"/>
+                            </p:iterate>
+                          </p:cTn>
+                        </p:par>
+                      </p:childTnLst>
+                    </p:cTn>
+                  </p:par>
+                  <p:par>
+                    <p:cTn id="23" fill="hold">
+                      <p:stCondLst>
+                        <p:cond delay="90"/>
+                      </p:stCondLst>
+                      <p:childTnLst>
+                        <p:par>
+                          <p:cTn id="24" presetID="1" presetClass="entr" presetSubtype="0" fill="hold" nodeType="clickEffect">
+                            <p:stCondLst>
+                              <p:cond delay="0"/>
+                            </p:stCondLst>
+                            <p:childTnLst>
+                              <p:animEffect transition="in" filter="typewriter">
+                                <p:cBhvr>
+                                  <p:cTn id="25" dur="835" fill="hold"/>
+                                  <p:tgtEl>
+                                    <p:spTgt spid="25"/>
+                                  </p:tgtEl>
+                                </p:cBhvr>
+                              </p:animEffect>
+                            </p:childTnLst>
+                            <p:iterate type="lt">
+                              <p:tmAbs val="35"/>
+                            </p:iterate>
+                          </p:cTn>
+                        </p:par>
+                      </p:childTnLst>
+                    </p:cTn>
+                  </p:par>
+                  <p:par>
+                    <p:cTn id="26" fill="hold">
+                      <p:stCondLst>
+                        <p:cond delay="90"/>
+                      </p:stCondLst>
+                      <p:childTnLst>
+                        <p:par>
+                          <p:cTn id="27" presetID="1" presetClass="entr" presetSubtype="0" fill="hold" nodeType="clickEffect">
+                            <p:stCondLst>
+                              <p:cond delay="0"/>
+                            </p:stCondLst>
+                            <p:childTnLst>
+                              <p:animEffect transition="in" filter="typewriter">
+                                <p:cBhvr>
+                                  <p:cTn id="28" dur="880" fill="hold"/>
+                                  <p:tgtEl>
+                                    <p:spTgt spid="26"/>
+                                  </p:tgtEl>
+                                </p:cBhvr>
+                              </p:animEffect>
+                            </p:childTnLst>
+                            <p:iterate type="lt">
+                              <p:tmAbs val="35"/>
+                            </p:iterate>
+                          </p:cTn>
+                        </p:par>
+                      </p:childTnLst>
+                    </p:cTn>
+                  </p:par>
+                  <p:par>
+                    <p:cTn id="29" fill="hold">
+                      <p:stCondLst>
+                        <p:cond delay="90"/>
+                      </p:stCondLst>
+                      <p:childTnLst>
+                        <p:par>
+                          <p:cTn id="30" presetID="1" presetClass="entr" presetSubtype="0" fill="hold" nodeType="clickEffect">
+                            <p:stCondLst>
+                              <p:cond delay="0"/>
+                            </p:stCondLst>
+                            <p:childTnLst>
+                              <p:animEffect transition="in" filter="typewriter">
+                                <p:cBhvr>
+                                  <p:cTn id="31" dur="925" fill="hold"/>
+                                  <p:tgtEl>
+                                    <p:spTgt spid="29"/>
+                                  </p:tgtEl>
+                                </p:cBhvr>
+                              </p:animEffect>
+                            </p:childTnLst>
+                            <p:iterate type="lt">
+                              <p:tmAbs val="35"/>
+                            </p:iterate>
+                          </p:cTn>
+                        </p:par>
+                      </p:childTnLst>
+                    </p:cTn>
+                  </p:par>
+                  <p:par>
+                    <p:cTn id="32" fill="hold">
+                      <p:stCondLst>
+                        <p:cond delay="90"/>
+                      </p:stCondLst>
+                      <p:childTnLst>
+                        <p:par>
+                          <p:cTn id="33" presetID="1" presetClass="entr" presetSubtype="0" fill="hold" nodeType="clickEffect">
+                            <p:stCondLst>
+                              <p:cond delay="0"/>
+                            </p:stCondLst>
+                            <p:childTnLst>
+                              <p:animEffect transition="in" filter="typewriter">
+                                <p:cBhvr>
+                                  <p:cTn id="34" dur="970" fill="hold"/>
+                                  <p:tgtEl>
+                                    <p:spTgt spid="30"/>
+                                  </p:tgtEl>
+                                </p:cBhvr>
+                              </p:animEffect>
+                            </p:childTnLst>
+                            <p:iterate type="lt">
+                              <p:tmAbs val="35"/>
+                            </p:iterate>
+                          </p:cTn>
+                        </p:par>
+                      </p:childTnLst>
+                    </p:cTn>
+                  </p:par>
+                  <p:par>
+                    <p:cTn id="35" fill="hold">
+                      <p:stCondLst>
+                        <p:cond delay="90"/>
+                      </p:stCondLst>
+                      <p:childTnLst>
+                        <p:par>
+                          <p:cTn id="36" presetID="1" presetClass="entr" presetSubtype="0" fill="hold" nodeType="clickEffect">
+                            <p:stCondLst>
+                              <p:cond delay="0"/>
+                            </p:stCondLst>
+                            <p:childTnLst>
+                              <p:animEffect transition="in" filter="typewriter">
+                                <p:cBhvr>
+                                  <p:cTn id="37" dur="1015" fill="hold"/>
+                                  <p:tgtEl>
+                                    <p:spTgt spid="33"/>
+                                  </p:tgtEl>
+                                </p:cBhvr>
+                              </p:animEffect>
+                            </p:childTnLst>
+                            <p:iterate type="lt">
+                              <p:tmAbs val="35"/>
+                            </p:iterate>
+                          </p:cTn>
+                        </p:par>
+                      </p:childTnLst>
+                    </p:cTn>
+                  </p:par>
+                  <p:par>
+                    <p:cTn id="38" fill="hold">
+                      <p:stCondLst>
+                        <p:cond delay="90"/>
+                      </p:stCondLst>
+                      <p:childTnLst>
+                        <p:par>
+                          <p:cTn id="39" presetID="1" presetClass="entr" presetSubtype="0" fill="hold" nodeType="clickEffect">
+                            <p:stCondLst>
+                              <p:cond delay="0"/>
+                            </p:stCondLst>
+                            <p:childTnLst>
+                              <p:animEffect transition="in" filter="typewriter">
+                                <p:cBhvr>
+                                  <p:cTn id="40" dur="1060" fill="hold"/>
+                                  <p:tgtEl>
+                                    <p:spTgt spid="34"/>
+                                  </p:tgtEl>
+                                </p:cBhvr>
+                              </p:animEffect>
+                            </p:childTnLst>
+                            <p:iterate type="lt">
+                              <p:tmAbs val="35"/>
+                            </p:iterate>
+                          </p:cTn>
+                        </p:par>
+                      </p:childTnLst>
+                    </p:cTn>
+                  </p:par>
+                </p:childTnLst>
+              </p:cTn>
+              <p:prevCondLst>
+                <p:cond evt="onPrev" delay="0">
+                  <p:tgtEl>
+                    <p:sldTgt/>
+                  </p:tgtEl>
+                </p:cond>
+              </p:prevCondLst>
+              <p:nextCondLst>
+                <p:cond evt="onNext" delay="0">
+                  <p:tgtEl>
+                    <p:sldTgt/>
+                  </p:tgtEl>
+                </p:cond>
+              </p:nextCondLst>
+            </p:seq>
+          </p:childTnLst>
+        </p:cTn>
+      </p:par>
+    </p:tnLst>
+    <p:bldLst>
+      <p:bldP spid="10" grpId="0" build="p"/>
+      <p:bldP spid="13" grpId="0" build="p"/>
+      <p:bldP spid="14" grpId="0" build="p"/>
+      <p:bldP spid="17" grpId="0" build="p"/>
+      <p:bldP spid="18" grpId="0" build="p"/>
+      <p:bldP spid="21" grpId="0" build="p"/>
+      <p:bldP spid="22" grpId="0" build="p"/>
+      <p:bldP spid="25" grpId="0" build="p"/>
+      <p:bldP spid="26" grpId="0" build="p"/>
+      <p:bldP spid="29" grpId="0" build="p"/>
+      <p:bldP spid="30" grpId="0" build="p"/>
+      <p:bldP spid="33" grpId="0" build="p"/>
+      <p:bldP spid="34" grpId="0" build="p"/>
+    </p:bldLst>
+  </p:timing>
 </p:sld>
 </file>
 
@@ -19392,7 +23290,7 @@
       </p:sp>
       <p:sp>
         <p:nvSpPr>
-          <p:cNvPr id="6" name="Text 4"/>
+          <p:cNvPr id="6" name="static_text_0038"/>
           <p:cNvSpPr/>
           <p:nvPr/>
         </p:nvSpPr>
@@ -19436,7 +23334,7 @@
       </p:sp>
       <p:sp>
         <p:nvSpPr>
-          <p:cNvPr id="7" name="Text 5"/>
+          <p:cNvPr id="7" name="static_text_0039"/>
           <p:cNvSpPr/>
           <p:nvPr/>
         </p:nvSpPr>
@@ -19503,7 +23401,7 @@
       </p:sp>
       <p:sp>
         <p:nvSpPr>
-          <p:cNvPr id="9" name="Text 7"/>
+          <p:cNvPr id="9" name="tw_text_0040"/>
           <p:cNvSpPr/>
           <p:nvPr/>
         </p:nvSpPr>
@@ -19547,7 +23445,7 @@
       </p:sp>
       <p:sp>
         <p:nvSpPr>
-          <p:cNvPr id="10" name="Text 8"/>
+          <p:cNvPr id="10" name="tw_text_0041"/>
           <p:cNvSpPr/>
           <p:nvPr/>
         </p:nvSpPr>
@@ -19618,7 +23516,7 @@
       </p:sp>
       <p:sp>
         <p:nvSpPr>
-          <p:cNvPr id="12" name="Text 10"/>
+          <p:cNvPr id="12" name="static_text_0042"/>
           <p:cNvSpPr/>
           <p:nvPr/>
         </p:nvSpPr>
@@ -19662,7 +23560,7 @@
       </p:sp>
       <p:sp>
         <p:nvSpPr>
-          <p:cNvPr id="13" name="Text 11"/>
+          <p:cNvPr id="13" name="tw_text_0043"/>
           <p:cNvSpPr/>
           <p:nvPr/>
         </p:nvSpPr>
@@ -19733,7 +23631,7 @@
       </p:sp>
       <p:sp>
         <p:nvSpPr>
-          <p:cNvPr id="15" name="Text 13"/>
+          <p:cNvPr id="15" name="static_text_0044"/>
           <p:cNvSpPr/>
           <p:nvPr/>
         </p:nvSpPr>
@@ -19777,7 +23675,7 @@
       </p:sp>
       <p:sp>
         <p:nvSpPr>
-          <p:cNvPr id="16" name="Text 14"/>
+          <p:cNvPr id="16" name="tw_text_0045"/>
           <p:cNvSpPr/>
           <p:nvPr/>
         </p:nvSpPr>
@@ -19848,7 +23746,7 @@
       </p:sp>
       <p:sp>
         <p:nvSpPr>
-          <p:cNvPr id="18" name="Text 16"/>
+          <p:cNvPr id="18" name="static_text_0046"/>
           <p:cNvSpPr/>
           <p:nvPr/>
         </p:nvSpPr>
@@ -19892,7 +23790,7 @@
       </p:sp>
       <p:sp>
         <p:nvSpPr>
-          <p:cNvPr id="19" name="Text 17"/>
+          <p:cNvPr id="19" name="tw_text_0047"/>
           <p:cNvSpPr/>
           <p:nvPr/>
         </p:nvSpPr>
@@ -19963,7 +23861,7 @@
       </p:sp>
       <p:sp>
         <p:nvSpPr>
-          <p:cNvPr id="21" name="Text 19"/>
+          <p:cNvPr id="21" name="static_text_0048"/>
           <p:cNvSpPr/>
           <p:nvPr/>
         </p:nvSpPr>
@@ -20007,7 +23905,7 @@
       </p:sp>
       <p:sp>
         <p:nvSpPr>
-          <p:cNvPr id="22" name="Text 20"/>
+          <p:cNvPr id="22" name="tw_text_0049"/>
           <p:cNvSpPr/>
           <p:nvPr/>
         </p:nvSpPr>
@@ -20078,7 +23976,7 @@
       </p:sp>
       <p:sp>
         <p:nvSpPr>
-          <p:cNvPr id="24" name="Text 22"/>
+          <p:cNvPr id="24" name="static_text_0050"/>
           <p:cNvSpPr/>
           <p:nvPr/>
         </p:nvSpPr>
@@ -20122,7 +24020,7 @@
       </p:sp>
       <p:sp>
         <p:nvSpPr>
-          <p:cNvPr id="25" name="Text 23"/>
+          <p:cNvPr id="25" name="tw_text_0051"/>
           <p:cNvSpPr/>
           <p:nvPr/>
         </p:nvSpPr>
@@ -20244,7 +24142,7 @@
       </p:pic>
       <p:sp>
         <p:nvSpPr>
-          <p:cNvPr id="29" name="Text 26"/>
+          <p:cNvPr id="29" name="tw_text_0052"/>
           <p:cNvSpPr/>
           <p:nvPr/>
         </p:nvSpPr>
@@ -20366,7 +24264,7 @@
       </p:pic>
       <p:sp>
         <p:nvSpPr>
-          <p:cNvPr id="33" name="Text 29"/>
+          <p:cNvPr id="33" name="tw_text_0053"/>
           <p:cNvSpPr/>
           <p:nvPr/>
         </p:nvSpPr>
@@ -20433,7 +24331,7 @@
       </p:sp>
       <p:sp>
         <p:nvSpPr>
-          <p:cNvPr id="35" name="Text 31"/>
+          <p:cNvPr id="35" name="static_text_0054"/>
           <p:cNvSpPr/>
           <p:nvPr/>
         </p:nvSpPr>
@@ -20480,6 +24378,308 @@
   <p:clrMapOvr>
     <a:masterClrMapping/>
   </p:clrMapOvr>
+  <p:timing>
+    <p:tnLst>
+      <p:par>
+        <p:cTn id="1" dur="indefinite" restart="never" nodeType="tmRoot">
+          <p:childTnLst>
+            <p:seq concurrent="1" nextAc="seek">
+              <p:cTn id="2" dur="indefinite" nodeType="mainSeq">
+                <p:childTnLst>
+                  <p:par>
+                    <p:cTn id="2" fill="hold">
+                      <p:stCondLst>
+                        <p:cond delay="0"/>
+                      </p:stCondLst>
+                      <p:childTnLst>
+                        <p:par>
+                          <p:cTn id="3" presetID="1" presetClass="entr" presetSubtype="0" fill="hold" nodeType="clickEffect">
+                            <p:stCondLst>
+                              <p:cond delay="0"/>
+                            </p:stCondLst>
+                            <p:childTnLst>
+                              <p:animEffect transition="in" filter="typewriter">
+                                <p:cBhvr>
+                                  <p:cTn id="4" dur="520" fill="hold"/>
+                                  <p:tgtEl>
+                                    <p:spTgt spid="9"/>
+                                  </p:tgtEl>
+                                </p:cBhvr>
+                              </p:animEffect>
+                            </p:childTnLst>
+                            <p:iterate type="lt">
+                              <p:tmAbs val="35"/>
+                            </p:iterate>
+                          </p:cTn>
+                        </p:par>
+                      </p:childTnLst>
+                    </p:cTn>
+                  </p:par>
+                  <p:par>
+                    <p:cTn id="5" fill="hold">
+                      <p:stCondLst>
+                        <p:cond delay="90"/>
+                      </p:stCondLst>
+                      <p:childTnLst>
+                        <p:par>
+                          <p:cTn id="6" presetID="1" presetClass="entr" presetSubtype="0" fill="hold" nodeType="clickEffect">
+                            <p:stCondLst>
+                              <p:cond delay="0"/>
+                            </p:stCondLst>
+                            <p:childTnLst>
+                              <p:animEffect transition="in" filter="typewriter">
+                                <p:cBhvr>
+                                  <p:cTn id="7" dur="565" fill="hold"/>
+                                  <p:tgtEl>
+                                    <p:spTgt spid="10"/>
+                                  </p:tgtEl>
+                                </p:cBhvr>
+                              </p:animEffect>
+                            </p:childTnLst>
+                            <p:iterate type="lt">
+                              <p:tmAbs val="35"/>
+                            </p:iterate>
+                          </p:cTn>
+                        </p:par>
+                      </p:childTnLst>
+                    </p:cTn>
+                  </p:par>
+                  <p:par>
+                    <p:cTn id="8" fill="hold">
+                      <p:stCondLst>
+                        <p:cond delay="90"/>
+                      </p:stCondLst>
+                      <p:childTnLst>
+                        <p:par>
+                          <p:cTn id="9" presetID="1" presetClass="entr" presetSubtype="0" fill="hold" nodeType="clickEffect">
+                            <p:stCondLst>
+                              <p:cond delay="0"/>
+                            </p:stCondLst>
+                            <p:childTnLst>
+                              <p:animEffect transition="in" filter="typewriter">
+                                <p:cBhvr>
+                                  <p:cTn id="10" dur="610" fill="hold"/>
+                                  <p:tgtEl>
+                                    <p:spTgt spid="13"/>
+                                  </p:tgtEl>
+                                </p:cBhvr>
+                              </p:animEffect>
+                            </p:childTnLst>
+                            <p:iterate type="lt">
+                              <p:tmAbs val="35"/>
+                            </p:iterate>
+                          </p:cTn>
+                        </p:par>
+                      </p:childTnLst>
+                    </p:cTn>
+                  </p:par>
+                  <p:par>
+                    <p:cTn id="11" fill="hold">
+                      <p:stCondLst>
+                        <p:cond delay="90"/>
+                      </p:stCondLst>
+                      <p:childTnLst>
+                        <p:par>
+                          <p:cTn id="12" presetID="1" presetClass="entr" presetSubtype="0" fill="hold" nodeType="clickEffect">
+                            <p:stCondLst>
+                              <p:cond delay="0"/>
+                            </p:stCondLst>
+                            <p:childTnLst>
+                              <p:animEffect transition="in" filter="typewriter">
+                                <p:cBhvr>
+                                  <p:cTn id="13" dur="655" fill="hold"/>
+                                  <p:tgtEl>
+                                    <p:spTgt spid="16"/>
+                                  </p:tgtEl>
+                                </p:cBhvr>
+                              </p:animEffect>
+                            </p:childTnLst>
+                            <p:iterate type="lt">
+                              <p:tmAbs val="35"/>
+                            </p:iterate>
+                          </p:cTn>
+                        </p:par>
+                      </p:childTnLst>
+                    </p:cTn>
+                  </p:par>
+                  <p:par>
+                    <p:cTn id="14" fill="hold">
+                      <p:stCondLst>
+                        <p:cond delay="90"/>
+                      </p:stCondLst>
+                      <p:childTnLst>
+                        <p:par>
+                          <p:cTn id="15" presetID="1" presetClass="entr" presetSubtype="0" fill="hold" nodeType="clickEffect">
+                            <p:stCondLst>
+                              <p:cond delay="0"/>
+                            </p:stCondLst>
+                            <p:childTnLst>
+                              <p:animEffect transition="in" filter="typewriter">
+                                <p:cBhvr>
+                                  <p:cTn id="16" dur="700" fill="hold"/>
+                                  <p:tgtEl>
+                                    <p:spTgt spid="19"/>
+                                  </p:tgtEl>
+                                </p:cBhvr>
+                              </p:animEffect>
+                            </p:childTnLst>
+                            <p:iterate type="lt">
+                              <p:tmAbs val="35"/>
+                            </p:iterate>
+                          </p:cTn>
+                        </p:par>
+                      </p:childTnLst>
+                    </p:cTn>
+                  </p:par>
+                  <p:par>
+                    <p:cTn id="17" fill="hold">
+                      <p:stCondLst>
+                        <p:cond delay="90"/>
+                      </p:stCondLst>
+                      <p:childTnLst>
+                        <p:par>
+                          <p:cTn id="18" presetID="1" presetClass="entr" presetSubtype="0" fill="hold" nodeType="clickEffect">
+                            <p:stCondLst>
+                              <p:cond delay="0"/>
+                            </p:stCondLst>
+                            <p:childTnLst>
+                              <p:animEffect transition="in" filter="typewriter">
+                                <p:cBhvr>
+                                  <p:cTn id="19" dur="745" fill="hold"/>
+                                  <p:tgtEl>
+                                    <p:spTgt spid="22"/>
+                                  </p:tgtEl>
+                                </p:cBhvr>
+                              </p:animEffect>
+                            </p:childTnLst>
+                            <p:iterate type="lt">
+                              <p:tmAbs val="35"/>
+                            </p:iterate>
+                          </p:cTn>
+                        </p:par>
+                      </p:childTnLst>
+                    </p:cTn>
+                  </p:par>
+                  <p:par>
+                    <p:cTn id="20" fill="hold">
+                      <p:stCondLst>
+                        <p:cond delay="90"/>
+                      </p:stCondLst>
+                      <p:childTnLst>
+                        <p:par>
+                          <p:cTn id="21" presetID="1" presetClass="entr" presetSubtype="0" fill="hold" nodeType="clickEffect">
+                            <p:stCondLst>
+                              <p:cond delay="0"/>
+                            </p:stCondLst>
+                            <p:childTnLst>
+                              <p:animEffect transition="in" filter="typewriter">
+                                <p:cBhvr>
+                                  <p:cTn id="22" dur="790" fill="hold"/>
+                                  <p:tgtEl>
+                                    <p:spTgt spid="25"/>
+                                  </p:tgtEl>
+                                </p:cBhvr>
+                              </p:animEffect>
+                            </p:childTnLst>
+                            <p:iterate type="lt">
+                              <p:tmAbs val="35"/>
+                            </p:iterate>
+                          </p:cTn>
+                        </p:par>
+                      </p:childTnLst>
+                    </p:cTn>
+                  </p:par>
+                  <p:par>
+                    <p:cTn id="23" fill="hold">
+                      <p:stCondLst>
+                        <p:cond delay="90"/>
+                      </p:stCondLst>
+                      <p:childTnLst>
+                        <p:par>
+                          <p:cTn id="24" presetID="1" presetClass="entr" presetSubtype="0" fill="hold" nodeType="clickEffect">
+                            <p:stCondLst>
+                              <p:cond delay="0"/>
+                            </p:stCondLst>
+                            <p:childTnLst>
+                              <p:animEffect transition="in" filter="typewriter">
+                                <p:cBhvr>
+                                  <p:cTn id="25" dur="835" fill="hold"/>
+                                  <p:tgtEl>
+                                    <p:spTgt spid="29"/>
+                                  </p:tgtEl>
+                                </p:cBhvr>
+                              </p:animEffect>
+                            </p:childTnLst>
+                            <p:iterate type="lt">
+                              <p:tmAbs val="35"/>
+                            </p:iterate>
+                          </p:cTn>
+                        </p:par>
+                      </p:childTnLst>
+                    </p:cTn>
+                  </p:par>
+                  <p:par>
+                    <p:cTn id="26" fill="hold">
+                      <p:stCondLst>
+                        <p:cond delay="90"/>
+                      </p:stCondLst>
+                      <p:childTnLst>
+                        <p:par>
+                          <p:cTn id="27" presetID="1" presetClass="entr" presetSubtype="0" fill="hold" nodeType="clickEffect">
+                            <p:stCondLst>
+                              <p:cond delay="0"/>
+                            </p:stCondLst>
+                            <p:childTnLst>
+                              <p:animEffect transition="in" filter="typewriter">
+                                <p:cBhvr>
+                                  <p:cTn id="28" dur="880" fill="hold"/>
+                                  <p:tgtEl>
+                                    <p:spTgt spid="33"/>
+                                  </p:tgtEl>
+                                </p:cBhvr>
+                              </p:animEffect>
+                            </p:childTnLst>
+                            <p:iterate type="lt">
+                              <p:tmAbs val="35"/>
+                            </p:iterate>
+                          </p:cTn>
+                        </p:par>
+                      </p:childTnLst>
+                    </p:cTn>
+                  </p:par>
+                </p:childTnLst>
+              </p:cTn>
+              <p:prevCondLst>
+                <p:cond evt="onPrev" delay="0">
+                  <p:tgtEl>
+                    <p:sldTgt/>
+                  </p:tgtEl>
+                </p:cond>
+              </p:prevCondLst>
+              <p:nextCondLst>
+                <p:cond evt="onNext" delay="0">
+                  <p:tgtEl>
+                    <p:sldTgt/>
+                  </p:tgtEl>
+                </p:cond>
+              </p:nextCondLst>
+            </p:seq>
+          </p:childTnLst>
+        </p:cTn>
+      </p:par>
+    </p:tnLst>
+    <p:bldLst>
+      <p:bldP spid="9" grpId="0" build="p"/>
+      <p:bldP spid="10" grpId="0" build="p"/>
+      <p:bldP spid="13" grpId="0" build="p"/>
+      <p:bldP spid="16" grpId="0" build="p"/>
+      <p:bldP spid="19" grpId="0" build="p"/>
+      <p:bldP spid="22" grpId="0" build="p"/>
+      <p:bldP spid="25" grpId="0" build="p"/>
+      <p:bldP spid="29" grpId="0" build="p"/>
+      <p:bldP spid="33" grpId="0" build="p"/>
+    </p:bldLst>
+  </p:timing>
 </p:sld>
 </file>
 
@@ -20611,7 +24811,7 @@
       </p:sp>
       <p:sp>
         <p:nvSpPr>
-          <p:cNvPr id="6" name="Text 4"/>
+          <p:cNvPr id="6" name="static_text_0055"/>
           <p:cNvSpPr/>
           <p:nvPr/>
         </p:nvSpPr>
@@ -20655,7 +24855,7 @@
       </p:sp>
       <p:sp>
         <p:nvSpPr>
-          <p:cNvPr id="7" name="Text 5"/>
+          <p:cNvPr id="7" name="static_text_0056"/>
           <p:cNvSpPr/>
           <p:nvPr/>
         </p:nvSpPr>
@@ -20722,7 +24922,7 @@
       </p:sp>
       <p:sp>
         <p:nvSpPr>
-          <p:cNvPr id="9" name="Text 7"/>
+          <p:cNvPr id="9" name="tw_text_0057"/>
           <p:cNvSpPr/>
           <p:nvPr/>
         </p:nvSpPr>
@@ -20766,7 +24966,7 @@
       </p:sp>
       <p:sp>
         <p:nvSpPr>
-          <p:cNvPr id="10" name="Text 8"/>
+          <p:cNvPr id="10" name="tw_text_0058"/>
           <p:cNvSpPr/>
           <p:nvPr/>
         </p:nvSpPr>
@@ -20888,7 +25088,7 @@
       </p:pic>
       <p:sp>
         <p:nvSpPr>
-          <p:cNvPr id="14" name="Text 11"/>
+          <p:cNvPr id="14" name="tw_text_0059"/>
           <p:cNvSpPr/>
           <p:nvPr/>
         </p:nvSpPr>
@@ -20932,7 +25132,7 @@
       </p:sp>
       <p:sp>
         <p:nvSpPr>
-          <p:cNvPr id="15" name="Text 12"/>
+          <p:cNvPr id="15" name="tw_text_0060"/>
           <p:cNvSpPr/>
           <p:nvPr/>
         </p:nvSpPr>
@@ -21005,7 +25205,7 @@
       </p:sp>
       <p:sp>
         <p:nvSpPr>
-          <p:cNvPr id="17" name="Text 14"/>
+          <p:cNvPr id="17" name="tw_text_0061"/>
           <p:cNvSpPr/>
           <p:nvPr/>
         </p:nvSpPr>
@@ -21127,7 +25327,7 @@
       </p:pic>
       <p:sp>
         <p:nvSpPr>
-          <p:cNvPr id="21" name="Text 17"/>
+          <p:cNvPr id="21" name="tw_text_0062"/>
           <p:cNvSpPr/>
           <p:nvPr/>
         </p:nvSpPr>
@@ -21171,7 +25371,7 @@
       </p:sp>
       <p:sp>
         <p:nvSpPr>
-          <p:cNvPr id="22" name="Text 18"/>
+          <p:cNvPr id="22" name="tw_text_0063"/>
           <p:cNvSpPr/>
           <p:nvPr/>
         </p:nvSpPr>
@@ -21244,7 +25444,7 @@
       </p:sp>
       <p:sp>
         <p:nvSpPr>
-          <p:cNvPr id="24" name="Text 20"/>
+          <p:cNvPr id="24" name="tw_text_0064"/>
           <p:cNvSpPr/>
           <p:nvPr/>
         </p:nvSpPr>
@@ -21366,7 +25566,7 @@
       </p:pic>
       <p:sp>
         <p:nvSpPr>
-          <p:cNvPr id="28" name="Text 23"/>
+          <p:cNvPr id="28" name="static_text_0065"/>
           <p:cNvSpPr/>
           <p:nvPr/>
         </p:nvSpPr>
@@ -21410,7 +25610,7 @@
       </p:sp>
       <p:sp>
         <p:nvSpPr>
-          <p:cNvPr id="29" name="Text 24"/>
+          <p:cNvPr id="29" name="tw_text_0066"/>
           <p:cNvSpPr/>
           <p:nvPr/>
         </p:nvSpPr>
@@ -21483,7 +25683,7 @@
       </p:sp>
       <p:sp>
         <p:nvSpPr>
-          <p:cNvPr id="31" name="Text 26"/>
+          <p:cNvPr id="31" name="tw_text_0067"/>
           <p:cNvSpPr/>
           <p:nvPr/>
         </p:nvSpPr>
@@ -21550,7 +25750,7 @@
       </p:sp>
       <p:sp>
         <p:nvSpPr>
-          <p:cNvPr id="33" name="Text 28"/>
+          <p:cNvPr id="33" name="static_text_0068"/>
           <p:cNvSpPr/>
           <p:nvPr/>
         </p:nvSpPr>
@@ -21597,6 +25797,338 @@
   <p:clrMapOvr>
     <a:masterClrMapping/>
   </p:clrMapOvr>
+  <p:timing>
+    <p:tnLst>
+      <p:par>
+        <p:cTn id="1" dur="indefinite" restart="never" nodeType="tmRoot">
+          <p:childTnLst>
+            <p:seq concurrent="1" nextAc="seek">
+              <p:cTn id="2" dur="indefinite" nodeType="mainSeq">
+                <p:childTnLst>
+                  <p:par>
+                    <p:cTn id="2" fill="hold">
+                      <p:stCondLst>
+                        <p:cond delay="0"/>
+                      </p:stCondLst>
+                      <p:childTnLst>
+                        <p:par>
+                          <p:cTn id="3" presetID="1" presetClass="entr" presetSubtype="0" fill="hold" nodeType="clickEffect">
+                            <p:stCondLst>
+                              <p:cond delay="0"/>
+                            </p:stCondLst>
+                            <p:childTnLst>
+                              <p:animEffect transition="in" filter="typewriter">
+                                <p:cBhvr>
+                                  <p:cTn id="4" dur="520" fill="hold"/>
+                                  <p:tgtEl>
+                                    <p:spTgt spid="9"/>
+                                  </p:tgtEl>
+                                </p:cBhvr>
+                              </p:animEffect>
+                            </p:childTnLst>
+                            <p:iterate type="lt">
+                              <p:tmAbs val="35"/>
+                            </p:iterate>
+                          </p:cTn>
+                        </p:par>
+                      </p:childTnLst>
+                    </p:cTn>
+                  </p:par>
+                  <p:par>
+                    <p:cTn id="5" fill="hold">
+                      <p:stCondLst>
+                        <p:cond delay="90"/>
+                      </p:stCondLst>
+                      <p:childTnLst>
+                        <p:par>
+                          <p:cTn id="6" presetID="1" presetClass="entr" presetSubtype="0" fill="hold" nodeType="clickEffect">
+                            <p:stCondLst>
+                              <p:cond delay="0"/>
+                            </p:stCondLst>
+                            <p:childTnLst>
+                              <p:animEffect transition="in" filter="typewriter">
+                                <p:cBhvr>
+                                  <p:cTn id="7" dur="565" fill="hold"/>
+                                  <p:tgtEl>
+                                    <p:spTgt spid="10"/>
+                                  </p:tgtEl>
+                                </p:cBhvr>
+                              </p:animEffect>
+                            </p:childTnLst>
+                            <p:iterate type="lt">
+                              <p:tmAbs val="35"/>
+                            </p:iterate>
+                          </p:cTn>
+                        </p:par>
+                      </p:childTnLst>
+                    </p:cTn>
+                  </p:par>
+                  <p:par>
+                    <p:cTn id="8" fill="hold">
+                      <p:stCondLst>
+                        <p:cond delay="90"/>
+                      </p:stCondLst>
+                      <p:childTnLst>
+                        <p:par>
+                          <p:cTn id="9" presetID="1" presetClass="entr" presetSubtype="0" fill="hold" nodeType="clickEffect">
+                            <p:stCondLst>
+                              <p:cond delay="0"/>
+                            </p:stCondLst>
+                            <p:childTnLst>
+                              <p:animEffect transition="in" filter="typewriter">
+                                <p:cBhvr>
+                                  <p:cTn id="10" dur="610" fill="hold"/>
+                                  <p:tgtEl>
+                                    <p:spTgt spid="14"/>
+                                  </p:tgtEl>
+                                </p:cBhvr>
+                              </p:animEffect>
+                            </p:childTnLst>
+                            <p:iterate type="lt">
+                              <p:tmAbs val="35"/>
+                            </p:iterate>
+                          </p:cTn>
+                        </p:par>
+                      </p:childTnLst>
+                    </p:cTn>
+                  </p:par>
+                  <p:par>
+                    <p:cTn id="11" fill="hold">
+                      <p:stCondLst>
+                        <p:cond delay="90"/>
+                      </p:stCondLst>
+                      <p:childTnLst>
+                        <p:par>
+                          <p:cTn id="12" presetID="1" presetClass="entr" presetSubtype="0" fill="hold" nodeType="clickEffect">
+                            <p:stCondLst>
+                              <p:cond delay="0"/>
+                            </p:stCondLst>
+                            <p:childTnLst>
+                              <p:animEffect transition="in" filter="typewriter">
+                                <p:cBhvr>
+                                  <p:cTn id="13" dur="655" fill="hold"/>
+                                  <p:tgtEl>
+                                    <p:spTgt spid="15"/>
+                                  </p:tgtEl>
+                                </p:cBhvr>
+                              </p:animEffect>
+                            </p:childTnLst>
+                            <p:iterate type="lt">
+                              <p:tmAbs val="35"/>
+                            </p:iterate>
+                          </p:cTn>
+                        </p:par>
+                      </p:childTnLst>
+                    </p:cTn>
+                  </p:par>
+                  <p:par>
+                    <p:cTn id="14" fill="hold">
+                      <p:stCondLst>
+                        <p:cond delay="90"/>
+                      </p:stCondLst>
+                      <p:childTnLst>
+                        <p:par>
+                          <p:cTn id="15" presetID="1" presetClass="entr" presetSubtype="0" fill="hold" nodeType="clickEffect">
+                            <p:stCondLst>
+                              <p:cond delay="0"/>
+                            </p:stCondLst>
+                            <p:childTnLst>
+                              <p:animEffect transition="in" filter="typewriter">
+                                <p:cBhvr>
+                                  <p:cTn id="16" dur="700" fill="hold"/>
+                                  <p:tgtEl>
+                                    <p:spTgt spid="17"/>
+                                  </p:tgtEl>
+                                </p:cBhvr>
+                              </p:animEffect>
+                            </p:childTnLst>
+                            <p:iterate type="lt">
+                              <p:tmAbs val="35"/>
+                            </p:iterate>
+                          </p:cTn>
+                        </p:par>
+                      </p:childTnLst>
+                    </p:cTn>
+                  </p:par>
+                  <p:par>
+                    <p:cTn id="17" fill="hold">
+                      <p:stCondLst>
+                        <p:cond delay="90"/>
+                      </p:stCondLst>
+                      <p:childTnLst>
+                        <p:par>
+                          <p:cTn id="18" presetID="1" presetClass="entr" presetSubtype="0" fill="hold" nodeType="clickEffect">
+                            <p:stCondLst>
+                              <p:cond delay="0"/>
+                            </p:stCondLst>
+                            <p:childTnLst>
+                              <p:animEffect transition="in" filter="typewriter">
+                                <p:cBhvr>
+                                  <p:cTn id="19" dur="745" fill="hold"/>
+                                  <p:tgtEl>
+                                    <p:spTgt spid="21"/>
+                                  </p:tgtEl>
+                                </p:cBhvr>
+                              </p:animEffect>
+                            </p:childTnLst>
+                            <p:iterate type="lt">
+                              <p:tmAbs val="35"/>
+                            </p:iterate>
+                          </p:cTn>
+                        </p:par>
+                      </p:childTnLst>
+                    </p:cTn>
+                  </p:par>
+                  <p:par>
+                    <p:cTn id="20" fill="hold">
+                      <p:stCondLst>
+                        <p:cond delay="90"/>
+                      </p:stCondLst>
+                      <p:childTnLst>
+                        <p:par>
+                          <p:cTn id="21" presetID="1" presetClass="entr" presetSubtype="0" fill="hold" nodeType="clickEffect">
+                            <p:stCondLst>
+                              <p:cond delay="0"/>
+                            </p:stCondLst>
+                            <p:childTnLst>
+                              <p:animEffect transition="in" filter="typewriter">
+                                <p:cBhvr>
+                                  <p:cTn id="22" dur="790" fill="hold"/>
+                                  <p:tgtEl>
+                                    <p:spTgt spid="22"/>
+                                  </p:tgtEl>
+                                </p:cBhvr>
+                              </p:animEffect>
+                            </p:childTnLst>
+                            <p:iterate type="lt">
+                              <p:tmAbs val="35"/>
+                            </p:iterate>
+                          </p:cTn>
+                        </p:par>
+                      </p:childTnLst>
+                    </p:cTn>
+                  </p:par>
+                  <p:par>
+                    <p:cTn id="23" fill="hold">
+                      <p:stCondLst>
+                        <p:cond delay="90"/>
+                      </p:stCondLst>
+                      <p:childTnLst>
+                        <p:par>
+                          <p:cTn id="24" presetID="1" presetClass="entr" presetSubtype="0" fill="hold" nodeType="clickEffect">
+                            <p:stCondLst>
+                              <p:cond delay="0"/>
+                            </p:stCondLst>
+                            <p:childTnLst>
+                              <p:animEffect transition="in" filter="typewriter">
+                                <p:cBhvr>
+                                  <p:cTn id="25" dur="835" fill="hold"/>
+                                  <p:tgtEl>
+                                    <p:spTgt spid="24"/>
+                                  </p:tgtEl>
+                                </p:cBhvr>
+                              </p:animEffect>
+                            </p:childTnLst>
+                            <p:iterate type="lt">
+                              <p:tmAbs val="35"/>
+                            </p:iterate>
+                          </p:cTn>
+                        </p:par>
+                      </p:childTnLst>
+                    </p:cTn>
+                  </p:par>
+                  <p:par>
+                    <p:cTn id="26" fill="hold">
+                      <p:stCondLst>
+                        <p:cond delay="90"/>
+                      </p:stCondLst>
+                      <p:childTnLst>
+                        <p:par>
+                          <p:cTn id="27" presetID="1" presetClass="entr" presetSubtype="0" fill="hold" nodeType="clickEffect">
+                            <p:stCondLst>
+                              <p:cond delay="0"/>
+                            </p:stCondLst>
+                            <p:childTnLst>
+                              <p:animEffect transition="in" filter="typewriter">
+                                <p:cBhvr>
+                                  <p:cTn id="28" dur="880" fill="hold"/>
+                                  <p:tgtEl>
+                                    <p:spTgt spid="29"/>
+                                  </p:tgtEl>
+                                </p:cBhvr>
+                              </p:animEffect>
+                            </p:childTnLst>
+                            <p:iterate type="lt">
+                              <p:tmAbs val="35"/>
+                            </p:iterate>
+                          </p:cTn>
+                        </p:par>
+                      </p:childTnLst>
+                    </p:cTn>
+                  </p:par>
+                  <p:par>
+                    <p:cTn id="29" fill="hold">
+                      <p:stCondLst>
+                        <p:cond delay="90"/>
+                      </p:stCondLst>
+                      <p:childTnLst>
+                        <p:par>
+                          <p:cTn id="30" presetID="1" presetClass="entr" presetSubtype="0" fill="hold" nodeType="clickEffect">
+                            <p:stCondLst>
+                              <p:cond delay="0"/>
+                            </p:stCondLst>
+                            <p:childTnLst>
+                              <p:animEffect transition="in" filter="typewriter">
+                                <p:cBhvr>
+                                  <p:cTn id="31" dur="925" fill="hold"/>
+                                  <p:tgtEl>
+                                    <p:spTgt spid="31"/>
+                                  </p:tgtEl>
+                                </p:cBhvr>
+                              </p:animEffect>
+                            </p:childTnLst>
+                            <p:iterate type="lt">
+                              <p:tmAbs val="35"/>
+                            </p:iterate>
+                          </p:cTn>
+                        </p:par>
+                      </p:childTnLst>
+                    </p:cTn>
+                  </p:par>
+                </p:childTnLst>
+              </p:cTn>
+              <p:prevCondLst>
+                <p:cond evt="onPrev" delay="0">
+                  <p:tgtEl>
+                    <p:sldTgt/>
+                  </p:tgtEl>
+                </p:cond>
+              </p:prevCondLst>
+              <p:nextCondLst>
+                <p:cond evt="onNext" delay="0">
+                  <p:tgtEl>
+                    <p:sldTgt/>
+                  </p:tgtEl>
+                </p:cond>
+              </p:nextCondLst>
+            </p:seq>
+          </p:childTnLst>
+        </p:cTn>
+      </p:par>
+    </p:tnLst>
+    <p:bldLst>
+      <p:bldP spid="9" grpId="0" build="p"/>
+      <p:bldP spid="10" grpId="0" build="p"/>
+      <p:bldP spid="14" grpId="0" build="p"/>
+      <p:bldP spid="15" grpId="0" build="p"/>
+      <p:bldP spid="17" grpId="0" build="p"/>
+      <p:bldP spid="21" grpId="0" build="p"/>
+      <p:bldP spid="22" grpId="0" build="p"/>
+      <p:bldP spid="24" grpId="0" build="p"/>
+      <p:bldP spid="29" grpId="0" build="p"/>
+      <p:bldP spid="31" grpId="0" build="p"/>
+    </p:bldLst>
+  </p:timing>
 </p:sld>
 </file>
 
@@ -21728,7 +26260,7 @@
       </p:sp>
       <p:sp>
         <p:nvSpPr>
-          <p:cNvPr id="6" name="Text 4"/>
+          <p:cNvPr id="6" name="static_text_0069"/>
           <p:cNvSpPr/>
           <p:nvPr/>
         </p:nvSpPr>
@@ -21772,7 +26304,7 @@
       </p:sp>
       <p:sp>
         <p:nvSpPr>
-          <p:cNvPr id="7" name="Text 5"/>
+          <p:cNvPr id="7" name="static_text_0070"/>
           <p:cNvSpPr/>
           <p:nvPr/>
         </p:nvSpPr>
@@ -21839,7 +26371,7 @@
       </p:sp>
       <p:sp>
         <p:nvSpPr>
-          <p:cNvPr id="9" name="Text 7"/>
+          <p:cNvPr id="9" name="tw_text_0071"/>
           <p:cNvSpPr/>
           <p:nvPr/>
         </p:nvSpPr>
@@ -21883,7 +26415,7 @@
       </p:sp>
       <p:sp>
         <p:nvSpPr>
-          <p:cNvPr id="10" name="Text 8"/>
+          <p:cNvPr id="10" name="tw_text_0072"/>
           <p:cNvSpPr/>
           <p:nvPr/>
         </p:nvSpPr>
@@ -21979,7 +26511,7 @@
       </p:sp>
       <p:sp>
         <p:nvSpPr>
-          <p:cNvPr id="13" name="Text 11"/>
+          <p:cNvPr id="13" name="static_text_0073"/>
           <p:cNvSpPr/>
           <p:nvPr/>
         </p:nvSpPr>
@@ -22023,7 +26555,7 @@
       </p:sp>
       <p:sp>
         <p:nvSpPr>
-          <p:cNvPr id="14" name="Text 12"/>
+          <p:cNvPr id="14" name="tw_text_0074"/>
           <p:cNvSpPr/>
           <p:nvPr/>
         </p:nvSpPr>
@@ -22119,7 +26651,7 @@
       </p:sp>
       <p:sp>
         <p:nvSpPr>
-          <p:cNvPr id="17" name="Text 15"/>
+          <p:cNvPr id="17" name="static_text_0075"/>
           <p:cNvSpPr/>
           <p:nvPr/>
         </p:nvSpPr>
@@ -22163,7 +26695,7 @@
       </p:sp>
       <p:sp>
         <p:nvSpPr>
-          <p:cNvPr id="18" name="Text 16"/>
+          <p:cNvPr id="18" name="tw_text_0076"/>
           <p:cNvSpPr/>
           <p:nvPr/>
         </p:nvSpPr>
@@ -22259,7 +26791,7 @@
       </p:sp>
       <p:sp>
         <p:nvSpPr>
-          <p:cNvPr id="21" name="Text 19"/>
+          <p:cNvPr id="21" name="static_text_0077"/>
           <p:cNvSpPr/>
           <p:nvPr/>
         </p:nvSpPr>
@@ -22303,7 +26835,7 @@
       </p:sp>
       <p:sp>
         <p:nvSpPr>
-          <p:cNvPr id="22" name="Text 20"/>
+          <p:cNvPr id="22" name="tw_text_0078"/>
           <p:cNvSpPr/>
           <p:nvPr/>
         </p:nvSpPr>
@@ -22374,7 +26906,7 @@
       </p:sp>
       <p:sp>
         <p:nvSpPr>
-          <p:cNvPr id="24" name="Text 22"/>
+          <p:cNvPr id="24" name="tw_text_0079"/>
           <p:cNvSpPr/>
           <p:nvPr/>
         </p:nvSpPr>
@@ -22421,6 +26953,218 @@
   <p:clrMapOvr>
     <a:masterClrMapping/>
   </p:clrMapOvr>
+  <p:timing>
+    <p:tnLst>
+      <p:par>
+        <p:cTn id="1" dur="indefinite" restart="never" nodeType="tmRoot">
+          <p:childTnLst>
+            <p:seq concurrent="1" nextAc="seek">
+              <p:cTn id="2" dur="indefinite" nodeType="mainSeq">
+                <p:childTnLst>
+                  <p:par>
+                    <p:cTn id="2" fill="hold">
+                      <p:stCondLst>
+                        <p:cond delay="0"/>
+                      </p:stCondLst>
+                      <p:childTnLst>
+                        <p:par>
+                          <p:cTn id="3" presetID="1" presetClass="entr" presetSubtype="0" fill="hold" nodeType="clickEffect">
+                            <p:stCondLst>
+                              <p:cond delay="0"/>
+                            </p:stCondLst>
+                            <p:childTnLst>
+                              <p:animEffect transition="in" filter="typewriter">
+                                <p:cBhvr>
+                                  <p:cTn id="4" dur="520" fill="hold"/>
+                                  <p:tgtEl>
+                                    <p:spTgt spid="9"/>
+                                  </p:tgtEl>
+                                </p:cBhvr>
+                              </p:animEffect>
+                            </p:childTnLst>
+                            <p:iterate type="lt">
+                              <p:tmAbs val="35"/>
+                            </p:iterate>
+                          </p:cTn>
+                        </p:par>
+                      </p:childTnLst>
+                    </p:cTn>
+                  </p:par>
+                  <p:par>
+                    <p:cTn id="5" fill="hold">
+                      <p:stCondLst>
+                        <p:cond delay="90"/>
+                      </p:stCondLst>
+                      <p:childTnLst>
+                        <p:par>
+                          <p:cTn id="6" presetID="1" presetClass="entr" presetSubtype="0" fill="hold" nodeType="clickEffect">
+                            <p:stCondLst>
+                              <p:cond delay="0"/>
+                            </p:stCondLst>
+                            <p:childTnLst>
+                              <p:animEffect transition="in" filter="typewriter">
+                                <p:cBhvr>
+                                  <p:cTn id="7" dur="565" fill="hold"/>
+                                  <p:tgtEl>
+                                    <p:spTgt spid="10"/>
+                                  </p:tgtEl>
+                                </p:cBhvr>
+                              </p:animEffect>
+                            </p:childTnLst>
+                            <p:iterate type="lt">
+                              <p:tmAbs val="35"/>
+                            </p:iterate>
+                          </p:cTn>
+                        </p:par>
+                      </p:childTnLst>
+                    </p:cTn>
+                  </p:par>
+                  <p:par>
+                    <p:cTn id="8" fill="hold">
+                      <p:stCondLst>
+                        <p:cond delay="90"/>
+                      </p:stCondLst>
+                      <p:childTnLst>
+                        <p:par>
+                          <p:cTn id="9" presetID="1" presetClass="entr" presetSubtype="0" fill="hold" nodeType="clickEffect">
+                            <p:stCondLst>
+                              <p:cond delay="0"/>
+                            </p:stCondLst>
+                            <p:childTnLst>
+                              <p:animEffect transition="in" filter="typewriter">
+                                <p:cBhvr>
+                                  <p:cTn id="10" dur="610" fill="hold"/>
+                                  <p:tgtEl>
+                                    <p:spTgt spid="14"/>
+                                  </p:tgtEl>
+                                </p:cBhvr>
+                              </p:animEffect>
+                            </p:childTnLst>
+                            <p:iterate type="lt">
+                              <p:tmAbs val="35"/>
+                            </p:iterate>
+                          </p:cTn>
+                        </p:par>
+                      </p:childTnLst>
+                    </p:cTn>
+                  </p:par>
+                  <p:par>
+                    <p:cTn id="11" fill="hold">
+                      <p:stCondLst>
+                        <p:cond delay="90"/>
+                      </p:stCondLst>
+                      <p:childTnLst>
+                        <p:par>
+                          <p:cTn id="12" presetID="1" presetClass="entr" presetSubtype="0" fill="hold" nodeType="clickEffect">
+                            <p:stCondLst>
+                              <p:cond delay="0"/>
+                            </p:stCondLst>
+                            <p:childTnLst>
+                              <p:animEffect transition="in" filter="typewriter">
+                                <p:cBhvr>
+                                  <p:cTn id="13" dur="655" fill="hold"/>
+                                  <p:tgtEl>
+                                    <p:spTgt spid="18"/>
+                                  </p:tgtEl>
+                                </p:cBhvr>
+                              </p:animEffect>
+                            </p:childTnLst>
+                            <p:iterate type="lt">
+                              <p:tmAbs val="35"/>
+                            </p:iterate>
+                          </p:cTn>
+                        </p:par>
+                      </p:childTnLst>
+                    </p:cTn>
+                  </p:par>
+                  <p:par>
+                    <p:cTn id="14" fill="hold">
+                      <p:stCondLst>
+                        <p:cond delay="90"/>
+                      </p:stCondLst>
+                      <p:childTnLst>
+                        <p:par>
+                          <p:cTn id="15" presetID="1" presetClass="entr" presetSubtype="0" fill="hold" nodeType="clickEffect">
+                            <p:stCondLst>
+                              <p:cond delay="0"/>
+                            </p:stCondLst>
+                            <p:childTnLst>
+                              <p:animEffect transition="in" filter="typewriter">
+                                <p:cBhvr>
+                                  <p:cTn id="16" dur="700" fill="hold"/>
+                                  <p:tgtEl>
+                                    <p:spTgt spid="22"/>
+                                  </p:tgtEl>
+                                </p:cBhvr>
+                              </p:animEffect>
+                            </p:childTnLst>
+                            <p:iterate type="lt">
+                              <p:tmAbs val="35"/>
+                            </p:iterate>
+                          </p:cTn>
+                        </p:par>
+                      </p:childTnLst>
+                    </p:cTn>
+                  </p:par>
+                  <p:par>
+                    <p:cTn id="17" fill="hold">
+                      <p:stCondLst>
+                        <p:cond delay="90"/>
+                      </p:stCondLst>
+                      <p:childTnLst>
+                        <p:par>
+                          <p:cTn id="18" presetID="1" presetClass="entr" presetSubtype="0" fill="hold" nodeType="clickEffect">
+                            <p:stCondLst>
+                              <p:cond delay="0"/>
+                            </p:stCondLst>
+                            <p:childTnLst>
+                              <p:animEffect transition="in" filter="typewriter">
+                                <p:cBhvr>
+                                  <p:cTn id="19" dur="745" fill="hold"/>
+                                  <p:tgtEl>
+                                    <p:spTgt spid="24"/>
+                                  </p:tgtEl>
+                                </p:cBhvr>
+                              </p:animEffect>
+                            </p:childTnLst>
+                            <p:iterate type="lt">
+                              <p:tmAbs val="35"/>
+                            </p:iterate>
+                          </p:cTn>
+                        </p:par>
+                      </p:childTnLst>
+                    </p:cTn>
+                  </p:par>
+                </p:childTnLst>
+              </p:cTn>
+              <p:prevCondLst>
+                <p:cond evt="onPrev" delay="0">
+                  <p:tgtEl>
+                    <p:sldTgt/>
+                  </p:tgtEl>
+                </p:cond>
+              </p:prevCondLst>
+              <p:nextCondLst>
+                <p:cond evt="onNext" delay="0">
+                  <p:tgtEl>
+                    <p:sldTgt/>
+                  </p:tgtEl>
+                </p:cond>
+              </p:nextCondLst>
+            </p:seq>
+          </p:childTnLst>
+        </p:cTn>
+      </p:par>
+    </p:tnLst>
+    <p:bldLst>
+      <p:bldP spid="9" grpId="0" build="p"/>
+      <p:bldP spid="10" grpId="0" build="p"/>
+      <p:bldP spid="14" grpId="0" build="p"/>
+      <p:bldP spid="18" grpId="0" build="p"/>
+      <p:bldP spid="22" grpId="0" build="p"/>
+      <p:bldP spid="24" grpId="0" build="p"/>
+    </p:bldLst>
+  </p:timing>
 </p:sld>
 </file>
 
@@ -22552,7 +27296,7 @@
       </p:sp>
       <p:sp>
         <p:nvSpPr>
-          <p:cNvPr id="6" name="Text 4"/>
+          <p:cNvPr id="6" name="static_text_0080"/>
           <p:cNvSpPr/>
           <p:nvPr/>
         </p:nvSpPr>
@@ -22596,7 +27340,7 @@
       </p:sp>
       <p:sp>
         <p:nvSpPr>
-          <p:cNvPr id="7" name="Text 5"/>
+          <p:cNvPr id="7" name="static_text_0081"/>
           <p:cNvSpPr/>
           <p:nvPr/>
         </p:nvSpPr>
@@ -22663,7 +27407,7 @@
       </p:sp>
       <p:sp>
         <p:nvSpPr>
-          <p:cNvPr id="9" name="Text 7"/>
+          <p:cNvPr id="9" name="tw_text_0082"/>
           <p:cNvSpPr/>
           <p:nvPr/>
         </p:nvSpPr>
@@ -22707,7 +27451,7 @@
       </p:sp>
       <p:sp>
         <p:nvSpPr>
-          <p:cNvPr id="10" name="Text 8"/>
+          <p:cNvPr id="10" name="tw_text_0083"/>
           <p:cNvSpPr/>
           <p:nvPr/>
         </p:nvSpPr>
@@ -22803,7 +27547,7 @@
       </p:sp>
       <p:sp>
         <p:nvSpPr>
-          <p:cNvPr id="13" name="Text 11"/>
+          <p:cNvPr id="13" name="static_text_0084"/>
           <p:cNvSpPr/>
           <p:nvPr/>
         </p:nvSpPr>
@@ -22847,7 +27591,7 @@
       </p:sp>
       <p:sp>
         <p:nvSpPr>
-          <p:cNvPr id="14" name="Text 12"/>
+          <p:cNvPr id="14" name="tw_text_0085"/>
           <p:cNvSpPr/>
           <p:nvPr/>
         </p:nvSpPr>
@@ -22968,7 +27712,7 @@
       </p:sp>
       <p:sp>
         <p:nvSpPr>
-          <p:cNvPr id="18" name="Text 16"/>
+          <p:cNvPr id="18" name="static_text_0086"/>
           <p:cNvSpPr/>
           <p:nvPr/>
         </p:nvSpPr>
@@ -23012,7 +27756,7 @@
       </p:sp>
       <p:sp>
         <p:nvSpPr>
-          <p:cNvPr id="19" name="Text 17"/>
+          <p:cNvPr id="19" name="tw_text_0087"/>
           <p:cNvSpPr/>
           <p:nvPr/>
         </p:nvSpPr>
@@ -23133,7 +27877,7 @@
       </p:sp>
       <p:sp>
         <p:nvSpPr>
-          <p:cNvPr id="23" name="Text 21"/>
+          <p:cNvPr id="23" name="static_text_0088"/>
           <p:cNvSpPr/>
           <p:nvPr/>
         </p:nvSpPr>
@@ -23177,7 +27921,7 @@
       </p:sp>
       <p:sp>
         <p:nvSpPr>
-          <p:cNvPr id="24" name="Text 22"/>
+          <p:cNvPr id="24" name="tw_text_0089"/>
           <p:cNvSpPr/>
           <p:nvPr/>
         </p:nvSpPr>
@@ -23298,7 +28042,7 @@
       </p:sp>
       <p:sp>
         <p:nvSpPr>
-          <p:cNvPr id="28" name="Text 26"/>
+          <p:cNvPr id="28" name="static_text_0090"/>
           <p:cNvSpPr/>
           <p:nvPr/>
         </p:nvSpPr>
@@ -23342,7 +28086,7 @@
       </p:sp>
       <p:sp>
         <p:nvSpPr>
-          <p:cNvPr id="29" name="Text 27"/>
+          <p:cNvPr id="29" name="tw_text_0091"/>
           <p:cNvSpPr/>
           <p:nvPr/>
         </p:nvSpPr>
@@ -23413,7 +28157,7 @@
       </p:sp>
       <p:sp>
         <p:nvSpPr>
-          <p:cNvPr id="31" name="Text 29"/>
+          <p:cNvPr id="31" name="tw_text_0092"/>
           <p:cNvSpPr/>
           <p:nvPr/>
         </p:nvSpPr>
@@ -23460,6 +28204,248 @@
   <p:clrMapOvr>
     <a:masterClrMapping/>
   </p:clrMapOvr>
+  <p:timing>
+    <p:tnLst>
+      <p:par>
+        <p:cTn id="1" dur="indefinite" restart="never" nodeType="tmRoot">
+          <p:childTnLst>
+            <p:seq concurrent="1" nextAc="seek">
+              <p:cTn id="2" dur="indefinite" nodeType="mainSeq">
+                <p:childTnLst>
+                  <p:par>
+                    <p:cTn id="2" fill="hold">
+                      <p:stCondLst>
+                        <p:cond delay="0"/>
+                      </p:stCondLst>
+                      <p:childTnLst>
+                        <p:par>
+                          <p:cTn id="3" presetID="1" presetClass="entr" presetSubtype="0" fill="hold" nodeType="clickEffect">
+                            <p:stCondLst>
+                              <p:cond delay="0"/>
+                            </p:stCondLst>
+                            <p:childTnLst>
+                              <p:animEffect transition="in" filter="typewriter">
+                                <p:cBhvr>
+                                  <p:cTn id="4" dur="520" fill="hold"/>
+                                  <p:tgtEl>
+                                    <p:spTgt spid="9"/>
+                                  </p:tgtEl>
+                                </p:cBhvr>
+                              </p:animEffect>
+                            </p:childTnLst>
+                            <p:iterate type="lt">
+                              <p:tmAbs val="35"/>
+                            </p:iterate>
+                          </p:cTn>
+                        </p:par>
+                      </p:childTnLst>
+                    </p:cTn>
+                  </p:par>
+                  <p:par>
+                    <p:cTn id="5" fill="hold">
+                      <p:stCondLst>
+                        <p:cond delay="90"/>
+                      </p:stCondLst>
+                      <p:childTnLst>
+                        <p:par>
+                          <p:cTn id="6" presetID="1" presetClass="entr" presetSubtype="0" fill="hold" nodeType="clickEffect">
+                            <p:stCondLst>
+                              <p:cond delay="0"/>
+                            </p:stCondLst>
+                            <p:childTnLst>
+                              <p:animEffect transition="in" filter="typewriter">
+                                <p:cBhvr>
+                                  <p:cTn id="7" dur="565" fill="hold"/>
+                                  <p:tgtEl>
+                                    <p:spTgt spid="10"/>
+                                  </p:tgtEl>
+                                </p:cBhvr>
+                              </p:animEffect>
+                            </p:childTnLst>
+                            <p:iterate type="lt">
+                              <p:tmAbs val="35"/>
+                            </p:iterate>
+                          </p:cTn>
+                        </p:par>
+                      </p:childTnLst>
+                    </p:cTn>
+                  </p:par>
+                  <p:par>
+                    <p:cTn id="8" fill="hold">
+                      <p:stCondLst>
+                        <p:cond delay="90"/>
+                      </p:stCondLst>
+                      <p:childTnLst>
+                        <p:par>
+                          <p:cTn id="9" presetID="1" presetClass="entr" presetSubtype="0" fill="hold" nodeType="clickEffect">
+                            <p:stCondLst>
+                              <p:cond delay="0"/>
+                            </p:stCondLst>
+                            <p:childTnLst>
+                              <p:animEffect transition="in" filter="typewriter">
+                                <p:cBhvr>
+                                  <p:cTn id="10" dur="610" fill="hold"/>
+                                  <p:tgtEl>
+                                    <p:spTgt spid="14"/>
+                                  </p:tgtEl>
+                                </p:cBhvr>
+                              </p:animEffect>
+                            </p:childTnLst>
+                            <p:iterate type="lt">
+                              <p:tmAbs val="35"/>
+                            </p:iterate>
+                          </p:cTn>
+                        </p:par>
+                      </p:childTnLst>
+                    </p:cTn>
+                  </p:par>
+                  <p:par>
+                    <p:cTn id="11" fill="hold">
+                      <p:stCondLst>
+                        <p:cond delay="90"/>
+                      </p:stCondLst>
+                      <p:childTnLst>
+                        <p:par>
+                          <p:cTn id="12" presetID="1" presetClass="entr" presetSubtype="0" fill="hold" nodeType="clickEffect">
+                            <p:stCondLst>
+                              <p:cond delay="0"/>
+                            </p:stCondLst>
+                            <p:childTnLst>
+                              <p:animEffect transition="in" filter="typewriter">
+                                <p:cBhvr>
+                                  <p:cTn id="13" dur="655" fill="hold"/>
+                                  <p:tgtEl>
+                                    <p:spTgt spid="19"/>
+                                  </p:tgtEl>
+                                </p:cBhvr>
+                              </p:animEffect>
+                            </p:childTnLst>
+                            <p:iterate type="lt">
+                              <p:tmAbs val="35"/>
+                            </p:iterate>
+                          </p:cTn>
+                        </p:par>
+                      </p:childTnLst>
+                    </p:cTn>
+                  </p:par>
+                  <p:par>
+                    <p:cTn id="14" fill="hold">
+                      <p:stCondLst>
+                        <p:cond delay="90"/>
+                      </p:stCondLst>
+                      <p:childTnLst>
+                        <p:par>
+                          <p:cTn id="15" presetID="1" presetClass="entr" presetSubtype="0" fill="hold" nodeType="clickEffect">
+                            <p:stCondLst>
+                              <p:cond delay="0"/>
+                            </p:stCondLst>
+                            <p:childTnLst>
+                              <p:animEffect transition="in" filter="typewriter">
+                                <p:cBhvr>
+                                  <p:cTn id="16" dur="700" fill="hold"/>
+                                  <p:tgtEl>
+                                    <p:spTgt spid="24"/>
+                                  </p:tgtEl>
+                                </p:cBhvr>
+                              </p:animEffect>
+                            </p:childTnLst>
+                            <p:iterate type="lt">
+                              <p:tmAbs val="35"/>
+                            </p:iterate>
+                          </p:cTn>
+                        </p:par>
+                      </p:childTnLst>
+                    </p:cTn>
+                  </p:par>
+                  <p:par>
+                    <p:cTn id="17" fill="hold">
+                      <p:stCondLst>
+                        <p:cond delay="90"/>
+                      </p:stCondLst>
+                      <p:childTnLst>
+                        <p:par>
+                          <p:cTn id="18" presetID="1" presetClass="entr" presetSubtype="0" fill="hold" nodeType="clickEffect">
+                            <p:stCondLst>
+                              <p:cond delay="0"/>
+                            </p:stCondLst>
+                            <p:childTnLst>
+                              <p:animEffect transition="in" filter="typewriter">
+                                <p:cBhvr>
+                                  <p:cTn id="19" dur="745" fill="hold"/>
+                                  <p:tgtEl>
+                                    <p:spTgt spid="29"/>
+                                  </p:tgtEl>
+                                </p:cBhvr>
+                              </p:animEffect>
+                            </p:childTnLst>
+                            <p:iterate type="lt">
+                              <p:tmAbs val="35"/>
+                            </p:iterate>
+                          </p:cTn>
+                        </p:par>
+                      </p:childTnLst>
+                    </p:cTn>
+                  </p:par>
+                  <p:par>
+                    <p:cTn id="20" fill="hold">
+                      <p:stCondLst>
+                        <p:cond delay="90"/>
+                      </p:stCondLst>
+                      <p:childTnLst>
+                        <p:par>
+                          <p:cTn id="21" presetID="1" presetClass="entr" presetSubtype="0" fill="hold" nodeType="clickEffect">
+                            <p:stCondLst>
+                              <p:cond delay="0"/>
+                            </p:stCondLst>
+                            <p:childTnLst>
+                              <p:animEffect transition="in" filter="typewriter">
+                                <p:cBhvr>
+                                  <p:cTn id="22" dur="790" fill="hold"/>
+                                  <p:tgtEl>
+                                    <p:spTgt spid="31"/>
+                                  </p:tgtEl>
+                                </p:cBhvr>
+                              </p:animEffect>
+                            </p:childTnLst>
+                            <p:iterate type="lt">
+                              <p:tmAbs val="35"/>
+                            </p:iterate>
+                          </p:cTn>
+                        </p:par>
+                      </p:childTnLst>
+                    </p:cTn>
+                  </p:par>
+                </p:childTnLst>
+              </p:cTn>
+              <p:prevCondLst>
+                <p:cond evt="onPrev" delay="0">
+                  <p:tgtEl>
+                    <p:sldTgt/>
+                  </p:tgtEl>
+                </p:cond>
+              </p:prevCondLst>
+              <p:nextCondLst>
+                <p:cond evt="onNext" delay="0">
+                  <p:tgtEl>
+                    <p:sldTgt/>
+                  </p:tgtEl>
+                </p:cond>
+              </p:nextCondLst>
+            </p:seq>
+          </p:childTnLst>
+        </p:cTn>
+      </p:par>
+    </p:tnLst>
+    <p:bldLst>
+      <p:bldP spid="9" grpId="0" build="p"/>
+      <p:bldP spid="10" grpId="0" build="p"/>
+      <p:bldP spid="14" grpId="0" build="p"/>
+      <p:bldP spid="19" grpId="0" build="p"/>
+      <p:bldP spid="24" grpId="0" build="p"/>
+      <p:bldP spid="29" grpId="0" build="p"/>
+      <p:bldP spid="31" grpId="0" build="p"/>
+    </p:bldLst>
+  </p:timing>
 </p:sld>
 </file>
 
@@ -23591,7 +28577,7 @@
       </p:sp>
       <p:sp>
         <p:nvSpPr>
-          <p:cNvPr id="6" name="Text 4"/>
+          <p:cNvPr id="6" name="static_text_0093"/>
           <p:cNvSpPr/>
           <p:nvPr/>
         </p:nvSpPr>
@@ -23635,7 +28621,7 @@
       </p:sp>
       <p:sp>
         <p:nvSpPr>
-          <p:cNvPr id="7" name="Text 5"/>
+          <p:cNvPr id="7" name="static_text_0094"/>
           <p:cNvSpPr/>
           <p:nvPr/>
         </p:nvSpPr>
@@ -23702,7 +28688,7 @@
       </p:sp>
       <p:sp>
         <p:nvSpPr>
-          <p:cNvPr id="9" name="Text 7"/>
+          <p:cNvPr id="9" name="tw_text_0095"/>
           <p:cNvSpPr/>
           <p:nvPr/>
         </p:nvSpPr>
@@ -23746,7 +28732,7 @@
       </p:sp>
       <p:sp>
         <p:nvSpPr>
-          <p:cNvPr id="10" name="Text 8"/>
+          <p:cNvPr id="10" name="tw_text_0096"/>
           <p:cNvSpPr/>
           <p:nvPr/>
         </p:nvSpPr>
@@ -23842,7 +28828,7 @@
       </p:sp>
       <p:sp>
         <p:nvSpPr>
-          <p:cNvPr id="13" name="Text 11"/>
+          <p:cNvPr id="13" name="static_text_0097"/>
           <p:cNvSpPr/>
           <p:nvPr/>
         </p:nvSpPr>
@@ -23886,7 +28872,7 @@
       </p:sp>
       <p:sp>
         <p:nvSpPr>
-          <p:cNvPr id="14" name="Text 12"/>
+          <p:cNvPr id="14" name="tw_text_0098"/>
           <p:cNvSpPr/>
           <p:nvPr/>
         </p:nvSpPr>
@@ -23982,7 +28968,7 @@
       </p:sp>
       <p:sp>
         <p:nvSpPr>
-          <p:cNvPr id="17" name="Text 15"/>
+          <p:cNvPr id="17" name="static_text_0099"/>
           <p:cNvSpPr/>
           <p:nvPr/>
         </p:nvSpPr>
@@ -24026,7 +29012,7 @@
       </p:sp>
       <p:sp>
         <p:nvSpPr>
-          <p:cNvPr id="18" name="Text 16"/>
+          <p:cNvPr id="18" name="tw_text_0100"/>
           <p:cNvSpPr/>
           <p:nvPr/>
         </p:nvSpPr>
@@ -24122,7 +29108,7 @@
       </p:sp>
       <p:sp>
         <p:nvSpPr>
-          <p:cNvPr id="21" name="Text 19"/>
+          <p:cNvPr id="21" name="static_text_0101"/>
           <p:cNvSpPr/>
           <p:nvPr/>
         </p:nvSpPr>
@@ -24166,7 +29152,7 @@
       </p:sp>
       <p:sp>
         <p:nvSpPr>
-          <p:cNvPr id="22" name="Text 20"/>
+          <p:cNvPr id="22" name="tw_text_0102"/>
           <p:cNvSpPr/>
           <p:nvPr/>
         </p:nvSpPr>
@@ -24237,7 +29223,7 @@
       </p:sp>
       <p:sp>
         <p:nvSpPr>
-          <p:cNvPr id="24" name="Text 22"/>
+          <p:cNvPr id="24" name="tw_text_0103"/>
           <p:cNvSpPr/>
           <p:nvPr/>
         </p:nvSpPr>
@@ -24393,7 +29379,7 @@
       </p:sp>
       <p:sp>
         <p:nvSpPr>
-          <p:cNvPr id="27" name="Text 25"/>
+          <p:cNvPr id="27" name="static_text_0104"/>
           <p:cNvSpPr/>
           <p:nvPr/>
         </p:nvSpPr>
@@ -24437,7 +29423,7 @@
       </p:sp>
       <p:sp>
         <p:nvSpPr>
-          <p:cNvPr id="28" name="Text 26"/>
+          <p:cNvPr id="28" name="tw_text_0105"/>
           <p:cNvSpPr/>
           <p:nvPr/>
         </p:nvSpPr>
@@ -24484,6 +29470,248 @@
   <p:clrMapOvr>
     <a:masterClrMapping/>
   </p:clrMapOvr>
+  <p:timing>
+    <p:tnLst>
+      <p:par>
+        <p:cTn id="1" dur="indefinite" restart="never" nodeType="tmRoot">
+          <p:childTnLst>
+            <p:seq concurrent="1" nextAc="seek">
+              <p:cTn id="2" dur="indefinite" nodeType="mainSeq">
+                <p:childTnLst>
+                  <p:par>
+                    <p:cTn id="2" fill="hold">
+                      <p:stCondLst>
+                        <p:cond delay="0"/>
+                      </p:stCondLst>
+                      <p:childTnLst>
+                        <p:par>
+                          <p:cTn id="3" presetID="1" presetClass="entr" presetSubtype="0" fill="hold" nodeType="clickEffect">
+                            <p:stCondLst>
+                              <p:cond delay="0"/>
+                            </p:stCondLst>
+                            <p:childTnLst>
+                              <p:animEffect transition="in" filter="typewriter">
+                                <p:cBhvr>
+                                  <p:cTn id="4" dur="520" fill="hold"/>
+                                  <p:tgtEl>
+                                    <p:spTgt spid="9"/>
+                                  </p:tgtEl>
+                                </p:cBhvr>
+                              </p:animEffect>
+                            </p:childTnLst>
+                            <p:iterate type="lt">
+                              <p:tmAbs val="35"/>
+                            </p:iterate>
+                          </p:cTn>
+                        </p:par>
+                      </p:childTnLst>
+                    </p:cTn>
+                  </p:par>
+                  <p:par>
+                    <p:cTn id="5" fill="hold">
+                      <p:stCondLst>
+                        <p:cond delay="90"/>
+                      </p:stCondLst>
+                      <p:childTnLst>
+                        <p:par>
+                          <p:cTn id="6" presetID="1" presetClass="entr" presetSubtype="0" fill="hold" nodeType="clickEffect">
+                            <p:stCondLst>
+                              <p:cond delay="0"/>
+                            </p:stCondLst>
+                            <p:childTnLst>
+                              <p:animEffect transition="in" filter="typewriter">
+                                <p:cBhvr>
+                                  <p:cTn id="7" dur="565" fill="hold"/>
+                                  <p:tgtEl>
+                                    <p:spTgt spid="10"/>
+                                  </p:tgtEl>
+                                </p:cBhvr>
+                              </p:animEffect>
+                            </p:childTnLst>
+                            <p:iterate type="lt">
+                              <p:tmAbs val="35"/>
+                            </p:iterate>
+                          </p:cTn>
+                        </p:par>
+                      </p:childTnLst>
+                    </p:cTn>
+                  </p:par>
+                  <p:par>
+                    <p:cTn id="8" fill="hold">
+                      <p:stCondLst>
+                        <p:cond delay="90"/>
+                      </p:stCondLst>
+                      <p:childTnLst>
+                        <p:par>
+                          <p:cTn id="9" presetID="1" presetClass="entr" presetSubtype="0" fill="hold" nodeType="clickEffect">
+                            <p:stCondLst>
+                              <p:cond delay="0"/>
+                            </p:stCondLst>
+                            <p:childTnLst>
+                              <p:animEffect transition="in" filter="typewriter">
+                                <p:cBhvr>
+                                  <p:cTn id="10" dur="610" fill="hold"/>
+                                  <p:tgtEl>
+                                    <p:spTgt spid="14"/>
+                                  </p:tgtEl>
+                                </p:cBhvr>
+                              </p:animEffect>
+                            </p:childTnLst>
+                            <p:iterate type="lt">
+                              <p:tmAbs val="35"/>
+                            </p:iterate>
+                          </p:cTn>
+                        </p:par>
+                      </p:childTnLst>
+                    </p:cTn>
+                  </p:par>
+                  <p:par>
+                    <p:cTn id="11" fill="hold">
+                      <p:stCondLst>
+                        <p:cond delay="90"/>
+                      </p:stCondLst>
+                      <p:childTnLst>
+                        <p:par>
+                          <p:cTn id="12" presetID="1" presetClass="entr" presetSubtype="0" fill="hold" nodeType="clickEffect">
+                            <p:stCondLst>
+                              <p:cond delay="0"/>
+                            </p:stCondLst>
+                            <p:childTnLst>
+                              <p:animEffect transition="in" filter="typewriter">
+                                <p:cBhvr>
+                                  <p:cTn id="13" dur="655" fill="hold"/>
+                                  <p:tgtEl>
+                                    <p:spTgt spid="18"/>
+                                  </p:tgtEl>
+                                </p:cBhvr>
+                              </p:animEffect>
+                            </p:childTnLst>
+                            <p:iterate type="lt">
+                              <p:tmAbs val="35"/>
+                            </p:iterate>
+                          </p:cTn>
+                        </p:par>
+                      </p:childTnLst>
+                    </p:cTn>
+                  </p:par>
+                  <p:par>
+                    <p:cTn id="14" fill="hold">
+                      <p:stCondLst>
+                        <p:cond delay="90"/>
+                      </p:stCondLst>
+                      <p:childTnLst>
+                        <p:par>
+                          <p:cTn id="15" presetID="1" presetClass="entr" presetSubtype="0" fill="hold" nodeType="clickEffect">
+                            <p:stCondLst>
+                              <p:cond delay="0"/>
+                            </p:stCondLst>
+                            <p:childTnLst>
+                              <p:animEffect transition="in" filter="typewriter">
+                                <p:cBhvr>
+                                  <p:cTn id="16" dur="700" fill="hold"/>
+                                  <p:tgtEl>
+                                    <p:spTgt spid="22"/>
+                                  </p:tgtEl>
+                                </p:cBhvr>
+                              </p:animEffect>
+                            </p:childTnLst>
+                            <p:iterate type="lt">
+                              <p:tmAbs val="35"/>
+                            </p:iterate>
+                          </p:cTn>
+                        </p:par>
+                      </p:childTnLst>
+                    </p:cTn>
+                  </p:par>
+                  <p:par>
+                    <p:cTn id="17" fill="hold">
+                      <p:stCondLst>
+                        <p:cond delay="90"/>
+                      </p:stCondLst>
+                      <p:childTnLst>
+                        <p:par>
+                          <p:cTn id="18" presetID="1" presetClass="entr" presetSubtype="0" fill="hold" nodeType="clickEffect">
+                            <p:stCondLst>
+                              <p:cond delay="0"/>
+                            </p:stCondLst>
+                            <p:childTnLst>
+                              <p:animEffect transition="in" filter="typewriter">
+                                <p:cBhvr>
+                                  <p:cTn id="19" dur="745" fill="hold"/>
+                                  <p:tgtEl>
+                                    <p:spTgt spid="24"/>
+                                  </p:tgtEl>
+                                </p:cBhvr>
+                              </p:animEffect>
+                            </p:childTnLst>
+                            <p:iterate type="lt">
+                              <p:tmAbs val="35"/>
+                            </p:iterate>
+                          </p:cTn>
+                        </p:par>
+                      </p:childTnLst>
+                    </p:cTn>
+                  </p:par>
+                  <p:par>
+                    <p:cTn id="20" fill="hold">
+                      <p:stCondLst>
+                        <p:cond delay="90"/>
+                      </p:stCondLst>
+                      <p:childTnLst>
+                        <p:par>
+                          <p:cTn id="21" presetID="1" presetClass="entr" presetSubtype="0" fill="hold" nodeType="clickEffect">
+                            <p:stCondLst>
+                              <p:cond delay="0"/>
+                            </p:stCondLst>
+                            <p:childTnLst>
+                              <p:animEffect transition="in" filter="typewriter">
+                                <p:cBhvr>
+                                  <p:cTn id="22" dur="790" fill="hold"/>
+                                  <p:tgtEl>
+                                    <p:spTgt spid="28"/>
+                                  </p:tgtEl>
+                                </p:cBhvr>
+                              </p:animEffect>
+                            </p:childTnLst>
+                            <p:iterate type="lt">
+                              <p:tmAbs val="35"/>
+                            </p:iterate>
+                          </p:cTn>
+                        </p:par>
+                      </p:childTnLst>
+                    </p:cTn>
+                  </p:par>
+                </p:childTnLst>
+              </p:cTn>
+              <p:prevCondLst>
+                <p:cond evt="onPrev" delay="0">
+                  <p:tgtEl>
+                    <p:sldTgt/>
+                  </p:tgtEl>
+                </p:cond>
+              </p:prevCondLst>
+              <p:nextCondLst>
+                <p:cond evt="onNext" delay="0">
+                  <p:tgtEl>
+                    <p:sldTgt/>
+                  </p:tgtEl>
+                </p:cond>
+              </p:nextCondLst>
+            </p:seq>
+          </p:childTnLst>
+        </p:cTn>
+      </p:par>
+    </p:tnLst>
+    <p:bldLst>
+      <p:bldP spid="9" grpId="0" build="p"/>
+      <p:bldP spid="10" grpId="0" build="p"/>
+      <p:bldP spid="14" grpId="0" build="p"/>
+      <p:bldP spid="18" grpId="0" build="p"/>
+      <p:bldP spid="22" grpId="0" build="p"/>
+      <p:bldP spid="24" grpId="0" build="p"/>
+      <p:bldP spid="28" grpId="0" build="p"/>
+    </p:bldLst>
+  </p:timing>
 </p:sld>
 </file>
 
@@ -24615,7 +29843,7 @@
       </p:sp>
       <p:sp>
         <p:nvSpPr>
-          <p:cNvPr id="6" name="Text 4"/>
+          <p:cNvPr id="6" name="static_text_0106"/>
           <p:cNvSpPr/>
           <p:nvPr/>
         </p:nvSpPr>
@@ -24659,7 +29887,7 @@
       </p:sp>
       <p:sp>
         <p:nvSpPr>
-          <p:cNvPr id="7" name="Text 5"/>
+          <p:cNvPr id="7" name="static_text_0107"/>
           <p:cNvSpPr/>
           <p:nvPr/>
         </p:nvSpPr>
@@ -24726,7 +29954,7 @@
       </p:sp>
       <p:sp>
         <p:nvSpPr>
-          <p:cNvPr id="9" name="Text 7"/>
+          <p:cNvPr id="9" name="tw_text_0108"/>
           <p:cNvSpPr/>
           <p:nvPr/>
         </p:nvSpPr>
@@ -24770,7 +29998,7 @@
       </p:sp>
       <p:sp>
         <p:nvSpPr>
-          <p:cNvPr id="10" name="Text 8"/>
+          <p:cNvPr id="10" name="tw_text_0109"/>
           <p:cNvSpPr/>
           <p:nvPr/>
         </p:nvSpPr>
@@ -24866,7 +30094,7 @@
       </p:sp>
       <p:sp>
         <p:nvSpPr>
-          <p:cNvPr id="13" name="Text 11"/>
+          <p:cNvPr id="13" name="static_text_0110"/>
           <p:cNvSpPr/>
           <p:nvPr/>
         </p:nvSpPr>
@@ -24910,7 +30138,7 @@
       </p:sp>
       <p:sp>
         <p:nvSpPr>
-          <p:cNvPr id="14" name="Text 12"/>
+          <p:cNvPr id="14" name="tw_text_0111"/>
           <p:cNvSpPr/>
           <p:nvPr/>
         </p:nvSpPr>
@@ -25006,7 +30234,7 @@
       </p:sp>
       <p:sp>
         <p:nvSpPr>
-          <p:cNvPr id="17" name="Text 15"/>
+          <p:cNvPr id="17" name="static_text_0112"/>
           <p:cNvSpPr/>
           <p:nvPr/>
         </p:nvSpPr>
@@ -25050,7 +30278,7 @@
       </p:sp>
       <p:sp>
         <p:nvSpPr>
-          <p:cNvPr id="18" name="Text 16"/>
+          <p:cNvPr id="18" name="tw_text_0113"/>
           <p:cNvSpPr/>
           <p:nvPr/>
         </p:nvSpPr>
@@ -25146,7 +30374,7 @@
       </p:sp>
       <p:sp>
         <p:nvSpPr>
-          <p:cNvPr id="21" name="Text 19"/>
+          <p:cNvPr id="21" name="static_text_0114"/>
           <p:cNvSpPr/>
           <p:nvPr/>
         </p:nvSpPr>
@@ -25190,7 +30418,7 @@
       </p:sp>
       <p:sp>
         <p:nvSpPr>
-          <p:cNvPr id="22" name="Text 20"/>
+          <p:cNvPr id="22" name="tw_text_0115"/>
           <p:cNvSpPr/>
           <p:nvPr/>
         </p:nvSpPr>
@@ -25286,7 +30514,7 @@
       </p:sp>
       <p:sp>
         <p:nvSpPr>
-          <p:cNvPr id="25" name="Text 23"/>
+          <p:cNvPr id="25" name="static_text_0116"/>
           <p:cNvSpPr/>
           <p:nvPr/>
         </p:nvSpPr>
@@ -25330,7 +30558,7 @@
       </p:sp>
       <p:sp>
         <p:nvSpPr>
-          <p:cNvPr id="26" name="Text 24"/>
+          <p:cNvPr id="26" name="tw_text_0117"/>
           <p:cNvSpPr/>
           <p:nvPr/>
         </p:nvSpPr>
@@ -25397,7 +30625,7 @@
       </p:sp>
       <p:sp>
         <p:nvSpPr>
-          <p:cNvPr id="28" name="Text 26"/>
+          <p:cNvPr id="28" name="tw_text_0118"/>
           <p:cNvSpPr/>
           <p:nvPr/>
         </p:nvSpPr>
@@ -25444,6 +30672,248 @@
   <p:clrMapOvr>
     <a:masterClrMapping/>
   </p:clrMapOvr>
+  <p:timing>
+    <p:tnLst>
+      <p:par>
+        <p:cTn id="1" dur="indefinite" restart="never" nodeType="tmRoot">
+          <p:childTnLst>
+            <p:seq concurrent="1" nextAc="seek">
+              <p:cTn id="2" dur="indefinite" nodeType="mainSeq">
+                <p:childTnLst>
+                  <p:par>
+                    <p:cTn id="2" fill="hold">
+                      <p:stCondLst>
+                        <p:cond delay="0"/>
+                      </p:stCondLst>
+                      <p:childTnLst>
+                        <p:par>
+                          <p:cTn id="3" presetID="1" presetClass="entr" presetSubtype="0" fill="hold" nodeType="clickEffect">
+                            <p:stCondLst>
+                              <p:cond delay="0"/>
+                            </p:stCondLst>
+                            <p:childTnLst>
+                              <p:animEffect transition="in" filter="typewriter">
+                                <p:cBhvr>
+                                  <p:cTn id="4" dur="520" fill="hold"/>
+                                  <p:tgtEl>
+                                    <p:spTgt spid="9"/>
+                                  </p:tgtEl>
+                                </p:cBhvr>
+                              </p:animEffect>
+                            </p:childTnLst>
+                            <p:iterate type="lt">
+                              <p:tmAbs val="35"/>
+                            </p:iterate>
+                          </p:cTn>
+                        </p:par>
+                      </p:childTnLst>
+                    </p:cTn>
+                  </p:par>
+                  <p:par>
+                    <p:cTn id="5" fill="hold">
+                      <p:stCondLst>
+                        <p:cond delay="90"/>
+                      </p:stCondLst>
+                      <p:childTnLst>
+                        <p:par>
+                          <p:cTn id="6" presetID="1" presetClass="entr" presetSubtype="0" fill="hold" nodeType="clickEffect">
+                            <p:stCondLst>
+                              <p:cond delay="0"/>
+                            </p:stCondLst>
+                            <p:childTnLst>
+                              <p:animEffect transition="in" filter="typewriter">
+                                <p:cBhvr>
+                                  <p:cTn id="7" dur="565" fill="hold"/>
+                                  <p:tgtEl>
+                                    <p:spTgt spid="10"/>
+                                  </p:tgtEl>
+                                </p:cBhvr>
+                              </p:animEffect>
+                            </p:childTnLst>
+                            <p:iterate type="lt">
+                              <p:tmAbs val="35"/>
+                            </p:iterate>
+                          </p:cTn>
+                        </p:par>
+                      </p:childTnLst>
+                    </p:cTn>
+                  </p:par>
+                  <p:par>
+                    <p:cTn id="8" fill="hold">
+                      <p:stCondLst>
+                        <p:cond delay="90"/>
+                      </p:stCondLst>
+                      <p:childTnLst>
+                        <p:par>
+                          <p:cTn id="9" presetID="1" presetClass="entr" presetSubtype="0" fill="hold" nodeType="clickEffect">
+                            <p:stCondLst>
+                              <p:cond delay="0"/>
+                            </p:stCondLst>
+                            <p:childTnLst>
+                              <p:animEffect transition="in" filter="typewriter">
+                                <p:cBhvr>
+                                  <p:cTn id="10" dur="610" fill="hold"/>
+                                  <p:tgtEl>
+                                    <p:spTgt spid="14"/>
+                                  </p:tgtEl>
+                                </p:cBhvr>
+                              </p:animEffect>
+                            </p:childTnLst>
+                            <p:iterate type="lt">
+                              <p:tmAbs val="35"/>
+                            </p:iterate>
+                          </p:cTn>
+                        </p:par>
+                      </p:childTnLst>
+                    </p:cTn>
+                  </p:par>
+                  <p:par>
+                    <p:cTn id="11" fill="hold">
+                      <p:stCondLst>
+                        <p:cond delay="90"/>
+                      </p:stCondLst>
+                      <p:childTnLst>
+                        <p:par>
+                          <p:cTn id="12" presetID="1" presetClass="entr" presetSubtype="0" fill="hold" nodeType="clickEffect">
+                            <p:stCondLst>
+                              <p:cond delay="0"/>
+                            </p:stCondLst>
+                            <p:childTnLst>
+                              <p:animEffect transition="in" filter="typewriter">
+                                <p:cBhvr>
+                                  <p:cTn id="13" dur="655" fill="hold"/>
+                                  <p:tgtEl>
+                                    <p:spTgt spid="18"/>
+                                  </p:tgtEl>
+                                </p:cBhvr>
+                              </p:animEffect>
+                            </p:childTnLst>
+                            <p:iterate type="lt">
+                              <p:tmAbs val="35"/>
+                            </p:iterate>
+                          </p:cTn>
+                        </p:par>
+                      </p:childTnLst>
+                    </p:cTn>
+                  </p:par>
+                  <p:par>
+                    <p:cTn id="14" fill="hold">
+                      <p:stCondLst>
+                        <p:cond delay="90"/>
+                      </p:stCondLst>
+                      <p:childTnLst>
+                        <p:par>
+                          <p:cTn id="15" presetID="1" presetClass="entr" presetSubtype="0" fill="hold" nodeType="clickEffect">
+                            <p:stCondLst>
+                              <p:cond delay="0"/>
+                            </p:stCondLst>
+                            <p:childTnLst>
+                              <p:animEffect transition="in" filter="typewriter">
+                                <p:cBhvr>
+                                  <p:cTn id="16" dur="700" fill="hold"/>
+                                  <p:tgtEl>
+                                    <p:spTgt spid="22"/>
+                                  </p:tgtEl>
+                                </p:cBhvr>
+                              </p:animEffect>
+                            </p:childTnLst>
+                            <p:iterate type="lt">
+                              <p:tmAbs val="35"/>
+                            </p:iterate>
+                          </p:cTn>
+                        </p:par>
+                      </p:childTnLst>
+                    </p:cTn>
+                  </p:par>
+                  <p:par>
+                    <p:cTn id="17" fill="hold">
+                      <p:stCondLst>
+                        <p:cond delay="90"/>
+                      </p:stCondLst>
+                      <p:childTnLst>
+                        <p:par>
+                          <p:cTn id="18" presetID="1" presetClass="entr" presetSubtype="0" fill="hold" nodeType="clickEffect">
+                            <p:stCondLst>
+                              <p:cond delay="0"/>
+                            </p:stCondLst>
+                            <p:childTnLst>
+                              <p:animEffect transition="in" filter="typewriter">
+                                <p:cBhvr>
+                                  <p:cTn id="19" dur="745" fill="hold"/>
+                                  <p:tgtEl>
+                                    <p:spTgt spid="26"/>
+                                  </p:tgtEl>
+                                </p:cBhvr>
+                              </p:animEffect>
+                            </p:childTnLst>
+                            <p:iterate type="lt">
+                              <p:tmAbs val="35"/>
+                            </p:iterate>
+                          </p:cTn>
+                        </p:par>
+                      </p:childTnLst>
+                    </p:cTn>
+                  </p:par>
+                  <p:par>
+                    <p:cTn id="20" fill="hold">
+                      <p:stCondLst>
+                        <p:cond delay="90"/>
+                      </p:stCondLst>
+                      <p:childTnLst>
+                        <p:par>
+                          <p:cTn id="21" presetID="1" presetClass="entr" presetSubtype="0" fill="hold" nodeType="clickEffect">
+                            <p:stCondLst>
+                              <p:cond delay="0"/>
+                            </p:stCondLst>
+                            <p:childTnLst>
+                              <p:animEffect transition="in" filter="typewriter">
+                                <p:cBhvr>
+                                  <p:cTn id="22" dur="790" fill="hold"/>
+                                  <p:tgtEl>
+                                    <p:spTgt spid="28"/>
+                                  </p:tgtEl>
+                                </p:cBhvr>
+                              </p:animEffect>
+                            </p:childTnLst>
+                            <p:iterate type="lt">
+                              <p:tmAbs val="35"/>
+                            </p:iterate>
+                          </p:cTn>
+                        </p:par>
+                      </p:childTnLst>
+                    </p:cTn>
+                  </p:par>
+                </p:childTnLst>
+              </p:cTn>
+              <p:prevCondLst>
+                <p:cond evt="onPrev" delay="0">
+                  <p:tgtEl>
+                    <p:sldTgt/>
+                  </p:tgtEl>
+                </p:cond>
+              </p:prevCondLst>
+              <p:nextCondLst>
+                <p:cond evt="onNext" delay="0">
+                  <p:tgtEl>
+                    <p:sldTgt/>
+                  </p:tgtEl>
+                </p:cond>
+              </p:nextCondLst>
+            </p:seq>
+          </p:childTnLst>
+        </p:cTn>
+      </p:par>
+    </p:tnLst>
+    <p:bldLst>
+      <p:bldP spid="9" grpId="0" build="p"/>
+      <p:bldP spid="10" grpId="0" build="p"/>
+      <p:bldP spid="14" grpId="0" build="p"/>
+      <p:bldP spid="18" grpId="0" build="p"/>
+      <p:bldP spid="22" grpId="0" build="p"/>
+      <p:bldP spid="26" grpId="0" build="p"/>
+      <p:bldP spid="28" grpId="0" build="p"/>
+    </p:bldLst>
+  </p:timing>
 </p:sld>
 </file>
 
@@ -25575,7 +31045,7 @@
       </p:sp>
       <p:sp>
         <p:nvSpPr>
-          <p:cNvPr id="6" name="Text 4"/>
+          <p:cNvPr id="6" name="static_text_0119"/>
           <p:cNvSpPr/>
           <p:nvPr/>
         </p:nvSpPr>
@@ -25619,7 +31089,7 @@
       </p:sp>
       <p:sp>
         <p:nvSpPr>
-          <p:cNvPr id="7" name="Text 5"/>
+          <p:cNvPr id="7" name="static_text_0120"/>
           <p:cNvSpPr/>
           <p:nvPr/>
         </p:nvSpPr>
@@ -25686,7 +31156,7 @@
       </p:sp>
       <p:sp>
         <p:nvSpPr>
-          <p:cNvPr id="9" name="Text 7"/>
+          <p:cNvPr id="9" name="tw_text_0121"/>
           <p:cNvSpPr/>
           <p:nvPr/>
         </p:nvSpPr>
@@ -25730,7 +31200,7 @@
       </p:sp>
       <p:sp>
         <p:nvSpPr>
-          <p:cNvPr id="10" name="Text 8"/>
+          <p:cNvPr id="10" name="tw_text_0122"/>
           <p:cNvSpPr/>
           <p:nvPr/>
         </p:nvSpPr>
@@ -25801,7 +31271,7 @@
       </p:sp>
       <p:sp>
         <p:nvSpPr>
-          <p:cNvPr id="12" name="Text 10"/>
+          <p:cNvPr id="12" name="static_text_0123"/>
           <p:cNvSpPr/>
           <p:nvPr/>
         </p:nvSpPr>
@@ -25897,7 +31367,7 @@
       </p:sp>
       <p:sp>
         <p:nvSpPr>
-          <p:cNvPr id="15" name="Text 13"/>
+          <p:cNvPr id="15" name="static_text_0124"/>
           <p:cNvSpPr/>
           <p:nvPr/>
         </p:nvSpPr>
@@ -25993,7 +31463,7 @@
       </p:sp>
       <p:sp>
         <p:nvSpPr>
-          <p:cNvPr id="18" name="Text 16"/>
+          <p:cNvPr id="18" name="static_text_0125"/>
           <p:cNvSpPr/>
           <p:nvPr/>
         </p:nvSpPr>
@@ -26089,7 +31559,7 @@
       </p:sp>
       <p:sp>
         <p:nvSpPr>
-          <p:cNvPr id="21" name="Text 19"/>
+          <p:cNvPr id="21" name="tw_text_0126"/>
           <p:cNvSpPr/>
           <p:nvPr/>
         </p:nvSpPr>
@@ -26185,7 +31655,7 @@
       </p:sp>
       <p:sp>
         <p:nvSpPr>
-          <p:cNvPr id="24" name="Text 22"/>
+          <p:cNvPr id="24" name="static_text_0127"/>
           <p:cNvSpPr/>
           <p:nvPr/>
         </p:nvSpPr>
@@ -26281,7 +31751,7 @@
       </p:sp>
       <p:sp>
         <p:nvSpPr>
-          <p:cNvPr id="27" name="Text 25"/>
+          <p:cNvPr id="27" name="static_text_0128"/>
           <p:cNvSpPr/>
           <p:nvPr/>
         </p:nvSpPr>
@@ -26354,7 +31824,7 @@
       </p:sp>
       <p:sp>
         <p:nvSpPr>
-          <p:cNvPr id="29" name="Text 27"/>
+          <p:cNvPr id="29" name="static_text_0129"/>
           <p:cNvSpPr/>
           <p:nvPr/>
         </p:nvSpPr>
@@ -26398,7 +31868,7 @@
       </p:sp>
       <p:sp>
         <p:nvSpPr>
-          <p:cNvPr id="30" name="Text 28"/>
+          <p:cNvPr id="30" name="static_text_0130"/>
           <p:cNvSpPr/>
           <p:nvPr/>
         </p:nvSpPr>
@@ -26442,7 +31912,7 @@
       </p:sp>
       <p:sp>
         <p:nvSpPr>
-          <p:cNvPr id="31" name="Text 29"/>
+          <p:cNvPr id="31" name="tw_text_0131"/>
           <p:cNvSpPr/>
           <p:nvPr/>
         </p:nvSpPr>
@@ -26515,7 +31985,7 @@
       </p:sp>
       <p:sp>
         <p:nvSpPr>
-          <p:cNvPr id="33" name="Text 31"/>
+          <p:cNvPr id="33" name="static_text_0132"/>
           <p:cNvSpPr/>
           <p:nvPr/>
         </p:nvSpPr>
@@ -26559,7 +32029,7 @@
       </p:sp>
       <p:sp>
         <p:nvSpPr>
-          <p:cNvPr id="34" name="Text 32"/>
+          <p:cNvPr id="34" name="static_text_0133"/>
           <p:cNvSpPr/>
           <p:nvPr/>
         </p:nvSpPr>
@@ -26603,7 +32073,7 @@
       </p:sp>
       <p:sp>
         <p:nvSpPr>
-          <p:cNvPr id="35" name="Text 33"/>
+          <p:cNvPr id="35" name="tw_text_0134"/>
           <p:cNvSpPr/>
           <p:nvPr/>
         </p:nvSpPr>
@@ -26676,7 +32146,7 @@
       </p:sp>
       <p:sp>
         <p:nvSpPr>
-          <p:cNvPr id="37" name="Text 35"/>
+          <p:cNvPr id="37" name="static_text_0135"/>
           <p:cNvSpPr/>
           <p:nvPr/>
         </p:nvSpPr>
@@ -26720,7 +32190,7 @@
       </p:sp>
       <p:sp>
         <p:nvSpPr>
-          <p:cNvPr id="38" name="Text 36"/>
+          <p:cNvPr id="38" name="static_text_0136"/>
           <p:cNvSpPr/>
           <p:nvPr/>
         </p:nvSpPr>
@@ -26764,7 +32234,7 @@
       </p:sp>
       <p:sp>
         <p:nvSpPr>
-          <p:cNvPr id="39" name="Text 37"/>
+          <p:cNvPr id="39" name="tw_text_0137"/>
           <p:cNvSpPr/>
           <p:nvPr/>
         </p:nvSpPr>
@@ -26831,7 +32301,7 @@
       </p:sp>
       <p:sp>
         <p:nvSpPr>
-          <p:cNvPr id="41" name="Text 39"/>
+          <p:cNvPr id="41" name="tw_text_0138"/>
           <p:cNvSpPr/>
           <p:nvPr/>
         </p:nvSpPr>
@@ -26878,6 +32348,248 @@
   <p:clrMapOvr>
     <a:masterClrMapping/>
   </p:clrMapOvr>
+  <p:timing>
+    <p:tnLst>
+      <p:par>
+        <p:cTn id="1" dur="indefinite" restart="never" nodeType="tmRoot">
+          <p:childTnLst>
+            <p:seq concurrent="1" nextAc="seek">
+              <p:cTn id="2" dur="indefinite" nodeType="mainSeq">
+                <p:childTnLst>
+                  <p:par>
+                    <p:cTn id="2" fill="hold">
+                      <p:stCondLst>
+                        <p:cond delay="0"/>
+                      </p:stCondLst>
+                      <p:childTnLst>
+                        <p:par>
+                          <p:cTn id="3" presetID="1" presetClass="entr" presetSubtype="0" fill="hold" nodeType="clickEffect">
+                            <p:stCondLst>
+                              <p:cond delay="0"/>
+                            </p:stCondLst>
+                            <p:childTnLst>
+                              <p:animEffect transition="in" filter="typewriter">
+                                <p:cBhvr>
+                                  <p:cTn id="4" dur="520" fill="hold"/>
+                                  <p:tgtEl>
+                                    <p:spTgt spid="9"/>
+                                  </p:tgtEl>
+                                </p:cBhvr>
+                              </p:animEffect>
+                            </p:childTnLst>
+                            <p:iterate type="lt">
+                              <p:tmAbs val="35"/>
+                            </p:iterate>
+                          </p:cTn>
+                        </p:par>
+                      </p:childTnLst>
+                    </p:cTn>
+                  </p:par>
+                  <p:par>
+                    <p:cTn id="5" fill="hold">
+                      <p:stCondLst>
+                        <p:cond delay="90"/>
+                      </p:stCondLst>
+                      <p:childTnLst>
+                        <p:par>
+                          <p:cTn id="6" presetID="1" presetClass="entr" presetSubtype="0" fill="hold" nodeType="clickEffect">
+                            <p:stCondLst>
+                              <p:cond delay="0"/>
+                            </p:stCondLst>
+                            <p:childTnLst>
+                              <p:animEffect transition="in" filter="typewriter">
+                                <p:cBhvr>
+                                  <p:cTn id="7" dur="565" fill="hold"/>
+                                  <p:tgtEl>
+                                    <p:spTgt spid="10"/>
+                                  </p:tgtEl>
+                                </p:cBhvr>
+                              </p:animEffect>
+                            </p:childTnLst>
+                            <p:iterate type="lt">
+                              <p:tmAbs val="35"/>
+                            </p:iterate>
+                          </p:cTn>
+                        </p:par>
+                      </p:childTnLst>
+                    </p:cTn>
+                  </p:par>
+                  <p:par>
+                    <p:cTn id="8" fill="hold">
+                      <p:stCondLst>
+                        <p:cond delay="90"/>
+                      </p:stCondLst>
+                      <p:childTnLst>
+                        <p:par>
+                          <p:cTn id="9" presetID="1" presetClass="entr" presetSubtype="0" fill="hold" nodeType="clickEffect">
+                            <p:stCondLst>
+                              <p:cond delay="0"/>
+                            </p:stCondLst>
+                            <p:childTnLst>
+                              <p:animEffect transition="in" filter="typewriter">
+                                <p:cBhvr>
+                                  <p:cTn id="10" dur="610" fill="hold"/>
+                                  <p:tgtEl>
+                                    <p:spTgt spid="21"/>
+                                  </p:tgtEl>
+                                </p:cBhvr>
+                              </p:animEffect>
+                            </p:childTnLst>
+                            <p:iterate type="lt">
+                              <p:tmAbs val="35"/>
+                            </p:iterate>
+                          </p:cTn>
+                        </p:par>
+                      </p:childTnLst>
+                    </p:cTn>
+                  </p:par>
+                  <p:par>
+                    <p:cTn id="11" fill="hold">
+                      <p:stCondLst>
+                        <p:cond delay="90"/>
+                      </p:stCondLst>
+                      <p:childTnLst>
+                        <p:par>
+                          <p:cTn id="12" presetID="1" presetClass="entr" presetSubtype="0" fill="hold" nodeType="clickEffect">
+                            <p:stCondLst>
+                              <p:cond delay="0"/>
+                            </p:stCondLst>
+                            <p:childTnLst>
+                              <p:animEffect transition="in" filter="typewriter">
+                                <p:cBhvr>
+                                  <p:cTn id="13" dur="655" fill="hold"/>
+                                  <p:tgtEl>
+                                    <p:spTgt spid="31"/>
+                                  </p:tgtEl>
+                                </p:cBhvr>
+                              </p:animEffect>
+                            </p:childTnLst>
+                            <p:iterate type="lt">
+                              <p:tmAbs val="35"/>
+                            </p:iterate>
+                          </p:cTn>
+                        </p:par>
+                      </p:childTnLst>
+                    </p:cTn>
+                  </p:par>
+                  <p:par>
+                    <p:cTn id="14" fill="hold">
+                      <p:stCondLst>
+                        <p:cond delay="90"/>
+                      </p:stCondLst>
+                      <p:childTnLst>
+                        <p:par>
+                          <p:cTn id="15" presetID="1" presetClass="entr" presetSubtype="0" fill="hold" nodeType="clickEffect">
+                            <p:stCondLst>
+                              <p:cond delay="0"/>
+                            </p:stCondLst>
+                            <p:childTnLst>
+                              <p:animEffect transition="in" filter="typewriter">
+                                <p:cBhvr>
+                                  <p:cTn id="16" dur="700" fill="hold"/>
+                                  <p:tgtEl>
+                                    <p:spTgt spid="35"/>
+                                  </p:tgtEl>
+                                </p:cBhvr>
+                              </p:animEffect>
+                            </p:childTnLst>
+                            <p:iterate type="lt">
+                              <p:tmAbs val="35"/>
+                            </p:iterate>
+                          </p:cTn>
+                        </p:par>
+                      </p:childTnLst>
+                    </p:cTn>
+                  </p:par>
+                  <p:par>
+                    <p:cTn id="17" fill="hold">
+                      <p:stCondLst>
+                        <p:cond delay="90"/>
+                      </p:stCondLst>
+                      <p:childTnLst>
+                        <p:par>
+                          <p:cTn id="18" presetID="1" presetClass="entr" presetSubtype="0" fill="hold" nodeType="clickEffect">
+                            <p:stCondLst>
+                              <p:cond delay="0"/>
+                            </p:stCondLst>
+                            <p:childTnLst>
+                              <p:animEffect transition="in" filter="typewriter">
+                                <p:cBhvr>
+                                  <p:cTn id="19" dur="745" fill="hold"/>
+                                  <p:tgtEl>
+                                    <p:spTgt spid="39"/>
+                                  </p:tgtEl>
+                                </p:cBhvr>
+                              </p:animEffect>
+                            </p:childTnLst>
+                            <p:iterate type="lt">
+                              <p:tmAbs val="35"/>
+                            </p:iterate>
+                          </p:cTn>
+                        </p:par>
+                      </p:childTnLst>
+                    </p:cTn>
+                  </p:par>
+                  <p:par>
+                    <p:cTn id="20" fill="hold">
+                      <p:stCondLst>
+                        <p:cond delay="90"/>
+                      </p:stCondLst>
+                      <p:childTnLst>
+                        <p:par>
+                          <p:cTn id="21" presetID="1" presetClass="entr" presetSubtype="0" fill="hold" nodeType="clickEffect">
+                            <p:stCondLst>
+                              <p:cond delay="0"/>
+                            </p:stCondLst>
+                            <p:childTnLst>
+                              <p:animEffect transition="in" filter="typewriter">
+                                <p:cBhvr>
+                                  <p:cTn id="22" dur="790" fill="hold"/>
+                                  <p:tgtEl>
+                                    <p:spTgt spid="41"/>
+                                  </p:tgtEl>
+                                </p:cBhvr>
+                              </p:animEffect>
+                            </p:childTnLst>
+                            <p:iterate type="lt">
+                              <p:tmAbs val="35"/>
+                            </p:iterate>
+                          </p:cTn>
+                        </p:par>
+                      </p:childTnLst>
+                    </p:cTn>
+                  </p:par>
+                </p:childTnLst>
+              </p:cTn>
+              <p:prevCondLst>
+                <p:cond evt="onPrev" delay="0">
+                  <p:tgtEl>
+                    <p:sldTgt/>
+                  </p:tgtEl>
+                </p:cond>
+              </p:prevCondLst>
+              <p:nextCondLst>
+                <p:cond evt="onNext" delay="0">
+                  <p:tgtEl>
+                    <p:sldTgt/>
+                  </p:tgtEl>
+                </p:cond>
+              </p:nextCondLst>
+            </p:seq>
+          </p:childTnLst>
+        </p:cTn>
+      </p:par>
+    </p:tnLst>
+    <p:bldLst>
+      <p:bldP spid="9" grpId="0" build="p"/>
+      <p:bldP spid="10" grpId="0" build="p"/>
+      <p:bldP spid="21" grpId="0" build="p"/>
+      <p:bldP spid="31" grpId="0" build="p"/>
+      <p:bldP spid="35" grpId="0" build="p"/>
+      <p:bldP spid="39" grpId="0" build="p"/>
+      <p:bldP spid="41" grpId="0" build="p"/>
+    </p:bldLst>
+  </p:timing>
 </p:sld>
 </file>
 
